--- a/Drinks_and_Wins_Presentacion_Ejecutiva.pptx
+++ b/Drinks_and_Wins_Presentacion_Ejecutiva.pptx
@@ -3122,7 +3122,7 @@
             <a:avLst/>
           </a:prstGeom>
           <a:solidFill>
-            <a:srgbClr val="161C2A"/>
+            <a:srgbClr val="141A26"/>
           </a:solidFill>
           <a:ln w="19050">
             <a:solidFill>
@@ -3168,7 +3168,7 @@
         </p:blipFill>
         <p:spPr>
           <a:xfrm>
-            <a:off x="1188720" y="1371600"/>
+            <a:off x="1188720" y="1280160"/>
             <a:ext cx="850821" cy="1097280"/>
           </a:xfrm>
           <a:prstGeom prst="rect">
@@ -3184,8 +3184,8 @@
         </p:nvSpPr>
         <p:spPr>
           <a:xfrm>
-            <a:off x="1188720" y="2651760"/>
-            <a:ext cx="9601200" cy="2926080"/>
+            <a:off x="1188720" y="2560320"/>
+            <a:ext cx="9601200" cy="3108960"/>
           </a:xfrm>
           <a:prstGeom prst="rect">
             <a:avLst/>
@@ -3200,23 +3200,23 @@
           <a:p>
             <a:pPr>
               <a:spcAft>
+                <a:spcPts val="600"/>
+              </a:spcAft>
+              <a:defRPr sz="1200" b="1">
+                <a:solidFill>
+                  <a:srgbClr val="FFB612"/>
+                </a:solidFill>
+              </a:defRPr>
+            </a:pPr>
+            <a:r>
+              <a:t>EXPERIENCIA DIGITAL EN MESA • VALIDADA EN BARRA</a:t>
+            </a:r>
+          </a:p>
+          <a:p>
+            <a:pPr>
+              <a:spcAft>
                 <a:spcPts val="800"/>
               </a:spcAft>
-              <a:defRPr sz="1300" b="1">
-                <a:solidFill>
-                  <a:srgbClr val="FFB612"/>
-                </a:solidFill>
-              </a:defRPr>
-            </a:pPr>
-            <a:r>
-              <a:t>EXPERIENCIA DIGITAL EN MESA</a:t>
-            </a:r>
-          </a:p>
-          <a:p>
-            <a:pPr>
-              <a:spcAft>
-                <a:spcPts val="1000"/>
-              </a:spcAft>
               <a:defRPr sz="4400" b="1">
                 <a:solidFill>
                   <a:srgbClr val="FFFFFF"/>
@@ -3230,16 +3230,16 @@
           <a:p>
             <a:pPr>
               <a:spcAft>
-                <a:spcPts val="2400"/>
-              </a:spcAft>
-              <a:defRPr sz="2000">
+                <a:spcPts val="2000"/>
+              </a:spcAft>
+              <a:defRPr sz="1900">
                 <a:solidFill>
                   <a:srgbClr val="FFD100"/>
                 </a:solidFill>
               </a:defRPr>
             </a:pPr>
             <a:r>
-              <a:t>La Plataforma de Gamificación Deportiva que Convierte Comensales en Fanáticos Recurrentes</a:t>
+              <a:t>La Plataforma Deportiva que Convierte Comensales en Fanáticos Recurrentes</a:t>
             </a:r>
           </a:p>
           <a:p>
@@ -3251,7 +3251,7 @@
               </a:defRPr>
             </a:pPr>
             <a:r>
-              <a:t>Presentación Estratégica para Dirección General, Dueños de Marca y Gerencia Operativa</a:t>
+              <a:t>De la Barra de Álamos a la Escala de Marca • Presentación para Dirección y Gerencia General</a:t>
             </a:r>
           </a:p>
         </p:txBody>
@@ -3290,7 +3290,7 @@
         </p:nvSpPr>
         <p:spPr>
           <a:xfrm>
-            <a:off x="731520" y="457200"/>
+            <a:off x="731520" y="411480"/>
             <a:ext cx="10698480" cy="1005840"/>
           </a:xfrm>
           <a:prstGeom prst="rect">
@@ -3306,28 +3306,28 @@
           <a:p>
             <a:pPr>
               <a:spcAft>
-                <a:spcPts val="400"/>
-              </a:spcAft>
-              <a:defRPr sz="1100" b="1">
+                <a:spcPts val="300"/>
+              </a:spcAft>
+              <a:defRPr sz="1050" b="1">
                 <a:solidFill>
                   <a:srgbClr val="FFB612"/>
                 </a:solidFill>
               </a:defRPr>
             </a:pPr>
             <a:r>
-              <a:t>DRINKS &amp; WINS • PLATAFORMA DE GAMIFICACIÓN</a:t>
-            </a:r>
-          </a:p>
-          <a:p>
-            <a:pPr>
-              <a:defRPr sz="2600" b="1">
+              <a:t>EQUIPO DE SERVICIO</a:t>
+            </a:r>
+          </a:p>
+          <a:p>
+            <a:pPr>
+              <a:defRPr sz="2400" b="1">
                 <a:solidFill>
                   <a:srgbClr val="FFFFFF"/>
                 </a:solidFill>
               </a:defRPr>
             </a:pPr>
             <a:r>
-              <a:t>Gamificación para el Equipo: Meseros como Embajadores</a:t>
+              <a:t>Gamificación del Personal: Meseros como Embajadores</a:t>
             </a:r>
           </a:p>
         </p:txBody>
@@ -3340,18 +3340,18 @@
         </p:nvSpPr>
         <p:spPr>
           <a:xfrm>
-            <a:off x="731520" y="1737360"/>
-            <a:ext cx="10728655" cy="4480560"/>
+            <a:off x="731520" y="1645920"/>
+            <a:ext cx="6858000" cy="4572000"/>
           </a:xfrm>
           <a:prstGeom prst="roundRect">
             <a:avLst/>
           </a:prstGeom>
           <a:solidFill>
-            <a:srgbClr val="161C2A"/>
+            <a:srgbClr val="141A26"/>
           </a:solidFill>
           <a:ln w="19050">
             <a:solidFill>
-              <a:srgbClr val="2D374B"/>
+              <a:srgbClr val="283246"/>
             </a:solidFill>
           </a:ln>
         </p:spPr>
@@ -3385,8 +3385,8 @@
         </p:nvSpPr>
         <p:spPr>
           <a:xfrm>
-            <a:off x="1097280" y="2011680"/>
-            <a:ext cx="9966960" cy="3931920"/>
+            <a:off x="1005840" y="1828800"/>
+            <a:ext cx="6309360" cy="4114800"/>
           </a:xfrm>
           <a:prstGeom prst="rect">
             <a:avLst/>
@@ -3403,14 +3403,14 @@
               <a:spcAft>
                 <a:spcPts val="200"/>
               </a:spcAft>
-              <a:defRPr sz="1500" b="1">
+              <a:defRPr sz="1400" b="1">
                 <a:solidFill>
                   <a:srgbClr val="FFB612"/>
                 </a:solidFill>
               </a:defRPr>
             </a:pPr>
             <a:r>
-              <a:t>🙋 Atribución Transparente en Cada Registro</a:t>
+              <a:t>🙋 Atribución Clara en Cada Mesa</a:t>
             </a:r>
           </a:p>
           <a:p>
@@ -3418,14 +3418,14 @@
               <a:spcAft>
                 <a:spcPts val="1000"/>
               </a:spcAft>
-              <a:defRPr sz="1200">
+              <a:defRPr sz="1150">
                 <a:solidFill>
                   <a:srgbClr val="FFFFFF"/>
                 </a:solidFill>
               </a:defRPr>
             </a:pPr>
             <a:r>
-              <a:t>Al entrar a la quiniela, el cliente selecciona el nombre de su mesero en un menú desplegable. Esto permite saber qué colaborador está invitando activamente a las mesas.</a:t>
+              <a:t>Al registrar sus pronósticos, el cliente selecciona el nombre de su mesero en la lista. La gerencia sabe con métricas exactas qué meseros están invitando activamente y cuáles no.</a:t>
             </a:r>
           </a:p>
           <a:p>
@@ -3433,14 +3433,14 @@
               <a:spcAft>
                 <a:spcPts val="200"/>
               </a:spcAft>
-              <a:defRPr sz="1500" b="1">
+              <a:defRPr sz="1400" b="1">
                 <a:solidFill>
                   <a:srgbClr val="FFB612"/>
                 </a:solidFill>
               </a:defRPr>
             </a:pPr>
             <a:r>
-              <a:t>💰 Mayor Tiempo de Mesa = Mayor Ticket = Más Propina</a:t>
+              <a:t>💰 Incentivo Económico Directo (Más Propina)</a:t>
             </a:r>
           </a:p>
           <a:p>
@@ -3448,14 +3448,14 @@
               <a:spcAft>
                 <a:spcPts val="1000"/>
               </a:spcAft>
-              <a:defRPr sz="1200">
+              <a:defRPr sz="1150">
                 <a:solidFill>
                   <a:srgbClr val="FFFFFF"/>
                 </a:solidFill>
               </a:defRPr>
             </a:pPr>
             <a:r>
-              <a:t>Los meseros entienden el beneficio directo: si la mesa se queda viendo el partido para ver si gana su quiniela, pedirán más rondas de cerveza y comida, aumentando la cuenta y la propina final.</a:t>
+              <a:t>Los meseros comprenden la fórmula de inmediato: Si la mesa se queda 3 horas compitiendo, consumirá más rondas de cerveza, hamburguesas y alitas, lo que elevará el total de la cuenta y su propina.</a:t>
             </a:r>
           </a:p>
           <a:p>
@@ -3463,14 +3463,14 @@
               <a:spcAft>
                 <a:spcPts val="200"/>
               </a:spcAft>
-              <a:defRPr sz="1500" b="1">
+              <a:defRPr sz="1400" b="1">
                 <a:solidFill>
                   <a:srgbClr val="FFB612"/>
                 </a:solidFill>
               </a:defRPr>
             </a:pPr>
             <a:r>
-              <a:t>🏆 Competencia Interna del Personal</a:t>
+              <a:t>💬 Rompehielos Natural de Venta Sugerida</a:t>
             </a:r>
           </a:p>
           <a:p>
@@ -3478,14 +3478,14 @@
               <a:spcAft>
                 <a:spcPts val="1000"/>
               </a:spcAft>
-              <a:defRPr sz="1200">
+              <a:defRPr sz="1150">
                 <a:solidFill>
                   <a:srgbClr val="FFFFFF"/>
                 </a:solidFill>
               </a:defRPr>
             </a:pPr>
             <a:r>
-              <a:t>El restaurante puede premiar al mesero con más comensales registrados en la semana (ej. bono simbólico, turno preferencial, reconocimiento en junta de servicio).</a:t>
+              <a:t>En lugar del genérico '¿Se les ofrece algo más?', el mesero llega sonriendo: '¿Ya metieron su quiniela de hoy con mi nombre? Si ganan, ¡la casa les invita unas alitas!'.</a:t>
             </a:r>
           </a:p>
           <a:p>
@@ -3493,14 +3493,14 @@
               <a:spcAft>
                 <a:spcPts val="200"/>
               </a:spcAft>
-              <a:defRPr sz="1500" b="1">
+              <a:defRPr sz="1400" b="1">
                 <a:solidFill>
                   <a:srgbClr val="FFB612"/>
                 </a:solidFill>
               </a:defRPr>
             </a:pPr>
             <a:r>
-              <a:t>💬 Rompehielos Natural en Mesa</a:t>
+              <a:t>🏆 Competencia Interna del Equipo</a:t>
             </a:r>
           </a:p>
           <a:p>
@@ -3508,18 +3508,42 @@
               <a:spcAft>
                 <a:spcPts val="1000"/>
               </a:spcAft>
-              <a:defRPr sz="1200">
+              <a:defRPr sz="1150">
                 <a:solidFill>
                   <a:srgbClr val="FFFFFF"/>
                 </a:solidFill>
               </a:defRPr>
             </a:pPr>
             <a:r>
-              <a:t>En lugar del clásico '¿Se les ofrece algo más?', el mesero pregunta: '¿Ya metieron su quiniela gratis para ganarse unas alitas hoy?'. Crea conexión inmediata.</a:t>
-            </a:r>
-          </a:p>
-        </p:txBody>
-      </p:sp>
+              <a:t>Se puede premiar al mesero con más comensales registrados en la semana con turnos preferenciales o un reconocimiento en la junta semanal.</a:t>
+            </a:r>
+          </a:p>
+        </p:txBody>
+      </p:sp>
+      <p:pic>
+        <p:nvPicPr>
+          <p:cNvPr id="5" name="Picture 4" descr="screenshot_admin_player.png"/>
+          <p:cNvPicPr>
+            <a:picLocks noChangeAspect="1"/>
+          </p:cNvPicPr>
+          <p:nvPr/>
+        </p:nvPicPr>
+        <p:blipFill>
+          <a:blip r:embed="rId2"/>
+          <a:stretch>
+            <a:fillRect/>
+          </a:stretch>
+        </p:blipFill>
+        <p:spPr>
+          <a:xfrm>
+            <a:off x="7863840" y="1828800"/>
+            <a:ext cx="3566160" cy="1308612"/>
+          </a:xfrm>
+          <a:prstGeom prst="rect">
+            <a:avLst/>
+          </a:prstGeom>
+        </p:spPr>
+      </p:pic>
     </p:spTree>
   </p:cSld>
   <p:clrMapOvr>
@@ -3554,7 +3578,7 @@
         </p:nvSpPr>
         <p:spPr>
           <a:xfrm>
-            <a:off x="731520" y="457200"/>
+            <a:off x="731520" y="411480"/>
             <a:ext cx="10698480" cy="1005840"/>
           </a:xfrm>
           <a:prstGeom prst="rect">
@@ -3570,28 +3594,28 @@
           <a:p>
             <a:pPr>
               <a:spcAft>
-                <a:spcPts val="400"/>
-              </a:spcAft>
-              <a:defRPr sz="1100" b="1">
+                <a:spcPts val="300"/>
+              </a:spcAft>
+              <a:defRPr sz="1050" b="1">
                 <a:solidFill>
                   <a:srgbClr val="FFB612"/>
                 </a:solidFill>
               </a:defRPr>
             </a:pPr>
             <a:r>
-              <a:t>DRINKS &amp; WINS • PLATAFORMA DE GAMIFICACIÓN</a:t>
-            </a:r>
-          </a:p>
-          <a:p>
-            <a:pPr>
-              <a:defRPr sz="2600" b="1">
+              <a:t>RETORNO DE INVERSIÓN</a:t>
+            </a:r>
+          </a:p>
+          <a:p>
+            <a:pPr>
+              <a:defRPr sz="2400" b="1">
                 <a:solidFill>
                   <a:srgbClr val="FFFFFF"/>
                 </a:solidFill>
               </a:defRPr>
             </a:pPr>
             <a:r>
-              <a:t>Métricas Clave de Negocio (KPIs y Retorno)</a:t>
+              <a:t>Métricas Clave de Negocio (KPIs y Rentabilidad)</a:t>
             </a:r>
           </a:p>
         </p:txBody>
@@ -3604,18 +3628,18 @@
         </p:nvSpPr>
         <p:spPr>
           <a:xfrm>
-            <a:off x="731520" y="1737360"/>
-            <a:ext cx="2499055" cy="4297680"/>
+            <a:off x="731520" y="1645920"/>
+            <a:ext cx="2499055" cy="4572000"/>
           </a:xfrm>
           <a:prstGeom prst="roundRect">
             <a:avLst/>
           </a:prstGeom>
           <a:solidFill>
-            <a:srgbClr val="161C2A"/>
+            <a:srgbClr val="141A26"/>
           </a:solidFill>
           <a:ln w="19050">
             <a:solidFill>
-              <a:srgbClr val="2D374B"/>
+              <a:srgbClr val="283246"/>
             </a:solidFill>
           </a:ln>
         </p:spPr>
@@ -3649,8 +3673,8 @@
         </p:nvSpPr>
         <p:spPr>
           <a:xfrm>
-            <a:off x="914400" y="2011680"/>
-            <a:ext cx="2133295" cy="3749039"/>
+            <a:off x="914400" y="1920240"/>
+            <a:ext cx="2133295" cy="4023360"/>
           </a:xfrm>
           <a:prstGeom prst="rect">
             <a:avLst/>
@@ -3689,19 +3713,19 @@
               </a:defRPr>
             </a:pPr>
             <a:r>
-              <a:t>TIEMPO DE ESTANCIA</a:t>
+              <a:t>PERMANENCIA (DWELL TIME)</a:t>
             </a:r>
           </a:p>
           <a:p>
             <a:pPr algn="ctr">
-              <a:defRPr sz="1100">
+              <a:defRPr sz="1150">
                 <a:solidFill>
                   <a:srgbClr val="94A3B8"/>
                 </a:solidFill>
               </a:defRPr>
             </a:pPr>
             <a:r>
-              <a:t>Los clientes permanecen durante todo el evento deportivo en lugar de pedir la cuenta al medio tiempo.</a:t>
+              <a:t>Las mesas se quedan hasta el silbatazo final para ver si ganan su quiniela.</a:t>
             </a:r>
           </a:p>
         </p:txBody>
@@ -3714,18 +3738,18 @@
         </p:nvSpPr>
         <p:spPr>
           <a:xfrm>
-            <a:off x="3474720" y="1737360"/>
-            <a:ext cx="2499055" cy="4297680"/>
+            <a:off x="3474720" y="1645920"/>
+            <a:ext cx="2499055" cy="4572000"/>
           </a:xfrm>
           <a:prstGeom prst="roundRect">
             <a:avLst/>
           </a:prstGeom>
           <a:solidFill>
-            <a:srgbClr val="161C2A"/>
+            <a:srgbClr val="141A26"/>
           </a:solidFill>
           <a:ln w="19050">
             <a:solidFill>
-              <a:srgbClr val="2D374B"/>
+              <a:srgbClr val="283246"/>
             </a:solidFill>
           </a:ln>
         </p:spPr>
@@ -3759,8 +3783,8 @@
         </p:nvSpPr>
         <p:spPr>
           <a:xfrm>
-            <a:off x="3657600" y="2011680"/>
-            <a:ext cx="2133295" cy="3749039"/>
+            <a:off x="3657600" y="1920240"/>
+            <a:ext cx="2133295" cy="4023360"/>
           </a:xfrm>
           <a:prstGeom prst="rect">
             <a:avLst/>
@@ -3804,14 +3828,14 @@
           </a:p>
           <a:p>
             <a:pPr algn="ctr">
-              <a:defRPr sz="1100">
+              <a:defRPr sz="1150">
                 <a:solidFill>
                   <a:srgbClr val="94A3B8"/>
                 </a:solidFill>
               </a:defRPr>
             </a:pPr>
             <a:r>
-              <a:t>El ambiente competitivo estimula pedidos repetidos de bebidas y snacks durante las fases finales del juego.</a:t>
+              <a:t>El ambiente competitivo estimula pedidos repetidos de cerveza y botanas.</a:t>
             </a:r>
           </a:p>
         </p:txBody>
@@ -3824,18 +3848,18 @@
         </p:nvSpPr>
         <p:spPr>
           <a:xfrm>
-            <a:off x="6217920" y="1737360"/>
-            <a:ext cx="2499055" cy="4297680"/>
+            <a:off x="6217920" y="1645920"/>
+            <a:ext cx="2499055" cy="4572000"/>
           </a:xfrm>
           <a:prstGeom prst="roundRect">
             <a:avLst/>
           </a:prstGeom>
           <a:solidFill>
-            <a:srgbClr val="161C2A"/>
+            <a:srgbClr val="141A26"/>
           </a:solidFill>
           <a:ln w="19050">
             <a:solidFill>
-              <a:srgbClr val="2D374B"/>
+              <a:srgbClr val="283246"/>
             </a:solidFill>
           </a:ln>
         </p:spPr>
@@ -3869,8 +3893,8 @@
         </p:nvSpPr>
         <p:spPr>
           <a:xfrm>
-            <a:off x="6400800" y="2011680"/>
-            <a:ext cx="2133295" cy="3749039"/>
+            <a:off x="6400800" y="1920240"/>
+            <a:ext cx="2133295" cy="4023360"/>
           </a:xfrm>
           <a:prstGeom prst="rect">
             <a:avLst/>
@@ -3909,19 +3933,19 @@
               </a:defRPr>
             </a:pPr>
             <a:r>
-              <a:t>RETENCIÓN SEMANAL</a:t>
+              <a:t>RETENCIÓN Y LEALTAD</a:t>
             </a:r>
           </a:p>
           <a:p>
             <a:pPr algn="ctr">
-              <a:defRPr sz="1100">
+              <a:defRPr sz="1150">
                 <a:solidFill>
                   <a:srgbClr val="94A3B8"/>
                 </a:solidFill>
               </a:defRPr>
             </a:pPr>
             <a:r>
-              <a:t>El fanático regresa la semana siguiente para defender su posición en la tabla de la temporada.</a:t>
+              <a:t>El comensal regresa jornada tras jornada para defender su posición en la tabla.</a:t>
             </a:r>
           </a:p>
         </p:txBody>
@@ -3934,18 +3958,18 @@
         </p:nvSpPr>
         <p:spPr>
           <a:xfrm>
-            <a:off x="8961120" y="1737360"/>
-            <a:ext cx="2499055" cy="4297680"/>
+            <a:off x="8961120" y="1645920"/>
+            <a:ext cx="2499055" cy="4572000"/>
           </a:xfrm>
           <a:prstGeom prst="roundRect">
             <a:avLst/>
           </a:prstGeom>
           <a:solidFill>
-            <a:srgbClr val="161C2A"/>
+            <a:srgbClr val="141A26"/>
           </a:solidFill>
           <a:ln w="19050">
             <a:solidFill>
-              <a:srgbClr val="2D374B"/>
+              <a:srgbClr val="283246"/>
             </a:solidFill>
           </a:ln>
         </p:spPr>
@@ -3979,8 +4003,8 @@
         </p:nvSpPr>
         <p:spPr>
           <a:xfrm>
-            <a:off x="9144000" y="2011680"/>
-            <a:ext cx="2133295" cy="3749039"/>
+            <a:off x="9144000" y="1920240"/>
+            <a:ext cx="2133295" cy="4023360"/>
           </a:xfrm>
           <a:prstGeom prst="rect">
             <a:avLst/>
@@ -4024,14 +4048,14 @@
           </a:p>
           <a:p>
             <a:pPr algn="ctr">
-              <a:defRPr sz="1100">
+              <a:defRPr sz="1150">
                 <a:solidFill>
                   <a:srgbClr val="94A3B8"/>
                 </a:solidFill>
               </a:defRPr>
             </a:pPr>
             <a:r>
-              <a:t>Eliminación absoluta de papeletas impresas, plumas extraviadas y conteos manuales con margen de error.</a:t>
+              <a:t>Eliminación total de impresiones, papeletas extraviadas y errores de conteo.</a:t>
             </a:r>
           </a:p>
         </p:txBody>
@@ -4070,7 +4094,7 @@
         </p:nvSpPr>
         <p:spPr>
           <a:xfrm>
-            <a:off x="731520" y="457200"/>
+            <a:off x="731520" y="411480"/>
             <a:ext cx="10698480" cy="1005840"/>
           </a:xfrm>
           <a:prstGeom prst="rect">
@@ -4086,28 +4110,28 @@
           <a:p>
             <a:pPr>
               <a:spcAft>
-                <a:spcPts val="400"/>
-              </a:spcAft>
-              <a:defRPr sz="1100" b="1">
+                <a:spcPts val="300"/>
+              </a:spcAft>
+              <a:defRPr sz="1050" b="1">
                 <a:solidFill>
                   <a:srgbClr val="FFB612"/>
                 </a:solidFill>
               </a:defRPr>
             </a:pPr>
             <a:r>
-              <a:t>DRINKS &amp; WINS • PLATAFORMA DE GAMIFICACIÓN</a:t>
-            </a:r>
-          </a:p>
-          <a:p>
-            <a:pPr>
-              <a:defRPr sz="2600" b="1">
+              <a:t>PRÓXIMOS PASOS</a:t>
+            </a:r>
+          </a:p>
+          <a:p>
+            <a:pPr>
+              <a:defRPr sz="2400" b="1">
                 <a:solidFill>
                   <a:srgbClr val="FFFFFF"/>
                 </a:solidFill>
               </a:defRPr>
             </a:pPr>
             <a:r>
-              <a:t>Próximos Pasos: Lanzamiento Rápido en Sucursal</a:t>
+              <a:t>Plan de Acción: Lanzamiento Piloto en Querétaro</a:t>
             </a:r>
           </a:p>
         </p:txBody>
@@ -4120,18 +4144,18 @@
         </p:nvSpPr>
         <p:spPr>
           <a:xfrm>
-            <a:off x="731520" y="1737360"/>
-            <a:ext cx="10728655" cy="4480560"/>
+            <a:off x="731520" y="1645920"/>
+            <a:ext cx="10728655" cy="4572000"/>
           </a:xfrm>
           <a:prstGeom prst="roundRect">
             <a:avLst/>
           </a:prstGeom>
           <a:solidFill>
-            <a:srgbClr val="161C2A"/>
+            <a:srgbClr val="141A26"/>
           </a:solidFill>
           <a:ln w="19050">
             <a:solidFill>
-              <a:srgbClr val="2D374B"/>
+              <a:srgbClr val="283246"/>
             </a:solidFill>
           </a:ln>
         </p:spPr>
@@ -4165,8 +4189,8 @@
         </p:nvSpPr>
         <p:spPr>
           <a:xfrm>
-            <a:off x="1097280" y="2011680"/>
-            <a:ext cx="9966960" cy="3931920"/>
+            <a:off x="1097280" y="1920240"/>
+            <a:ext cx="9966960" cy="4023360"/>
           </a:xfrm>
           <a:prstGeom prst="rect">
             <a:avLst/>
@@ -4183,20 +4207,20 @@
               <a:spcAft>
                 <a:spcPts val="200"/>
               </a:spcAft>
-              <a:defRPr sz="1500" b="1">
+              <a:defRPr sz="1450" b="1">
                 <a:solidFill>
                   <a:srgbClr val="FFB612"/>
                 </a:solidFill>
               </a:defRPr>
             </a:pPr>
             <a:r>
-              <a:t>Fase 1: Material en Mesas (Día 1)</a:t>
-            </a:r>
-          </a:p>
-          <a:p>
-            <a:pPr>
-              <a:spcAft>
-                <a:spcPts val="1200"/>
+              <a:t>Paso 1: Colocación de Material POP en Mesas (Día 1)</a:t>
+            </a:r>
+          </a:p>
+          <a:p>
+            <a:pPr>
+              <a:spcAft>
+                <a:spcPts val="1000"/>
               </a:spcAft>
               <a:defRPr sz="1200">
                 <a:solidFill>
@@ -4205,7 +4229,7 @@
               </a:defRPr>
             </a:pPr>
             <a:r>
-              <a:t>Colocación de códigos QR en acrílicos de mesa y banners de bienvenida en pantallas de bar.</a:t>
+              <a:t>Acrílicos de mesa con código QR directo y bienvenida en pantallas del restaurante.</a:t>
             </a:r>
           </a:p>
           <a:p>
@@ -4213,20 +4237,20 @@
               <a:spcAft>
                 <a:spcPts val="200"/>
               </a:spcAft>
-              <a:defRPr sz="1500" b="1">
+              <a:defRPr sz="1450" b="1">
                 <a:solidFill>
                   <a:srgbClr val="FFB612"/>
                 </a:solidFill>
               </a:defRPr>
             </a:pPr>
             <a:r>
-              <a:t>Fase 2: Capacitación Express de 15 Minutos (Día 2)</a:t>
-            </a:r>
-          </a:p>
-          <a:p>
-            <a:pPr>
-              <a:spcAft>
-                <a:spcPts val="1200"/>
+              <a:t>Paso 2: Capacitación Express de 15 Minutos (Día 2)</a:t>
+            </a:r>
+          </a:p>
+          <a:p>
+            <a:pPr>
+              <a:spcAft>
+                <a:spcPts val="1000"/>
               </a:spcAft>
               <a:defRPr sz="1200">
                 <a:solidFill>
@@ -4235,7 +4259,7 @@
               </a:defRPr>
             </a:pPr>
             <a:r>
-              <a:t>Demostración rápida al equipo de gerencia y meseros: cómo invitar al cliente y cómo verificar ganadores.</a:t>
+              <a:t>Demostración rápida al equipo de meseros y capitanes: cómo invitar a la mesa y cómo verificar al ganador.</a:t>
             </a:r>
           </a:p>
           <a:p>
@@ -4243,20 +4267,20 @@
               <a:spcAft>
                 <a:spcPts val="200"/>
               </a:spcAft>
-              <a:defRPr sz="1500" b="1">
+              <a:defRPr sz="1450" b="1">
                 <a:solidFill>
                   <a:srgbClr val="FFB612"/>
                 </a:solidFill>
               </a:defRPr>
             </a:pPr>
             <a:r>
-              <a:t>Fase 3: Jornada Piloto de Estreno (Fin de Semana)</a:t>
-            </a:r>
-          </a:p>
-          <a:p>
-            <a:pPr>
-              <a:spcAft>
-                <a:spcPts val="1200"/>
+              <a:t>Paso 3: Activación Piloto con Fan Club (Fin de Semana)</a:t>
+            </a:r>
+          </a:p>
+          <a:p>
+            <a:pPr>
+              <a:spcAft>
+                <a:spcPts val="1000"/>
               </a:spcAft>
               <a:defRPr sz="1200">
                 <a:solidFill>
@@ -4265,7 +4289,7 @@
               </a:defRPr>
             </a:pPr>
             <a:r>
-              <a:t>Lanzamiento oficial en el partido estelar de la semana (ej. Domingo de NFL o Clásico de Liga MX).</a:t>
+              <a:t>Lanzamiento con la comunidad de Steelers Nation Querétaro en el partido estelar de la semana.</a:t>
             </a:r>
           </a:p>
           <a:p>
@@ -4273,20 +4297,20 @@
               <a:spcAft>
                 <a:spcPts val="200"/>
               </a:spcAft>
-              <a:defRPr sz="1500" b="1">
+              <a:defRPr sz="1450" b="1">
                 <a:solidFill>
                   <a:srgbClr val="FFB612"/>
                 </a:solidFill>
               </a:defRPr>
             </a:pPr>
             <a:r>
-              <a:t>Fase 4: Evaluación de Resultados y Expansión</a:t>
-            </a:r>
-          </a:p>
-          <a:p>
-            <a:pPr>
-              <a:spcAft>
-                <a:spcPts val="1200"/>
+              <a:t>Paso 4: Evaluación de Resultados y Expansión a Otras Sucursales</a:t>
+            </a:r>
+          </a:p>
+          <a:p>
+            <a:pPr>
+              <a:spcAft>
+                <a:spcPts val="1000"/>
               </a:spcAft>
               <a:defRPr sz="1200">
                 <a:solidFill>
@@ -4295,7 +4319,7 @@
               </a:defRPr>
             </a:pPr>
             <a:r>
-              <a:t>Revisión con gerencia de mesas participantes, consumo generado y retroalimentación para afinar premios.</a:t>
+              <a:t>Revisión con dueños y gerencia de consumo generado, mesas participantes y lealtad para escalarlo.</a:t>
             </a:r>
           </a:p>
         </p:txBody>
@@ -4334,7 +4358,7 @@
         </p:nvSpPr>
         <p:spPr>
           <a:xfrm>
-            <a:off x="731520" y="457200"/>
+            <a:off x="731520" y="411480"/>
             <a:ext cx="10698480" cy="1005840"/>
           </a:xfrm>
           <a:prstGeom prst="rect">
@@ -4350,28 +4374,28 @@
           <a:p>
             <a:pPr>
               <a:spcAft>
-                <a:spcPts val="400"/>
-              </a:spcAft>
-              <a:defRPr sz="1100" b="1">
+                <a:spcPts val="300"/>
+              </a:spcAft>
+              <a:defRPr sz="1050" b="1">
                 <a:solidFill>
                   <a:srgbClr val="FFB612"/>
                 </a:solidFill>
               </a:defRPr>
             </a:pPr>
             <a:r>
-              <a:t>DRINKS &amp; WINS • PLATAFORMA DE GAMIFICACIÓN</a:t>
-            </a:r>
-          </a:p>
-          <a:p>
-            <a:pPr>
-              <a:defRPr sz="2600" b="1">
+              <a:t>VALIDACIÓN ORGÁNICA • HISTORIA DE ÉXITO</a:t>
+            </a:r>
+          </a:p>
+          <a:p>
+            <a:pPr>
+              <a:defRPr sz="2400" b="1">
                 <a:solidFill>
                   <a:srgbClr val="FFFFFF"/>
                 </a:solidFill>
               </a:defRPr>
             </a:pPr>
             <a:r>
-              <a:t>El Reto en el Restaurante: ¿Qué pasa durante los partidos?</a:t>
+              <a:t>Nacido en Barra: Una Idea Probada con Clientes Reales</a:t>
             </a:r>
           </a:p>
         </p:txBody>
@@ -4384,18 +4408,18 @@
         </p:nvSpPr>
         <p:spPr>
           <a:xfrm>
-            <a:off x="731520" y="1737360"/>
-            <a:ext cx="3413455" cy="4297680"/>
+            <a:off x="731520" y="1645920"/>
+            <a:ext cx="10728655" cy="4572000"/>
           </a:xfrm>
           <a:prstGeom prst="roundRect">
             <a:avLst/>
           </a:prstGeom>
           <a:solidFill>
-            <a:srgbClr val="161C2A"/>
+            <a:srgbClr val="141A26"/>
           </a:solidFill>
           <a:ln w="19050">
             <a:solidFill>
-              <a:srgbClr val="2D374B"/>
+              <a:srgbClr val="283246"/>
             </a:solidFill>
           </a:ln>
         </p:spPr>
@@ -4429,8 +4453,8 @@
         </p:nvSpPr>
         <p:spPr>
           <a:xfrm>
-            <a:off x="1005840" y="2011680"/>
-            <a:ext cx="2864815" cy="3749039"/>
+            <a:off x="1097280" y="1920240"/>
+            <a:ext cx="9966960" cy="4023360"/>
           </a:xfrm>
           <a:prstGeom prst="rect">
             <a:avLst/>
@@ -4445,218 +4469,106 @@
           <a:p>
             <a:pPr>
               <a:spcAft>
-                <a:spcPts val="1600"/>
+                <a:spcPts val="1400"/>
               </a:spcAft>
               <a:defRPr sz="1800" b="1">
                 <a:solidFill>
-                  <a:srgbClr val="FF5722"/>
-                </a:solidFill>
-              </a:defRPr>
-            </a:pPr>
-            <a:r>
-              <a:t>⏳ Tiempos Muertos y Rotación Lenta</a:t>
-            </a:r>
-          </a:p>
-          <a:p>
-            <a:pPr>
-              <a:defRPr sz="1400">
+                  <a:srgbClr val="FFB612"/>
+                </a:solidFill>
+              </a:defRPr>
+            </a:pPr>
+            <a:r>
+              <a:t>💬 «Beto, ¿qué onda? ¿Para cuándo la próxima quiniela o trivia?»</a:t>
+            </a:r>
+          </a:p>
+          <a:p>
+            <a:pPr>
+              <a:spcAft>
+                <a:spcPts val="200"/>
+              </a:spcAft>
+              <a:defRPr sz="1450" b="1">
+                <a:solidFill>
+                  <a:srgbClr val="FFD100"/>
+                </a:solidFill>
+              </a:defRPr>
+            </a:pPr>
+            <a:r>
+              <a:t>🍺 El Origen en Álamos</a:t>
+            </a:r>
+          </a:p>
+          <a:p>
+            <a:pPr>
+              <a:spcAft>
+                <a:spcPts val="1200"/>
+              </a:spcAft>
+              <a:defRPr sz="1200">
                 <a:solidFill>
                   <a:srgbClr val="FFFFFF"/>
                 </a:solidFill>
               </a:defRPr>
             </a:pPr>
             <a:r>
-              <a:t>Durante un partido de 3 horas de NFL o 90 min de fútbol, hay largos lapsos pasivos (medios tiempos, pausas comerciales, revisiones de jugadas). Los comensales pierden dinamismo y baja la frecuencia de pedidos.</a:t>
-            </a:r>
-          </a:p>
-        </p:txBody>
-      </p:sp>
-      <p:sp>
-        <p:nvSpPr>
-          <p:cNvPr id="5" name="Rounded Rectangle 4"/>
-          <p:cNvSpPr/>
-          <p:nvPr/>
-        </p:nvSpPr>
-        <p:spPr>
-          <a:xfrm>
-            <a:off x="4389120" y="1737360"/>
-            <a:ext cx="3413455" cy="4297680"/>
-          </a:xfrm>
-          <a:prstGeom prst="roundRect">
-            <a:avLst/>
-          </a:prstGeom>
-          <a:solidFill>
-            <a:srgbClr val="161C2A"/>
-          </a:solidFill>
-          <a:ln w="19050">
-            <a:solidFill>
-              <a:srgbClr val="2D374B"/>
-            </a:solidFill>
-          </a:ln>
-        </p:spPr>
-        <p:style>
-          <a:lnRef idx="1">
-            <a:schemeClr val="accent1"/>
-          </a:lnRef>
-          <a:fillRef idx="3">
-            <a:schemeClr val="accent1"/>
-          </a:fillRef>
-          <a:effectRef idx="2">
-            <a:schemeClr val="accent1"/>
-          </a:effectRef>
-          <a:fontRef idx="minor">
-            <a:schemeClr val="lt1"/>
-          </a:fontRef>
-        </p:style>
-        <p:txBody>
-          <a:bodyPr rtlCol="0" anchor="ctr"/>
-          <a:lstStyle/>
-          <a:p>
-            <a:pPr algn="ctr"/>
-          </a:p>
-        </p:txBody>
-      </p:sp>
-      <p:sp>
-        <p:nvSpPr>
-          <p:cNvPr id="6" name="TextBox 5"/>
-          <p:cNvSpPr txBox="1"/>
-          <p:nvPr/>
-        </p:nvSpPr>
-        <p:spPr>
-          <a:xfrm>
-            <a:off x="4663440" y="2011680"/>
-            <a:ext cx="2864815" cy="3749039"/>
-          </a:xfrm>
-          <a:prstGeom prst="rect">
-            <a:avLst/>
-          </a:prstGeom>
-          <a:noFill/>
-        </p:spPr>
-        <p:txBody>
-          <a:bodyPr wrap="square">
-            <a:spAutoFit/>
-          </a:bodyPr>
-          <a:lstStyle/>
-          <a:p>
-            <a:pPr>
-              <a:spcAft>
-                <a:spcPts val="1600"/>
-              </a:spcAft>
-              <a:defRPr sz="1800" b="1">
-                <a:solidFill>
-                  <a:srgbClr val="FFB612"/>
-                </a:solidFill>
-              </a:defRPr>
-            </a:pPr>
-            <a:r>
-              <a:t>📱 Distracción Aislada en el Celular</a:t>
-            </a:r>
-          </a:p>
-          <a:p>
-            <a:pPr>
-              <a:defRPr sz="1400">
+              <a:t>Drinks &amp; Wins no nació como una teoría de oficina. Nació directamente en la barra de Álamos, donde Beto empezó a organizar quinielas y trivias entre las mesas de forma orgánica. La respuesta de los comensales fue abrumadora: las mesas competían, consumían más y se quedaban hasta el final del partido.</a:t>
+            </a:r>
+          </a:p>
+          <a:p>
+            <a:pPr>
+              <a:spcAft>
+                <a:spcPts val="200"/>
+              </a:spcAft>
+              <a:defRPr sz="1450" b="1">
+                <a:solidFill>
+                  <a:srgbClr val="FFD100"/>
+                </a:solidFill>
+              </a:defRPr>
+            </a:pPr>
+            <a:r>
+              <a:t>🤝 Creación de Clientes Frecuentes y Leales</a:t>
+            </a:r>
+          </a:p>
+          <a:p>
+            <a:pPr>
+              <a:spcAft>
+                <a:spcPts val="1200"/>
+              </a:spcAft>
+              <a:defRPr sz="1200">
                 <a:solidFill>
                   <a:srgbClr val="FFFFFF"/>
                 </a:solidFill>
               </a:defRPr>
             </a:pPr>
             <a:r>
-              <a:t>El cliente mira su teléfono para chatear o revisar redes ajenas al restaurante. No existe una experiencia interactiva que vincule la pantalla de televisión del bar con la mesa del cliente.</a:t>
-            </a:r>
-          </a:p>
-        </p:txBody>
-      </p:sp>
-      <p:sp>
-        <p:nvSpPr>
-          <p:cNvPr id="7" name="Rounded Rectangle 6"/>
-          <p:cNvSpPr/>
-          <p:nvPr/>
-        </p:nvSpPr>
-        <p:spPr>
-          <a:xfrm>
-            <a:off x="8046720" y="1737360"/>
-            <a:ext cx="3413455" cy="4297680"/>
-          </a:xfrm>
-          <a:prstGeom prst="roundRect">
-            <a:avLst/>
-          </a:prstGeom>
-          <a:solidFill>
-            <a:srgbClr val="161C2A"/>
-          </a:solidFill>
-          <a:ln w="19050">
-            <a:solidFill>
-              <a:srgbClr val="2D374B"/>
-            </a:solidFill>
-          </a:ln>
-        </p:spPr>
-        <p:style>
-          <a:lnRef idx="1">
-            <a:schemeClr val="accent1"/>
-          </a:lnRef>
-          <a:fillRef idx="3">
-            <a:schemeClr val="accent1"/>
-          </a:fillRef>
-          <a:effectRef idx="2">
-            <a:schemeClr val="accent1"/>
-          </a:effectRef>
-          <a:fontRef idx="minor">
-            <a:schemeClr val="lt1"/>
-          </a:fontRef>
-        </p:style>
-        <p:txBody>
-          <a:bodyPr rtlCol="0" anchor="ctr"/>
-          <a:lstStyle/>
-          <a:p>
-            <a:pPr algn="ctr"/>
-          </a:p>
-        </p:txBody>
-      </p:sp>
-      <p:sp>
-        <p:nvSpPr>
-          <p:cNvPr id="8" name="TextBox 7"/>
-          <p:cNvSpPr txBox="1"/>
-          <p:nvPr/>
-        </p:nvSpPr>
-        <p:spPr>
-          <a:xfrm>
-            <a:off x="8321040" y="2011680"/>
-            <a:ext cx="2864815" cy="3749039"/>
-          </a:xfrm>
-          <a:prstGeom prst="rect">
-            <a:avLst/>
-          </a:prstGeom>
-          <a:noFill/>
-        </p:spPr>
-        <p:txBody>
-          <a:bodyPr wrap="square">
-            <a:spAutoFit/>
-          </a:bodyPr>
-          <a:lstStyle/>
-          <a:p>
-            <a:pPr>
-              <a:spcAft>
-                <a:spcPts val="1600"/>
-              </a:spcAft>
-              <a:defRPr sz="1800" b="1">
-                <a:solidFill>
-                  <a:srgbClr val="00E676"/>
-                </a:solidFill>
-              </a:defRPr>
-            </a:pPr>
-            <a:r>
-              <a:t>💵 Pérdida de Potencial de Consumo</a:t>
-            </a:r>
-          </a:p>
-          <a:p>
-            <a:pPr>
-              <a:defRPr sz="1400">
+              <a:t>Esa dinámica creó una comunidad fiel que no solo llenaba el restaurante en días de juego, sino que hoy en día, cuando ven a Beto en la calle en Querétaro, lo reconocen y le preguntan entusiasmados por la siguiente fecha.</a:t>
+            </a:r>
+          </a:p>
+          <a:p>
+            <a:pPr>
+              <a:spcAft>
+                <a:spcPts val="200"/>
+              </a:spcAft>
+              <a:defRPr sz="1450" b="1">
+                <a:solidFill>
+                  <a:srgbClr val="FFD100"/>
+                </a:solidFill>
+              </a:defRPr>
+            </a:pPr>
+            <a:r>
+              <a:t>🚀 De la Libreta de Papel a la Tecnología PWA con IA</a:t>
+            </a:r>
+          </a:p>
+          <a:p>
+            <a:pPr>
+              <a:spcAft>
+                <a:spcPts val="1200"/>
+              </a:spcAft>
+              <a:defRPr sz="1200">
                 <a:solidFill>
                   <a:srgbClr val="FFFFFF"/>
                 </a:solidFill>
               </a:defRPr>
             </a:pPr>
             <a:r>
-              <a:t>Una mesa entretenida y compitiendo amistosamente consume más bebidas, alitas y botanas. Sin dinamismo, el ticket promedio se estanca tras el primer pedido inicial.</a:t>
+              <a:t>Lo que antes se hacía con hojas de papel, plumas perdidas y conteos manuales agotadores, ahora está digitalizado al 100% en la nube, con conexión oficial a ESPN e Inteligencia Artificial para crear jornadas en segundos.</a:t>
             </a:r>
           </a:p>
         </p:txBody>
@@ -4695,7 +4607,7 @@
         </p:nvSpPr>
         <p:spPr>
           <a:xfrm>
-            <a:off x="731520" y="457200"/>
+            <a:off x="731520" y="411480"/>
             <a:ext cx="10698480" cy="1005840"/>
           </a:xfrm>
           <a:prstGeom prst="rect">
@@ -4711,28 +4623,28 @@
           <a:p>
             <a:pPr>
               <a:spcAft>
-                <a:spcPts val="400"/>
-              </a:spcAft>
-              <a:defRPr sz="1100" b="1">
+                <a:spcPts val="300"/>
+              </a:spcAft>
+              <a:defRPr sz="1050" b="1">
                 <a:solidFill>
                   <a:srgbClr val="FFB612"/>
                 </a:solidFill>
               </a:defRPr>
             </a:pPr>
             <a:r>
-              <a:t>DRINKS &amp; WINS • PLATAFORMA DE GAMIFICACIÓN</a:t>
-            </a:r>
-          </a:p>
-          <a:p>
-            <a:pPr>
-              <a:defRPr sz="2600" b="1">
+              <a:t>ESTRATEGIA COMERCIAL INTELIGENTE</a:t>
+            </a:r>
+          </a:p>
+          <a:p>
+            <a:pPr>
+              <a:defRPr sz="2400" b="1">
                 <a:solidFill>
                   <a:srgbClr val="FFFFFF"/>
                 </a:solidFill>
               </a:defRPr>
             </a:pPr>
             <a:r>
-              <a:t>La Solución: Gamificación en Mesa sin Fricción</a:t>
+              <a:t>Estrategia Gradual y Punta de Lanza con Fan Clubs</a:t>
             </a:r>
           </a:p>
         </p:txBody>
@@ -4745,18 +4657,18 @@
         </p:nvSpPr>
         <p:spPr>
           <a:xfrm>
-            <a:off x="731520" y="1737360"/>
-            <a:ext cx="6583680" cy="4480560"/>
+            <a:off x="731520" y="1645920"/>
+            <a:ext cx="5212080" cy="4572000"/>
           </a:xfrm>
           <a:prstGeom prst="roundRect">
             <a:avLst/>
           </a:prstGeom>
           <a:solidFill>
-            <a:srgbClr val="161C2A"/>
+            <a:srgbClr val="141A26"/>
           </a:solidFill>
           <a:ln w="19050">
             <a:solidFill>
-              <a:srgbClr val="2D374B"/>
+              <a:srgbClr val="283246"/>
             </a:solidFill>
           </a:ln>
         </p:spPr>
@@ -4790,8 +4702,8 @@
         </p:nvSpPr>
         <p:spPr>
           <a:xfrm>
-            <a:off x="1097280" y="2011680"/>
-            <a:ext cx="5852160" cy="3931920"/>
+            <a:off x="1005840" y="1920240"/>
+            <a:ext cx="4663440" cy="4023360"/>
           </a:xfrm>
           <a:prstGeom prst="rect">
             <a:avLst/>
@@ -4806,149 +4718,313 @@
           <a:p>
             <a:pPr>
               <a:spcAft>
-                <a:spcPts val="200"/>
-              </a:spcAft>
-              <a:defRPr sz="1500" b="1">
+                <a:spcPts val="1000"/>
+              </a:spcAft>
+              <a:defRPr sz="1700" b="1">
                 <a:solidFill>
                   <a:srgbClr val="FFB612"/>
                 </a:solidFill>
               </a:defRPr>
             </a:pPr>
             <a:r>
-              <a:t>📲 100% Web (Sin Descargas)</a:t>
-            </a:r>
-          </a:p>
-          <a:p>
-            <a:pPr>
-              <a:spcAft>
-                <a:spcPts val="1200"/>
-              </a:spcAft>
-              <a:defRPr sz="1200">
+              <a:t>🎯 No Saturar: El Juego Indicado en el Día Indicado</a:t>
+            </a:r>
+          </a:p>
+          <a:p>
+            <a:pPr>
+              <a:spcAft>
+                <a:spcPts val="100"/>
+              </a:spcAft>
+              <a:defRPr sz="1300" b="1">
+                <a:solidFill>
+                  <a:srgbClr val="FF5722"/>
+                </a:solidFill>
+              </a:defRPr>
+            </a:pPr>
+            <a:r>
+              <a:t>📅 Selección Quirúrgica de Fechas</a:t>
+            </a:r>
+          </a:p>
+          <a:p>
+            <a:pPr>
+              <a:spcAft>
+                <a:spcPts val="800"/>
+              </a:spcAft>
+              <a:defRPr sz="1100">
                 <a:solidFill>
                   <a:srgbClr val="FFFFFF"/>
                 </a:solidFill>
               </a:defRPr>
             </a:pPr>
             <a:r>
-              <a:t>El cliente escanea el código QR de su mesa y entra directo desde su navegador en 3 segundos. Cero descargas pesadas de App Store o Play Store.</a:t>
-            </a:r>
-          </a:p>
-          <a:p>
-            <a:pPr>
-              <a:spcAft>
-                <a:spcPts val="200"/>
-              </a:spcAft>
-              <a:defRPr sz="1500" b="1">
-                <a:solidFill>
-                  <a:srgbClr val="FFB612"/>
-                </a:solidFill>
-              </a:defRPr>
-            </a:pPr>
-            <a:r>
-              <a:t>🏆 Emoción Deportiva en Vivo</a:t>
-            </a:r>
-          </a:p>
-          <a:p>
-            <a:pPr>
-              <a:spcAft>
-                <a:spcPts val="1200"/>
-              </a:spcAft>
-              <a:defRPr sz="1200">
+              <a:t>No se tienen que jugar todos los juegos todos los días. Saturar al cliente cansa. La clave es activar dinámicas exclusivamente en partidos estelares:</a:t>
+            </a:r>
+          </a:p>
+          <a:p>
+            <a:pPr>
+              <a:spcAft>
+                <a:spcPts val="100"/>
+              </a:spcAft>
+              <a:defRPr sz="1300" b="1">
+                <a:solidFill>
+                  <a:srgbClr val="FF5722"/>
+                </a:solidFill>
+              </a:defRPr>
+            </a:pPr>
+            <a:r>
+              <a:t>🏈 Jueves, Domingos y Lunes</a:t>
+            </a:r>
+          </a:p>
+          <a:p>
+            <a:pPr>
+              <a:spcAft>
+                <a:spcPts val="800"/>
+              </a:spcAft>
+              <a:defRPr sz="1100">
                 <a:solidFill>
                   <a:srgbClr val="FFFFFF"/>
                 </a:solidFill>
               </a:defRPr>
             </a:pPr>
             <a:r>
-              <a:t>Pronósticos, quinielas y trivias conectadas en tiempo real a los marcadores oficiales de ESPN. Cada anotación en la TV cambia la tabla en su celular.</a:t>
-            </a:r>
-          </a:p>
-          <a:p>
-            <a:pPr>
-              <a:spcAft>
-                <a:spcPts val="200"/>
-              </a:spcAft>
-              <a:defRPr sz="1500" b="1">
-                <a:solidFill>
-                  <a:srgbClr val="FFB612"/>
-                </a:solidFill>
-              </a:defRPr>
-            </a:pPr>
-            <a:r>
-              <a:t>🍻 Recompensas Reales del Restaurante</a:t>
-            </a:r>
-          </a:p>
-          <a:p>
-            <a:pPr>
-              <a:spcAft>
-                <a:spcPts val="1200"/>
-              </a:spcAft>
-              <a:defRPr sz="1200">
+              <a:t>Quinielas y Grids de NFL durante transmisiones estelares.</a:t>
+            </a:r>
+          </a:p>
+          <a:p>
+            <a:pPr>
+              <a:spcAft>
+                <a:spcPts val="100"/>
+              </a:spcAft>
+              <a:defRPr sz="1300" b="1">
+                <a:solidFill>
+                  <a:srgbClr val="FF5722"/>
+                </a:solidFill>
+              </a:defRPr>
+            </a:pPr>
+            <a:r>
+              <a:t>⚽ Viernes a Domingo</a:t>
+            </a:r>
+          </a:p>
+          <a:p>
+            <a:pPr>
+              <a:spcAft>
+                <a:spcPts val="800"/>
+              </a:spcAft>
+              <a:defRPr sz="1100">
                 <a:solidFill>
                   <a:srgbClr val="FFFFFF"/>
                 </a:solidFill>
               </a:defRPr>
             </a:pPr>
             <a:r>
-              <a:t>Los ganadores reciben premios del bar (cervezas, alitas, descuentos en su próxima visita). El premio incentiva la permanencia y el retorno.</a:t>
-            </a:r>
-          </a:p>
-          <a:p>
-            <a:pPr>
-              <a:spcAft>
-                <a:spcPts val="200"/>
-              </a:spcAft>
-              <a:defRPr sz="1500" b="1">
-                <a:solidFill>
-                  <a:srgbClr val="FFB612"/>
-                </a:solidFill>
-              </a:defRPr>
-            </a:pPr>
-            <a:r>
-              <a:t>👨‍🍳 Conexión con el Personal (Meseros)</a:t>
-            </a:r>
-          </a:p>
-          <a:p>
-            <a:pPr>
-              <a:spcAft>
-                <a:spcPts val="1200"/>
-              </a:spcAft>
-              <a:defRPr sz="1200">
+              <a:t>Quinielas de Liga MX, First Striker y Clásicos de fútbol.</a:t>
+            </a:r>
+          </a:p>
+          <a:p>
+            <a:pPr>
+              <a:spcAft>
+                <a:spcPts val="100"/>
+              </a:spcAft>
+              <a:defRPr sz="1300" b="1">
+                <a:solidFill>
+                  <a:srgbClr val="FF5722"/>
+                </a:solidFill>
+              </a:defRPr>
+            </a:pPr>
+            <a:r>
+              <a:t>🧠 Medios Tiempos Selectos</a:t>
+            </a:r>
+          </a:p>
+          <a:p>
+            <a:pPr>
+              <a:spcAft>
+                <a:spcPts val="800"/>
+              </a:spcAft>
+              <a:defRPr sz="1100">
                 <a:solidFill>
                   <a:srgbClr val="FFFFFF"/>
                 </a:solidFill>
               </a:defRPr>
             </a:pPr>
             <a:r>
-              <a:t>Cada comensal asocia su participación a su mesero. Los meseros se convierten en embajadores del juego y aumentan sus propinas por mayor consumo.</a:t>
-            </a:r>
-          </a:p>
-        </p:txBody>
-      </p:sp>
-      <p:pic>
-        <p:nvPicPr>
-          <p:cNvPr id="5" name="Picture 4" descr="tarjeta_1_que_es_drinks_and_wins.png"/>
-          <p:cNvPicPr>
-            <a:picLocks noChangeAspect="1"/>
-          </p:cNvPicPr>
+              <a:t>Trivias rápidas de 10 min para reactivar consumo en la pausa.</a:t>
+            </a:r>
+          </a:p>
+        </p:txBody>
+      </p:sp>
+      <p:sp>
+        <p:nvSpPr>
+          <p:cNvPr id="5" name="Rounded Rectangle 4"/>
+          <p:cNvSpPr/>
           <p:nvPr/>
-        </p:nvPicPr>
-        <p:blipFill>
-          <a:blip r:embed="rId2"/>
-          <a:stretch>
-            <a:fillRect/>
-          </a:stretch>
-        </p:blipFill>
-        <p:spPr>
-          <a:xfrm>
-            <a:off x="7680960" y="1737360"/>
-            <a:ext cx="2520315" cy="4480560"/>
+        </p:nvSpPr>
+        <p:spPr>
+          <a:xfrm>
+            <a:off x="6217920" y="1645920"/>
+            <a:ext cx="5212080" cy="4572000"/>
+          </a:xfrm>
+          <a:prstGeom prst="roundRect">
+            <a:avLst/>
+          </a:prstGeom>
+          <a:solidFill>
+            <a:srgbClr val="141A26"/>
+          </a:solidFill>
+          <a:ln w="19050">
+            <a:solidFill>
+              <a:srgbClr val="283246"/>
+            </a:solidFill>
+          </a:ln>
+        </p:spPr>
+        <p:style>
+          <a:lnRef idx="1">
+            <a:schemeClr val="accent1"/>
+          </a:lnRef>
+          <a:fillRef idx="3">
+            <a:schemeClr val="accent1"/>
+          </a:fillRef>
+          <a:effectRef idx="2">
+            <a:schemeClr val="accent1"/>
+          </a:effectRef>
+          <a:fontRef idx="minor">
+            <a:schemeClr val="lt1"/>
+          </a:fontRef>
+        </p:style>
+        <p:txBody>
+          <a:bodyPr rtlCol="0" anchor="ctr"/>
+          <a:lstStyle/>
+          <a:p>
+            <a:pPr algn="ctr"/>
+          </a:p>
+        </p:txBody>
+      </p:sp>
+      <p:sp>
+        <p:nvSpPr>
+          <p:cNvPr id="6" name="TextBox 5"/>
+          <p:cNvSpPr txBox="1"/>
+          <p:nvPr/>
+        </p:nvSpPr>
+        <p:spPr>
+          <a:xfrm>
+            <a:off x="6492240" y="1920240"/>
+            <a:ext cx="4663440" cy="4023360"/>
           </a:xfrm>
           <a:prstGeom prst="rect">
             <a:avLst/>
           </a:prstGeom>
-        </p:spPr>
-      </p:pic>
+          <a:noFill/>
+        </p:spPr>
+        <p:txBody>
+          <a:bodyPr wrap="square">
+            <a:spAutoFit/>
+          </a:bodyPr>
+          <a:lstStyle/>
+          <a:p>
+            <a:pPr>
+              <a:spcAft>
+                <a:spcPts val="1000"/>
+              </a:spcAft>
+              <a:defRPr sz="1700" b="1">
+                <a:solidFill>
+                  <a:srgbClr val="00E676"/>
+                </a:solidFill>
+              </a:defRPr>
+            </a:pPr>
+            <a:r>
+              <a:t>🛡️ Punta de Lanza: Steelers Nation QRO (71+ Fans)</a:t>
+            </a:r>
+          </a:p>
+          <a:p>
+            <a:pPr>
+              <a:spcAft>
+                <a:spcPts val="100"/>
+              </a:spcAft>
+              <a:defRPr sz="1300" b="1">
+                <a:solidFill>
+                  <a:srgbClr val="FFD100"/>
+                </a:solidFill>
+              </a:defRPr>
+            </a:pPr>
+            <a:r>
+              <a:t>💳 Audiencia Cautiva y Lista</a:t>
+            </a:r>
+          </a:p>
+          <a:p>
+            <a:pPr>
+              <a:spcAft>
+                <a:spcPts val="800"/>
+              </a:spcAft>
+              <a:defRPr sz="1100">
+                <a:solidFill>
+                  <a:srgbClr val="FFFFFF"/>
+                </a:solidFill>
+              </a:defRPr>
+            </a:pPr>
+            <a:r>
+              <a:t>En Querétaro ya contamos con más de 71 fanáticos registrados en la app oficial de Steelers Fan Club, con su credencial digital PWA activa en sus celulares.</a:t>
+            </a:r>
+          </a:p>
+          <a:p>
+            <a:pPr>
+              <a:spcAft>
+                <a:spcPts val="100"/>
+              </a:spcAft>
+              <a:defRPr sz="1300" b="1">
+                <a:solidFill>
+                  <a:srgbClr val="FFD100"/>
+                </a:solidFill>
+              </a:defRPr>
+            </a:pPr>
+            <a:r>
+              <a:t>📲 Botón Directo Integrado</a:t>
+            </a:r>
+          </a:p>
+          <a:p>
+            <a:pPr>
+              <a:spcAft>
+                <a:spcPts val="800"/>
+              </a:spcAft>
+              <a:defRPr sz="1100">
+                <a:solidFill>
+                  <a:srgbClr val="FFFFFF"/>
+                </a:solidFill>
+              </a:defRPr>
+            </a:pPr>
+            <a:r>
+              <a:t>Su credencial ya incluye el botón especial que los enlaza directamente a Drinks &amp; Wins para participar en las dinámicas de cada partido.</a:t>
+            </a:r>
+          </a:p>
+          <a:p>
+            <a:pPr>
+              <a:spcAft>
+                <a:spcPts val="100"/>
+              </a:spcAft>
+              <a:defRPr sz="1300" b="1">
+                <a:solidFill>
+                  <a:srgbClr val="FFD100"/>
+                </a:solidFill>
+              </a:defRPr>
+            </a:pPr>
+            <a:r>
+              <a:t>🍻 Asistencia Garantizada</a:t>
+            </a:r>
+          </a:p>
+          <a:p>
+            <a:pPr>
+              <a:spcAft>
+                <a:spcPts val="800"/>
+              </a:spcAft>
+              <a:defRPr sz="1100">
+                <a:solidFill>
+                  <a:srgbClr val="FFFFFF"/>
+                </a:solidFill>
+              </a:defRPr>
+            </a:pPr>
+            <a:r>
+              <a:t>Este grupo ya llena mesas, pide rondas continuas y consume activamente alitas y cerveza semana a semana. Es la base perfecta para arrancar con éxito probado.</a:t>
+            </a:r>
+          </a:p>
+        </p:txBody>
+      </p:sp>
     </p:spTree>
   </p:cSld>
   <p:clrMapOvr>
@@ -4983,7 +5059,7 @@
         </p:nvSpPr>
         <p:spPr>
           <a:xfrm>
-            <a:off x="731520" y="457200"/>
+            <a:off x="731520" y="411480"/>
             <a:ext cx="10698480" cy="1005840"/>
           </a:xfrm>
           <a:prstGeom prst="rect">
@@ -4999,28 +5075,28 @@
           <a:p>
             <a:pPr>
               <a:spcAft>
-                <a:spcPts val="400"/>
-              </a:spcAft>
-              <a:defRPr sz="1100" b="1">
+                <a:spcPts val="300"/>
+              </a:spcAft>
+              <a:defRPr sz="1050" b="1">
                 <a:solidFill>
                   <a:srgbClr val="FFB612"/>
                 </a:solidFill>
               </a:defRPr>
             </a:pPr>
             <a:r>
-              <a:t>DRINKS &amp; WINS • PLATAFORMA DE GAMIFICACIÓN</a:t>
-            </a:r>
-          </a:p>
-          <a:p>
-            <a:pPr>
-              <a:defRPr sz="2600" b="1">
+              <a:t>EFICIENCIA OPERATIVA</a:t>
+            </a:r>
+          </a:p>
+          <a:p>
+            <a:pPr>
+              <a:defRPr sz="2400" b="1">
                 <a:solidFill>
                   <a:srgbClr val="FFFFFF"/>
                 </a:solidFill>
               </a:defRPr>
             </a:pPr>
             <a:r>
-              <a:t>6 Juegos Diseñados para Cada Deporte y Momento</a:t>
+              <a:t>Inteligencia Artificial y Automatización: Cero Carga para el Gerente</a:t>
             </a:r>
           </a:p>
         </p:txBody>
@@ -5033,18 +5109,18 @@
         </p:nvSpPr>
         <p:spPr>
           <a:xfrm>
-            <a:off x="731520" y="1737360"/>
-            <a:ext cx="3413455" cy="2011680"/>
+            <a:off x="731520" y="1645920"/>
+            <a:ext cx="3413455" cy="4572000"/>
           </a:xfrm>
           <a:prstGeom prst="roundRect">
             <a:avLst/>
           </a:prstGeom>
           <a:solidFill>
-            <a:srgbClr val="161C2A"/>
+            <a:srgbClr val="141A26"/>
           </a:solidFill>
           <a:ln w="19050">
             <a:solidFill>
-              <a:srgbClr val="2D374B"/>
+              <a:srgbClr val="283246"/>
             </a:solidFill>
           </a:ln>
         </p:spPr>
@@ -5070,40 +5146,16 @@
           </a:p>
         </p:txBody>
       </p:sp>
-      <p:pic>
-        <p:nvPicPr>
-          <p:cNvPr id="4" name="Picture 3" descr="badge_quiniela.png"/>
-          <p:cNvPicPr>
-            <a:picLocks noChangeAspect="1"/>
-          </p:cNvPicPr>
-          <p:nvPr/>
-        </p:nvPicPr>
-        <p:blipFill>
-          <a:blip r:embed="rId2"/>
-          <a:stretch>
-            <a:fillRect/>
-          </a:stretch>
-        </p:blipFill>
-        <p:spPr>
-          <a:xfrm>
-            <a:off x="914400" y="2011680"/>
-            <a:ext cx="727492" cy="548640"/>
-          </a:xfrm>
-          <a:prstGeom prst="rect">
-            <a:avLst/>
-          </a:prstGeom>
-        </p:spPr>
-      </p:pic>
-      <p:sp>
-        <p:nvSpPr>
-          <p:cNvPr id="5" name="TextBox 4"/>
+      <p:sp>
+        <p:nvSpPr>
+          <p:cNvPr id="4" name="TextBox 3"/>
           <p:cNvSpPr txBox="1"/>
           <p:nvPr/>
         </p:nvSpPr>
         <p:spPr>
           <a:xfrm>
-            <a:off x="1554480" y="1965960"/>
-            <a:ext cx="2377440" cy="1554480"/>
+            <a:off x="1005840" y="1920240"/>
+            <a:ext cx="2864815" cy="4023360"/>
           </a:xfrm>
           <a:prstGeom prst="rect">
             <a:avLst/>
@@ -5117,65 +5169,57 @@
           <a:lstStyle/>
           <a:p>
             <a:pPr>
-              <a:defRPr sz="1400" b="1">
+              <a:spcAft>
+                <a:spcPts val="1400"/>
+              </a:spcAft>
+              <a:defRPr sz="1650" b="1">
                 <a:solidFill>
                   <a:srgbClr val="FFB612"/>
                 </a:solidFill>
               </a:defRPr>
             </a:pPr>
             <a:r>
-              <a:t>🏈 Quinielas Pick'em</a:t>
-            </a:r>
-          </a:p>
-          <a:p>
-            <a:pPr>
-              <a:spcAft>
-                <a:spcPts val="400"/>
-              </a:spcAft>
-              <a:defRPr sz="950" b="1">
-                <a:solidFill>
-                  <a:srgbClr val="FF5722"/>
-                </a:solidFill>
-              </a:defRPr>
-            </a:pPr>
-            <a:r>
-              <a:t>NFL &amp; LIGA MX</a:t>
-            </a:r>
-          </a:p>
-          <a:p>
-            <a:pPr>
-              <a:defRPr sz="1100">
-                <a:solidFill>
-                  <a:srgbClr val="94A3B8"/>
-                </a:solidFill>
-              </a:defRPr>
-            </a:pPr>
-            <a:r>
-              <a:t>Pronósticos de ganadores y marcadores exactos con ranking en vivo.</a:t>
-            </a:r>
-          </a:p>
-        </p:txBody>
-      </p:sp>
-      <p:sp>
-        <p:nvSpPr>
-          <p:cNvPr id="6" name="Rounded Rectangle 5"/>
+              <a:t>⚡ Creación de Jornadas en Segundos</a:t>
+            </a:r>
+          </a:p>
+          <a:p>
+            <a:pPr>
+              <a:defRPr sz="1300">
+                <a:solidFill>
+                  <a:srgbClr val="FFFFFF"/>
+                </a:solidFill>
+              </a:defRPr>
+            </a:pPr>
+            <a:r>
+              <a:t>Antes: Un gerente tardaba hasta 2 horas buscando partidos en internet, armando tablas en Excel e imprimiendo hojas.</a:t>
+            </a:r>
+            <a:br/>
+            <a:r>
+              <a:t>Hoy: Conexión directa a ESPN y algoritmos que importan partidos oficiales, horarios y escudos con un solo clic.</a:t>
+            </a:r>
+          </a:p>
+        </p:txBody>
+      </p:sp>
+      <p:sp>
+        <p:nvSpPr>
+          <p:cNvPr id="5" name="Rounded Rectangle 4"/>
           <p:cNvSpPr/>
           <p:nvPr/>
         </p:nvSpPr>
         <p:spPr>
           <a:xfrm>
-            <a:off x="4389120" y="1737360"/>
-            <a:ext cx="3413455" cy="2011680"/>
+            <a:off x="4389120" y="1645920"/>
+            <a:ext cx="3413455" cy="4572000"/>
           </a:xfrm>
           <a:prstGeom prst="roundRect">
             <a:avLst/>
           </a:prstGeom>
           <a:solidFill>
-            <a:srgbClr val="161C2A"/>
+            <a:srgbClr val="141A26"/>
           </a:solidFill>
           <a:ln w="19050">
             <a:solidFill>
-              <a:srgbClr val="2D374B"/>
+              <a:srgbClr val="283246"/>
             </a:solidFill>
           </a:ln>
         </p:spPr>
@@ -5201,40 +5245,16 @@
           </a:p>
         </p:txBody>
       </p:sp>
-      <p:pic>
-        <p:nvPicPr>
-          <p:cNvPr id="7" name="Picture 6" descr="badge_grids.png"/>
-          <p:cNvPicPr>
-            <a:picLocks noChangeAspect="1"/>
-          </p:cNvPicPr>
-          <p:nvPr/>
-        </p:nvPicPr>
-        <p:blipFill>
-          <a:blip r:embed="rId3"/>
-          <a:stretch>
-            <a:fillRect/>
-          </a:stretch>
-        </p:blipFill>
-        <p:spPr>
-          <a:xfrm>
-            <a:off x="4572000" y="2011680"/>
-            <a:ext cx="667265" cy="548640"/>
-          </a:xfrm>
-          <a:prstGeom prst="rect">
-            <a:avLst/>
-          </a:prstGeom>
-        </p:spPr>
-      </p:pic>
-      <p:sp>
-        <p:nvSpPr>
-          <p:cNvPr id="8" name="TextBox 7"/>
+      <p:sp>
+        <p:nvSpPr>
+          <p:cNvPr id="6" name="TextBox 5"/>
           <p:cNvSpPr txBox="1"/>
           <p:nvPr/>
         </p:nvSpPr>
         <p:spPr>
           <a:xfrm>
-            <a:off x="5212080" y="1965960"/>
-            <a:ext cx="2377440" cy="1554480"/>
+            <a:off x="4663440" y="1920240"/>
+            <a:ext cx="2864815" cy="4023360"/>
           </a:xfrm>
           <a:prstGeom prst="rect">
             <a:avLst/>
@@ -5248,65 +5268,53 @@
           <a:lstStyle/>
           <a:p>
             <a:pPr>
-              <a:defRPr sz="1400" b="1">
-                <a:solidFill>
-                  <a:srgbClr val="FFB612"/>
-                </a:solidFill>
-              </a:defRPr>
-            </a:pPr>
-            <a:r>
-              <a:t>🏁 Football Grids</a:t>
-            </a:r>
-          </a:p>
-          <a:p>
-            <a:pPr>
-              <a:spcAft>
-                <a:spcPts val="400"/>
-              </a:spcAft>
-              <a:defRPr sz="950" b="1">
+              <a:spcAft>
+                <a:spcPts val="1400"/>
+              </a:spcAft>
+              <a:defRPr sz="1650" b="1">
                 <a:solidFill>
                   <a:srgbClr val="FF5722"/>
                 </a:solidFill>
               </a:defRPr>
             </a:pPr>
             <a:r>
-              <a:t>NFL ESPECIAL</a:t>
-            </a:r>
-          </a:p>
-          <a:p>
-            <a:pPr>
-              <a:defRPr sz="1100">
-                <a:solidFill>
-                  <a:srgbClr val="94A3B8"/>
-                </a:solidFill>
-              </a:defRPr>
-            </a:pPr>
-            <a:r>
-              <a:t>Cuadrícula digital de 100 casillas con ganadores por cada cuarto.</a:t>
-            </a:r>
-          </a:p>
-        </p:txBody>
-      </p:sp>
-      <p:sp>
-        <p:nvSpPr>
-          <p:cNvPr id="9" name="Rounded Rectangle 8"/>
+              <a:t>🧠 Generación de Trivias Deportivas con IA</a:t>
+            </a:r>
+          </a:p>
+          <a:p>
+            <a:pPr>
+              <a:defRPr sz="1300">
+                <a:solidFill>
+                  <a:srgbClr val="FFFFFF"/>
+                </a:solidFill>
+              </a:defRPr>
+            </a:pPr>
+            <a:r>
+              <a:t>La Inteligencia Artificial genera sets completos de preguntas deportivas temáticas (NFL, Liga MX, datos curiosos de Steelers) adaptadas al partido del día en menos de 10 segundos, listas para proyectar en TV.</a:t>
+            </a:r>
+          </a:p>
+        </p:txBody>
+      </p:sp>
+      <p:sp>
+        <p:nvSpPr>
+          <p:cNvPr id="7" name="Rounded Rectangle 6"/>
           <p:cNvSpPr/>
           <p:nvPr/>
         </p:nvSpPr>
         <p:spPr>
           <a:xfrm>
-            <a:off x="8046720" y="1737360"/>
-            <a:ext cx="3413455" cy="2011680"/>
+            <a:off x="8046720" y="1645920"/>
+            <a:ext cx="3413455" cy="4572000"/>
           </a:xfrm>
           <a:prstGeom prst="roundRect">
             <a:avLst/>
           </a:prstGeom>
           <a:solidFill>
-            <a:srgbClr val="161C2A"/>
+            <a:srgbClr val="141A26"/>
           </a:solidFill>
           <a:ln w="19050">
             <a:solidFill>
-              <a:srgbClr val="2D374B"/>
+              <a:srgbClr val="283246"/>
             </a:solidFill>
           </a:ln>
         </p:spPr>
@@ -5332,40 +5340,16 @@
           </a:p>
         </p:txBody>
       </p:sp>
-      <p:pic>
-        <p:nvPicPr>
-          <p:cNvPr id="10" name="Picture 9" descr="badge_survivor.png"/>
-          <p:cNvPicPr>
-            <a:picLocks noChangeAspect="1"/>
-          </p:cNvPicPr>
-          <p:nvPr/>
-        </p:nvPicPr>
-        <p:blipFill>
-          <a:blip r:embed="rId4"/>
-          <a:stretch>
-            <a:fillRect/>
-          </a:stretch>
-        </p:blipFill>
-        <p:spPr>
-          <a:xfrm>
-            <a:off x="8229600" y="2011680"/>
-            <a:ext cx="753301" cy="548640"/>
-          </a:xfrm>
-          <a:prstGeom prst="rect">
-            <a:avLst/>
-          </a:prstGeom>
-        </p:spPr>
-      </p:pic>
-      <p:sp>
-        <p:nvSpPr>
-          <p:cNvPr id="11" name="TextBox 10"/>
+      <p:sp>
+        <p:nvSpPr>
+          <p:cNvPr id="8" name="TextBox 7"/>
           <p:cNvSpPr txBox="1"/>
           <p:nvPr/>
         </p:nvSpPr>
         <p:spPr>
           <a:xfrm>
-            <a:off x="8869680" y="1965960"/>
-            <a:ext cx="2377440" cy="1554480"/>
+            <a:off x="8321040" y="1920240"/>
+            <a:ext cx="2864815" cy="4023360"/>
           </a:xfrm>
           <a:prstGeom prst="rect">
             <a:avLst/>
@@ -5379,434 +5363,29 @@
           <a:lstStyle/>
           <a:p>
             <a:pPr>
-              <a:defRPr sz="1400" b="1">
-                <a:solidFill>
-                  <a:srgbClr val="FFB612"/>
-                </a:solidFill>
-              </a:defRPr>
-            </a:pPr>
-            <a:r>
-              <a:t>🛡️ Survivor NFL</a:t>
-            </a:r>
-          </a:p>
-          <a:p>
-            <a:pPr>
-              <a:spcAft>
-                <a:spcPts val="400"/>
-              </a:spcAft>
-              <a:defRPr sz="950" b="1">
-                <a:solidFill>
-                  <a:srgbClr val="FF5722"/>
-                </a:solidFill>
-              </a:defRPr>
-            </a:pPr>
-            <a:r>
-              <a:t>SEMANA A SEMANA</a:t>
-            </a:r>
-          </a:p>
-          <a:p>
-            <a:pPr>
-              <a:defRPr sz="1100">
-                <a:solidFill>
-                  <a:srgbClr val="94A3B8"/>
-                </a:solidFill>
-              </a:defRPr>
-            </a:pPr>
-            <a:r>
-              <a:t>Elige 1 equipo ganador por semana sin repetir. El último en pie gana.</a:t>
-            </a:r>
-          </a:p>
-        </p:txBody>
-      </p:sp>
-      <p:sp>
-        <p:nvSpPr>
-          <p:cNvPr id="12" name="Rounded Rectangle 11"/>
-          <p:cNvSpPr/>
-          <p:nvPr/>
-        </p:nvSpPr>
-        <p:spPr>
-          <a:xfrm>
-            <a:off x="731520" y="4023360"/>
-            <a:ext cx="3413455" cy="2011680"/>
-          </a:xfrm>
-          <a:prstGeom prst="roundRect">
-            <a:avLst/>
-          </a:prstGeom>
-          <a:solidFill>
-            <a:srgbClr val="161C2A"/>
-          </a:solidFill>
-          <a:ln w="19050">
-            <a:solidFill>
-              <a:srgbClr val="2D374B"/>
-            </a:solidFill>
-          </a:ln>
-        </p:spPr>
-        <p:style>
-          <a:lnRef idx="1">
-            <a:schemeClr val="accent1"/>
-          </a:lnRef>
-          <a:fillRef idx="3">
-            <a:schemeClr val="accent1"/>
-          </a:fillRef>
-          <a:effectRef idx="2">
-            <a:schemeClr val="accent1"/>
-          </a:effectRef>
-          <a:fontRef idx="minor">
-            <a:schemeClr val="lt1"/>
-          </a:fontRef>
-        </p:style>
-        <p:txBody>
-          <a:bodyPr rtlCol="0" anchor="ctr"/>
-          <a:lstStyle/>
-          <a:p>
-            <a:pPr algn="ctr"/>
-          </a:p>
-        </p:txBody>
-      </p:sp>
-      <p:pic>
-        <p:nvPicPr>
-          <p:cNvPr id="13" name="Picture 12" descr="badge_firststriker.png"/>
-          <p:cNvPicPr>
-            <a:picLocks noChangeAspect="1"/>
-          </p:cNvPicPr>
-          <p:nvPr/>
-        </p:nvPicPr>
-        <p:blipFill>
-          <a:blip r:embed="rId5"/>
-          <a:stretch>
-            <a:fillRect/>
-          </a:stretch>
-        </p:blipFill>
-        <p:spPr>
-          <a:xfrm>
-            <a:off x="914400" y="4297680"/>
-            <a:ext cx="656662" cy="548640"/>
-          </a:xfrm>
-          <a:prstGeom prst="rect">
-            <a:avLst/>
-          </a:prstGeom>
-        </p:spPr>
-      </p:pic>
-      <p:sp>
-        <p:nvSpPr>
-          <p:cNvPr id="14" name="TextBox 13"/>
-          <p:cNvSpPr txBox="1"/>
-          <p:nvPr/>
-        </p:nvSpPr>
-        <p:spPr>
-          <a:xfrm>
-            <a:off x="1554480" y="4251960"/>
-            <a:ext cx="2377440" cy="1554480"/>
-          </a:xfrm>
-          <a:prstGeom prst="rect">
-            <a:avLst/>
-          </a:prstGeom>
-          <a:noFill/>
-        </p:spPr>
-        <p:txBody>
-          <a:bodyPr wrap="square">
-            <a:spAutoFit/>
-          </a:bodyPr>
-          <a:lstStyle/>
-          <a:p>
-            <a:pPr>
-              <a:defRPr sz="1400" b="1">
-                <a:solidFill>
-                  <a:srgbClr val="FFB612"/>
-                </a:solidFill>
-              </a:defRPr>
-            </a:pPr>
-            <a:r>
-              <a:t>⚽ First Striker</a:t>
-            </a:r>
-          </a:p>
-          <a:p>
-            <a:pPr>
-              <a:spcAft>
-                <a:spcPts val="400"/>
-              </a:spcAft>
-              <a:defRPr sz="950" b="1">
-                <a:solidFill>
-                  <a:srgbClr val="FF5722"/>
-                </a:solidFill>
-              </a:defRPr>
-            </a:pPr>
-            <a:r>
-              <a:t>FÚTBOL EN VIVO</a:t>
-            </a:r>
-          </a:p>
-          <a:p>
-            <a:pPr>
-              <a:defRPr sz="1100">
-                <a:solidFill>
-                  <a:srgbClr val="94A3B8"/>
-                </a:solidFill>
-              </a:defRPr>
-            </a:pPr>
-            <a:r>
-              <a:t>Predice qué equipo y en qué bloque de 15 min caerá el primer gol.</a:t>
-            </a:r>
-          </a:p>
-        </p:txBody>
-      </p:sp>
-      <p:sp>
-        <p:nvSpPr>
-          <p:cNvPr id="15" name="Rounded Rectangle 14"/>
-          <p:cNvSpPr/>
-          <p:nvPr/>
-        </p:nvSpPr>
-        <p:spPr>
-          <a:xfrm>
-            <a:off x="4389120" y="4023360"/>
-            <a:ext cx="3413455" cy="2011680"/>
-          </a:xfrm>
-          <a:prstGeom prst="roundRect">
-            <a:avLst/>
-          </a:prstGeom>
-          <a:solidFill>
-            <a:srgbClr val="161C2A"/>
-          </a:solidFill>
-          <a:ln w="19050">
-            <a:solidFill>
-              <a:srgbClr val="2D374B"/>
-            </a:solidFill>
-          </a:ln>
-        </p:spPr>
-        <p:style>
-          <a:lnRef idx="1">
-            <a:schemeClr val="accent1"/>
-          </a:lnRef>
-          <a:fillRef idx="3">
-            <a:schemeClr val="accent1"/>
-          </a:fillRef>
-          <a:effectRef idx="2">
-            <a:schemeClr val="accent1"/>
-          </a:effectRef>
-          <a:fontRef idx="minor">
-            <a:schemeClr val="lt1"/>
-          </a:fontRef>
-        </p:style>
-        <p:txBody>
-          <a:bodyPr rtlCol="0" anchor="ctr"/>
-          <a:lstStyle/>
-          <a:p>
-            <a:pPr algn="ctr"/>
-          </a:p>
-        </p:txBody>
-      </p:sp>
-      <p:pic>
-        <p:nvPicPr>
-          <p:cNvPr id="16" name="Picture 15" descr="badge_trivia.png"/>
-          <p:cNvPicPr>
-            <a:picLocks noChangeAspect="1"/>
-          </p:cNvPicPr>
-          <p:nvPr/>
-        </p:nvPicPr>
-        <p:blipFill>
-          <a:blip r:embed="rId6"/>
-          <a:stretch>
-            <a:fillRect/>
-          </a:stretch>
-        </p:blipFill>
-        <p:spPr>
-          <a:xfrm>
-            <a:off x="4572000" y="4297680"/>
-            <a:ext cx="697667" cy="548640"/>
-          </a:xfrm>
-          <a:prstGeom prst="rect">
-            <a:avLst/>
-          </a:prstGeom>
-        </p:spPr>
-      </p:pic>
-      <p:sp>
-        <p:nvSpPr>
-          <p:cNvPr id="17" name="TextBox 16"/>
-          <p:cNvSpPr txBox="1"/>
-          <p:nvPr/>
-        </p:nvSpPr>
-        <p:spPr>
-          <a:xfrm>
-            <a:off x="5212080" y="4251960"/>
-            <a:ext cx="2377440" cy="1554480"/>
-          </a:xfrm>
-          <a:prstGeom prst="rect">
-            <a:avLst/>
-          </a:prstGeom>
-          <a:noFill/>
-        </p:spPr>
-        <p:txBody>
-          <a:bodyPr wrap="square">
-            <a:spAutoFit/>
-          </a:bodyPr>
-          <a:lstStyle/>
-          <a:p>
-            <a:pPr>
-              <a:defRPr sz="1400" b="1">
-                <a:solidFill>
-                  <a:srgbClr val="FFB612"/>
-                </a:solidFill>
-              </a:defRPr>
-            </a:pPr>
-            <a:r>
-              <a:t>🧠 Trivia en Vivo</a:t>
-            </a:r>
-          </a:p>
-          <a:p>
-            <a:pPr>
-              <a:spcAft>
-                <a:spcPts val="400"/>
-              </a:spcAft>
-              <a:defRPr sz="950" b="1">
-                <a:solidFill>
-                  <a:srgbClr val="FF5722"/>
-                </a:solidFill>
-              </a:defRPr>
-            </a:pPr>
-            <a:r>
-              <a:t>INTERACTIVO EN TV</a:t>
-            </a:r>
-          </a:p>
-          <a:p>
-            <a:pPr>
-              <a:defRPr sz="1100">
-                <a:solidFill>
-                  <a:srgbClr val="94A3B8"/>
-                </a:solidFill>
-              </a:defRPr>
-            </a:pPr>
-            <a:r>
-              <a:t>Preguntas deportivas compitiendo en tiempo real contra otras mesas.</a:t>
-            </a:r>
-          </a:p>
-        </p:txBody>
-      </p:sp>
-      <p:sp>
-        <p:nvSpPr>
-          <p:cNvPr id="18" name="Rounded Rectangle 17"/>
-          <p:cNvSpPr/>
-          <p:nvPr/>
-        </p:nvSpPr>
-        <p:spPr>
-          <a:xfrm>
-            <a:off x="8046720" y="4023360"/>
-            <a:ext cx="3413455" cy="2011680"/>
-          </a:xfrm>
-          <a:prstGeom prst="roundRect">
-            <a:avLst/>
-          </a:prstGeom>
-          <a:solidFill>
-            <a:srgbClr val="161C2A"/>
-          </a:solidFill>
-          <a:ln w="19050">
-            <a:solidFill>
-              <a:srgbClr val="2D374B"/>
-            </a:solidFill>
-          </a:ln>
-        </p:spPr>
-        <p:style>
-          <a:lnRef idx="1">
-            <a:schemeClr val="accent1"/>
-          </a:lnRef>
-          <a:fillRef idx="3">
-            <a:schemeClr val="accent1"/>
-          </a:fillRef>
-          <a:effectRef idx="2">
-            <a:schemeClr val="accent1"/>
-          </a:effectRef>
-          <a:fontRef idx="minor">
-            <a:schemeClr val="lt1"/>
-          </a:fontRef>
-        </p:style>
-        <p:txBody>
-          <a:bodyPr rtlCol="0" anchor="ctr"/>
-          <a:lstStyle/>
-          <a:p>
-            <a:pPr algn="ctr"/>
-          </a:p>
-        </p:txBody>
-      </p:sp>
-      <p:pic>
-        <p:nvPicPr>
-          <p:cNvPr id="19" name="Picture 18" descr="badge_bingo.png"/>
-          <p:cNvPicPr>
-            <a:picLocks noChangeAspect="1"/>
-          </p:cNvPicPr>
-          <p:nvPr/>
-        </p:nvPicPr>
-        <p:blipFill>
-          <a:blip r:embed="rId7"/>
-          <a:stretch>
-            <a:fillRect/>
-          </a:stretch>
-        </p:blipFill>
-        <p:spPr>
-          <a:xfrm>
-            <a:off x="8229600" y="4297680"/>
-            <a:ext cx="701426" cy="548640"/>
-          </a:xfrm>
-          <a:prstGeom prst="rect">
-            <a:avLst/>
-          </a:prstGeom>
-        </p:spPr>
-      </p:pic>
-      <p:sp>
-        <p:nvSpPr>
-          <p:cNvPr id="20" name="TextBox 19"/>
-          <p:cNvSpPr txBox="1"/>
-          <p:nvPr/>
-        </p:nvSpPr>
-        <p:spPr>
-          <a:xfrm>
-            <a:off x="8869680" y="4251960"/>
-            <a:ext cx="2377440" cy="1554480"/>
-          </a:xfrm>
-          <a:prstGeom prst="rect">
-            <a:avLst/>
-          </a:prstGeom>
-          <a:noFill/>
-        </p:spPr>
-        <p:txBody>
-          <a:bodyPr wrap="square">
-            <a:spAutoFit/>
-          </a:bodyPr>
-          <a:lstStyle/>
-          <a:p>
-            <a:pPr>
-              <a:defRPr sz="1400" b="1">
-                <a:solidFill>
-                  <a:srgbClr val="FFB612"/>
-                </a:solidFill>
-              </a:defRPr>
-            </a:pPr>
-            <a:r>
-              <a:t>🎯 Bar Bingo</a:t>
-            </a:r>
-          </a:p>
-          <a:p>
-            <a:pPr>
-              <a:spcAft>
-                <a:spcPts val="400"/>
-              </a:spcAft>
-              <a:defRPr sz="950" b="1">
-                <a:solidFill>
-                  <a:srgbClr val="FF5722"/>
-                </a:solidFill>
-              </a:defRPr>
-            </a:pPr>
-            <a:r>
-              <a:t>TODO EL PARTIDO</a:t>
-            </a:r>
-          </a:p>
-          <a:p>
-            <a:pPr>
-              <a:defRPr sz="1100">
-                <a:solidFill>
-                  <a:srgbClr val="94A3B8"/>
-                </a:solidFill>
-              </a:defRPr>
-            </a:pPr>
-            <a:r>
-              <a:t>Cartones con eventos del juego (Touchdown, Gol de Campo, etc.).</a:t>
+              <a:spcAft>
+                <a:spcPts val="1400"/>
+              </a:spcAft>
+              <a:defRPr sz="1650" b="1">
+                <a:solidFill>
+                  <a:srgbClr val="00E676"/>
+                </a:solidFill>
+              </a:defRPr>
+            </a:pPr>
+            <a:r>
+              <a:t>📊 Marcadores Exactos y Calificación en Tiempo Real</a:t>
+            </a:r>
+          </a:p>
+          <a:p>
+            <a:pPr>
+              <a:defRPr sz="1300">
+                <a:solidFill>
+                  <a:srgbClr val="FFFFFF"/>
+                </a:solidFill>
+              </a:defRPr>
+            </a:pPr>
+            <a:r>
+              <a:t>La plataforma detecta marcadores finales en vivo vía API de ESPN, calcula aciertos exactos (+3) o ganadores (+1), genera la tabla y proclama al campeón de forma 100% automática sin errores humanos.</a:t>
             </a:r>
           </a:p>
         </p:txBody>
@@ -5845,7 +5424,7 @@
         </p:nvSpPr>
         <p:spPr>
           <a:xfrm>
-            <a:off x="731520" y="457200"/>
+            <a:off x="731520" y="411480"/>
             <a:ext cx="10698480" cy="1005840"/>
           </a:xfrm>
           <a:prstGeom prst="rect">
@@ -5861,28 +5440,28 @@
           <a:p>
             <a:pPr>
               <a:spcAft>
-                <a:spcPts val="400"/>
-              </a:spcAft>
-              <a:defRPr sz="1100" b="1">
+                <a:spcPts val="300"/>
+              </a:spcAft>
+              <a:defRPr sz="1050" b="1">
                 <a:solidFill>
                   <a:srgbClr val="FFB612"/>
                 </a:solidFill>
               </a:defRPr>
             </a:pPr>
             <a:r>
-              <a:t>DRINKS &amp; WINS • PLATAFORMA DE GAMIFICACIÓN</a:t>
-            </a:r>
-          </a:p>
-          <a:p>
-            <a:pPr>
-              <a:defRPr sz="2600" b="1">
+              <a:t>DETALLE PASO A PASO POR JUEGO</a:t>
+            </a:r>
+          </a:p>
+          <a:p>
+            <a:pPr>
+              <a:defRPr sz="2400" b="1">
                 <a:solidFill>
                   <a:srgbClr val="FFFFFF"/>
                 </a:solidFill>
               </a:defRPr>
             </a:pPr>
             <a:r>
-              <a:t>Quinielas Pick'em: El Motor de Competencia en Vivo</a:t>
+              <a:t>Juego 1: Quinielas Pick'em (NFL y Liga MX)</a:t>
             </a:r>
           </a:p>
         </p:txBody>
@@ -5895,18 +5474,18 @@
         </p:nvSpPr>
         <p:spPr>
           <a:xfrm>
-            <a:off x="731520" y="1737360"/>
-            <a:ext cx="6858000" cy="4480560"/>
+            <a:off x="731520" y="1645920"/>
+            <a:ext cx="6858000" cy="4572000"/>
           </a:xfrm>
           <a:prstGeom prst="roundRect">
             <a:avLst/>
           </a:prstGeom>
           <a:solidFill>
-            <a:srgbClr val="161C2A"/>
+            <a:srgbClr val="141A26"/>
           </a:solidFill>
           <a:ln w="19050">
             <a:solidFill>
-              <a:srgbClr val="2D374B"/>
+              <a:srgbClr val="283246"/>
             </a:solidFill>
           </a:ln>
         </p:spPr>
@@ -5940,8 +5519,8 @@
         </p:nvSpPr>
         <p:spPr>
           <a:xfrm>
-            <a:off x="1097280" y="2011680"/>
-            <a:ext cx="6126480" cy="3931920"/>
+            <a:off x="1005840" y="1828800"/>
+            <a:ext cx="6309360" cy="4114800"/>
           </a:xfrm>
           <a:prstGeom prst="rect">
             <a:avLst/>
@@ -5956,99 +5535,91 @@
           <a:p>
             <a:pPr>
               <a:spcAft>
-                <a:spcPts val="300"/>
-              </a:spcAft>
-              <a:defRPr sz="1500" b="1">
+                <a:spcPts val="200"/>
+              </a:spcAft>
+              <a:defRPr sz="1400" b="1">
                 <a:solidFill>
                   <a:srgbClr val="FFB612"/>
                 </a:solidFill>
               </a:defRPr>
             </a:pPr>
             <a:r>
-              <a:t>🎯 Sistema de Puntos Transparente</a:t>
-            </a:r>
-          </a:p>
-          <a:p>
-            <a:pPr>
-              <a:spcAft>
-                <a:spcPts val="1400"/>
-              </a:spcAft>
-              <a:defRPr sz="1200">
+              <a:t>🛠️ 1. CÓMO LO CREA EL GERENTE (60 seg)</a:t>
+            </a:r>
+          </a:p>
+          <a:p>
+            <a:pPr>
+              <a:spcAft>
+                <a:spcPts val="1000"/>
+              </a:spcAft>
+              <a:defRPr sz="1150">
                 <a:solidFill>
                   <a:srgbClr val="FFFFFF"/>
                 </a:solidFill>
               </a:defRPr>
             </a:pPr>
             <a:r>
-              <a:t>• Marcador Exacto: +3 Puntos (Ej: Pronosticó 2-1 y el juego terminó 2-1).</a:t>
-            </a:r>
-            <a:br/>
-            <a:r>
-              <a:t>• Ganador / Empate Acertado: +1 Punto (Atinó quién ganó aunque falló el marcador).</a:t>
-            </a:r>
-            <a:br/>
-            <a:r>
-              <a:t>• Fallo: 0 Puntos.</a:t>
-            </a:r>
-          </a:p>
-          <a:p>
-            <a:pPr>
-              <a:spcAft>
-                <a:spcPts val="300"/>
-              </a:spcAft>
-              <a:defRPr sz="1500" b="1">
+              <a:t>Entra al panel Admin, selecciona la liga (NFL, Liga MX o fútbol europeo). El sistema jala los partidos oficiales con escudos de ESPN. Toca los partidos a incluir, asigna el premio (ej. Orden de Alitas + Cerveza) y da clic en 'Crear Quiniela'.</a:t>
+            </a:r>
+          </a:p>
+          <a:p>
+            <a:pPr>
+              <a:spcAft>
+                <a:spcPts val="200"/>
+              </a:spcAft>
+              <a:defRPr sz="1400" b="1">
                 <a:solidFill>
                   <a:srgbClr val="FFB612"/>
                 </a:solidFill>
               </a:defRPr>
             </a:pPr>
             <a:r>
-              <a:t>⚡ Conexión Directa con ESPN (Cero Trabajo Manual)</a:t>
-            </a:r>
-          </a:p>
-          <a:p>
-            <a:pPr>
-              <a:spcAft>
-                <a:spcPts val="1400"/>
-              </a:spcAft>
-              <a:defRPr sz="1200">
+              <a:t>📱 2. CÓMO ENTRA Y JUEGA EL CLIENTE</a:t>
+            </a:r>
+          </a:p>
+          <a:p>
+            <a:pPr>
+              <a:spcAft>
+                <a:spcPts val="1000"/>
+              </a:spcAft>
+              <a:defRPr sz="1150">
                 <a:solidFill>
                   <a:srgbClr val="FFFFFF"/>
                 </a:solidFill>
               </a:defRPr>
             </a:pPr>
             <a:r>
-              <a:t>Los resultados se actualizan automáticamente vía API de ESPN. Cuando cae un touchdown o gol, la tabla recalcula puntos en vivo sin intervención del personal.</a:t>
-            </a:r>
-          </a:p>
-          <a:p>
-            <a:pPr>
-              <a:spcAft>
-                <a:spcPts val="300"/>
-              </a:spcAft>
-              <a:defRPr sz="1500" b="1">
+              <a:t>Escanea el QR de su mesa, ingresa con su nombre o Google, selecciona a su mesero y captura sus marcadores o ganadores en la pantalla interactiva antes del silbatazo inicial.</a:t>
+            </a:r>
+          </a:p>
+          <a:p>
+            <a:pPr>
+              <a:spcAft>
+                <a:spcPts val="200"/>
+              </a:spcAft>
+              <a:defRPr sz="1400" b="1">
                 <a:solidFill>
                   <a:srgbClr val="FFB612"/>
                 </a:solidFill>
               </a:defRPr>
             </a:pPr>
             <a:r>
-              <a:t>👑 Podio y Ganador Oficial Automatizado</a:t>
-            </a:r>
-          </a:p>
-          <a:p>
-            <a:pPr>
-              <a:spcAft>
-                <a:spcPts val="1400"/>
-              </a:spcAft>
-              <a:defRPr sz="1200">
+              <a:t>🏆 3. CÓMO GANA Y CANJEA</a:t>
+            </a:r>
+          </a:p>
+          <a:p>
+            <a:pPr>
+              <a:spcAft>
+                <a:spcPts val="1000"/>
+              </a:spcAft>
+              <a:defRPr sz="1150">
                 <a:solidFill>
                   <a:srgbClr val="FFFFFF"/>
                 </a:solidFill>
               </a:defRPr>
             </a:pPr>
             <a:r>
-              <a:t>Al terminar la jornada, se corona al campeón oficial con tarjeta de premiación digital y podio de 1º, 2º y 3º lugar, listo para canje en barra.</a:t>
+              <a:t>Durante el partido, los marcadores cambian en tiempo real. Marcador exacto: +3 pts (verde), Ganador: +1 pt (dorado), Error: 0 pts (rojo). Al finalizar, el comensal número 1 en el podio recibe la corona y muestra su cupón digital en barra para reclamar su premio.</a:t>
             </a:r>
           </a:p>
         </p:txBody>
@@ -6069,8 +5640,8 @@
         </p:blipFill>
         <p:spPr>
           <a:xfrm>
-            <a:off x="7863840" y="1737360"/>
-            <a:ext cx="8496469" cy="4480560"/>
+            <a:off x="7863840" y="1645920"/>
+            <a:ext cx="8669867" cy="4572000"/>
           </a:xfrm>
           <a:prstGeom prst="rect">
             <a:avLst/>
@@ -6111,7 +5682,7 @@
         </p:nvSpPr>
         <p:spPr>
           <a:xfrm>
-            <a:off x="731520" y="457200"/>
+            <a:off x="731520" y="411480"/>
             <a:ext cx="10698480" cy="1005840"/>
           </a:xfrm>
           <a:prstGeom prst="rect">
@@ -6127,28 +5698,28 @@
           <a:p>
             <a:pPr>
               <a:spcAft>
-                <a:spcPts val="400"/>
-              </a:spcAft>
-              <a:defRPr sz="1100" b="1">
+                <a:spcPts val="300"/>
+              </a:spcAft>
+              <a:defRPr sz="1050" b="1">
                 <a:solidFill>
                   <a:srgbClr val="FFB612"/>
                 </a:solidFill>
               </a:defRPr>
             </a:pPr>
             <a:r>
-              <a:t>DRINKS &amp; WINS • PLATAFORMA DE GAMIFICACIÓN</a:t>
-            </a:r>
-          </a:p>
-          <a:p>
-            <a:pPr>
-              <a:defRPr sz="2600" b="1">
+              <a:t>DETALLE PASO A PASO POR JUEGO</a:t>
+            </a:r>
+          </a:p>
+          <a:p>
+            <a:pPr>
+              <a:defRPr sz="2400" b="1">
                 <a:solidFill>
                   <a:srgbClr val="FFFFFF"/>
                 </a:solidFill>
               </a:defRPr>
             </a:pPr>
             <a:r>
-              <a:t>Juegos Especializados: NFL Grids y First Striker</a:t>
+              <a:t>Juego 2: Football Grids (100 Casillas Digitales)</a:t>
             </a:r>
           </a:p>
         </p:txBody>
@@ -6161,18 +5732,18 @@
         </p:nvSpPr>
         <p:spPr>
           <a:xfrm>
-            <a:off x="731520" y="1737360"/>
-            <a:ext cx="5212080" cy="4480560"/>
+            <a:off x="731520" y="1645920"/>
+            <a:ext cx="6858000" cy="4572000"/>
           </a:xfrm>
           <a:prstGeom prst="roundRect">
             <a:avLst/>
           </a:prstGeom>
           <a:solidFill>
-            <a:srgbClr val="161C2A"/>
+            <a:srgbClr val="141A26"/>
           </a:solidFill>
           <a:ln w="19050">
             <a:solidFill>
-              <a:srgbClr val="2D374B"/>
+              <a:srgbClr val="283246"/>
             </a:solidFill>
           </a:ln>
         </p:spPr>
@@ -6206,8 +5777,8 @@
         </p:nvSpPr>
         <p:spPr>
           <a:xfrm>
-            <a:off x="1005840" y="2011680"/>
-            <a:ext cx="4663440" cy="3931920"/>
+            <a:off x="1005840" y="1828800"/>
+            <a:ext cx="6309360" cy="4114800"/>
           </a:xfrm>
           <a:prstGeom prst="rect">
             <a:avLst/>
@@ -6222,223 +5793,119 @@
           <a:p>
             <a:pPr>
               <a:spcAft>
-                <a:spcPts val="1200"/>
-              </a:spcAft>
-              <a:defRPr sz="1800" b="1">
-                <a:solidFill>
-                  <a:srgbClr val="FFB612"/>
-                </a:solidFill>
-              </a:defRPr>
-            </a:pPr>
-            <a:r>
-              <a:t>🏁 Football Grids (100 Casillas)</a:t>
-            </a:r>
-          </a:p>
-          <a:p>
-            <a:pPr>
-              <a:spcAft>
-                <a:spcPts val="600"/>
-              </a:spcAft>
-              <a:defRPr sz="1200">
+                <a:spcPts val="200"/>
+              </a:spcAft>
+              <a:defRPr sz="1400" b="1">
+                <a:solidFill>
+                  <a:srgbClr val="FF5722"/>
+                </a:solidFill>
+              </a:defRPr>
+            </a:pPr>
+            <a:r>
+              <a:t>🛠️ 1. CÓMO LO CREA EL GERENTE (30 seg)</a:t>
+            </a:r>
+          </a:p>
+          <a:p>
+            <a:pPr>
+              <a:spcAft>
+                <a:spcPts val="1000"/>
+              </a:spcAft>
+              <a:defRPr sz="1150">
                 <a:solidFill>
                   <a:srgbClr val="FFFFFF"/>
                 </a:solidFill>
               </a:defRPr>
             </a:pPr>
             <a:r>
-              <a:t>• Cuadrícula 10x10 donde cada comensal elige sus casillas favoritas.</a:t>
-            </a:r>
-          </a:p>
-          <a:p>
-            <a:pPr>
-              <a:spcAft>
-                <a:spcPts val="600"/>
-              </a:spcAft>
-              <a:defRPr sz="1200">
+              <a:t>Selecciona el partido estelar de NFL (Sunday Night o Steelers). El sistema genera la cuadrícula digital de 10x10 (100 casillas) con los logotipos oficiales de los dos equipos rivales.</a:t>
+            </a:r>
+          </a:p>
+          <a:p>
+            <a:pPr>
+              <a:spcAft>
+                <a:spcPts val="200"/>
+              </a:spcAft>
+              <a:defRPr sz="1400" b="1">
+                <a:solidFill>
+                  <a:srgbClr val="FF5722"/>
+                </a:solidFill>
+              </a:defRPr>
+            </a:pPr>
+            <a:r>
+              <a:t>📱 2. CÓMO ENTRA Y JUEGA EL CLIENTE</a:t>
+            </a:r>
+          </a:p>
+          <a:p>
+            <a:pPr>
+              <a:spcAft>
+                <a:spcPts val="1000"/>
+              </a:spcAft>
+              <a:defRPr sz="1150">
                 <a:solidFill>
                   <a:srgbClr val="FFFFFF"/>
                 </a:solidFill>
               </a:defRPr>
             </a:pPr>
             <a:r>
-              <a:t>• Al inicio del juego, se sortean los dígitos finales de cada equipo.</a:t>
-            </a:r>
-          </a:p>
-          <a:p>
-            <a:pPr>
-              <a:spcAft>
-                <a:spcPts val="600"/>
-              </a:spcAft>
-              <a:defRPr sz="1200">
+              <a:t>Escanea el QR en mesa, ve la cuadrícula en su celular y toca las casillas vacías que desea apartar con su nombre o apodo, apoyando a su equipo con amigos.</a:t>
+            </a:r>
+          </a:p>
+          <a:p>
+            <a:pPr>
+              <a:spcAft>
+                <a:spcPts val="200"/>
+              </a:spcAft>
+              <a:defRPr sz="1400" b="1">
+                <a:solidFill>
+                  <a:srgbClr val="FF5722"/>
+                </a:solidFill>
+              </a:defRPr>
+            </a:pPr>
+            <a:r>
+              <a:t>🏆 3. CÓMO GANA Y MANTIENE EL CONSUMO</a:t>
+            </a:r>
+          </a:p>
+          <a:p>
+            <a:pPr>
+              <a:spcAft>
+                <a:spcPts val="1000"/>
+              </a:spcAft>
+              <a:defRPr sz="1150">
                 <a:solidFill>
                   <a:srgbClr val="FFFFFF"/>
                 </a:solidFill>
               </a:defRPr>
             </a:pPr>
             <a:r>
-              <a:t>• ¡4 Ganadores por partido! Se premia al final del 1er Cuarto, 2do Cuarto, 3er Cuarto y Marcador Final.</a:t>
-            </a:r>
-          </a:p>
-          <a:p>
-            <a:pPr>
-              <a:spcAft>
-                <a:spcPts val="600"/>
-              </a:spcAft>
-              <a:defRPr sz="1200">
-                <a:solidFill>
-                  <a:srgbClr val="FFFFFF"/>
-                </a:solidFill>
-              </a:defRPr>
-            </a:pPr>
-            <a:r>
-              <a:t>• Mantiene a los clientes atentos y pidiendo rondas de bebidas durante las 3 horas de transmisión.</a:t>
-            </a:r>
-          </a:p>
-        </p:txBody>
-      </p:sp>
-      <p:sp>
-        <p:nvSpPr>
-          <p:cNvPr id="5" name="Rounded Rectangle 4"/>
-          <p:cNvSpPr/>
+              <a:t>Al inicio del partido, el sistema sortea los dígitos del 0 al 9 en filas y columnas. ¡Hay 4 GANADORES por partido! (Al término del 1Q, Medio Tiempo, 3Q y Final según el último dígito del marcador). Mantiene a la mesa comiendo y bebiendo durante las 3 horas completas.</a:t>
+            </a:r>
+          </a:p>
+        </p:txBody>
+      </p:sp>
+      <p:pic>
+        <p:nvPicPr>
+          <p:cNvPr id="5" name="Picture 4" descr="tarjeta_2_vive_la_nfl.png"/>
+          <p:cNvPicPr>
+            <a:picLocks noChangeAspect="1"/>
+          </p:cNvPicPr>
           <p:nvPr/>
-        </p:nvSpPr>
-        <p:spPr>
-          <a:xfrm>
-            <a:off x="6217920" y="1737360"/>
-            <a:ext cx="5212080" cy="4480560"/>
-          </a:xfrm>
-          <a:prstGeom prst="roundRect">
-            <a:avLst/>
-          </a:prstGeom>
-          <a:solidFill>
-            <a:srgbClr val="161C2A"/>
-          </a:solidFill>
-          <a:ln w="19050">
-            <a:solidFill>
-              <a:srgbClr val="2D374B"/>
-            </a:solidFill>
-          </a:ln>
-        </p:spPr>
-        <p:style>
-          <a:lnRef idx="1">
-            <a:schemeClr val="accent1"/>
-          </a:lnRef>
-          <a:fillRef idx="3">
-            <a:schemeClr val="accent1"/>
-          </a:fillRef>
-          <a:effectRef idx="2">
-            <a:schemeClr val="accent1"/>
-          </a:effectRef>
-          <a:fontRef idx="minor">
-            <a:schemeClr val="lt1"/>
-          </a:fontRef>
-        </p:style>
-        <p:txBody>
-          <a:bodyPr rtlCol="0" anchor="ctr"/>
-          <a:lstStyle/>
-          <a:p>
-            <a:pPr algn="ctr"/>
-          </a:p>
-        </p:txBody>
-      </p:sp>
-      <p:sp>
-        <p:nvSpPr>
-          <p:cNvPr id="6" name="TextBox 5"/>
-          <p:cNvSpPr txBox="1"/>
-          <p:nvPr/>
-        </p:nvSpPr>
-        <p:spPr>
-          <a:xfrm>
-            <a:off x="6492240" y="2011680"/>
-            <a:ext cx="4663440" cy="3931920"/>
+        </p:nvPicPr>
+        <p:blipFill>
+          <a:blip r:embed="rId2"/>
+          <a:stretch>
+            <a:fillRect/>
+          </a:stretch>
+        </p:blipFill>
+        <p:spPr>
+          <a:xfrm>
+            <a:off x="7955279" y="1645920"/>
+            <a:ext cx="2571750" cy="4572000"/>
           </a:xfrm>
           <a:prstGeom prst="rect">
             <a:avLst/>
           </a:prstGeom>
-          <a:noFill/>
-        </p:spPr>
-        <p:txBody>
-          <a:bodyPr wrap="square">
-            <a:spAutoFit/>
-          </a:bodyPr>
-          <a:lstStyle/>
-          <a:p>
-            <a:pPr>
-              <a:spcAft>
-                <a:spcPts val="1200"/>
-              </a:spcAft>
-              <a:defRPr sz="1800" b="1">
-                <a:solidFill>
-                  <a:srgbClr val="FF5722"/>
-                </a:solidFill>
-              </a:defRPr>
-            </a:pPr>
-            <a:r>
-              <a:t>⚽ First Striker Wins (Primer Gol)</a:t>
-            </a:r>
-          </a:p>
-          <a:p>
-            <a:pPr>
-              <a:spcAft>
-                <a:spcPts val="600"/>
-              </a:spcAft>
-              <a:defRPr sz="1200">
-                <a:solidFill>
-                  <a:srgbClr val="FFFFFF"/>
-                </a:solidFill>
-              </a:defRPr>
-            </a:pPr>
-            <a:r>
-              <a:t>• El juego de acción rápida ideal para partidos de Liga MX y Champions League.</a:t>
-            </a:r>
-          </a:p>
-          <a:p>
-            <a:pPr>
-              <a:spcAft>
-                <a:spcPts val="600"/>
-              </a:spcAft>
-              <a:defRPr sz="1200">
-                <a:solidFill>
-                  <a:srgbClr val="FFFFFF"/>
-                </a:solidFill>
-              </a:defRPr>
-            </a:pPr>
-            <a:r>
-              <a:t>• Los comensales eligen el bloque de 15 minutos en que caerá el primer gol (1-15', 16-30', etc.) y al jugador que anotará.</a:t>
-            </a:r>
-          </a:p>
-          <a:p>
-            <a:pPr>
-              <a:spcAft>
-                <a:spcPts val="600"/>
-              </a:spcAft>
-              <a:defRPr sz="1200">
-                <a:solidFill>
-                  <a:srgbClr val="FFFFFF"/>
-                </a:solidFill>
-              </a:defRPr>
-            </a:pPr>
-            <a:r>
-              <a:t>• Genera adrenalina inmediata desde el silbatazo inicial.</a:t>
-            </a:r>
-          </a:p>
-          <a:p>
-            <a:pPr>
-              <a:spcAft>
-                <a:spcPts val="600"/>
-              </a:spcAft>
-              <a:defRPr sz="1200">
-                <a:solidFill>
-                  <a:srgbClr val="FFFFFF"/>
-                </a:solidFill>
-              </a:defRPr>
-            </a:pPr>
-            <a:r>
-              <a:t>• Fácil de explicar por los meseros y rápido de jugar mientras esperan su orden de comida.</a:t>
-            </a:r>
-          </a:p>
-        </p:txBody>
-      </p:sp>
+        </p:spPr>
+      </p:pic>
     </p:spTree>
   </p:cSld>
   <p:clrMapOvr>
@@ -6473,7 +5940,7 @@
         </p:nvSpPr>
         <p:spPr>
           <a:xfrm>
-            <a:off x="731520" y="457200"/>
+            <a:off x="731520" y="411480"/>
             <a:ext cx="10698480" cy="1005840"/>
           </a:xfrm>
           <a:prstGeom prst="rect">
@@ -6489,28 +5956,28 @@
           <a:p>
             <a:pPr>
               <a:spcAft>
-                <a:spcPts val="400"/>
-              </a:spcAft>
-              <a:defRPr sz="1100" b="1">
+                <a:spcPts val="300"/>
+              </a:spcAft>
+              <a:defRPr sz="1050" b="1">
                 <a:solidFill>
                   <a:srgbClr val="FFB612"/>
                 </a:solidFill>
               </a:defRPr>
             </a:pPr>
             <a:r>
-              <a:t>DRINKS &amp; WINS • PLATAFORMA DE GAMIFICACIÓN</a:t>
-            </a:r>
-          </a:p>
-          <a:p>
-            <a:pPr>
-              <a:defRPr sz="2600" b="1">
+              <a:t>DETALLE PASO A PASO POR JUEGO</a:t>
+            </a:r>
+          </a:p>
+          <a:p>
+            <a:pPr>
+              <a:defRPr sz="2400" b="1">
                 <a:solidFill>
                   <a:srgbClr val="FFFFFF"/>
                 </a:solidFill>
               </a:defRPr>
             </a:pPr>
             <a:r>
-              <a:t>Experiencia del Comensal en 3 Pasos Sencillos</a:t>
+              <a:t>Juego 3: First Striker Wins (El Gol del Partido)</a:t>
             </a:r>
           </a:p>
         </p:txBody>
@@ -6523,18 +5990,18 @@
         </p:nvSpPr>
         <p:spPr>
           <a:xfrm>
-            <a:off x="731520" y="1737360"/>
-            <a:ext cx="3413455" cy="4297680"/>
+            <a:off x="731520" y="1645920"/>
+            <a:ext cx="6858000" cy="4572000"/>
           </a:xfrm>
           <a:prstGeom prst="roundRect">
             <a:avLst/>
           </a:prstGeom>
           <a:solidFill>
-            <a:srgbClr val="161C2A"/>
+            <a:srgbClr val="141A26"/>
           </a:solidFill>
           <a:ln w="19050">
             <a:solidFill>
-              <a:srgbClr val="2D374B"/>
+              <a:srgbClr val="283246"/>
             </a:solidFill>
           </a:ln>
         </p:spPr>
@@ -6568,8 +6035,8 @@
         </p:nvSpPr>
         <p:spPr>
           <a:xfrm>
-            <a:off x="1005840" y="2011680"/>
-            <a:ext cx="2864815" cy="3749039"/>
+            <a:off x="1005840" y="1828800"/>
+            <a:ext cx="6309360" cy="4114800"/>
           </a:xfrm>
           <a:prstGeom prst="rect">
             <a:avLst/>
@@ -6584,222 +6051,119 @@
           <a:p>
             <a:pPr>
               <a:spcAft>
-                <a:spcPts val="1600"/>
-              </a:spcAft>
-              <a:defRPr sz="1700" b="1">
-                <a:solidFill>
-                  <a:srgbClr val="FFB612"/>
-                </a:solidFill>
-              </a:defRPr>
-            </a:pPr>
-            <a:r>
-              <a:t>1. LLEGADA Y ESCANEO</a:t>
-            </a:r>
-          </a:p>
-          <a:p>
-            <a:pPr>
-              <a:defRPr sz="1400">
+                <a:spcPts val="200"/>
+              </a:spcAft>
+              <a:defRPr sz="1400" b="1">
+                <a:solidFill>
+                  <a:srgbClr val="00E676"/>
+                </a:solidFill>
+              </a:defRPr>
+            </a:pPr>
+            <a:r>
+              <a:t>🛠️ 1. CÓMO LO CREA EL GERENTE (30 seg)</a:t>
+            </a:r>
+          </a:p>
+          <a:p>
+            <a:pPr>
+              <a:spcAft>
+                <a:spcPts val="1000"/>
+              </a:spcAft>
+              <a:defRPr sz="1150">
                 <a:solidFill>
                   <a:srgbClr val="FFFFFF"/>
                 </a:solidFill>
               </a:defRPr>
             </a:pPr>
             <a:r>
-              <a:t>📱 En su mesa encuentra un caballete o mantel con código QR. Abre su cámara, escanea e ingresa instantáneamente con su cuenta de Google o nombre.</a:t>
-            </a:r>
-          </a:p>
-        </p:txBody>
-      </p:sp>
-      <p:sp>
-        <p:nvSpPr>
-          <p:cNvPr id="5" name="Rounded Rectangle 4"/>
-          <p:cNvSpPr/>
+              <a:t>Elige el partido estelar de fútbol (ej. Clásico Nacional o Champions League) y define el premio inmediato (ej. Jarra de Cerveza o 1 Orden de Boneless para la mesa).</a:t>
+            </a:r>
+          </a:p>
+          <a:p>
+            <a:pPr>
+              <a:spcAft>
+                <a:spcPts val="200"/>
+              </a:spcAft>
+              <a:defRPr sz="1400" b="1">
+                <a:solidFill>
+                  <a:srgbClr val="00E676"/>
+                </a:solidFill>
+              </a:defRPr>
+            </a:pPr>
+            <a:r>
+              <a:t>📱 2. CÓMO ENTRA Y JUEGA EL CLIENTE</a:t>
+            </a:r>
+          </a:p>
+          <a:p>
+            <a:pPr>
+              <a:spcAft>
+                <a:spcPts val="1000"/>
+              </a:spcAft>
+              <a:defRPr sz="1150">
+                <a:solidFill>
+                  <a:srgbClr val="FFFFFF"/>
+                </a:solidFill>
+              </a:defRPr>
+            </a:pPr>
+            <a:r>
+              <a:t>Desde su celular, el comensal selecciona qué equipo anotará primero y en qué bloque de 15 minutos caerá el gol (1-15', 16-30', 31-45', etc.), o la opción de 'Sin Goles'.</a:t>
+            </a:r>
+          </a:p>
+          <a:p>
+            <a:pPr>
+              <a:spcAft>
+                <a:spcPts val="200"/>
+              </a:spcAft>
+              <a:defRPr sz="1400" b="1">
+                <a:solidFill>
+                  <a:srgbClr val="00E676"/>
+                </a:solidFill>
+              </a:defRPr>
+            </a:pPr>
+            <a:r>
+              <a:t>🏆 3. CÓMO GANA: ADRENALINA DESDE EL MINUTO 1</a:t>
+            </a:r>
+          </a:p>
+          <a:p>
+            <a:pPr>
+              <a:spcAft>
+                <a:spcPts val="1000"/>
+              </a:spcAft>
+              <a:defRPr sz="1150">
+                <a:solidFill>
+                  <a:srgbClr val="FFFFFF"/>
+                </a:solidFill>
+              </a:defRPr>
+            </a:pPr>
+            <a:r>
+              <a:t>En cuanto cae la primera anotación del partido, el sistema valida el minuto oficial de juego. El comensal que acertó el bloque de tiempo gana en el acto, generando gritos de festejo en el bar y rondas de brindis.</a:t>
+            </a:r>
+          </a:p>
+        </p:txBody>
+      </p:sp>
+      <p:pic>
+        <p:nvPicPr>
+          <p:cNvPr id="5" name="Picture 4" descr="tarjeta_3_instinto_goleador.png"/>
+          <p:cNvPicPr>
+            <a:picLocks noChangeAspect="1"/>
+          </p:cNvPicPr>
           <p:nvPr/>
-        </p:nvSpPr>
-        <p:spPr>
-          <a:xfrm>
-            <a:off x="4389120" y="1737360"/>
-            <a:ext cx="3413455" cy="4297680"/>
-          </a:xfrm>
-          <a:prstGeom prst="roundRect">
-            <a:avLst/>
-          </a:prstGeom>
-          <a:solidFill>
-            <a:srgbClr val="161C2A"/>
-          </a:solidFill>
-          <a:ln w="19050">
-            <a:solidFill>
-              <a:srgbClr val="2D374B"/>
-            </a:solidFill>
-          </a:ln>
-        </p:spPr>
-        <p:style>
-          <a:lnRef idx="1">
-            <a:schemeClr val="accent1"/>
-          </a:lnRef>
-          <a:fillRef idx="3">
-            <a:schemeClr val="accent1"/>
-          </a:fillRef>
-          <a:effectRef idx="2">
-            <a:schemeClr val="accent1"/>
-          </a:effectRef>
-          <a:fontRef idx="minor">
-            <a:schemeClr val="lt1"/>
-          </a:fontRef>
-        </p:style>
-        <p:txBody>
-          <a:bodyPr rtlCol="0" anchor="ctr"/>
-          <a:lstStyle/>
-          <a:p>
-            <a:pPr algn="ctr"/>
-          </a:p>
-        </p:txBody>
-      </p:sp>
-      <p:sp>
-        <p:nvSpPr>
-          <p:cNvPr id="6" name="TextBox 5"/>
-          <p:cNvSpPr txBox="1"/>
-          <p:nvPr/>
-        </p:nvSpPr>
-        <p:spPr>
-          <a:xfrm>
-            <a:off x="4663440" y="2011680"/>
-            <a:ext cx="2864815" cy="3749039"/>
+        </p:nvPicPr>
+        <p:blipFill>
+          <a:blip r:embed="rId2"/>
+          <a:stretch>
+            <a:fillRect/>
+          </a:stretch>
+        </p:blipFill>
+        <p:spPr>
+          <a:xfrm>
+            <a:off x="7955279" y="1645920"/>
+            <a:ext cx="2571750" cy="4572000"/>
           </a:xfrm>
           <a:prstGeom prst="rect">
             <a:avLst/>
           </a:prstGeom>
-          <a:noFill/>
-        </p:spPr>
-        <p:txBody>
-          <a:bodyPr wrap="square">
-            <a:spAutoFit/>
-          </a:bodyPr>
-          <a:lstStyle/>
-          <a:p>
-            <a:pPr>
-              <a:spcAft>
-                <a:spcPts val="1600"/>
-              </a:spcAft>
-              <a:defRPr sz="1700" b="1">
-                <a:solidFill>
-                  <a:srgbClr val="FF5722"/>
-                </a:solidFill>
-              </a:defRPr>
-            </a:pPr>
-            <a:r>
-              <a:t>2. SELECCIÓN Y PRONÓSTICO</a:t>
-            </a:r>
-          </a:p>
-          <a:p>
-            <a:pPr>
-              <a:defRPr sz="1400">
-                <a:solidFill>
-                  <a:srgbClr val="FFFFFF"/>
-                </a:solidFill>
-              </a:defRPr>
-            </a:pPr>
-            <a:r>
-              <a:t>🏈 Selecciona a su mesero, introduce sus marcadores o casillas y confirma en un solo toque antes del inicio del juego.</a:t>
-            </a:r>
-          </a:p>
-        </p:txBody>
-      </p:sp>
-      <p:sp>
-        <p:nvSpPr>
-          <p:cNvPr id="7" name="Rounded Rectangle 6"/>
-          <p:cNvSpPr/>
-          <p:nvPr/>
-        </p:nvSpPr>
-        <p:spPr>
-          <a:xfrm>
-            <a:off x="8046720" y="1737360"/>
-            <a:ext cx="3413455" cy="4297680"/>
-          </a:xfrm>
-          <a:prstGeom prst="roundRect">
-            <a:avLst/>
-          </a:prstGeom>
-          <a:solidFill>
-            <a:srgbClr val="161C2A"/>
-          </a:solidFill>
-          <a:ln w="19050">
-            <a:solidFill>
-              <a:srgbClr val="2D374B"/>
-            </a:solidFill>
-          </a:ln>
-        </p:spPr>
-        <p:style>
-          <a:lnRef idx="1">
-            <a:schemeClr val="accent1"/>
-          </a:lnRef>
-          <a:fillRef idx="3">
-            <a:schemeClr val="accent1"/>
-          </a:fillRef>
-          <a:effectRef idx="2">
-            <a:schemeClr val="accent1"/>
-          </a:effectRef>
-          <a:fontRef idx="minor">
-            <a:schemeClr val="lt1"/>
-          </a:fontRef>
-        </p:style>
-        <p:txBody>
-          <a:bodyPr rtlCol="0" anchor="ctr"/>
-          <a:lstStyle/>
-          <a:p>
-            <a:pPr algn="ctr"/>
-          </a:p>
-        </p:txBody>
-      </p:sp>
-      <p:sp>
-        <p:nvSpPr>
-          <p:cNvPr id="8" name="TextBox 7"/>
-          <p:cNvSpPr txBox="1"/>
-          <p:nvPr/>
-        </p:nvSpPr>
-        <p:spPr>
-          <a:xfrm>
-            <a:off x="8321040" y="2011680"/>
-            <a:ext cx="2864815" cy="3749039"/>
-          </a:xfrm>
-          <a:prstGeom prst="rect">
-            <a:avLst/>
-          </a:prstGeom>
-          <a:noFill/>
-        </p:spPr>
-        <p:txBody>
-          <a:bodyPr wrap="square">
-            <a:spAutoFit/>
-          </a:bodyPr>
-          <a:lstStyle/>
-          <a:p>
-            <a:pPr>
-              <a:spcAft>
-                <a:spcPts val="1600"/>
-              </a:spcAft>
-              <a:defRPr sz="1700" b="1">
-                <a:solidFill>
-                  <a:srgbClr val="00E676"/>
-                </a:solidFill>
-              </a:defRPr>
-            </a:pPr>
-            <a:r>
-              <a:t>3. VIVE LA EMOCIÓN Y GANA</a:t>
-            </a:r>
-          </a:p>
-          <a:p>
-            <a:pPr>
-              <a:defRPr sz="1400">
-                <a:solidFill>
-                  <a:srgbClr val="FFFFFF"/>
-                </a:solidFill>
-              </a:defRPr>
-            </a:pPr>
-            <a:r>
-              <a:t>🏆 Conforme avanza el partido en las pantallas del bar, ve subir su posición en la tabla en vivo. Al ganar, muestra su cupón digital al mesero o en barra.</a:t>
-            </a:r>
-          </a:p>
-        </p:txBody>
-      </p:sp>
+        </p:spPr>
+      </p:pic>
     </p:spTree>
   </p:cSld>
   <p:clrMapOvr>
@@ -6834,7 +6198,7 @@
         </p:nvSpPr>
         <p:spPr>
           <a:xfrm>
-            <a:off x="731520" y="457200"/>
+            <a:off x="731520" y="411480"/>
             <a:ext cx="10698480" cy="1005840"/>
           </a:xfrm>
           <a:prstGeom prst="rect">
@@ -6850,28 +6214,28 @@
           <a:p>
             <a:pPr>
               <a:spcAft>
-                <a:spcPts val="400"/>
-              </a:spcAft>
-              <a:defRPr sz="1100" b="1">
+                <a:spcPts val="300"/>
+              </a:spcAft>
+              <a:defRPr sz="1050" b="1">
                 <a:solidFill>
                   <a:srgbClr val="FFB612"/>
                 </a:solidFill>
               </a:defRPr>
             </a:pPr>
             <a:r>
-              <a:t>DRINKS &amp; WINS • PLATAFORMA DE GAMIFICACIÓN</a:t>
-            </a:r>
-          </a:p>
-          <a:p>
-            <a:pPr>
-              <a:defRPr sz="2600" b="1">
+              <a:t>DETALLE PASO A PASO POR JUEGO</a:t>
+            </a:r>
+          </a:p>
+          <a:p>
+            <a:pPr>
+              <a:defRPr sz="2400" b="1">
                 <a:solidFill>
                   <a:srgbClr val="FFFFFF"/>
                 </a:solidFill>
               </a:defRPr>
             </a:pPr>
             <a:r>
-              <a:t>Panel de Administración: Control Total en Minutos</a:t>
+              <a:t>Juegos 4 y 5: Trivia en Pantallas y Survivor NFL</a:t>
             </a:r>
           </a:p>
         </p:txBody>
@@ -6884,18 +6248,18 @@
         </p:nvSpPr>
         <p:spPr>
           <a:xfrm>
-            <a:off x="731520" y="1737360"/>
-            <a:ext cx="6858000" cy="4480560"/>
+            <a:off x="731520" y="1645920"/>
+            <a:ext cx="5212080" cy="4572000"/>
           </a:xfrm>
           <a:prstGeom prst="roundRect">
             <a:avLst/>
           </a:prstGeom>
           <a:solidFill>
-            <a:srgbClr val="161C2A"/>
+            <a:srgbClr val="141A26"/>
           </a:solidFill>
           <a:ln w="19050">
             <a:solidFill>
-              <a:srgbClr val="2D374B"/>
+              <a:srgbClr val="283246"/>
             </a:solidFill>
           </a:ln>
         </p:spPr>
@@ -6929,8 +6293,8 @@
         </p:nvSpPr>
         <p:spPr>
           <a:xfrm>
-            <a:off x="1097280" y="2011680"/>
-            <a:ext cx="6126480" cy="3931920"/>
+            <a:off x="1005840" y="1828800"/>
+            <a:ext cx="4663440" cy="4114800"/>
           </a:xfrm>
           <a:prstGeom prst="rect">
             <a:avLst/>
@@ -6945,149 +6309,283 @@
           <a:p>
             <a:pPr>
               <a:spcAft>
-                <a:spcPts val="200"/>
-              </a:spcAft>
-              <a:defRPr sz="1450" b="1">
+                <a:spcPts val="800"/>
+              </a:spcAft>
+              <a:defRPr sz="1650" b="1">
                 <a:solidFill>
                   <a:srgbClr val="FFB612"/>
                 </a:solidFill>
               </a:defRPr>
             </a:pPr>
             <a:r>
-              <a:t>⚡ Creación de Quinielas en 60 Segundos</a:t>
-            </a:r>
-          </a:p>
-          <a:p>
-            <a:pPr>
-              <a:spcAft>
-                <a:spcPts val="1000"/>
-              </a:spcAft>
-              <a:defRPr sz="1150">
+              <a:t>🧠 Trivia en Vivo en Pantallas de TV</a:t>
+            </a:r>
+          </a:p>
+          <a:p>
+            <a:pPr>
+              <a:spcAft>
+                <a:spcPts val="100"/>
+              </a:spcAft>
+              <a:defRPr sz="1300" b="1">
+                <a:solidFill>
+                  <a:srgbClr val="FF5722"/>
+                </a:solidFill>
+              </a:defRPr>
+            </a:pPr>
+            <a:r>
+              <a:t>🛠️ Creación con IA</a:t>
+            </a:r>
+          </a:p>
+          <a:p>
+            <a:pPr>
+              <a:spcAft>
+                <a:spcPts val="600"/>
+              </a:spcAft>
+              <a:defRPr sz="1100">
                 <a:solidFill>
                   <a:srgbClr val="FFFFFF"/>
                 </a:solidFill>
               </a:defRPr>
             </a:pPr>
             <a:r>
-              <a:t>El gerente solo elige el deporte (NFL, Liga MX, Premier, Champions) y la jornada. El sistema importa automáticamente partidos, horarios y escudos oficiales de ESPN.</a:t>
-            </a:r>
-          </a:p>
-          <a:p>
-            <a:pPr>
-              <a:spcAft>
-                <a:spcPts val="200"/>
-              </a:spcAft>
-              <a:defRPr sz="1450" b="1">
-                <a:solidFill>
-                  <a:srgbClr val="FFB612"/>
-                </a:solidFill>
-              </a:defRPr>
-            </a:pPr>
-            <a:r>
-              <a:t>👥 Control y Aprobación de Jugadores</a:t>
-            </a:r>
-          </a:p>
-          <a:p>
-            <a:pPr>
-              <a:spcAft>
-                <a:spcPts val="1000"/>
-              </a:spcAft>
-              <a:defRPr sz="1150">
+              <a:t>El gerente genera 10 preguntas deportivas temáticas con IA en 10 segundos.</a:t>
+            </a:r>
+          </a:p>
+          <a:p>
+            <a:pPr>
+              <a:spcAft>
+                <a:spcPts val="100"/>
+              </a:spcAft>
+              <a:defRPr sz="1300" b="1">
+                <a:solidFill>
+                  <a:srgbClr val="FF5722"/>
+                </a:solidFill>
+              </a:defRPr>
+            </a:pPr>
+            <a:r>
+              <a:t>📱 Juego en Vivo</a:t>
+            </a:r>
+          </a:p>
+          <a:p>
+            <a:pPr>
+              <a:spcAft>
+                <a:spcPts val="600"/>
+              </a:spcAft>
+              <a:defRPr sz="1100">
                 <a:solidFill>
                   <a:srgbClr val="FFFFFF"/>
                 </a:solidFill>
               </a:defRPr>
             </a:pPr>
             <a:r>
-              <a:t>Visualiza en tiempo real quién se unió a cada juego, qué mesero lo atendió y aprueba o gestiona participantes desde cualquier celular o tablet.</a:t>
-            </a:r>
-          </a:p>
-          <a:p>
-            <a:pPr>
-              <a:spcAft>
-                <a:spcPts val="200"/>
-              </a:spcAft>
-              <a:defRPr sz="1450" b="1">
-                <a:solidFill>
-                  <a:srgbClr val="FFB612"/>
-                </a:solidFill>
-              </a:defRPr>
-            </a:pPr>
-            <a:r>
-              <a:t>🎁 Configuración de Premios y Vouchers</a:t>
-            </a:r>
-          </a:p>
-          <a:p>
-            <a:pPr>
-              <a:spcAft>
-                <a:spcPts val="1000"/>
-              </a:spcAft>
-              <a:defRPr sz="1150">
+              <a:t>En el medio tiempo, la TV del bar muestra la pregunta con cuenta regresiva. Los clientes responden contrarreloj desde su smartphone.</a:t>
+            </a:r>
+          </a:p>
+          <a:p>
+            <a:pPr>
+              <a:spcAft>
+                <a:spcPts val="100"/>
+              </a:spcAft>
+              <a:defRPr sz="1300" b="1">
+                <a:solidFill>
+                  <a:srgbClr val="FF5722"/>
+                </a:solidFill>
+              </a:defRPr>
+            </a:pPr>
+            <a:r>
+              <a:t>🏆 Ganador</a:t>
+            </a:r>
+          </a:p>
+          <a:p>
+            <a:pPr>
+              <a:spcAft>
+                <a:spcPts val="600"/>
+              </a:spcAft>
+              <a:defRPr sz="1100">
                 <a:solidFill>
                   <a:srgbClr val="FFFFFF"/>
                 </a:solidFill>
               </a:defRPr>
             </a:pPr>
             <a:r>
-              <a:t>Define qué premio se entregará (ej. 1 Orden de Boneless, Jarra de Cerveza o % de Descuento en la siguiente cuenta).</a:t>
-            </a:r>
-          </a:p>
-          <a:p>
-            <a:pPr>
-              <a:spcAft>
-                <a:spcPts val="200"/>
-              </a:spcAft>
-              <a:defRPr sz="1450" b="1">
-                <a:solidFill>
-                  <a:srgbClr val="FFB612"/>
-                </a:solidFill>
-              </a:defRPr>
-            </a:pPr>
-            <a:r>
-              <a:t>🛡️ Seguridad y Control de Fraude</a:t>
-            </a:r>
-          </a:p>
-          <a:p>
-            <a:pPr>
-              <a:spcAft>
-                <a:spcPts val="1000"/>
-              </a:spcAft>
-              <a:defRPr sz="1150">
-                <a:solidFill>
-                  <a:srgbClr val="FFFFFF"/>
-                </a:solidFill>
-              </a:defRPr>
-            </a:pPr>
-            <a:r>
-              <a:t>Los pronósticos se bloquean automáticamente en cuanto inicia el primer partido. Nadie puede editar marcadores una vez arrancado el juego.</a:t>
-            </a:r>
-          </a:p>
-        </p:txBody>
-      </p:sp>
-      <p:pic>
-        <p:nvPicPr>
-          <p:cNvPr id="5" name="Picture 4" descr="screenshot_admin_player.png"/>
-          <p:cNvPicPr>
-            <a:picLocks noChangeAspect="1"/>
-          </p:cNvPicPr>
+              <a:t>La pantalla de TV muestra el podio del bar en tiempo real con fanfarrias y aplausos en el restaurante.</a:t>
+            </a:r>
+          </a:p>
+        </p:txBody>
+      </p:sp>
+      <p:sp>
+        <p:nvSpPr>
+          <p:cNvPr id="5" name="Rounded Rectangle 4"/>
+          <p:cNvSpPr/>
           <p:nvPr/>
-        </p:nvPicPr>
-        <p:blipFill>
-          <a:blip r:embed="rId2"/>
-          <a:stretch>
-            <a:fillRect/>
-          </a:stretch>
-        </p:blipFill>
-        <p:spPr>
-          <a:xfrm>
-            <a:off x="7863840" y="1920240"/>
-            <a:ext cx="3566160" cy="1308612"/>
+        </p:nvSpPr>
+        <p:spPr>
+          <a:xfrm>
+            <a:off x="6217920" y="1645920"/>
+            <a:ext cx="5212080" cy="4572000"/>
+          </a:xfrm>
+          <a:prstGeom prst="roundRect">
+            <a:avLst/>
+          </a:prstGeom>
+          <a:solidFill>
+            <a:srgbClr val="141A26"/>
+          </a:solidFill>
+          <a:ln w="19050">
+            <a:solidFill>
+              <a:srgbClr val="283246"/>
+            </a:solidFill>
+          </a:ln>
+        </p:spPr>
+        <p:style>
+          <a:lnRef idx="1">
+            <a:schemeClr val="accent1"/>
+          </a:lnRef>
+          <a:fillRef idx="3">
+            <a:schemeClr val="accent1"/>
+          </a:fillRef>
+          <a:effectRef idx="2">
+            <a:schemeClr val="accent1"/>
+          </a:effectRef>
+          <a:fontRef idx="minor">
+            <a:schemeClr val="lt1"/>
+          </a:fontRef>
+        </p:style>
+        <p:txBody>
+          <a:bodyPr rtlCol="0" anchor="ctr"/>
+          <a:lstStyle/>
+          <a:p>
+            <a:pPr algn="ctr"/>
+          </a:p>
+        </p:txBody>
+      </p:sp>
+      <p:sp>
+        <p:nvSpPr>
+          <p:cNvPr id="6" name="TextBox 5"/>
+          <p:cNvSpPr txBox="1"/>
+          <p:nvPr/>
+        </p:nvSpPr>
+        <p:spPr>
+          <a:xfrm>
+            <a:off x="6492240" y="1828800"/>
+            <a:ext cx="4663440" cy="4114800"/>
           </a:xfrm>
           <a:prstGeom prst="rect">
             <a:avLst/>
           </a:prstGeom>
-        </p:spPr>
-      </p:pic>
+          <a:noFill/>
+        </p:spPr>
+        <p:txBody>
+          <a:bodyPr wrap="square">
+            <a:spAutoFit/>
+          </a:bodyPr>
+          <a:lstStyle/>
+          <a:p>
+            <a:pPr>
+              <a:spcAft>
+                <a:spcPts val="800"/>
+              </a:spcAft>
+              <a:defRPr sz="1650" b="1">
+                <a:solidFill>
+                  <a:srgbClr val="00E676"/>
+                </a:solidFill>
+              </a:defRPr>
+            </a:pPr>
+            <a:r>
+              <a:t>🛡️ Survivor NFL: Fidelización Semanal</a:t>
+            </a:r>
+          </a:p>
+          <a:p>
+            <a:pPr>
+              <a:spcAft>
+                <a:spcPts val="100"/>
+              </a:spcAft>
+              <a:defRPr sz="1300" b="1">
+                <a:solidFill>
+                  <a:srgbClr val="FFD100"/>
+                </a:solidFill>
+              </a:defRPr>
+            </a:pPr>
+            <a:r>
+              <a:t>🛠️ Creación Única</a:t>
+            </a:r>
+          </a:p>
+          <a:p>
+            <a:pPr>
+              <a:spcAft>
+                <a:spcPts val="600"/>
+              </a:spcAft>
+              <a:defRPr sz="1100">
+                <a:solidFill>
+                  <a:srgbClr val="FFFFFF"/>
+                </a:solidFill>
+              </a:defRPr>
+            </a:pPr>
+            <a:r>
+              <a:t>Se abre al inicio de la temporada regular de NFL.</a:t>
+            </a:r>
+          </a:p>
+          <a:p>
+            <a:pPr>
+              <a:spcAft>
+                <a:spcPts val="100"/>
+              </a:spcAft>
+              <a:defRPr sz="1300" b="1">
+                <a:solidFill>
+                  <a:srgbClr val="FFD100"/>
+                </a:solidFill>
+              </a:defRPr>
+            </a:pPr>
+            <a:r>
+              <a:t>📱 Elección Semanal</a:t>
+            </a:r>
+          </a:p>
+          <a:p>
+            <a:pPr>
+              <a:spcAft>
+                <a:spcPts val="600"/>
+              </a:spcAft>
+              <a:defRPr sz="1100">
+                <a:solidFill>
+                  <a:srgbClr val="FFFFFF"/>
+                </a:solidFill>
+              </a:defRPr>
+            </a:pPr>
+            <a:r>
+              <a:t>Cada comensal elige 1 equipo ganador por semana sin repetir. Si su equipo gana, sobrevive; si pierde, queda eliminado.</a:t>
+            </a:r>
+          </a:p>
+          <a:p>
+            <a:pPr>
+              <a:spcAft>
+                <a:spcPts val="100"/>
+              </a:spcAft>
+              <a:defRPr sz="1300" b="1">
+                <a:solidFill>
+                  <a:srgbClr val="FFD100"/>
+                </a:solidFill>
+              </a:defRPr>
+            </a:pPr>
+            <a:r>
+              <a:t>🏆 Retención Frecuente</a:t>
+            </a:r>
+          </a:p>
+          <a:p>
+            <a:pPr>
+              <a:spcAft>
+                <a:spcPts val="600"/>
+              </a:spcAft>
+              <a:defRPr sz="1100">
+                <a:solidFill>
+                  <a:srgbClr val="FFFFFF"/>
+                </a:solidFill>
+              </a:defRPr>
+            </a:pPr>
+            <a:r>
+              <a:t>Obliga al cliente a regresar cada semana a la sucursal para defender su boleto de sobreviviente y competir por el premio mayor de la temporada.</a:t>
+            </a:r>
+          </a:p>
+        </p:txBody>
+      </p:sp>
     </p:spTree>
   </p:cSld>
   <p:clrMapOvr>
@@ -7122,7 +6620,7 @@
         </p:nvSpPr>
         <p:spPr>
           <a:xfrm>
-            <a:off x="731520" y="457200"/>
+            <a:off x="731520" y="411480"/>
             <a:ext cx="10698480" cy="1005840"/>
           </a:xfrm>
           <a:prstGeom prst="rect">
@@ -7138,21 +6636,21 @@
           <a:p>
             <a:pPr>
               <a:spcAft>
-                <a:spcPts val="400"/>
-              </a:spcAft>
-              <a:defRPr sz="1100" b="1">
+                <a:spcPts val="300"/>
+              </a:spcAft>
+              <a:defRPr sz="1050" b="1">
                 <a:solidFill>
                   <a:srgbClr val="FFB612"/>
                 </a:solidFill>
               </a:defRPr>
             </a:pPr>
             <a:r>
-              <a:t>DRINKS &amp; WINS • PLATAFORMA DE GAMIFICACIÓN</a:t>
-            </a:r>
-          </a:p>
-          <a:p>
-            <a:pPr>
-              <a:defRPr sz="2600" b="1">
+              <a:t>RENTABILIDAD Y VENTAS</a:t>
+            </a:r>
+          </a:p>
+          <a:p>
+            <a:pPr>
+              <a:defRPr sz="2400" b="1">
                 <a:solidFill>
                   <a:srgbClr val="FFFFFF"/>
                 </a:solidFill>
@@ -7172,18 +6670,18 @@
         </p:nvSpPr>
         <p:spPr>
           <a:xfrm>
-            <a:off x="731520" y="1737360"/>
-            <a:ext cx="3413455" cy="4297680"/>
+            <a:off x="731520" y="1645920"/>
+            <a:ext cx="3413455" cy="4572000"/>
           </a:xfrm>
           <a:prstGeom prst="roundRect">
             <a:avLst/>
           </a:prstGeom>
           <a:solidFill>
-            <a:srgbClr val="161C2A"/>
+            <a:srgbClr val="141A26"/>
           </a:solidFill>
           <a:ln w="19050">
             <a:solidFill>
-              <a:srgbClr val="2D374B"/>
+              <a:srgbClr val="283246"/>
             </a:solidFill>
           </a:ln>
         </p:spPr>
@@ -7217,8 +6715,8 @@
         </p:nvSpPr>
         <p:spPr>
           <a:xfrm>
-            <a:off x="1005840" y="2011680"/>
-            <a:ext cx="2864815" cy="3749039"/>
+            <a:off x="1005840" y="1920240"/>
+            <a:ext cx="2864815" cy="4023360"/>
           </a:xfrm>
           <a:prstGeom prst="rect">
             <a:avLst/>
@@ -7233,28 +6731,28 @@
           <a:p>
             <a:pPr>
               <a:spcAft>
-                <a:spcPts val="1600"/>
-              </a:spcAft>
-              <a:defRPr sz="1700" b="1">
+                <a:spcPts val="1400"/>
+              </a:spcAft>
+              <a:defRPr sz="1650" b="1">
                 <a:solidFill>
                   <a:srgbClr val="FFB612"/>
                 </a:solidFill>
               </a:defRPr>
             </a:pPr>
             <a:r>
-              <a:t>🍔 Premios de Alto Valor Percibido</a:t>
-            </a:r>
-          </a:p>
-          <a:p>
-            <a:pPr>
-              <a:defRPr sz="1400">
+              <a:t>🍔 Alto Valor Percibido vs Bajo Costo</a:t>
+            </a:r>
+          </a:p>
+          <a:p>
+            <a:pPr>
+              <a:defRPr sz="1300">
                 <a:solidFill>
                   <a:srgbClr val="FFFFFF"/>
                 </a:solidFill>
               </a:defRPr>
             </a:pPr>
             <a:r>
-              <a:t>Entregar una orden de alitas o una cerveza tiene un costo operativo bajo para la cocina pero un valor percibido de $150-$250 MXN para el cliente. Es el incentivo perfecto sin erosionar margen.</a:t>
+              <a:t>Una orden de alitas o una cerveza tiene un costo de materia prima muy manejable para la cocina ($30-$50 MXN), pero en la mente del cliente representa un premio valioso de $160 a $240 MXN.</a:t>
             </a:r>
           </a:p>
         </p:txBody>
@@ -7267,18 +6765,18 @@
         </p:nvSpPr>
         <p:spPr>
           <a:xfrm>
-            <a:off x="4389120" y="1737360"/>
-            <a:ext cx="3413455" cy="4297680"/>
+            <a:off x="4389120" y="1645920"/>
+            <a:ext cx="3413455" cy="4572000"/>
           </a:xfrm>
           <a:prstGeom prst="roundRect">
             <a:avLst/>
           </a:prstGeom>
           <a:solidFill>
-            <a:srgbClr val="161C2A"/>
+            <a:srgbClr val="141A26"/>
           </a:solidFill>
           <a:ln w="19050">
             <a:solidFill>
-              <a:srgbClr val="2D374B"/>
+              <a:srgbClr val="283246"/>
             </a:solidFill>
           </a:ln>
         </p:spPr>
@@ -7312,8 +6810,8 @@
         </p:nvSpPr>
         <p:spPr>
           <a:xfrm>
-            <a:off x="4663440" y="2011680"/>
-            <a:ext cx="2864815" cy="3749039"/>
+            <a:off x="4663440" y="1920240"/>
+            <a:ext cx="2864815" cy="4023360"/>
           </a:xfrm>
           <a:prstGeom prst="rect">
             <a:avLst/>
@@ -7328,28 +6826,28 @@
           <a:p>
             <a:pPr>
               <a:spcAft>
-                <a:spcPts val="1600"/>
-              </a:spcAft>
-              <a:defRPr sz="1700" b="1">
+                <a:spcPts val="1400"/>
+              </a:spcAft>
+              <a:defRPr sz="1650" b="1">
                 <a:solidFill>
                   <a:srgbClr val="00E676"/>
                 </a:solidFill>
               </a:defRPr>
             </a:pPr>
             <a:r>
-              <a:t>🔄 Recompensa Condicionada a Consumo</a:t>
-            </a:r>
-          </a:p>
-          <a:p>
-            <a:pPr>
-              <a:defRPr sz="1400">
+              <a:t>🍻 Festejo y Rondas Adicionales</a:t>
+            </a:r>
+          </a:p>
+          <a:p>
+            <a:pPr>
+              <a:defRPr sz="1300">
                 <a:solidFill>
                   <a:srgbClr val="FFFFFF"/>
                 </a:solidFill>
               </a:defRPr>
             </a:pPr>
             <a:r>
-              <a:t>Los premios se canjean en la mesa mientras el grupo sigue consumiendo, o como cupón para su siguiente visita. El ganador celebra y suele pedir una ronda extra para brindar con sus amigos.</a:t>
+              <a:t>Nadie gana y se va. El comensal que resulta campeón celebra con su mesa, y el grupo pide cervezas y platillos adicionales para acompañar el premio. El ticket final siempre supera con creces el costo del incentivo.</a:t>
             </a:r>
           </a:p>
         </p:txBody>
@@ -7362,18 +6860,18 @@
         </p:nvSpPr>
         <p:spPr>
           <a:xfrm>
-            <a:off x="8046720" y="1737360"/>
-            <a:ext cx="3413455" cy="4297680"/>
+            <a:off x="8046720" y="1645920"/>
+            <a:ext cx="3413455" cy="4572000"/>
           </a:xfrm>
           <a:prstGeom prst="roundRect">
             <a:avLst/>
           </a:prstGeom>
           <a:solidFill>
-            <a:srgbClr val="161C2A"/>
+            <a:srgbClr val="141A26"/>
           </a:solidFill>
           <a:ln w="19050">
             <a:solidFill>
-              <a:srgbClr val="2D374B"/>
+              <a:srgbClr val="283246"/>
             </a:solidFill>
           </a:ln>
         </p:spPr>
@@ -7407,8 +6905,8 @@
         </p:nvSpPr>
         <p:spPr>
           <a:xfrm>
-            <a:off x="8321040" y="2011680"/>
-            <a:ext cx="2864815" cy="3749039"/>
+            <a:off x="8321040" y="1920240"/>
+            <a:ext cx="2864815" cy="4023360"/>
           </a:xfrm>
           <a:prstGeom prst="rect">
             <a:avLst/>
@@ -7423,28 +6921,28 @@
           <a:p>
             <a:pPr>
               <a:spcAft>
-                <a:spcPts val="1600"/>
-              </a:spcAft>
-              <a:defRPr sz="1700" b="1">
+                <a:spcPts val="1400"/>
+              </a:spcAft>
+              <a:defRPr sz="1650" b="1">
                 <a:solidFill>
                   <a:srgbClr val="FF5722"/>
                 </a:solidFill>
               </a:defRPr>
             </a:pPr>
             <a:r>
-              <a:t>📊 Captura de Clientes Frecuentes</a:t>
-            </a:r>
-          </a:p>
-          <a:p>
-            <a:pPr>
-              <a:defRPr sz="1400">
+              <a:t>🔄 Retorno Asegurado en Días Bajas</a:t>
+            </a:r>
+          </a:p>
+          <a:p>
+            <a:pPr>
+              <a:defRPr sz="1300">
                 <a:solidFill>
                   <a:srgbClr val="FFFFFF"/>
                 </a:solidFill>
               </a:defRPr>
             </a:pPr>
             <a:r>
-              <a:t>El restaurante construye una base de datos propia de fanáticos recurrentes para enviar avisos de partidos importantes, promociones y eventos especiales de NFL y liguilla.</a:t>
+              <a:t>Los cupones de 2º y 3º lugar se pueden programar para canjearse de lunes a jueves en su siguiente visita, generando tráfico en días y horarios con menor ocupación.</a:t>
             </a:r>
           </a:p>
         </p:txBody>

--- a/Drinks_and_Wins_Presentacion_Ejecutiva.pptx
+++ b/Drinks_and_Wins_Presentacion_Ejecutiva.pptx
@@ -17,6 +17,8 @@
     <p:sldId id="265" r:id="rId16"/>
     <p:sldId id="266" r:id="rId17"/>
     <p:sldId id="267" r:id="rId18"/>
+    <p:sldId id="268" r:id="rId19"/>
+    <p:sldId id="269" r:id="rId20"/>
   </p:sldIdLst>
   <p:sldSz cx="12191695" cy="6858000" type="screen4x3"/>
   <p:notesSz cx="6858000" cy="9144000"/>
@@ -3168,7 +3170,7 @@
         </p:blipFill>
         <p:spPr>
           <a:xfrm>
-            <a:off x="1188720" y="1280160"/>
+            <a:off x="1188720" y="1188720"/>
             <a:ext cx="850821" cy="1097280"/>
           </a:xfrm>
           <a:prstGeom prst="rect">
@@ -3184,8 +3186,8 @@
         </p:nvSpPr>
         <p:spPr>
           <a:xfrm>
-            <a:off x="1188720" y="2560320"/>
-            <a:ext cx="9601200" cy="3108960"/>
+            <a:off x="1188720" y="2468880"/>
+            <a:ext cx="9601200" cy="3291840"/>
           </a:xfrm>
           <a:prstGeom prst="rect">
             <a:avLst/>
@@ -3209,7 +3211,7 @@
               </a:defRPr>
             </a:pPr>
             <a:r>
-              <a:t>EXPERIENCIA DIGITAL EN MESA • VALIDADA EN BARRA</a:t>
+              <a:t>PROYECTO DE GAMIFICACIÓN EN MESA • DE LA BARRA A LA OPERACIÓN</a:t>
             </a:r>
           </a:p>
           <a:p>
@@ -3230,7 +3232,7 @@
           <a:p>
             <a:pPr>
               <a:spcAft>
-                <a:spcPts val="2000"/>
+                <a:spcPts val="1800"/>
               </a:spcAft>
               <a:defRPr sz="1900">
                 <a:solidFill>
@@ -3244,14 +3246,29 @@
           </a:p>
           <a:p>
             <a:pPr>
-              <a:defRPr sz="1300">
+              <a:spcAft>
+                <a:spcPts val="400"/>
+              </a:spcAft>
+              <a:defRPr sz="1350">
+                <a:solidFill>
+                  <a:srgbClr val="FFFFFF"/>
+                </a:solidFill>
+              </a:defRPr>
+            </a:pPr>
+            <a:r>
+              <a:t>Presentado por Beto Muñoz • Para el Dueño de la Marca, Dirección General y Gerencia</a:t>
+            </a:r>
+          </a:p>
+          <a:p>
+            <a:pPr>
+              <a:defRPr sz="1200" i="1">
                 <a:solidFill>
                   <a:srgbClr val="94A3B8"/>
                 </a:solidFill>
               </a:defRPr>
             </a:pPr>
             <a:r>
-              <a:t>De la Barra de Álamos a la Escala de Marca • Presentación para Dirección y Gerencia General</a:t>
+              <a:t>«Nacido del cariño al lugar de trabajo, a los clientes y a las propinas que sacan adelante a mi familia»</a:t>
             </a:r>
           </a:p>
         </p:txBody>
@@ -3290,7 +3307,7 @@
         </p:nvSpPr>
         <p:spPr>
           <a:xfrm>
-            <a:off x="731520" y="411480"/>
+            <a:off x="731520" y="365760"/>
             <a:ext cx="10698480" cy="1005840"/>
           </a:xfrm>
           <a:prstGeom prst="rect">
@@ -3306,28 +3323,28 @@
           <a:p>
             <a:pPr>
               <a:spcAft>
-                <a:spcPts val="300"/>
-              </a:spcAft>
-              <a:defRPr sz="1050" b="1">
+                <a:spcPts val="200"/>
+              </a:spcAft>
+              <a:defRPr sz="1000" b="1">
                 <a:solidFill>
                   <a:srgbClr val="FFB612"/>
                 </a:solidFill>
               </a:defRPr>
             </a:pPr>
             <a:r>
-              <a:t>EQUIPO DE SERVICIO</a:t>
-            </a:r>
-          </a:p>
-          <a:p>
-            <a:pPr>
-              <a:defRPr sz="2400" b="1">
+              <a:t>RENTABILIDAD Y VENTAS</a:t>
+            </a:r>
+          </a:p>
+          <a:p>
+            <a:pPr>
+              <a:defRPr sz="2300" b="1">
                 <a:solidFill>
                   <a:srgbClr val="FFFFFF"/>
                 </a:solidFill>
               </a:defRPr>
             </a:pPr>
             <a:r>
-              <a:t>Gamificación del Personal: Meseros como Embajadores</a:t>
+              <a:t>Estrategia de Premios: Diseñada para Proteger el Margen</a:t>
             </a:r>
           </a:p>
         </p:txBody>
@@ -3341,7 +3358,7 @@
         <p:spPr>
           <a:xfrm>
             <a:off x="731520" y="1645920"/>
-            <a:ext cx="6858000" cy="4572000"/>
+            <a:ext cx="3413455" cy="4663440"/>
           </a:xfrm>
           <a:prstGeom prst="roundRect">
             <a:avLst/>
@@ -3385,8 +3402,8 @@
         </p:nvSpPr>
         <p:spPr>
           <a:xfrm>
-            <a:off x="1005840" y="1828800"/>
-            <a:ext cx="6309360" cy="4114800"/>
+            <a:off x="1005840" y="1920240"/>
+            <a:ext cx="2864815" cy="4114800"/>
           </a:xfrm>
           <a:prstGeom prst="rect">
             <a:avLst/>
@@ -3401,149 +3418,222 @@
           <a:p>
             <a:pPr>
               <a:spcAft>
-                <a:spcPts val="200"/>
-              </a:spcAft>
-              <a:defRPr sz="1400" b="1">
+                <a:spcPts val="1400"/>
+              </a:spcAft>
+              <a:defRPr sz="1600" b="1">
                 <a:solidFill>
                   <a:srgbClr val="FFB612"/>
                 </a:solidFill>
               </a:defRPr>
             </a:pPr>
             <a:r>
-              <a:t>🙋 Atribución Clara en Cada Mesa</a:t>
-            </a:r>
-          </a:p>
-          <a:p>
-            <a:pPr>
-              <a:spcAft>
-                <a:spcPts val="1000"/>
-              </a:spcAft>
-              <a:defRPr sz="1150">
+              <a:t>🍔 Alto Valor Percibido vs Bajo Costo</a:t>
+            </a:r>
+          </a:p>
+          <a:p>
+            <a:pPr>
+              <a:defRPr sz="1300">
                 <a:solidFill>
                   <a:srgbClr val="FFFFFF"/>
                 </a:solidFill>
               </a:defRPr>
             </a:pPr>
             <a:r>
-              <a:t>Al registrar sus pronósticos, el cliente selecciona el nombre de su mesero en la lista. La gerencia sabe con métricas exactas qué meseros están invitando activamente y cuáles no.</a:t>
-            </a:r>
-          </a:p>
-          <a:p>
-            <a:pPr>
-              <a:spcAft>
-                <a:spcPts val="200"/>
-              </a:spcAft>
-              <a:defRPr sz="1400" b="1">
-                <a:solidFill>
-                  <a:srgbClr val="FFB612"/>
-                </a:solidFill>
-              </a:defRPr>
-            </a:pPr>
-            <a:r>
-              <a:t>💰 Incentivo Económico Directo (Más Propina)</a:t>
-            </a:r>
-          </a:p>
-          <a:p>
-            <a:pPr>
-              <a:spcAft>
-                <a:spcPts val="1000"/>
-              </a:spcAft>
-              <a:defRPr sz="1150">
-                <a:solidFill>
-                  <a:srgbClr val="FFFFFF"/>
-                </a:solidFill>
-              </a:defRPr>
-            </a:pPr>
-            <a:r>
-              <a:t>Los meseros comprenden la fórmula de inmediato: Si la mesa se queda 3 horas compitiendo, consumirá más rondas de cerveza, hamburguesas y alitas, lo que elevará el total de la cuenta y su propina.</a:t>
-            </a:r>
-          </a:p>
-          <a:p>
-            <a:pPr>
-              <a:spcAft>
-                <a:spcPts val="200"/>
-              </a:spcAft>
-              <a:defRPr sz="1400" b="1">
-                <a:solidFill>
-                  <a:srgbClr val="FFB612"/>
-                </a:solidFill>
-              </a:defRPr>
-            </a:pPr>
-            <a:r>
-              <a:t>💬 Rompehielos Natural de Venta Sugerida</a:t>
-            </a:r>
-          </a:p>
-          <a:p>
-            <a:pPr>
-              <a:spcAft>
-                <a:spcPts val="1000"/>
-              </a:spcAft>
-              <a:defRPr sz="1150">
-                <a:solidFill>
-                  <a:srgbClr val="FFFFFF"/>
-                </a:solidFill>
-              </a:defRPr>
-            </a:pPr>
-            <a:r>
-              <a:t>En lugar del genérico '¿Se les ofrece algo más?', el mesero llega sonriendo: '¿Ya metieron su quiniela de hoy con mi nombre? Si ganan, ¡la casa les invita unas alitas!'.</a:t>
-            </a:r>
-          </a:p>
-          <a:p>
-            <a:pPr>
-              <a:spcAft>
-                <a:spcPts val="200"/>
-              </a:spcAft>
-              <a:defRPr sz="1400" b="1">
-                <a:solidFill>
-                  <a:srgbClr val="FFB612"/>
-                </a:solidFill>
-              </a:defRPr>
-            </a:pPr>
-            <a:r>
-              <a:t>🏆 Competencia Interna del Equipo</a:t>
-            </a:r>
-          </a:p>
-          <a:p>
-            <a:pPr>
-              <a:spcAft>
-                <a:spcPts val="1000"/>
-              </a:spcAft>
-              <a:defRPr sz="1150">
-                <a:solidFill>
-                  <a:srgbClr val="FFFFFF"/>
-                </a:solidFill>
-              </a:defRPr>
-            </a:pPr>
-            <a:r>
-              <a:t>Se puede premiar al mesero con más comensales registrados en la semana con turnos preferenciales o un reconocimiento en la junta semanal.</a:t>
-            </a:r>
-          </a:p>
-        </p:txBody>
-      </p:sp>
-      <p:pic>
-        <p:nvPicPr>
-          <p:cNvPr id="5" name="Picture 4" descr="screenshot_admin_player.png"/>
-          <p:cNvPicPr>
-            <a:picLocks noChangeAspect="1"/>
-          </p:cNvPicPr>
+              <a:t>Una orden de alitas o una cerveza tiene un costo de insumo moderado para cocina/barra ($30-$50 MXN), pero en la mente del cliente representa un premio valioso de $160 a $240 MXN.</a:t>
+            </a:r>
+          </a:p>
+        </p:txBody>
+      </p:sp>
+      <p:sp>
+        <p:nvSpPr>
+          <p:cNvPr id="5" name="Rounded Rectangle 4"/>
+          <p:cNvSpPr/>
           <p:nvPr/>
-        </p:nvPicPr>
-        <p:blipFill>
-          <a:blip r:embed="rId2"/>
-          <a:stretch>
-            <a:fillRect/>
-          </a:stretch>
-        </p:blipFill>
-        <p:spPr>
-          <a:xfrm>
-            <a:off x="7863840" y="1828800"/>
-            <a:ext cx="3566160" cy="1308612"/>
+        </p:nvSpPr>
+        <p:spPr>
+          <a:xfrm>
+            <a:off x="4389120" y="1645920"/>
+            <a:ext cx="3413455" cy="4663440"/>
+          </a:xfrm>
+          <a:prstGeom prst="roundRect">
+            <a:avLst/>
+          </a:prstGeom>
+          <a:solidFill>
+            <a:srgbClr val="141A26"/>
+          </a:solidFill>
+          <a:ln w="19050">
+            <a:solidFill>
+              <a:srgbClr val="283246"/>
+            </a:solidFill>
+          </a:ln>
+        </p:spPr>
+        <p:style>
+          <a:lnRef idx="1">
+            <a:schemeClr val="accent1"/>
+          </a:lnRef>
+          <a:fillRef idx="3">
+            <a:schemeClr val="accent1"/>
+          </a:fillRef>
+          <a:effectRef idx="2">
+            <a:schemeClr val="accent1"/>
+          </a:effectRef>
+          <a:fontRef idx="minor">
+            <a:schemeClr val="lt1"/>
+          </a:fontRef>
+        </p:style>
+        <p:txBody>
+          <a:bodyPr rtlCol="0" anchor="ctr"/>
+          <a:lstStyle/>
+          <a:p>
+            <a:pPr algn="ctr"/>
+          </a:p>
+        </p:txBody>
+      </p:sp>
+      <p:sp>
+        <p:nvSpPr>
+          <p:cNvPr id="6" name="TextBox 5"/>
+          <p:cNvSpPr txBox="1"/>
+          <p:nvPr/>
+        </p:nvSpPr>
+        <p:spPr>
+          <a:xfrm>
+            <a:off x="4663440" y="1920240"/>
+            <a:ext cx="2864815" cy="4114800"/>
           </a:xfrm>
           <a:prstGeom prst="rect">
             <a:avLst/>
           </a:prstGeom>
-        </p:spPr>
-      </p:pic>
+          <a:noFill/>
+        </p:spPr>
+        <p:txBody>
+          <a:bodyPr wrap="square">
+            <a:spAutoFit/>
+          </a:bodyPr>
+          <a:lstStyle/>
+          <a:p>
+            <a:pPr>
+              <a:spcAft>
+                <a:spcPts val="1400"/>
+              </a:spcAft>
+              <a:defRPr sz="1600" b="1">
+                <a:solidFill>
+                  <a:srgbClr val="00E676"/>
+                </a:solidFill>
+              </a:defRPr>
+            </a:pPr>
+            <a:r>
+              <a:t>🍻 Festejo y Rondas Extra en Mesa</a:t>
+            </a:r>
+          </a:p>
+          <a:p>
+            <a:pPr>
+              <a:defRPr sz="1300">
+                <a:solidFill>
+                  <a:srgbClr val="FFFFFF"/>
+                </a:solidFill>
+              </a:defRPr>
+            </a:pPr>
+            <a:r>
+              <a:t>Nadie gana y se va. El comensal que resulta campeón celebra con su mesa, y el grupo pide cervezas y platillos adicionales para acompañar el premio. El ticket final siempre supera con creces el costo del incentivo.</a:t>
+            </a:r>
+          </a:p>
+        </p:txBody>
+      </p:sp>
+      <p:sp>
+        <p:nvSpPr>
+          <p:cNvPr id="7" name="Rounded Rectangle 6"/>
+          <p:cNvSpPr/>
+          <p:nvPr/>
+        </p:nvSpPr>
+        <p:spPr>
+          <a:xfrm>
+            <a:off x="8046720" y="1645920"/>
+            <a:ext cx="3413455" cy="4663440"/>
+          </a:xfrm>
+          <a:prstGeom prst="roundRect">
+            <a:avLst/>
+          </a:prstGeom>
+          <a:solidFill>
+            <a:srgbClr val="141A26"/>
+          </a:solidFill>
+          <a:ln w="19050">
+            <a:solidFill>
+              <a:srgbClr val="283246"/>
+            </a:solidFill>
+          </a:ln>
+        </p:spPr>
+        <p:style>
+          <a:lnRef idx="1">
+            <a:schemeClr val="accent1"/>
+          </a:lnRef>
+          <a:fillRef idx="3">
+            <a:schemeClr val="accent1"/>
+          </a:fillRef>
+          <a:effectRef idx="2">
+            <a:schemeClr val="accent1"/>
+          </a:effectRef>
+          <a:fontRef idx="minor">
+            <a:schemeClr val="lt1"/>
+          </a:fontRef>
+        </p:style>
+        <p:txBody>
+          <a:bodyPr rtlCol="0" anchor="ctr"/>
+          <a:lstStyle/>
+          <a:p>
+            <a:pPr algn="ctr"/>
+          </a:p>
+        </p:txBody>
+      </p:sp>
+      <p:sp>
+        <p:nvSpPr>
+          <p:cNvPr id="8" name="TextBox 7"/>
+          <p:cNvSpPr txBox="1"/>
+          <p:nvPr/>
+        </p:nvSpPr>
+        <p:spPr>
+          <a:xfrm>
+            <a:off x="8321040" y="1920240"/>
+            <a:ext cx="2864815" cy="4114800"/>
+          </a:xfrm>
+          <a:prstGeom prst="rect">
+            <a:avLst/>
+          </a:prstGeom>
+          <a:noFill/>
+        </p:spPr>
+        <p:txBody>
+          <a:bodyPr wrap="square">
+            <a:spAutoFit/>
+          </a:bodyPr>
+          <a:lstStyle/>
+          <a:p>
+            <a:pPr>
+              <a:spcAft>
+                <a:spcPts val="1400"/>
+              </a:spcAft>
+              <a:defRPr sz="1600" b="1">
+                <a:solidFill>
+                  <a:srgbClr val="FF5722"/>
+                </a:solidFill>
+              </a:defRPr>
+            </a:pPr>
+            <a:r>
+              <a:t>🔄 Retorno Asegurado en Días Bajas</a:t>
+            </a:r>
+          </a:p>
+          <a:p>
+            <a:pPr>
+              <a:defRPr sz="1300">
+                <a:solidFill>
+                  <a:srgbClr val="FFFFFF"/>
+                </a:solidFill>
+              </a:defRPr>
+            </a:pPr>
+            <a:r>
+              <a:t>Los cupones de 2º y 3º lugar se pueden programar para canjearse de lunes a jueves en su siguiente visita, generando tráfico en días y horarios con menor ocupación.</a:t>
+            </a:r>
+          </a:p>
+        </p:txBody>
+      </p:sp>
     </p:spTree>
   </p:cSld>
   <p:clrMapOvr>
@@ -3578,7 +3668,7 @@
         </p:nvSpPr>
         <p:spPr>
           <a:xfrm>
-            <a:off x="731520" y="411480"/>
+            <a:off x="731520" y="365760"/>
             <a:ext cx="10698480" cy="1005840"/>
           </a:xfrm>
           <a:prstGeom prst="rect">
@@ -3594,28 +3684,28 @@
           <a:p>
             <a:pPr>
               <a:spcAft>
-                <a:spcPts val="300"/>
-              </a:spcAft>
-              <a:defRPr sz="1050" b="1">
+                <a:spcPts val="200"/>
+              </a:spcAft>
+              <a:defRPr sz="1000" b="1">
                 <a:solidFill>
                   <a:srgbClr val="FFB612"/>
                 </a:solidFill>
               </a:defRPr>
             </a:pPr>
             <a:r>
-              <a:t>RETORNO DE INVERSIÓN</a:t>
-            </a:r>
-          </a:p>
-          <a:p>
-            <a:pPr>
-              <a:defRPr sz="2400" b="1">
+              <a:t>EQUIPO DE SERVICIO</a:t>
+            </a:r>
+          </a:p>
+          <a:p>
+            <a:pPr>
+              <a:defRPr sz="2300" b="1">
                 <a:solidFill>
                   <a:srgbClr val="FFFFFF"/>
                 </a:solidFill>
               </a:defRPr>
             </a:pPr>
             <a:r>
-              <a:t>Métricas Clave de Negocio (KPIs y Rentabilidad)</a:t>
+              <a:t>Gamificación del Personal: Meseros como Embajadores</a:t>
             </a:r>
           </a:p>
         </p:txBody>
@@ -3629,7 +3719,7 @@
         <p:spPr>
           <a:xfrm>
             <a:off x="731520" y="1645920"/>
-            <a:ext cx="2499055" cy="4572000"/>
+            <a:ext cx="6858000" cy="4663440"/>
           </a:xfrm>
           <a:prstGeom prst="roundRect">
             <a:avLst/>
@@ -3673,8 +3763,8 @@
         </p:nvSpPr>
         <p:spPr>
           <a:xfrm>
-            <a:off x="914400" y="1920240"/>
-            <a:ext cx="2133295" cy="4023360"/>
+            <a:off x="1005840" y="1828800"/>
+            <a:ext cx="6309360" cy="4206240"/>
           </a:xfrm>
           <a:prstGeom prst="rect">
             <a:avLst/>
@@ -3687,379 +3777,151 @@
           </a:bodyPr>
           <a:lstStyle/>
           <a:p>
-            <a:pPr algn="ctr">
-              <a:spcAft>
-                <a:spcPts val="400"/>
-              </a:spcAft>
-              <a:defRPr sz="3600" b="1">
+            <a:pPr>
+              <a:spcAft>
+                <a:spcPts val="200"/>
+              </a:spcAft>
+              <a:defRPr sz="1350" b="1">
                 <a:solidFill>
                   <a:srgbClr val="FFB612"/>
                 </a:solidFill>
               </a:defRPr>
             </a:pPr>
             <a:r>
-              <a:t>+35%</a:t>
-            </a:r>
-          </a:p>
-          <a:p>
-            <a:pPr algn="ctr">
-              <a:spcAft>
-                <a:spcPts val="1400"/>
-              </a:spcAft>
-              <a:defRPr sz="1100" b="1">
+              <a:t>🙋 Atribución Clara en Cada Mesa</a:t>
+            </a:r>
+          </a:p>
+          <a:p>
+            <a:pPr>
+              <a:spcAft>
+                <a:spcPts val="1000"/>
+              </a:spcAft>
+              <a:defRPr sz="1150">
+                <a:solidFill>
+                  <a:srgbClr val="FFFFFF"/>
+                </a:solidFill>
+              </a:defRPr>
+            </a:pPr>
+            <a:r>
+              <a:t>Al registrar sus pronósticos, el cliente selecciona el nombre de su mesero en la lista. La gerencia sabe con métricas exactas qué meseros están invitando activamente y cuáles no.</a:t>
+            </a:r>
+          </a:p>
+          <a:p>
+            <a:pPr>
+              <a:spcAft>
+                <a:spcPts val="200"/>
+              </a:spcAft>
+              <a:defRPr sz="1350" b="1">
                 <a:solidFill>
                   <a:srgbClr val="FFB612"/>
                 </a:solidFill>
               </a:defRPr>
             </a:pPr>
             <a:r>
-              <a:t>PERMANENCIA (DWELL TIME)</a:t>
-            </a:r>
-          </a:p>
-          <a:p>
-            <a:pPr algn="ctr">
+              <a:t>💰 Incentivo Económico Directo (Más Propina)</a:t>
+            </a:r>
+          </a:p>
+          <a:p>
+            <a:pPr>
+              <a:spcAft>
+                <a:spcPts val="1000"/>
+              </a:spcAft>
               <a:defRPr sz="1150">
                 <a:solidFill>
-                  <a:srgbClr val="94A3B8"/>
-                </a:solidFill>
-              </a:defRPr>
-            </a:pPr>
-            <a:r>
-              <a:t>Las mesas se quedan hasta el silbatazo final para ver si ganan su quiniela.</a:t>
-            </a:r>
-          </a:p>
-        </p:txBody>
-      </p:sp>
-      <p:sp>
-        <p:nvSpPr>
-          <p:cNvPr id="5" name="Rounded Rectangle 4"/>
-          <p:cNvSpPr/>
+                  <a:srgbClr val="FFFFFF"/>
+                </a:solidFill>
+              </a:defRPr>
+            </a:pPr>
+            <a:r>
+              <a:t>Los meseros comprenden la fórmula de inmediato: Si la mesa se queda 3 horas compitiendo, consumirá más rondas de cerveza, hamburguesas y alitas, lo que elevará el total de la cuenta y su propina.</a:t>
+            </a:r>
+          </a:p>
+          <a:p>
+            <a:pPr>
+              <a:spcAft>
+                <a:spcPts val="200"/>
+              </a:spcAft>
+              <a:defRPr sz="1350" b="1">
+                <a:solidFill>
+                  <a:srgbClr val="FFB612"/>
+                </a:solidFill>
+              </a:defRPr>
+            </a:pPr>
+            <a:r>
+              <a:t>💬 Rompehielos Natural de Venta Sugerida</a:t>
+            </a:r>
+          </a:p>
+          <a:p>
+            <a:pPr>
+              <a:spcAft>
+                <a:spcPts val="1000"/>
+              </a:spcAft>
+              <a:defRPr sz="1150">
+                <a:solidFill>
+                  <a:srgbClr val="FFFFFF"/>
+                </a:solidFill>
+              </a:defRPr>
+            </a:pPr>
+            <a:r>
+              <a:t>En lugar del genérico '¿Se les ofrece algo más?', el mesero llega sonriendo: '¿Ya metieron su quiniela de hoy con mi nombre? Si ganan, ¡la casa les invita unas alitas!'.</a:t>
+            </a:r>
+          </a:p>
+          <a:p>
+            <a:pPr>
+              <a:spcAft>
+                <a:spcPts val="200"/>
+              </a:spcAft>
+              <a:defRPr sz="1350" b="1">
+                <a:solidFill>
+                  <a:srgbClr val="FFB612"/>
+                </a:solidFill>
+              </a:defRPr>
+            </a:pPr>
+            <a:r>
+              <a:t>🏆 Competencia Interna del Equipo</a:t>
+            </a:r>
+          </a:p>
+          <a:p>
+            <a:pPr>
+              <a:spcAft>
+                <a:spcPts val="1000"/>
+              </a:spcAft>
+              <a:defRPr sz="1150">
+                <a:solidFill>
+                  <a:srgbClr val="FFFFFF"/>
+                </a:solidFill>
+              </a:defRPr>
+            </a:pPr>
+            <a:r>
+              <a:t>Se puede premiar al mesero con más comensales registrados en la semana con turnos preferenciales o un reconocimiento en la junta semanal.</a:t>
+            </a:r>
+          </a:p>
+        </p:txBody>
+      </p:sp>
+      <p:pic>
+        <p:nvPicPr>
+          <p:cNvPr id="5" name="Picture 4" descr="screenshot_admin_player.png"/>
+          <p:cNvPicPr>
+            <a:picLocks noChangeAspect="1"/>
+          </p:cNvPicPr>
           <p:nvPr/>
-        </p:nvSpPr>
-        <p:spPr>
-          <a:xfrm>
-            <a:off x="3474720" y="1645920"/>
-            <a:ext cx="2499055" cy="4572000"/>
-          </a:xfrm>
-          <a:prstGeom prst="roundRect">
-            <a:avLst/>
-          </a:prstGeom>
-          <a:solidFill>
-            <a:srgbClr val="141A26"/>
-          </a:solidFill>
-          <a:ln w="19050">
-            <a:solidFill>
-              <a:srgbClr val="283246"/>
-            </a:solidFill>
-          </a:ln>
-        </p:spPr>
-        <p:style>
-          <a:lnRef idx="1">
-            <a:schemeClr val="accent1"/>
-          </a:lnRef>
-          <a:fillRef idx="3">
-            <a:schemeClr val="accent1"/>
-          </a:fillRef>
-          <a:effectRef idx="2">
-            <a:schemeClr val="accent1"/>
-          </a:effectRef>
-          <a:fontRef idx="minor">
-            <a:schemeClr val="lt1"/>
-          </a:fontRef>
-        </p:style>
-        <p:txBody>
-          <a:bodyPr rtlCol="0" anchor="ctr"/>
-          <a:lstStyle/>
-          <a:p>
-            <a:pPr algn="ctr"/>
-          </a:p>
-        </p:txBody>
-      </p:sp>
-      <p:sp>
-        <p:nvSpPr>
-          <p:cNvPr id="6" name="TextBox 5"/>
-          <p:cNvSpPr txBox="1"/>
-          <p:nvPr/>
-        </p:nvSpPr>
-        <p:spPr>
-          <a:xfrm>
-            <a:off x="3657600" y="1920240"/>
-            <a:ext cx="2133295" cy="4023360"/>
+        </p:nvPicPr>
+        <p:blipFill>
+          <a:blip r:embed="rId2"/>
+          <a:stretch>
+            <a:fillRect/>
+          </a:stretch>
+        </p:blipFill>
+        <p:spPr>
+          <a:xfrm>
+            <a:off x="7863840" y="1828800"/>
+            <a:ext cx="3566160" cy="1308612"/>
           </a:xfrm>
           <a:prstGeom prst="rect">
             <a:avLst/>
           </a:prstGeom>
-          <a:noFill/>
-        </p:spPr>
-        <p:txBody>
-          <a:bodyPr wrap="square">
-            <a:spAutoFit/>
-          </a:bodyPr>
-          <a:lstStyle/>
-          <a:p>
-            <a:pPr algn="ctr">
-              <a:spcAft>
-                <a:spcPts val="400"/>
-              </a:spcAft>
-              <a:defRPr sz="3600" b="1">
-                <a:solidFill>
-                  <a:srgbClr val="00E676"/>
-                </a:solidFill>
-              </a:defRPr>
-            </a:pPr>
-            <a:r>
-              <a:t>+22%</a:t>
-            </a:r>
-          </a:p>
-          <a:p>
-            <a:pPr algn="ctr">
-              <a:spcAft>
-                <a:spcPts val="1400"/>
-              </a:spcAft>
-              <a:defRPr sz="1100" b="1">
-                <a:solidFill>
-                  <a:srgbClr val="FFB612"/>
-                </a:solidFill>
-              </a:defRPr>
-            </a:pPr>
-            <a:r>
-              <a:t>TICKET PROMEDIO (AOV)</a:t>
-            </a:r>
-          </a:p>
-          <a:p>
-            <a:pPr algn="ctr">
-              <a:defRPr sz="1150">
-                <a:solidFill>
-                  <a:srgbClr val="94A3B8"/>
-                </a:solidFill>
-              </a:defRPr>
-            </a:pPr>
-            <a:r>
-              <a:t>El ambiente competitivo estimula pedidos repetidos de cerveza y botanas.</a:t>
-            </a:r>
-          </a:p>
-        </p:txBody>
-      </p:sp>
-      <p:sp>
-        <p:nvSpPr>
-          <p:cNvPr id="7" name="Rounded Rectangle 6"/>
-          <p:cNvSpPr/>
-          <p:nvPr/>
-        </p:nvSpPr>
-        <p:spPr>
-          <a:xfrm>
-            <a:off x="6217920" y="1645920"/>
-            <a:ext cx="2499055" cy="4572000"/>
-          </a:xfrm>
-          <a:prstGeom prst="roundRect">
-            <a:avLst/>
-          </a:prstGeom>
-          <a:solidFill>
-            <a:srgbClr val="141A26"/>
-          </a:solidFill>
-          <a:ln w="19050">
-            <a:solidFill>
-              <a:srgbClr val="283246"/>
-            </a:solidFill>
-          </a:ln>
-        </p:spPr>
-        <p:style>
-          <a:lnRef idx="1">
-            <a:schemeClr val="accent1"/>
-          </a:lnRef>
-          <a:fillRef idx="3">
-            <a:schemeClr val="accent1"/>
-          </a:fillRef>
-          <a:effectRef idx="2">
-            <a:schemeClr val="accent1"/>
-          </a:effectRef>
-          <a:fontRef idx="minor">
-            <a:schemeClr val="lt1"/>
-          </a:fontRef>
-        </p:style>
-        <p:txBody>
-          <a:bodyPr rtlCol="0" anchor="ctr"/>
-          <a:lstStyle/>
-          <a:p>
-            <a:pPr algn="ctr"/>
-          </a:p>
-        </p:txBody>
-      </p:sp>
-      <p:sp>
-        <p:nvSpPr>
-          <p:cNvPr id="8" name="TextBox 7"/>
-          <p:cNvSpPr txBox="1"/>
-          <p:nvPr/>
-        </p:nvSpPr>
-        <p:spPr>
-          <a:xfrm>
-            <a:off x="6400800" y="1920240"/>
-            <a:ext cx="2133295" cy="4023360"/>
-          </a:xfrm>
-          <a:prstGeom prst="rect">
-            <a:avLst/>
-          </a:prstGeom>
-          <a:noFill/>
-        </p:spPr>
-        <p:txBody>
-          <a:bodyPr wrap="square">
-            <a:spAutoFit/>
-          </a:bodyPr>
-          <a:lstStyle/>
-          <a:p>
-            <a:pPr algn="ctr">
-              <a:spcAft>
-                <a:spcPts val="400"/>
-              </a:spcAft>
-              <a:defRPr sz="3600" b="1">
-                <a:solidFill>
-                  <a:srgbClr val="FF5722"/>
-                </a:solidFill>
-              </a:defRPr>
-            </a:pPr>
-            <a:r>
-              <a:t>3x</a:t>
-            </a:r>
-          </a:p>
-          <a:p>
-            <a:pPr algn="ctr">
-              <a:spcAft>
-                <a:spcPts val="1400"/>
-              </a:spcAft>
-              <a:defRPr sz="1100" b="1">
-                <a:solidFill>
-                  <a:srgbClr val="FFB612"/>
-                </a:solidFill>
-              </a:defRPr>
-            </a:pPr>
-            <a:r>
-              <a:t>RETENCIÓN Y LEALTAD</a:t>
-            </a:r>
-          </a:p>
-          <a:p>
-            <a:pPr algn="ctr">
-              <a:defRPr sz="1150">
-                <a:solidFill>
-                  <a:srgbClr val="94A3B8"/>
-                </a:solidFill>
-              </a:defRPr>
-            </a:pPr>
-            <a:r>
-              <a:t>El comensal regresa jornada tras jornada para defender su posición en la tabla.</a:t>
-            </a:r>
-          </a:p>
-        </p:txBody>
-      </p:sp>
-      <p:sp>
-        <p:nvSpPr>
-          <p:cNvPr id="9" name="Rounded Rectangle 8"/>
-          <p:cNvSpPr/>
-          <p:nvPr/>
-        </p:nvSpPr>
-        <p:spPr>
-          <a:xfrm>
-            <a:off x="8961120" y="1645920"/>
-            <a:ext cx="2499055" cy="4572000"/>
-          </a:xfrm>
-          <a:prstGeom prst="roundRect">
-            <a:avLst/>
-          </a:prstGeom>
-          <a:solidFill>
-            <a:srgbClr val="141A26"/>
-          </a:solidFill>
-          <a:ln w="19050">
-            <a:solidFill>
-              <a:srgbClr val="283246"/>
-            </a:solidFill>
-          </a:ln>
-        </p:spPr>
-        <p:style>
-          <a:lnRef idx="1">
-            <a:schemeClr val="accent1"/>
-          </a:lnRef>
-          <a:fillRef idx="3">
-            <a:schemeClr val="accent1"/>
-          </a:fillRef>
-          <a:effectRef idx="2">
-            <a:schemeClr val="accent1"/>
-          </a:effectRef>
-          <a:fontRef idx="minor">
-            <a:schemeClr val="lt1"/>
-          </a:fontRef>
-        </p:style>
-        <p:txBody>
-          <a:bodyPr rtlCol="0" anchor="ctr"/>
-          <a:lstStyle/>
-          <a:p>
-            <a:pPr algn="ctr"/>
-          </a:p>
-        </p:txBody>
-      </p:sp>
-      <p:sp>
-        <p:nvSpPr>
-          <p:cNvPr id="10" name="TextBox 9"/>
-          <p:cNvSpPr txBox="1"/>
-          <p:nvPr/>
-        </p:nvSpPr>
-        <p:spPr>
-          <a:xfrm>
-            <a:off x="9144000" y="1920240"/>
-            <a:ext cx="2133295" cy="4023360"/>
-          </a:xfrm>
-          <a:prstGeom prst="rect">
-            <a:avLst/>
-          </a:prstGeom>
-          <a:noFill/>
-        </p:spPr>
-        <p:txBody>
-          <a:bodyPr wrap="square">
-            <a:spAutoFit/>
-          </a:bodyPr>
-          <a:lstStyle/>
-          <a:p>
-            <a:pPr algn="ctr">
-              <a:spcAft>
-                <a:spcPts val="400"/>
-              </a:spcAft>
-              <a:defRPr sz="3600" b="1">
-                <a:solidFill>
-                  <a:srgbClr val="FFFFFF"/>
-                </a:solidFill>
-              </a:defRPr>
-            </a:pPr>
-            <a:r>
-              <a:t>$0</a:t>
-            </a:r>
-          </a:p>
-          <a:p>
-            <a:pPr algn="ctr">
-              <a:spcAft>
-                <a:spcPts val="1400"/>
-              </a:spcAft>
-              <a:defRPr sz="1100" b="1">
-                <a:solidFill>
-                  <a:srgbClr val="FFB612"/>
-                </a:solidFill>
-              </a:defRPr>
-            </a:pPr>
-            <a:r>
-              <a:t>COSTO DE PAPELERÍA</a:t>
-            </a:r>
-          </a:p>
-          <a:p>
-            <a:pPr algn="ctr">
-              <a:defRPr sz="1150">
-                <a:solidFill>
-                  <a:srgbClr val="94A3B8"/>
-                </a:solidFill>
-              </a:defRPr>
-            </a:pPr>
-            <a:r>
-              <a:t>Eliminación total de impresiones, papeletas extraviadas y errores de conteo.</a:t>
-            </a:r>
-          </a:p>
-        </p:txBody>
-      </p:sp>
+        </p:spPr>
+      </p:pic>
     </p:spTree>
   </p:cSld>
   <p:clrMapOvr>
@@ -4094,7 +3956,7 @@
         </p:nvSpPr>
         <p:spPr>
           <a:xfrm>
-            <a:off x="731520" y="411480"/>
+            <a:off x="731520" y="365760"/>
             <a:ext cx="10698480" cy="1005840"/>
           </a:xfrm>
           <a:prstGeom prst="rect">
@@ -4110,28 +3972,28 @@
           <a:p>
             <a:pPr>
               <a:spcAft>
-                <a:spcPts val="300"/>
-              </a:spcAft>
-              <a:defRPr sz="1050" b="1">
+                <a:spcPts val="200"/>
+              </a:spcAft>
+              <a:defRPr sz="1000" b="1">
                 <a:solidFill>
                   <a:srgbClr val="FFB612"/>
                 </a:solidFill>
               </a:defRPr>
             </a:pPr>
             <a:r>
-              <a:t>PRÓXIMOS PASOS</a:t>
-            </a:r>
-          </a:p>
-          <a:p>
-            <a:pPr>
-              <a:defRPr sz="2400" b="1">
+              <a:t>CALENDARIO INTELIGENTE</a:t>
+            </a:r>
+          </a:p>
+          <a:p>
+            <a:pPr>
+              <a:defRPr sz="2300" b="1">
                 <a:solidFill>
                   <a:srgbClr val="FFFFFF"/>
                 </a:solidFill>
               </a:defRPr>
             </a:pPr>
             <a:r>
-              <a:t>Plan de Acción: Lanzamiento Piloto en Querétaro</a:t>
+              <a:t>Estrategia Gradual: El Juego Indicado en el Momento Indicado</a:t>
             </a:r>
           </a:p>
         </p:txBody>
@@ -4145,7 +4007,7 @@
         <p:spPr>
           <a:xfrm>
             <a:off x="731520" y="1645920"/>
-            <a:ext cx="10728655" cy="4572000"/>
+            <a:ext cx="10728655" cy="4663440"/>
           </a:xfrm>
           <a:prstGeom prst="roundRect">
             <a:avLst/>
@@ -4189,8 +4051,8 @@
         </p:nvSpPr>
         <p:spPr>
           <a:xfrm>
-            <a:off x="1097280" y="1920240"/>
-            <a:ext cx="9966960" cy="4023360"/>
+            <a:off x="1097280" y="1828800"/>
+            <a:ext cx="9966960" cy="4206240"/>
           </a:xfrm>
           <a:prstGeom prst="rect">
             <a:avLst/>
@@ -4205,15 +4067,810 @@
           <a:p>
             <a:pPr>
               <a:spcAft>
+                <a:spcPts val="1200"/>
+              </a:spcAft>
+              <a:defRPr sz="1700" b="1">
+                <a:solidFill>
+                  <a:srgbClr val="FFB612"/>
+                </a:solidFill>
+              </a:defRPr>
+            </a:pPr>
+            <a:r>
+              <a:t>🎯 Menos es Más: La Calidad del Momento vs Saturación</a:t>
+            </a:r>
+          </a:p>
+          <a:p>
+            <a:pPr>
+              <a:spcAft>
                 <a:spcPts val="200"/>
               </a:spcAft>
-              <a:defRPr sz="1450" b="1">
+              <a:defRPr sz="1400" b="1">
+                <a:solidFill>
+                  <a:srgbClr val="FFD100"/>
+                </a:solidFill>
+              </a:defRPr>
+            </a:pPr>
+            <a:r>
+              <a:t>🚫 No Jugar Todos los Juegos Todos los Días</a:t>
+            </a:r>
+          </a:p>
+          <a:p>
+            <a:pPr>
+              <a:spcAft>
+                <a:spcPts val="1000"/>
+              </a:spcAft>
+              <a:defRPr sz="1200">
+                <a:solidFill>
+                  <a:srgbClr val="FFFFFF"/>
+                </a:solidFill>
+              </a:defRPr>
+            </a:pPr>
+            <a:r>
+              <a:t>Saturar al cliente o al personal con 5 juegos simultáneos genera fatiga y desinterés. La experiencia debe sentirse especial y esperada cada fin de semana.</a:t>
+            </a:r>
+          </a:p>
+          <a:p>
+            <a:pPr>
+              <a:spcAft>
+                <a:spcPts val="200"/>
+              </a:spcAft>
+              <a:defRPr sz="1400" b="1">
+                <a:solidFill>
+                  <a:srgbClr val="FFD100"/>
+                </a:solidFill>
+              </a:defRPr>
+            </a:pPr>
+            <a:r>
+              <a:t>📅 Jueves, Domingos y Lunes: Modo NFL</a:t>
+            </a:r>
+          </a:p>
+          <a:p>
+            <a:pPr>
+              <a:spcAft>
+                <a:spcPts val="1000"/>
+              </a:spcAft>
+              <a:defRPr sz="1200">
+                <a:solidFill>
+                  <a:srgbClr val="FFFFFF"/>
+                </a:solidFill>
+              </a:defRPr>
+            </a:pPr>
+            <a:r>
+              <a:t>Exclusivamente Quinielas de Semana NFL y Football Grids en partidos estelares de Steelers, Sunday Night y Monday Night.</a:t>
+            </a:r>
+          </a:p>
+          <a:p>
+            <a:pPr>
+              <a:spcAft>
+                <a:spcPts val="200"/>
+              </a:spcAft>
+              <a:defRPr sz="1400" b="1">
+                <a:solidFill>
+                  <a:srgbClr val="FFD100"/>
+                </a:solidFill>
+              </a:defRPr>
+            </a:pPr>
+            <a:r>
+              <a:t>⚽ Viernes, Sábados y Domingos: Modo Fútbol</a:t>
+            </a:r>
+          </a:p>
+          <a:p>
+            <a:pPr>
+              <a:spcAft>
+                <a:spcPts val="1000"/>
+              </a:spcAft>
+              <a:defRPr sz="1200">
+                <a:solidFill>
+                  <a:srgbClr val="FFFFFF"/>
+                </a:solidFill>
+              </a:defRPr>
+            </a:pPr>
+            <a:r>
+              <a:t>Quinielas de Jornada de Liga MX y dinámicas de First Striker en Clásicos y liguilla.</a:t>
+            </a:r>
+          </a:p>
+          <a:p>
+            <a:pPr>
+              <a:spcAft>
+                <a:spcPts val="200"/>
+              </a:spcAft>
+              <a:defRPr sz="1400" b="1">
+                <a:solidFill>
+                  <a:srgbClr val="FFD100"/>
+                </a:solidFill>
+              </a:defRPr>
+            </a:pPr>
+            <a:r>
+              <a:t>🧠 Medios Tiempos Selectos: Modo Trivia</a:t>
+            </a:r>
+          </a:p>
+          <a:p>
+            <a:pPr>
+              <a:spcAft>
+                <a:spcPts val="1000"/>
+              </a:spcAft>
+              <a:defRPr sz="1200">
+                <a:solidFill>
+                  <a:srgbClr val="FFFFFF"/>
+                </a:solidFill>
+              </a:defRPr>
+            </a:pPr>
+            <a:r>
+              <a:t>Trivias de 10 minutos exclusivamente en el medio tiempo de partidos de alta audiencia para mantener a la gente entretenida mientras no hay jugadas.</a:t>
+            </a:r>
+          </a:p>
+        </p:txBody>
+      </p:sp>
+    </p:spTree>
+  </p:cSld>
+  <p:clrMapOvr>
+    <a:masterClrMapping/>
+  </p:clrMapOvr>
+</p:sld>
+</file>
+
+<file path=ppt/slides/slide13.xml><?xml version="1.0" encoding="utf-8"?>
+<p:sld xmlns:a="http://schemas.openxmlformats.org/drawingml/2006/main" xmlns:p="http://schemas.openxmlformats.org/presentationml/2006/main" xmlns:r="http://schemas.openxmlformats.org/officeDocument/2006/relationships">
+  <p:cSld>
+    <p:bg>
+      <p:bgPr>
+        <a:solidFill>
+          <a:srgbClr val="0B0F17"/>
+        </a:solidFill>
+        <a:effectLst/>
+      </p:bgPr>
+    </p:bg>
+    <p:spTree>
+      <p:nvGrpSpPr>
+        <p:cNvPr id="1" name=""/>
+        <p:cNvGrpSpPr/>
+        <p:nvPr/>
+      </p:nvGrpSpPr>
+      <p:grpSpPr/>
+      <p:sp>
+        <p:nvSpPr>
+          <p:cNvPr id="2" name="TextBox 1"/>
+          <p:cNvSpPr txBox="1"/>
+          <p:nvPr/>
+        </p:nvSpPr>
+        <p:spPr>
+          <a:xfrm>
+            <a:off x="731520" y="365760"/>
+            <a:ext cx="10698480" cy="1005840"/>
+          </a:xfrm>
+          <a:prstGeom prst="rect">
+            <a:avLst/>
+          </a:prstGeom>
+          <a:noFill/>
+        </p:spPr>
+        <p:txBody>
+          <a:bodyPr wrap="square" lIns="0" tIns="0" rIns="0" bIns="0">
+            <a:spAutoFit/>
+          </a:bodyPr>
+          <a:lstStyle/>
+          <a:p>
+            <a:pPr>
+              <a:spcAft>
+                <a:spcPts val="200"/>
+              </a:spcAft>
+              <a:defRPr sz="1000" b="1">
                 <a:solidFill>
                   <a:srgbClr val="FFB612"/>
                 </a:solidFill>
               </a:defRPr>
             </a:pPr>
             <a:r>
+              <a:t>RETORNO DE INVERSIÓN</a:t>
+            </a:r>
+          </a:p>
+          <a:p>
+            <a:pPr>
+              <a:defRPr sz="2300" b="1">
+                <a:solidFill>
+                  <a:srgbClr val="FFFFFF"/>
+                </a:solidFill>
+              </a:defRPr>
+            </a:pPr>
+            <a:r>
+              <a:t>Métricas Clave de Negocio (KPIs y Rentabilidad)</a:t>
+            </a:r>
+          </a:p>
+        </p:txBody>
+      </p:sp>
+      <p:sp>
+        <p:nvSpPr>
+          <p:cNvPr id="3" name="Rounded Rectangle 2"/>
+          <p:cNvSpPr/>
+          <p:nvPr/>
+        </p:nvSpPr>
+        <p:spPr>
+          <a:xfrm>
+            <a:off x="731520" y="1645920"/>
+            <a:ext cx="2499055" cy="4663440"/>
+          </a:xfrm>
+          <a:prstGeom prst="roundRect">
+            <a:avLst/>
+          </a:prstGeom>
+          <a:solidFill>
+            <a:srgbClr val="141A26"/>
+          </a:solidFill>
+          <a:ln w="19050">
+            <a:solidFill>
+              <a:srgbClr val="283246"/>
+            </a:solidFill>
+          </a:ln>
+        </p:spPr>
+        <p:style>
+          <a:lnRef idx="1">
+            <a:schemeClr val="accent1"/>
+          </a:lnRef>
+          <a:fillRef idx="3">
+            <a:schemeClr val="accent1"/>
+          </a:fillRef>
+          <a:effectRef idx="2">
+            <a:schemeClr val="accent1"/>
+          </a:effectRef>
+          <a:fontRef idx="minor">
+            <a:schemeClr val="lt1"/>
+          </a:fontRef>
+        </p:style>
+        <p:txBody>
+          <a:bodyPr rtlCol="0" anchor="ctr"/>
+          <a:lstStyle/>
+          <a:p>
+            <a:pPr algn="ctr"/>
+          </a:p>
+        </p:txBody>
+      </p:sp>
+      <p:sp>
+        <p:nvSpPr>
+          <p:cNvPr id="4" name="TextBox 3"/>
+          <p:cNvSpPr txBox="1"/>
+          <p:nvPr/>
+        </p:nvSpPr>
+        <p:spPr>
+          <a:xfrm>
+            <a:off x="914400" y="1920240"/>
+            <a:ext cx="2133295" cy="4114800"/>
+          </a:xfrm>
+          <a:prstGeom prst="rect">
+            <a:avLst/>
+          </a:prstGeom>
+          <a:noFill/>
+        </p:spPr>
+        <p:txBody>
+          <a:bodyPr wrap="square">
+            <a:spAutoFit/>
+          </a:bodyPr>
+          <a:lstStyle/>
+          <a:p>
+            <a:pPr algn="ctr">
+              <a:spcAft>
+                <a:spcPts val="400"/>
+              </a:spcAft>
+              <a:defRPr sz="3600" b="1">
+                <a:solidFill>
+                  <a:srgbClr val="FFB612"/>
+                </a:solidFill>
+              </a:defRPr>
+            </a:pPr>
+            <a:r>
+              <a:t>+35%</a:t>
+            </a:r>
+          </a:p>
+          <a:p>
+            <a:pPr algn="ctr">
+              <a:spcAft>
+                <a:spcPts val="1400"/>
+              </a:spcAft>
+              <a:defRPr sz="1100" b="1">
+                <a:solidFill>
+                  <a:srgbClr val="FFB612"/>
+                </a:solidFill>
+              </a:defRPr>
+            </a:pPr>
+            <a:r>
+              <a:t>PERMANENCIA (DWELL TIME)</a:t>
+            </a:r>
+          </a:p>
+          <a:p>
+            <a:pPr algn="ctr">
+              <a:defRPr sz="1150">
+                <a:solidFill>
+                  <a:srgbClr val="94A3B8"/>
+                </a:solidFill>
+              </a:defRPr>
+            </a:pPr>
+            <a:r>
+              <a:t>Las mesas se quedan hasta el silbatazo final para ver si ganan su quiniela.</a:t>
+            </a:r>
+          </a:p>
+        </p:txBody>
+      </p:sp>
+      <p:sp>
+        <p:nvSpPr>
+          <p:cNvPr id="5" name="Rounded Rectangle 4"/>
+          <p:cNvSpPr/>
+          <p:nvPr/>
+        </p:nvSpPr>
+        <p:spPr>
+          <a:xfrm>
+            <a:off x="3474720" y="1645920"/>
+            <a:ext cx="2499055" cy="4663440"/>
+          </a:xfrm>
+          <a:prstGeom prst="roundRect">
+            <a:avLst/>
+          </a:prstGeom>
+          <a:solidFill>
+            <a:srgbClr val="141A26"/>
+          </a:solidFill>
+          <a:ln w="19050">
+            <a:solidFill>
+              <a:srgbClr val="283246"/>
+            </a:solidFill>
+          </a:ln>
+        </p:spPr>
+        <p:style>
+          <a:lnRef idx="1">
+            <a:schemeClr val="accent1"/>
+          </a:lnRef>
+          <a:fillRef idx="3">
+            <a:schemeClr val="accent1"/>
+          </a:fillRef>
+          <a:effectRef idx="2">
+            <a:schemeClr val="accent1"/>
+          </a:effectRef>
+          <a:fontRef idx="minor">
+            <a:schemeClr val="lt1"/>
+          </a:fontRef>
+        </p:style>
+        <p:txBody>
+          <a:bodyPr rtlCol="0" anchor="ctr"/>
+          <a:lstStyle/>
+          <a:p>
+            <a:pPr algn="ctr"/>
+          </a:p>
+        </p:txBody>
+      </p:sp>
+      <p:sp>
+        <p:nvSpPr>
+          <p:cNvPr id="6" name="TextBox 5"/>
+          <p:cNvSpPr txBox="1"/>
+          <p:nvPr/>
+        </p:nvSpPr>
+        <p:spPr>
+          <a:xfrm>
+            <a:off x="3657600" y="1920240"/>
+            <a:ext cx="2133295" cy="4114800"/>
+          </a:xfrm>
+          <a:prstGeom prst="rect">
+            <a:avLst/>
+          </a:prstGeom>
+          <a:noFill/>
+        </p:spPr>
+        <p:txBody>
+          <a:bodyPr wrap="square">
+            <a:spAutoFit/>
+          </a:bodyPr>
+          <a:lstStyle/>
+          <a:p>
+            <a:pPr algn="ctr">
+              <a:spcAft>
+                <a:spcPts val="400"/>
+              </a:spcAft>
+              <a:defRPr sz="3600" b="1">
+                <a:solidFill>
+                  <a:srgbClr val="00E676"/>
+                </a:solidFill>
+              </a:defRPr>
+            </a:pPr>
+            <a:r>
+              <a:t>+22%</a:t>
+            </a:r>
+          </a:p>
+          <a:p>
+            <a:pPr algn="ctr">
+              <a:spcAft>
+                <a:spcPts val="1400"/>
+              </a:spcAft>
+              <a:defRPr sz="1100" b="1">
+                <a:solidFill>
+                  <a:srgbClr val="FFB612"/>
+                </a:solidFill>
+              </a:defRPr>
+            </a:pPr>
+            <a:r>
+              <a:t>TICKET PROMEDIO (AOV)</a:t>
+            </a:r>
+          </a:p>
+          <a:p>
+            <a:pPr algn="ctr">
+              <a:defRPr sz="1150">
+                <a:solidFill>
+                  <a:srgbClr val="94A3B8"/>
+                </a:solidFill>
+              </a:defRPr>
+            </a:pPr>
+            <a:r>
+              <a:t>El ambiente competitivo estimula pedidos repetidos de cerveza y botanas.</a:t>
+            </a:r>
+          </a:p>
+        </p:txBody>
+      </p:sp>
+      <p:sp>
+        <p:nvSpPr>
+          <p:cNvPr id="7" name="Rounded Rectangle 6"/>
+          <p:cNvSpPr/>
+          <p:nvPr/>
+        </p:nvSpPr>
+        <p:spPr>
+          <a:xfrm>
+            <a:off x="6217920" y="1645920"/>
+            <a:ext cx="2499055" cy="4663440"/>
+          </a:xfrm>
+          <a:prstGeom prst="roundRect">
+            <a:avLst/>
+          </a:prstGeom>
+          <a:solidFill>
+            <a:srgbClr val="141A26"/>
+          </a:solidFill>
+          <a:ln w="19050">
+            <a:solidFill>
+              <a:srgbClr val="283246"/>
+            </a:solidFill>
+          </a:ln>
+        </p:spPr>
+        <p:style>
+          <a:lnRef idx="1">
+            <a:schemeClr val="accent1"/>
+          </a:lnRef>
+          <a:fillRef idx="3">
+            <a:schemeClr val="accent1"/>
+          </a:fillRef>
+          <a:effectRef idx="2">
+            <a:schemeClr val="accent1"/>
+          </a:effectRef>
+          <a:fontRef idx="minor">
+            <a:schemeClr val="lt1"/>
+          </a:fontRef>
+        </p:style>
+        <p:txBody>
+          <a:bodyPr rtlCol="0" anchor="ctr"/>
+          <a:lstStyle/>
+          <a:p>
+            <a:pPr algn="ctr"/>
+          </a:p>
+        </p:txBody>
+      </p:sp>
+      <p:sp>
+        <p:nvSpPr>
+          <p:cNvPr id="8" name="TextBox 7"/>
+          <p:cNvSpPr txBox="1"/>
+          <p:nvPr/>
+        </p:nvSpPr>
+        <p:spPr>
+          <a:xfrm>
+            <a:off x="6400800" y="1920240"/>
+            <a:ext cx="2133295" cy="4114800"/>
+          </a:xfrm>
+          <a:prstGeom prst="rect">
+            <a:avLst/>
+          </a:prstGeom>
+          <a:noFill/>
+        </p:spPr>
+        <p:txBody>
+          <a:bodyPr wrap="square">
+            <a:spAutoFit/>
+          </a:bodyPr>
+          <a:lstStyle/>
+          <a:p>
+            <a:pPr algn="ctr">
+              <a:spcAft>
+                <a:spcPts val="400"/>
+              </a:spcAft>
+              <a:defRPr sz="3600" b="1">
+                <a:solidFill>
+                  <a:srgbClr val="FF5722"/>
+                </a:solidFill>
+              </a:defRPr>
+            </a:pPr>
+            <a:r>
+              <a:t>3x</a:t>
+            </a:r>
+          </a:p>
+          <a:p>
+            <a:pPr algn="ctr">
+              <a:spcAft>
+                <a:spcPts val="1400"/>
+              </a:spcAft>
+              <a:defRPr sz="1100" b="1">
+                <a:solidFill>
+                  <a:srgbClr val="FFB612"/>
+                </a:solidFill>
+              </a:defRPr>
+            </a:pPr>
+            <a:r>
+              <a:t>RETENCIÓN Y LEALTAD</a:t>
+            </a:r>
+          </a:p>
+          <a:p>
+            <a:pPr algn="ctr">
+              <a:defRPr sz="1150">
+                <a:solidFill>
+                  <a:srgbClr val="94A3B8"/>
+                </a:solidFill>
+              </a:defRPr>
+            </a:pPr>
+            <a:r>
+              <a:t>El comensal regresa jornada tras jornada para defender su posición en la tabla.</a:t>
+            </a:r>
+          </a:p>
+        </p:txBody>
+      </p:sp>
+      <p:sp>
+        <p:nvSpPr>
+          <p:cNvPr id="9" name="Rounded Rectangle 8"/>
+          <p:cNvSpPr/>
+          <p:nvPr/>
+        </p:nvSpPr>
+        <p:spPr>
+          <a:xfrm>
+            <a:off x="8961120" y="1645920"/>
+            <a:ext cx="2499055" cy="4663440"/>
+          </a:xfrm>
+          <a:prstGeom prst="roundRect">
+            <a:avLst/>
+          </a:prstGeom>
+          <a:solidFill>
+            <a:srgbClr val="141A26"/>
+          </a:solidFill>
+          <a:ln w="19050">
+            <a:solidFill>
+              <a:srgbClr val="283246"/>
+            </a:solidFill>
+          </a:ln>
+        </p:spPr>
+        <p:style>
+          <a:lnRef idx="1">
+            <a:schemeClr val="accent1"/>
+          </a:lnRef>
+          <a:fillRef idx="3">
+            <a:schemeClr val="accent1"/>
+          </a:fillRef>
+          <a:effectRef idx="2">
+            <a:schemeClr val="accent1"/>
+          </a:effectRef>
+          <a:fontRef idx="minor">
+            <a:schemeClr val="lt1"/>
+          </a:fontRef>
+        </p:style>
+        <p:txBody>
+          <a:bodyPr rtlCol="0" anchor="ctr"/>
+          <a:lstStyle/>
+          <a:p>
+            <a:pPr algn="ctr"/>
+          </a:p>
+        </p:txBody>
+      </p:sp>
+      <p:sp>
+        <p:nvSpPr>
+          <p:cNvPr id="10" name="TextBox 9"/>
+          <p:cNvSpPr txBox="1"/>
+          <p:nvPr/>
+        </p:nvSpPr>
+        <p:spPr>
+          <a:xfrm>
+            <a:off x="9144000" y="1920240"/>
+            <a:ext cx="2133295" cy="4114800"/>
+          </a:xfrm>
+          <a:prstGeom prst="rect">
+            <a:avLst/>
+          </a:prstGeom>
+          <a:noFill/>
+        </p:spPr>
+        <p:txBody>
+          <a:bodyPr wrap="square">
+            <a:spAutoFit/>
+          </a:bodyPr>
+          <a:lstStyle/>
+          <a:p>
+            <a:pPr algn="ctr">
+              <a:spcAft>
+                <a:spcPts val="400"/>
+              </a:spcAft>
+              <a:defRPr sz="3600" b="1">
+                <a:solidFill>
+                  <a:srgbClr val="FFFFFF"/>
+                </a:solidFill>
+              </a:defRPr>
+            </a:pPr>
+            <a:r>
+              <a:t>$0</a:t>
+            </a:r>
+          </a:p>
+          <a:p>
+            <a:pPr algn="ctr">
+              <a:spcAft>
+                <a:spcPts val="1400"/>
+              </a:spcAft>
+              <a:defRPr sz="1100" b="1">
+                <a:solidFill>
+                  <a:srgbClr val="FFB612"/>
+                </a:solidFill>
+              </a:defRPr>
+            </a:pPr>
+            <a:r>
+              <a:t>COSTO DE PAPELERÍA</a:t>
+            </a:r>
+          </a:p>
+          <a:p>
+            <a:pPr algn="ctr">
+              <a:defRPr sz="1150">
+                <a:solidFill>
+                  <a:srgbClr val="94A3B8"/>
+                </a:solidFill>
+              </a:defRPr>
+            </a:pPr>
+            <a:r>
+              <a:t>Eliminación total de impresiones, papeletas extraviadas y errores de conteo.</a:t>
+            </a:r>
+          </a:p>
+        </p:txBody>
+      </p:sp>
+    </p:spTree>
+  </p:cSld>
+  <p:clrMapOvr>
+    <a:masterClrMapping/>
+  </p:clrMapOvr>
+</p:sld>
+</file>
+
+<file path=ppt/slides/slide14.xml><?xml version="1.0" encoding="utf-8"?>
+<p:sld xmlns:a="http://schemas.openxmlformats.org/drawingml/2006/main" xmlns:p="http://schemas.openxmlformats.org/presentationml/2006/main" xmlns:r="http://schemas.openxmlformats.org/officeDocument/2006/relationships">
+  <p:cSld>
+    <p:bg>
+      <p:bgPr>
+        <a:solidFill>
+          <a:srgbClr val="0B0F17"/>
+        </a:solidFill>
+        <a:effectLst/>
+      </p:bgPr>
+    </p:bg>
+    <p:spTree>
+      <p:nvGrpSpPr>
+        <p:cNvPr id="1" name=""/>
+        <p:cNvGrpSpPr/>
+        <p:nvPr/>
+      </p:nvGrpSpPr>
+      <p:grpSpPr/>
+      <p:sp>
+        <p:nvSpPr>
+          <p:cNvPr id="2" name="TextBox 1"/>
+          <p:cNvSpPr txBox="1"/>
+          <p:nvPr/>
+        </p:nvSpPr>
+        <p:spPr>
+          <a:xfrm>
+            <a:off x="731520" y="365760"/>
+            <a:ext cx="10698480" cy="1005840"/>
+          </a:xfrm>
+          <a:prstGeom prst="rect">
+            <a:avLst/>
+          </a:prstGeom>
+          <a:noFill/>
+        </p:spPr>
+        <p:txBody>
+          <a:bodyPr wrap="square" lIns="0" tIns="0" rIns="0" bIns="0">
+            <a:spAutoFit/>
+          </a:bodyPr>
+          <a:lstStyle/>
+          <a:p>
+            <a:pPr>
+              <a:spcAft>
+                <a:spcPts val="200"/>
+              </a:spcAft>
+              <a:defRPr sz="1000" b="1">
+                <a:solidFill>
+                  <a:srgbClr val="FFB612"/>
+                </a:solidFill>
+              </a:defRPr>
+            </a:pPr>
+            <a:r>
+              <a:t>PRÓXIMOS PASOS</a:t>
+            </a:r>
+          </a:p>
+          <a:p>
+            <a:pPr>
+              <a:defRPr sz="2300" b="1">
+                <a:solidFill>
+                  <a:srgbClr val="FFFFFF"/>
+                </a:solidFill>
+              </a:defRPr>
+            </a:pPr>
+            <a:r>
+              <a:t>Plan de Acción en Juriquilla y Conclusión</a:t>
+            </a:r>
+          </a:p>
+        </p:txBody>
+      </p:sp>
+      <p:sp>
+        <p:nvSpPr>
+          <p:cNvPr id="3" name="Rounded Rectangle 2"/>
+          <p:cNvSpPr/>
+          <p:nvPr/>
+        </p:nvSpPr>
+        <p:spPr>
+          <a:xfrm>
+            <a:off x="731520" y="1645920"/>
+            <a:ext cx="10728655" cy="4663440"/>
+          </a:xfrm>
+          <a:prstGeom prst="roundRect">
+            <a:avLst/>
+          </a:prstGeom>
+          <a:solidFill>
+            <a:srgbClr val="141A26"/>
+          </a:solidFill>
+          <a:ln w="19050">
+            <a:solidFill>
+              <a:srgbClr val="283246"/>
+            </a:solidFill>
+          </a:ln>
+        </p:spPr>
+        <p:style>
+          <a:lnRef idx="1">
+            <a:schemeClr val="accent1"/>
+          </a:lnRef>
+          <a:fillRef idx="3">
+            <a:schemeClr val="accent1"/>
+          </a:fillRef>
+          <a:effectRef idx="2">
+            <a:schemeClr val="accent1"/>
+          </a:effectRef>
+          <a:fontRef idx="minor">
+            <a:schemeClr val="lt1"/>
+          </a:fontRef>
+        </p:style>
+        <p:txBody>
+          <a:bodyPr rtlCol="0" anchor="ctr"/>
+          <a:lstStyle/>
+          <a:p>
+            <a:pPr algn="ctr"/>
+          </a:p>
+        </p:txBody>
+      </p:sp>
+      <p:sp>
+        <p:nvSpPr>
+          <p:cNvPr id="4" name="TextBox 3"/>
+          <p:cNvSpPr txBox="1"/>
+          <p:nvPr/>
+        </p:nvSpPr>
+        <p:spPr>
+          <a:xfrm>
+            <a:off x="1097280" y="1828800"/>
+            <a:ext cx="9966960" cy="4206240"/>
+          </a:xfrm>
+          <a:prstGeom prst="rect">
+            <a:avLst/>
+          </a:prstGeom>
+          <a:noFill/>
+        </p:spPr>
+        <p:txBody>
+          <a:bodyPr wrap="square">
+            <a:spAutoFit/>
+          </a:bodyPr>
+          <a:lstStyle/>
+          <a:p>
+            <a:pPr>
+              <a:spcAft>
+                <a:spcPts val="200"/>
+              </a:spcAft>
+              <a:defRPr sz="1400" b="1">
+                <a:solidFill>
+                  <a:srgbClr val="FFB612"/>
+                </a:solidFill>
+              </a:defRPr>
+            </a:pPr>
+            <a:r>
               <a:t>Paso 1: Colocación de Material POP en Mesas (Día 1)</a:t>
             </a:r>
           </a:p>
@@ -4222,7 +4879,7 @@
               <a:spcAft>
                 <a:spcPts val="1000"/>
               </a:spcAft>
-              <a:defRPr sz="1200">
+              <a:defRPr sz="1150">
                 <a:solidFill>
                   <a:srgbClr val="FFFFFF"/>
                 </a:solidFill>
@@ -4237,7 +4894,7 @@
               <a:spcAft>
                 <a:spcPts val="200"/>
               </a:spcAft>
-              <a:defRPr sz="1450" b="1">
+              <a:defRPr sz="1400" b="1">
                 <a:solidFill>
                   <a:srgbClr val="FFB612"/>
                 </a:solidFill>
@@ -4252,7 +4909,7 @@
               <a:spcAft>
                 <a:spcPts val="1000"/>
               </a:spcAft>
-              <a:defRPr sz="1200">
+              <a:defRPr sz="1150">
                 <a:solidFill>
                   <a:srgbClr val="FFFFFF"/>
                 </a:solidFill>
@@ -4267,14 +4924,14 @@
               <a:spcAft>
                 <a:spcPts val="200"/>
               </a:spcAft>
-              <a:defRPr sz="1450" b="1">
+              <a:defRPr sz="1400" b="1">
                 <a:solidFill>
                   <a:srgbClr val="FFB612"/>
                 </a:solidFill>
               </a:defRPr>
             </a:pPr>
             <a:r>
-              <a:t>Paso 3: Activación Piloto con Fan Club (Fin de Semana)</a:t>
+              <a:t>Paso 3: Activación Piloto con Steelers Nation QRO (Fin de Semana)</a:t>
             </a:r>
           </a:p>
           <a:p>
@@ -4282,14 +4939,14 @@
               <a:spcAft>
                 <a:spcPts val="1000"/>
               </a:spcAft>
-              <a:defRPr sz="1200">
+              <a:defRPr sz="1150">
                 <a:solidFill>
                   <a:srgbClr val="FFFFFF"/>
                 </a:solidFill>
               </a:defRPr>
             </a:pPr>
             <a:r>
-              <a:t>Lanzamiento con la comunidad de Steelers Nation Querétaro en el partido estelar de la semana.</a:t>
+              <a:t>Lanzamiento oficial en el partido estelar de Steelers en Juriquilla con la comunidad de más de 71 miembros registrados.</a:t>
             </a:r>
           </a:p>
           <a:p>
@@ -4297,7 +4954,7 @@
               <a:spcAft>
                 <a:spcPts val="200"/>
               </a:spcAft>
-              <a:defRPr sz="1450" b="1">
+              <a:defRPr sz="1400" b="1">
                 <a:solidFill>
                   <a:srgbClr val="FFB612"/>
                 </a:solidFill>
@@ -4312,14 +4969,14 @@
               <a:spcAft>
                 <a:spcPts val="1000"/>
               </a:spcAft>
-              <a:defRPr sz="1200">
+              <a:defRPr sz="1150">
                 <a:solidFill>
                   <a:srgbClr val="FFFFFF"/>
                 </a:solidFill>
               </a:defRPr>
             </a:pPr>
             <a:r>
-              <a:t>Revisión con dueños y gerencia de consumo generado, mesas participantes y lealtad para escalarlo.</a:t>
+              <a:t>Revisión con dueños y gerencia de consumo generado, mesas participantes y lealtad para escalarlo a toda la marca.</a:t>
             </a:r>
           </a:p>
         </p:txBody>
@@ -4358,7 +5015,7 @@
         </p:nvSpPr>
         <p:spPr>
           <a:xfrm>
-            <a:off x="731520" y="411480"/>
+            <a:off x="731520" y="365760"/>
             <a:ext cx="10698480" cy="1005840"/>
           </a:xfrm>
           <a:prstGeom prst="rect">
@@ -4374,28 +5031,28 @@
           <a:p>
             <a:pPr>
               <a:spcAft>
-                <a:spcPts val="300"/>
-              </a:spcAft>
-              <a:defRPr sz="1050" b="1">
+                <a:spcPts val="200"/>
+              </a:spcAft>
+              <a:defRPr sz="1000" b="1">
                 <a:solidFill>
                   <a:srgbClr val="FFB612"/>
                 </a:solidFill>
               </a:defRPr>
             </a:pPr>
             <a:r>
-              <a:t>VALIDACIÓN ORGÁNICA • HISTORIA DE ÉXITO</a:t>
-            </a:r>
-          </a:p>
-          <a:p>
-            <a:pPr>
-              <a:defRPr sz="2400" b="1">
+              <a:t>HISTORIA REAL • MOTIVACIÓN Y PROPÓSITO</a:t>
+            </a:r>
+          </a:p>
+          <a:p>
+            <a:pPr>
+              <a:defRPr sz="2300" b="1">
                 <a:solidFill>
                   <a:srgbClr val="FFFFFF"/>
                 </a:solidFill>
               </a:defRPr>
             </a:pPr>
             <a:r>
-              <a:t>Nacido en Barra: Una Idea Probada con Clientes Reales</a:t>
+              <a:t>El Corazón del Proyecto: La Historia de un Barman en Álamos</a:t>
             </a:r>
           </a:p>
         </p:txBody>
@@ -4409,7 +5066,7 @@
         <p:spPr>
           <a:xfrm>
             <a:off x="731520" y="1645920"/>
-            <a:ext cx="10728655" cy="4572000"/>
+            <a:ext cx="10728655" cy="4663440"/>
           </a:xfrm>
           <a:prstGeom prst="roundRect">
             <a:avLst/>
@@ -4453,8 +5110,8 @@
         </p:nvSpPr>
         <p:spPr>
           <a:xfrm>
-            <a:off x="1097280" y="1920240"/>
-            <a:ext cx="9966960" cy="4023360"/>
+            <a:off x="1097280" y="1828800"/>
+            <a:ext cx="9966960" cy="4206240"/>
           </a:xfrm>
           <a:prstGeom prst="rect">
             <a:avLst/>
@@ -4469,16 +5126,16 @@
           <a:p>
             <a:pPr>
               <a:spcAft>
-                <a:spcPts val="1400"/>
-              </a:spcAft>
-              <a:defRPr sz="1800" b="1">
+                <a:spcPts val="1200"/>
+              </a:spcAft>
+              <a:defRPr sz="1700" b="1">
                 <a:solidFill>
                   <a:srgbClr val="FFB612"/>
                 </a:solidFill>
               </a:defRPr>
             </a:pPr>
             <a:r>
-              <a:t>💬 «Beto, ¿qué onda? ¿Para cuándo la próxima quiniela o trivia?»</a:t>
+              <a:t>❤️ «El cliente debe estar contento: aún si su equipo pierde o el partido está aburrido»</a:t>
             </a:r>
           </a:p>
           <a:p>
@@ -4486,20 +5143,20 @@
               <a:spcAft>
                 <a:spcPts val="200"/>
               </a:spcAft>
-              <a:defRPr sz="1450" b="1">
+              <a:defRPr sz="1400" b="1">
                 <a:solidFill>
                   <a:srgbClr val="FFD100"/>
                 </a:solidFill>
               </a:defRPr>
             </a:pPr>
             <a:r>
-              <a:t>🍺 El Origen en Álamos</a:t>
-            </a:r>
-          </a:p>
-          <a:p>
-            <a:pPr>
-              <a:spcAft>
-                <a:spcPts val="1200"/>
+              <a:t>🍺 El Origen Detrás de la Barra en Álamos</a:t>
+            </a:r>
+          </a:p>
+          <a:p>
+            <a:pPr>
+              <a:spcAft>
+                <a:spcPts val="1000"/>
               </a:spcAft>
               <a:defRPr sz="1200">
                 <a:solidFill>
@@ -4508,7 +5165,7 @@
               </a:defRPr>
             </a:pPr>
             <a:r>
-              <a:t>Drinks &amp; Wins no nació como una teoría de oficina. Nació directamente en la barra de Álamos, donde Beto empezó a organizar quinielas y trivias entre las mesas de forma orgánica. La respuesta de los comensales fue abrumadora: las mesas competían, consumían más y se quedaban hasta el final del partido.</a:t>
+              <a:t>Esto comenzó cuando yo era barman en la sucursal de Álamos. Mi meta siempre fue clara: que cada persona se fuera feliz del restaurante. Por naturaleza, al ser humano le fascina competir. Empecé a inventar quinielas y trivias entre las mesas; de repente, la gente no solo veía la tele, ¡estaban conviviendo, gritando y pidiendo más rondas!</a:t>
             </a:r>
           </a:p>
           <a:p>
@@ -4516,20 +5173,20 @@
               <a:spcAft>
                 <a:spcPts val="200"/>
               </a:spcAft>
-              <a:defRPr sz="1450" b="1">
+              <a:defRPr sz="1400" b="1">
                 <a:solidFill>
                   <a:srgbClr val="FFD100"/>
                 </a:solidFill>
               </a:defRPr>
             </a:pPr>
             <a:r>
-              <a:t>🤝 Creación de Clientes Frecuentes y Leales</a:t>
-            </a:r>
-          </a:p>
-          <a:p>
-            <a:pPr>
-              <a:spcAft>
-                <a:spcPts val="1200"/>
+              <a:t>🙏 Una Comunidad Fiel que Impulsa a Mi Familia</a:t>
+            </a:r>
+          </a:p>
+          <a:p>
+            <a:pPr>
+              <a:spcAft>
+                <a:spcPts val="1000"/>
               </a:spcAft>
               <a:defRPr sz="1200">
                 <a:solidFill>
@@ -4538,7 +5195,7 @@
               </a:defRPr>
             </a:pPr>
             <a:r>
-              <a:t>Esa dinámica creó una comunidad fiel que no solo llenaba el restaurante en días de juego, sino que hoy en día, cuando ven a Beto en la calle en Querétaro, lo reconocen y le preguntan entusiasmados por la siguiente fecha.</a:t>
+              <a:t>Esas dinámicas crearon clientes tan frecuentes y leales que hasta el día de hoy me ven en la calle en Querétaro y me dicen con una sonrisa: '¡Beto, qué onda! ¿Para cuándo otra quiniela o trivia?'. Gracias a esos clientes y a las propinas que dejan en mesa, he podido sacar adelante a mi familia.</a:t>
             </a:r>
           </a:p>
           <a:p>
@@ -4546,20 +5203,20 @@
               <a:spcAft>
                 <a:spcPts val="200"/>
               </a:spcAft>
-              <a:defRPr sz="1450" b="1">
+              <a:defRPr sz="1400" b="1">
                 <a:solidFill>
                   <a:srgbClr val="FFD100"/>
                 </a:solidFill>
               </a:defRPr>
             </a:pPr>
             <a:r>
-              <a:t>🚀 De la Libreta de Papel a la Tecnología PWA con IA</a:t>
-            </a:r>
-          </a:p>
-          <a:p>
-            <a:pPr>
-              <a:spcAft>
-                <a:spcPts val="1200"/>
+              <a:t>💡 No Soy Programador ni Ingeniero: Soy Alguien que Ama Este Lugar</a:t>
+            </a:r>
+          </a:p>
+          <a:p>
+            <a:pPr>
+              <a:spcAft>
+                <a:spcPts val="1000"/>
               </a:spcAft>
               <a:defRPr sz="1200">
                 <a:solidFill>
@@ -4568,7 +5225,7 @@
               </a:defRPr>
             </a:pPr>
             <a:r>
-              <a:t>Lo que antes se hacía con hojas de papel, plumas perdidas y conteos manuales agotadores, ahora está digitalizado al 100% en la nube, con conexión oficial a ESPN e Inteligencia Artificial para crear jornadas en segundos.</a:t>
+              <a:t>No soy desarrollador de software ni diseñador gráfico. Construí esta plataforma con todo el corazón, utilizando Inteligencia Artificial y herramientas modernas, por el inmenso cariño que le tengo a la marca y a este equipo.</a:t>
             </a:r>
           </a:p>
         </p:txBody>
@@ -4607,7 +5264,7 @@
         </p:nvSpPr>
         <p:spPr>
           <a:xfrm>
-            <a:off x="731520" y="411480"/>
+            <a:off x="731520" y="365760"/>
             <a:ext cx="10698480" cy="1005840"/>
           </a:xfrm>
           <a:prstGeom prst="rect">
@@ -4623,28 +5280,28 @@
           <a:p>
             <a:pPr>
               <a:spcAft>
-                <a:spcPts val="300"/>
-              </a:spcAft>
-              <a:defRPr sz="1050" b="1">
+                <a:spcPts val="200"/>
+              </a:spcAft>
+              <a:defRPr sz="1000" b="1">
                 <a:solidFill>
                   <a:srgbClr val="FFB612"/>
                 </a:solidFill>
               </a:defRPr>
             </a:pPr>
             <a:r>
-              <a:t>ESTRATEGIA COMERCIAL INTELIGENTE</a:t>
-            </a:r>
-          </a:p>
-          <a:p>
-            <a:pPr>
-              <a:defRPr sz="2400" b="1">
+              <a:t>SOLUCIÓN OPERATIVA</a:t>
+            </a:r>
+          </a:p>
+          <a:p>
+            <a:pPr>
+              <a:defRPr sz="2300" b="1">
                 <a:solidFill>
                   <a:srgbClr val="FFFFFF"/>
                 </a:solidFill>
               </a:defRPr>
             </a:pPr>
             <a:r>
-              <a:t>Estrategia Gradual y Punta de Lanza con Fan Clubs</a:t>
+              <a:t>De Álamos a Juriquilla: El Reto Operativo y la Automatización</a:t>
             </a:r>
           </a:p>
         </p:txBody>
@@ -4658,7 +5315,7 @@
         <p:spPr>
           <a:xfrm>
             <a:off x="731520" y="1645920"/>
-            <a:ext cx="5212080" cy="4572000"/>
+            <a:ext cx="5212080" cy="4663440"/>
           </a:xfrm>
           <a:prstGeom prst="roundRect">
             <a:avLst/>
@@ -4702,8 +5359,8 @@
         </p:nvSpPr>
         <p:spPr>
           <a:xfrm>
-            <a:off x="1005840" y="1920240"/>
-            <a:ext cx="4663440" cy="4023360"/>
+            <a:off x="1005840" y="1828800"/>
+            <a:ext cx="4663440" cy="4206240"/>
           </a:xfrm>
           <a:prstGeom prst="rect">
             <a:avLst/>
@@ -4722,12 +5379,12 @@
               </a:spcAft>
               <a:defRPr sz="1700" b="1">
                 <a:solidFill>
-                  <a:srgbClr val="FFB612"/>
-                </a:solidFill>
-              </a:defRPr>
-            </a:pPr>
-            <a:r>
-              <a:t>🎯 No Saturar: El Juego Indicado en el Día Indicado</a:t>
+                  <a:srgbClr val="FF5722"/>
+                </a:solidFill>
+              </a:defRPr>
+            </a:pPr>
+            <a:r>
+              <a:t>⚠️ El Dilema Operativo Actual</a:t>
             </a:r>
           </a:p>
           <a:p>
@@ -4737,27 +5394,27 @@
               </a:spcAft>
               <a:defRPr sz="1300" b="1">
                 <a:solidFill>
-                  <a:srgbClr val="FF5722"/>
-                </a:solidFill>
-              </a:defRPr>
-            </a:pPr>
-            <a:r>
-              <a:t>📅 Selección Quirúrgica de Fechas</a:t>
-            </a:r>
-          </a:p>
-          <a:p>
-            <a:pPr>
-              <a:spcAft>
-                <a:spcPts val="800"/>
-              </a:spcAft>
-              <a:defRPr sz="1100">
+                  <a:srgbClr val="FFD100"/>
+                </a:solidFill>
+              </a:defRPr>
+            </a:pPr>
+            <a:r>
+              <a:t>📍 Cambio a Juriquilla</a:t>
+            </a:r>
+          </a:p>
+          <a:p>
+            <a:pPr>
+              <a:spcAft>
+                <a:spcPts val="1000"/>
+              </a:spcAft>
+              <a:defRPr sz="1150">
                 <a:solidFill>
                   <a:srgbClr val="FFFFFF"/>
                 </a:solidFill>
               </a:defRPr>
             </a:pPr>
             <a:r>
-              <a:t>No se tienen que jugar todos los juegos todos los días. Saturar al cliente cansa. La clave es activar dinámicas exclusivamente en partidos estelares:</a:t>
+              <a:t>Ahora que estoy en Juriquilla, muchos comensales van buscando exactamente esas dinámicas divertidas que vivieron en Álamos.</a:t>
             </a:r>
           </a:p>
           <a:p>
@@ -4767,87 +5424,27 @@
               </a:spcAft>
               <a:defRPr sz="1300" b="1">
                 <a:solidFill>
-                  <a:srgbClr val="FF5722"/>
-                </a:solidFill>
-              </a:defRPr>
-            </a:pPr>
-            <a:r>
-              <a:t>🏈 Jueves, Domingos y Lunes</a:t>
-            </a:r>
-          </a:p>
-          <a:p>
-            <a:pPr>
-              <a:spcAft>
-                <a:spcPts val="800"/>
-              </a:spcAft>
-              <a:defRPr sz="1100">
+                  <a:srgbClr val="FFD100"/>
+                </a:solidFill>
+              </a:defRPr>
+            </a:pPr>
+            <a:r>
+              <a:t>⏱️ La Operación No Puede Descuidarse</a:t>
+            </a:r>
+          </a:p>
+          <a:p>
+            <a:pPr>
+              <a:spcAft>
+                <a:spcPts val="1000"/>
+              </a:spcAft>
+              <a:defRPr sz="1150">
                 <a:solidFill>
                   <a:srgbClr val="FFFFFF"/>
                 </a:solidFill>
               </a:defRPr>
             </a:pPr>
             <a:r>
-              <a:t>Quinielas y Grids de NFL durante transmisiones estelares.</a:t>
-            </a:r>
-          </a:p>
-          <a:p>
-            <a:pPr>
-              <a:spcAft>
-                <a:spcPts val="100"/>
-              </a:spcAft>
-              <a:defRPr sz="1300" b="1">
-                <a:solidFill>
-                  <a:srgbClr val="FF5722"/>
-                </a:solidFill>
-              </a:defRPr>
-            </a:pPr>
-            <a:r>
-              <a:t>⚽ Viernes a Domingo</a:t>
-            </a:r>
-          </a:p>
-          <a:p>
-            <a:pPr>
-              <a:spcAft>
-                <a:spcPts val="800"/>
-              </a:spcAft>
-              <a:defRPr sz="1100">
-                <a:solidFill>
-                  <a:srgbClr val="FFFFFF"/>
-                </a:solidFill>
-              </a:defRPr>
-            </a:pPr>
-            <a:r>
-              <a:t>Quinielas de Liga MX, First Striker y Clásicos de fútbol.</a:t>
-            </a:r>
-          </a:p>
-          <a:p>
-            <a:pPr>
-              <a:spcAft>
-                <a:spcPts val="100"/>
-              </a:spcAft>
-              <a:defRPr sz="1300" b="1">
-                <a:solidFill>
-                  <a:srgbClr val="FF5722"/>
-                </a:solidFill>
-              </a:defRPr>
-            </a:pPr>
-            <a:r>
-              <a:t>🧠 Medios Tiempos Selectos</a:t>
-            </a:r>
-          </a:p>
-          <a:p>
-            <a:pPr>
-              <a:spcAft>
-                <a:spcPts val="800"/>
-              </a:spcAft>
-              <a:defRPr sz="1100">
-                <a:solidFill>
-                  <a:srgbClr val="FFFFFF"/>
-                </a:solidFill>
-              </a:defRPr>
-            </a:pPr>
-            <a:r>
-              <a:t>Trivias rápidas de 10 min para reactivar consumo en la pausa.</a:t>
+              <a:t>Hoy mis deberes ya no son solo atender la barra, sino estar pendiente de la operación completa del restaurante. Es imposible descuidar el servicio para andar contando papeletas de papel o sumando puntos a mano.</a:t>
             </a:r>
           </a:p>
         </p:txBody>
@@ -4861,7 +5458,7 @@
         <p:spPr>
           <a:xfrm>
             <a:off x="6217920" y="1645920"/>
-            <a:ext cx="5212080" cy="4572000"/>
+            <a:ext cx="5212080" cy="4663440"/>
           </a:xfrm>
           <a:prstGeom prst="roundRect">
             <a:avLst/>
@@ -4905,8 +5502,8 @@
         </p:nvSpPr>
         <p:spPr>
           <a:xfrm>
-            <a:off x="6492240" y="1920240"/>
-            <a:ext cx="4663440" cy="4023360"/>
+            <a:off x="6492240" y="1828800"/>
+            <a:ext cx="4663440" cy="4206240"/>
           </a:xfrm>
           <a:prstGeom prst="rect">
             <a:avLst/>
@@ -4930,7 +5527,7 @@
               </a:defRPr>
             </a:pPr>
             <a:r>
-              <a:t>🛡️ Punta de Lanza: Steelers Nation QRO (71+ Fans)</a:t>
+              <a:t>🤖 La Solución: 80% Autónoma con IA</a:t>
             </a:r>
           </a:p>
           <a:p>
@@ -4945,22 +5542,22 @@
               </a:defRPr>
             </a:pPr>
             <a:r>
-              <a:t>💳 Audiencia Cautiva y Lista</a:t>
-            </a:r>
-          </a:p>
-          <a:p>
-            <a:pPr>
-              <a:spcAft>
-                <a:spcPts val="800"/>
-              </a:spcAft>
-              <a:defRPr sz="1100">
+              <a:t>⚡ Cero Tiempo Perdido por el Gerente</a:t>
+            </a:r>
+          </a:p>
+          <a:p>
+            <a:pPr>
+              <a:spcAft>
+                <a:spcPts val="1000"/>
+              </a:spcAft>
+              <a:defRPr sz="1150">
                 <a:solidFill>
                   <a:srgbClr val="FFFFFF"/>
                 </a:solidFill>
               </a:defRPr>
             </a:pPr>
             <a:r>
-              <a:t>En Querétaro ya contamos con más de 71 fanáticos registrados en la app oficial de Steelers Fan Club, con su credencial digital PWA activa en sus celulares.</a:t>
+              <a:t>La app se administra sola en un 80%. Se conecta en vivo a ESPN y calcula marcadores oficiales sin intervención humana.</a:t>
             </a:r>
           </a:p>
           <a:p>
@@ -4975,22 +5572,22 @@
               </a:defRPr>
             </a:pPr>
             <a:r>
-              <a:t>📲 Botón Directo Integrado</a:t>
-            </a:r>
-          </a:p>
-          <a:p>
-            <a:pPr>
-              <a:spcAft>
-                <a:spcPts val="800"/>
-              </a:spcAft>
-              <a:defRPr sz="1100">
+              <a:t>🧠 Creación con IA en Segundos</a:t>
+            </a:r>
+          </a:p>
+          <a:p>
+            <a:pPr>
+              <a:spcAft>
+                <a:spcPts val="1000"/>
+              </a:spcAft>
+              <a:defRPr sz="1150">
                 <a:solidFill>
                   <a:srgbClr val="FFFFFF"/>
                 </a:solidFill>
               </a:defRPr>
             </a:pPr>
             <a:r>
-              <a:t>Su credencial ya incluye el botón especial que los enlaza directamente a Drinks &amp; Wins para participar en las dinámicas de cada partido.</a:t>
+              <a:t>La IA genera trivias deportivas y redacta preguntas temáticas para días de partido en 10 segundos.</a:t>
             </a:r>
           </a:p>
           <a:p>
@@ -5005,22 +5602,22 @@
               </a:defRPr>
             </a:pPr>
             <a:r>
-              <a:t>🍻 Asistencia Garantizada</a:t>
-            </a:r>
-          </a:p>
-          <a:p>
-            <a:pPr>
-              <a:spcAft>
-                <a:spcPts val="800"/>
-              </a:spcAft>
-              <a:defRPr sz="1100">
+              <a:t>📊 Cero Papel y Cero Errores</a:t>
+            </a:r>
+          </a:p>
+          <a:p>
+            <a:pPr>
+              <a:spcAft>
+                <a:spcPts val="1000"/>
+              </a:spcAft>
+              <a:defRPr sz="1150">
                 <a:solidFill>
                   <a:srgbClr val="FFFFFF"/>
                 </a:solidFill>
               </a:defRPr>
             </a:pPr>
             <a:r>
-              <a:t>Este grupo ya llena mesas, pide rondas continuas y consume activamente alitas y cerveza semana a semana. Es la base perfecta para arrancar con éxito probado.</a:t>
+              <a:t>Elimina impresiones, plumas y quejas de clientes por conteos incorrectos. Todo es transparente y en vivo en el celular del cliente.</a:t>
             </a:r>
           </a:p>
         </p:txBody>
@@ -5059,7 +5656,7 @@
         </p:nvSpPr>
         <p:spPr>
           <a:xfrm>
-            <a:off x="731520" y="411480"/>
+            <a:off x="731520" y="365760"/>
             <a:ext cx="10698480" cy="1005840"/>
           </a:xfrm>
           <a:prstGeom prst="rect">
@@ -5075,28 +5672,28 @@
           <a:p>
             <a:pPr>
               <a:spcAft>
-                <a:spcPts val="300"/>
-              </a:spcAft>
-              <a:defRPr sz="1050" b="1">
+                <a:spcPts val="200"/>
+              </a:spcAft>
+              <a:defRPr sz="1000" b="1">
                 <a:solidFill>
                   <a:srgbClr val="FFB612"/>
                 </a:solidFill>
               </a:defRPr>
             </a:pPr>
             <a:r>
-              <a:t>EFICIENCIA OPERATIVA</a:t>
-            </a:r>
-          </a:p>
-          <a:p>
-            <a:pPr>
-              <a:defRPr sz="2400" b="1">
+              <a:t>TRACCIÓN REAL EN QUERÉTARO</a:t>
+            </a:r>
+          </a:p>
+          <a:p>
+            <a:pPr>
+              <a:defRPr sz="2300" b="1">
                 <a:solidFill>
                   <a:srgbClr val="FFFFFF"/>
                 </a:solidFill>
               </a:defRPr>
             </a:pPr>
             <a:r>
-              <a:t>Inteligencia Artificial y Automatización: Cero Carga para el Gerente</a:t>
+              <a:t>Potencial Inmediato: 71 Fans en 2 Semanas de una Base de +350</a:t>
             </a:r>
           </a:p>
         </p:txBody>
@@ -5110,7 +5707,7 @@
         <p:spPr>
           <a:xfrm>
             <a:off x="731520" y="1645920"/>
-            <a:ext cx="3413455" cy="4572000"/>
+            <a:ext cx="10728655" cy="4663440"/>
           </a:xfrm>
           <a:prstGeom prst="roundRect">
             <a:avLst/>
@@ -5154,8 +5751,8 @@
         </p:nvSpPr>
         <p:spPr>
           <a:xfrm>
-            <a:off x="1005840" y="1920240"/>
-            <a:ext cx="2864815" cy="4023360"/>
+            <a:off x="1097280" y="1828800"/>
+            <a:ext cx="9966960" cy="4206240"/>
           </a:xfrm>
           <a:prstGeom prst="rect">
             <a:avLst/>
@@ -5170,222 +5767,106 @@
           <a:p>
             <a:pPr>
               <a:spcAft>
-                <a:spcPts val="1400"/>
-              </a:spcAft>
-              <a:defRPr sz="1650" b="1">
+                <a:spcPts val="1200"/>
+              </a:spcAft>
+              <a:defRPr sz="1700" b="1">
                 <a:solidFill>
                   <a:srgbClr val="FFB612"/>
                 </a:solidFill>
               </a:defRPr>
             </a:pPr>
             <a:r>
-              <a:t>⚡ Creación de Jornadas en Segundos</a:t>
-            </a:r>
-          </a:p>
-          <a:p>
-            <a:pPr>
-              <a:defRPr sz="1300">
+              <a:t>🏈 La Punta de Lanza: Steelers Nation Querétaro</a:t>
+            </a:r>
+          </a:p>
+          <a:p>
+            <a:pPr>
+              <a:spcAft>
+                <a:spcPts val="200"/>
+              </a:spcAft>
+              <a:defRPr sz="1400" b="1">
+                <a:solidFill>
+                  <a:srgbClr val="FFD100"/>
+                </a:solidFill>
+              </a:defRPr>
+            </a:pPr>
+            <a:r>
+              <a:t>📈 Crecimiento Explosivo Orgánico</a:t>
+            </a:r>
+          </a:p>
+          <a:p>
+            <a:pPr>
+              <a:spcAft>
+                <a:spcPts val="1000"/>
+              </a:spcAft>
+              <a:defRPr sz="1200">
                 <a:solidFill>
                   <a:srgbClr val="FFFFFF"/>
                 </a:solidFill>
               </a:defRPr>
             </a:pPr>
             <a:r>
-              <a:t>Antes: Un gerente tardaba hasta 2 horas buscando partidos en internet, armando tablas en Excel e imprimiendo hojas.</a:t>
-            </a:r>
-            <a:br/>
-            <a:r>
-              <a:t>Hoy: Conexión directa a ESPN y algoritmos que importan partidos oficiales, horarios y escudos con un solo clic.</a:t>
-            </a:r>
-          </a:p>
-        </p:txBody>
-      </p:sp>
-      <p:sp>
-        <p:nvSpPr>
-          <p:cNvPr id="5" name="Rounded Rectangle 4"/>
-          <p:cNvSpPr/>
-          <p:nvPr/>
-        </p:nvSpPr>
-        <p:spPr>
-          <a:xfrm>
-            <a:off x="4389120" y="1645920"/>
-            <a:ext cx="3413455" cy="4572000"/>
-          </a:xfrm>
-          <a:prstGeom prst="roundRect">
-            <a:avLst/>
-          </a:prstGeom>
-          <a:solidFill>
-            <a:srgbClr val="141A26"/>
-          </a:solidFill>
-          <a:ln w="19050">
-            <a:solidFill>
-              <a:srgbClr val="283246"/>
-            </a:solidFill>
-          </a:ln>
-        </p:spPr>
-        <p:style>
-          <a:lnRef idx="1">
-            <a:schemeClr val="accent1"/>
-          </a:lnRef>
-          <a:fillRef idx="3">
-            <a:schemeClr val="accent1"/>
-          </a:fillRef>
-          <a:effectRef idx="2">
-            <a:schemeClr val="accent1"/>
-          </a:effectRef>
-          <a:fontRef idx="minor">
-            <a:schemeClr val="lt1"/>
-          </a:fontRef>
-        </p:style>
-        <p:txBody>
-          <a:bodyPr rtlCol="0" anchor="ctr"/>
-          <a:lstStyle/>
-          <a:p>
-            <a:pPr algn="ctr"/>
-          </a:p>
-        </p:txBody>
-      </p:sp>
-      <p:sp>
-        <p:nvSpPr>
-          <p:cNvPr id="6" name="TextBox 5"/>
-          <p:cNvSpPr txBox="1"/>
-          <p:nvPr/>
-        </p:nvSpPr>
-        <p:spPr>
-          <a:xfrm>
-            <a:off x="4663440" y="1920240"/>
-            <a:ext cx="2864815" cy="4023360"/>
-          </a:xfrm>
-          <a:prstGeom prst="rect">
-            <a:avLst/>
-          </a:prstGeom>
-          <a:noFill/>
-        </p:spPr>
-        <p:txBody>
-          <a:bodyPr wrap="square">
-            <a:spAutoFit/>
-          </a:bodyPr>
-          <a:lstStyle/>
-          <a:p>
-            <a:pPr>
-              <a:spcAft>
-                <a:spcPts val="1400"/>
-              </a:spcAft>
-              <a:defRPr sz="1650" b="1">
-                <a:solidFill>
-                  <a:srgbClr val="FF5722"/>
-                </a:solidFill>
-              </a:defRPr>
-            </a:pPr>
-            <a:r>
-              <a:t>🧠 Generación de Trivias Deportivas con IA</a:t>
-            </a:r>
-          </a:p>
-          <a:p>
-            <a:pPr>
-              <a:defRPr sz="1300">
+              <a:t>En tan solo 2 semanas desde el lanzamiento de la Credencial Digital de Steelers Nation QRO, ya se han registrado 71 miembros oficiales en la app. Pero son más de 350 fanáticos activos en la comunidad de Querétaro.</a:t>
+            </a:r>
+          </a:p>
+          <a:p>
+            <a:pPr>
+              <a:spcAft>
+                <a:spcPts val="200"/>
+              </a:spcAft>
+              <a:defRPr sz="1400" b="1">
+                <a:solidFill>
+                  <a:srgbClr val="FFD100"/>
+                </a:solidFill>
+              </a:defRPr>
+            </a:pPr>
+            <a:r>
+              <a:t>📲 Conexión Directa desde su Credencial Digital (PWA)</a:t>
+            </a:r>
+          </a:p>
+          <a:p>
+            <a:pPr>
+              <a:spcAft>
+                <a:spcPts val="1000"/>
+              </a:spcAft>
+              <a:defRPr sz="1200">
                 <a:solidFill>
                   <a:srgbClr val="FFFFFF"/>
                 </a:solidFill>
               </a:defRPr>
             </a:pPr>
             <a:r>
-              <a:t>La Inteligencia Artificial genera sets completos de preguntas deportivas temáticas (NFL, Liga MX, datos curiosos de Steelers) adaptadas al partido del día en menos de 10 segundos, listas para proyectar en TV.</a:t>
-            </a:r>
-          </a:p>
-        </p:txBody>
-      </p:sp>
-      <p:sp>
-        <p:nvSpPr>
-          <p:cNvPr id="7" name="Rounded Rectangle 6"/>
-          <p:cNvSpPr/>
-          <p:nvPr/>
-        </p:nvSpPr>
-        <p:spPr>
-          <a:xfrm>
-            <a:off x="8046720" y="1645920"/>
-            <a:ext cx="3413455" cy="4572000"/>
-          </a:xfrm>
-          <a:prstGeom prst="roundRect">
-            <a:avLst/>
-          </a:prstGeom>
-          <a:solidFill>
-            <a:srgbClr val="141A26"/>
-          </a:solidFill>
-          <a:ln w="19050">
-            <a:solidFill>
-              <a:srgbClr val="283246"/>
-            </a:solidFill>
-          </a:ln>
-        </p:spPr>
-        <p:style>
-          <a:lnRef idx="1">
-            <a:schemeClr val="accent1"/>
-          </a:lnRef>
-          <a:fillRef idx="3">
-            <a:schemeClr val="accent1"/>
-          </a:fillRef>
-          <a:effectRef idx="2">
-            <a:schemeClr val="accent1"/>
-          </a:effectRef>
-          <a:fontRef idx="minor">
-            <a:schemeClr val="lt1"/>
-          </a:fontRef>
-        </p:style>
-        <p:txBody>
-          <a:bodyPr rtlCol="0" anchor="ctr"/>
-          <a:lstStyle/>
-          <a:p>
-            <a:pPr algn="ctr"/>
-          </a:p>
-        </p:txBody>
-      </p:sp>
-      <p:sp>
-        <p:nvSpPr>
-          <p:cNvPr id="8" name="TextBox 7"/>
-          <p:cNvSpPr txBox="1"/>
-          <p:nvPr/>
-        </p:nvSpPr>
-        <p:spPr>
-          <a:xfrm>
-            <a:off x="8321040" y="1920240"/>
-            <a:ext cx="2864815" cy="4023360"/>
-          </a:xfrm>
-          <a:prstGeom prst="rect">
-            <a:avLst/>
-          </a:prstGeom>
-          <a:noFill/>
-        </p:spPr>
-        <p:txBody>
-          <a:bodyPr wrap="square">
-            <a:spAutoFit/>
-          </a:bodyPr>
-          <a:lstStyle/>
-          <a:p>
-            <a:pPr>
-              <a:spcAft>
-                <a:spcPts val="1400"/>
-              </a:spcAft>
-              <a:defRPr sz="1650" b="1">
-                <a:solidFill>
-                  <a:srgbClr val="00E676"/>
-                </a:solidFill>
-              </a:defRPr>
-            </a:pPr>
-            <a:r>
-              <a:t>📊 Marcadores Exactos y Calificación en Tiempo Real</a:t>
-            </a:r>
-          </a:p>
-          <a:p>
-            <a:pPr>
-              <a:defRPr sz="1300">
+              <a:t>La credencial digital de los fans tiene un botón especial integrado que los manda directamente a Drinks &amp; Wins para participar en las dinámicas de cada juego. Es una audiencia cautiva que ya ama la marca.</a:t>
+            </a:r>
+          </a:p>
+          <a:p>
+            <a:pPr>
+              <a:spcAft>
+                <a:spcPts val="200"/>
+              </a:spcAft>
+              <a:defRPr sz="1400" b="1">
+                <a:solidFill>
+                  <a:srgbClr val="FFD100"/>
+                </a:solidFill>
+              </a:defRPr>
+            </a:pPr>
+            <a:r>
+              <a:t>🍻 Asistencia y Consumo Comprobado</a:t>
+            </a:r>
+          </a:p>
+          <a:p>
+            <a:pPr>
+              <a:spcAft>
+                <a:spcPts val="1000"/>
+              </a:spcAft>
+              <a:defRPr sz="1200">
                 <a:solidFill>
                   <a:srgbClr val="FFFFFF"/>
                 </a:solidFill>
               </a:defRPr>
             </a:pPr>
             <a:r>
-              <a:t>La plataforma detecta marcadores finales en vivo vía API de ESPN, calcula aciertos exactos (+3) o ganadores (+1), genera la tabla y proclama al campeón de forma 100% automática sin errores humanos.</a:t>
+              <a:t>Este grupo no viene solo por una cerveza: llenan mesas enteras, piden cubetazos, rondas continuas de alitas y se quedan durante toda la transmisión del partido. Es el motor perfecto para arrancar en Juriquilla.</a:t>
             </a:r>
           </a:p>
         </p:txBody>
@@ -5424,7 +5905,7 @@
         </p:nvSpPr>
         <p:spPr>
           <a:xfrm>
-            <a:off x="731520" y="411480"/>
+            <a:off x="731520" y="365760"/>
             <a:ext cx="10698480" cy="1005840"/>
           </a:xfrm>
           <a:prstGeom prst="rect">
@@ -5440,28 +5921,28 @@
           <a:p>
             <a:pPr>
               <a:spcAft>
-                <a:spcPts val="300"/>
-              </a:spcAft>
-              <a:defRPr sz="1050" b="1">
+                <a:spcPts val="200"/>
+              </a:spcAft>
+              <a:defRPr sz="1000" b="1">
                 <a:solidFill>
                   <a:srgbClr val="FFB612"/>
                 </a:solidFill>
               </a:defRPr>
             </a:pPr>
             <a:r>
-              <a:t>DETALLE PASO A PASO POR JUEGO</a:t>
-            </a:r>
-          </a:p>
-          <a:p>
-            <a:pPr>
-              <a:defRPr sz="2400" b="1">
+              <a:t>EXPERIENCIA DE USUARIO SIN FRICCIÓN</a:t>
+            </a:r>
+          </a:p>
+          <a:p>
+            <a:pPr>
+              <a:defRPr sz="2300" b="1">
                 <a:solidFill>
                   <a:srgbClr val="FFFFFF"/>
                 </a:solidFill>
               </a:defRPr>
             </a:pPr>
             <a:r>
-              <a:t>Juego 1: Quinielas Pick'em (NFL y Liga MX)</a:t>
+              <a:t>Guía del Cliente: Cómo Ingresar, Registrarse e Instalar la App</a:t>
             </a:r>
           </a:p>
         </p:txBody>
@@ -5475,7 +5956,7 @@
         <p:spPr>
           <a:xfrm>
             <a:off x="731520" y="1645920"/>
-            <a:ext cx="6858000" cy="4572000"/>
+            <a:ext cx="3413455" cy="4663440"/>
           </a:xfrm>
           <a:prstGeom prst="roundRect">
             <a:avLst/>
@@ -5520,7 +6001,7 @@
         <p:spPr>
           <a:xfrm>
             <a:off x="1005840" y="1828800"/>
-            <a:ext cx="6309360" cy="4114800"/>
+            <a:ext cx="2864815" cy="4206240"/>
           </a:xfrm>
           <a:prstGeom prst="rect">
             <a:avLst/>
@@ -5535,119 +6016,250 @@
           <a:p>
             <a:pPr>
               <a:spcAft>
-                <a:spcPts val="200"/>
-              </a:spcAft>
-              <a:defRPr sz="1400" b="1">
+                <a:spcPts val="1400"/>
+              </a:spcAft>
+              <a:defRPr sz="1600" b="1">
                 <a:solidFill>
                   <a:srgbClr val="FFB612"/>
                 </a:solidFill>
               </a:defRPr>
             </a:pPr>
             <a:r>
-              <a:t>🛠️ 1. CÓMO LO CREA EL GERENTE (60 seg)</a:t>
-            </a:r>
-          </a:p>
-          <a:p>
-            <a:pPr>
-              <a:spcAft>
-                <a:spcPts val="1000"/>
-              </a:spcAft>
-              <a:defRPr sz="1150">
+              <a:t>1. CÓMO INGRESA</a:t>
+            </a:r>
+          </a:p>
+          <a:p>
+            <a:pPr>
+              <a:defRPr sz="1250">
                 <a:solidFill>
                   <a:srgbClr val="FFFFFF"/>
                 </a:solidFill>
               </a:defRPr>
             </a:pPr>
             <a:r>
-              <a:t>Entra al panel Admin, selecciona la liga (NFL, Liga MX o fútbol europeo). El sistema jala los partidos oficiales con escudos de ESPN. Toca los partidos a incluir, asigna el premio (ej. Orden de Alitas + Cerveza) y da clic en 'Crear Quiniela'.</a:t>
-            </a:r>
-          </a:p>
-          <a:p>
-            <a:pPr>
-              <a:spcAft>
-                <a:spcPts val="200"/>
-              </a:spcAft>
-              <a:defRPr sz="1400" b="1">
-                <a:solidFill>
-                  <a:srgbClr val="FFB612"/>
-                </a:solidFill>
-              </a:defRPr>
-            </a:pPr>
-            <a:r>
-              <a:t>📱 2. CÓMO ENTRA Y JUEGA EL CLIENTE</a:t>
-            </a:r>
-          </a:p>
-          <a:p>
-            <a:pPr>
-              <a:spcAft>
-                <a:spcPts val="1000"/>
-              </a:spcAft>
-              <a:defRPr sz="1150">
-                <a:solidFill>
-                  <a:srgbClr val="FFFFFF"/>
-                </a:solidFill>
-              </a:defRPr>
-            </a:pPr>
-            <a:r>
-              <a:t>Escanea el QR de su mesa, ingresa con su nombre o Google, selecciona a su mesero y captura sus marcadores o ganadores en la pantalla interactiva antes del silbatazo inicial.</a:t>
-            </a:r>
-          </a:p>
-          <a:p>
-            <a:pPr>
-              <a:spcAft>
-                <a:spcPts val="200"/>
-              </a:spcAft>
-              <a:defRPr sz="1400" b="1">
-                <a:solidFill>
-                  <a:srgbClr val="FFB612"/>
-                </a:solidFill>
-              </a:defRPr>
-            </a:pPr>
-            <a:r>
-              <a:t>🏆 3. CÓMO GANA Y CANJEA</a:t>
-            </a:r>
-          </a:p>
-          <a:p>
-            <a:pPr>
-              <a:spcAft>
-                <a:spcPts val="1000"/>
-              </a:spcAft>
-              <a:defRPr sz="1150">
-                <a:solidFill>
-                  <a:srgbClr val="FFFFFF"/>
-                </a:solidFill>
-              </a:defRPr>
-            </a:pPr>
-            <a:r>
-              <a:t>Durante el partido, los marcadores cambian en tiempo real. Marcador exacto: +3 pts (verde), Ganador: +1 pt (dorado), Error: 0 pts (rojo). Al finalizar, el comensal número 1 en el podio recibe la corona y muestra su cupón digital en barra para reclamar su premio.</a:t>
-            </a:r>
-          </a:p>
-        </p:txBody>
-      </p:sp>
-      <p:pic>
-        <p:nvPicPr>
-          <p:cNvPr id="5" name="Picture 4" descr="screenshot_podium_standings.png"/>
-          <p:cNvPicPr>
-            <a:picLocks noChangeAspect="1"/>
-          </p:cNvPicPr>
+              <a:t>📱 En su mesa encuentra el código QR en el acrílico.</a:t>
+            </a:r>
+            <a:br/>
+            <a:r>
+              <a:t>• Abre la cámara de su celular y apunta al QR.</a:t>
+            </a:r>
+            <a:br/>
+            <a:r>
+              <a:t>• Entra en 3 segundos en su navegador web sin descargas pesadas ni tiendas de aplicaciones.</a:t>
+            </a:r>
+          </a:p>
+        </p:txBody>
+      </p:sp>
+      <p:sp>
+        <p:nvSpPr>
+          <p:cNvPr id="5" name="Rounded Rectangle 4"/>
+          <p:cNvSpPr/>
           <p:nvPr/>
-        </p:nvPicPr>
-        <p:blipFill>
-          <a:blip r:embed="rId2"/>
-          <a:stretch>
-            <a:fillRect/>
-          </a:stretch>
-        </p:blipFill>
-        <p:spPr>
-          <a:xfrm>
-            <a:off x="7863840" y="1645920"/>
-            <a:ext cx="8669867" cy="4572000"/>
+        </p:nvSpPr>
+        <p:spPr>
+          <a:xfrm>
+            <a:off x="4389120" y="1645920"/>
+            <a:ext cx="3413455" cy="4663440"/>
+          </a:xfrm>
+          <a:prstGeom prst="roundRect">
+            <a:avLst/>
+          </a:prstGeom>
+          <a:solidFill>
+            <a:srgbClr val="141A26"/>
+          </a:solidFill>
+          <a:ln w="19050">
+            <a:solidFill>
+              <a:srgbClr val="283246"/>
+            </a:solidFill>
+          </a:ln>
+        </p:spPr>
+        <p:style>
+          <a:lnRef idx="1">
+            <a:schemeClr val="accent1"/>
+          </a:lnRef>
+          <a:fillRef idx="3">
+            <a:schemeClr val="accent1"/>
+          </a:fillRef>
+          <a:effectRef idx="2">
+            <a:schemeClr val="accent1"/>
+          </a:effectRef>
+          <a:fontRef idx="minor">
+            <a:schemeClr val="lt1"/>
+          </a:fontRef>
+        </p:style>
+        <p:txBody>
+          <a:bodyPr rtlCol="0" anchor="ctr"/>
+          <a:lstStyle/>
+          <a:p>
+            <a:pPr algn="ctr"/>
+          </a:p>
+        </p:txBody>
+      </p:sp>
+      <p:sp>
+        <p:nvSpPr>
+          <p:cNvPr id="6" name="TextBox 5"/>
+          <p:cNvSpPr txBox="1"/>
+          <p:nvPr/>
+        </p:nvSpPr>
+        <p:spPr>
+          <a:xfrm>
+            <a:off x="4663440" y="1828800"/>
+            <a:ext cx="2864815" cy="4206240"/>
           </a:xfrm>
           <a:prstGeom prst="rect">
             <a:avLst/>
           </a:prstGeom>
-        </p:spPr>
-      </p:pic>
+          <a:noFill/>
+        </p:spPr>
+        <p:txBody>
+          <a:bodyPr wrap="square">
+            <a:spAutoFit/>
+          </a:bodyPr>
+          <a:lstStyle/>
+          <a:p>
+            <a:pPr>
+              <a:spcAft>
+                <a:spcPts val="1400"/>
+              </a:spcAft>
+              <a:defRPr sz="1600" b="1">
+                <a:solidFill>
+                  <a:srgbClr val="FF5722"/>
+                </a:solidFill>
+              </a:defRPr>
+            </a:pPr>
+            <a:r>
+              <a:t>2. CÓMO SE REGISTRA</a:t>
+            </a:r>
+          </a:p>
+          <a:p>
+            <a:pPr>
+              <a:defRPr sz="1250">
+                <a:solidFill>
+                  <a:srgbClr val="FFFFFF"/>
+                </a:solidFill>
+              </a:defRPr>
+            </a:pPr>
+            <a:r>
+              <a:t>👤 Con un solo toque inicia sesión con su cuenta de Google o escribe su nombre/apodo.</a:t>
+            </a:r>
+            <a:br/>
+            <a:r>
+              <a:t>• Selecciona el nombre del mesero que lo atiende.</a:t>
+            </a:r>
+            <a:br/>
+            <a:r>
+              <a:t>• Todo queda guardado en la nube al instante.</a:t>
+            </a:r>
+          </a:p>
+        </p:txBody>
+      </p:sp>
+      <p:sp>
+        <p:nvSpPr>
+          <p:cNvPr id="7" name="Rounded Rectangle 6"/>
+          <p:cNvSpPr/>
+          <p:nvPr/>
+        </p:nvSpPr>
+        <p:spPr>
+          <a:xfrm>
+            <a:off x="8046720" y="1645920"/>
+            <a:ext cx="3413455" cy="4663440"/>
+          </a:xfrm>
+          <a:prstGeom prst="roundRect">
+            <a:avLst/>
+          </a:prstGeom>
+          <a:solidFill>
+            <a:srgbClr val="141A26"/>
+          </a:solidFill>
+          <a:ln w="19050">
+            <a:solidFill>
+              <a:srgbClr val="283246"/>
+            </a:solidFill>
+          </a:ln>
+        </p:spPr>
+        <p:style>
+          <a:lnRef idx="1">
+            <a:schemeClr val="accent1"/>
+          </a:lnRef>
+          <a:fillRef idx="3">
+            <a:schemeClr val="accent1"/>
+          </a:fillRef>
+          <a:effectRef idx="2">
+            <a:schemeClr val="accent1"/>
+          </a:effectRef>
+          <a:fontRef idx="minor">
+            <a:schemeClr val="lt1"/>
+          </a:fontRef>
+        </p:style>
+        <p:txBody>
+          <a:bodyPr rtlCol="0" anchor="ctr"/>
+          <a:lstStyle/>
+          <a:p>
+            <a:pPr algn="ctr"/>
+          </a:p>
+        </p:txBody>
+      </p:sp>
+      <p:sp>
+        <p:nvSpPr>
+          <p:cNvPr id="8" name="TextBox 7"/>
+          <p:cNvSpPr txBox="1"/>
+          <p:nvPr/>
+        </p:nvSpPr>
+        <p:spPr>
+          <a:xfrm>
+            <a:off x="8321040" y="1828800"/>
+            <a:ext cx="2864815" cy="4206240"/>
+          </a:xfrm>
+          <a:prstGeom prst="rect">
+            <a:avLst/>
+          </a:prstGeom>
+          <a:noFill/>
+        </p:spPr>
+        <p:txBody>
+          <a:bodyPr wrap="square">
+            <a:spAutoFit/>
+          </a:bodyPr>
+          <a:lstStyle/>
+          <a:p>
+            <a:pPr>
+              <a:spcAft>
+                <a:spcPts val="1400"/>
+              </a:spcAft>
+              <a:defRPr sz="1600" b="1">
+                <a:solidFill>
+                  <a:srgbClr val="00E676"/>
+                </a:solidFill>
+              </a:defRPr>
+            </a:pPr>
+            <a:r>
+              <a:t>3. CÓMO SE INSTALA (PWA)</a:t>
+            </a:r>
+          </a:p>
+          <a:p>
+            <a:pPr>
+              <a:defRPr sz="1250">
+                <a:solidFill>
+                  <a:srgbClr val="FFFFFF"/>
+                </a:solidFill>
+              </a:defRPr>
+            </a:pPr>
+            <a:r>
+              <a:t>📲 Se instala como una app nativa en 1 clic:</a:t>
+            </a:r>
+            <a:br/>
+            <a:r>
+              <a:t>• En iPhone: Compartir ➔ 'Agregar a pantalla de inicio'.</a:t>
+            </a:r>
+            <a:br/>
+            <a:r>
+              <a:t>• En Android: Toca el aviso 'Instalar App'.</a:t>
+            </a:r>
+            <a:br/>
+            <a:r>
+              <a:t>• ¡Queda el icono oficial en su celular para siempre!</a:t>
+            </a:r>
+          </a:p>
+        </p:txBody>
+      </p:sp>
     </p:spTree>
   </p:cSld>
   <p:clrMapOvr>
@@ -5682,7 +6294,7 @@
         </p:nvSpPr>
         <p:spPr>
           <a:xfrm>
-            <a:off x="731520" y="411480"/>
+            <a:off x="731520" y="365760"/>
             <a:ext cx="10698480" cy="1005840"/>
           </a:xfrm>
           <a:prstGeom prst="rect">
@@ -5698,28 +6310,28 @@
           <a:p>
             <a:pPr>
               <a:spcAft>
-                <a:spcPts val="300"/>
-              </a:spcAft>
-              <a:defRPr sz="1050" b="1">
+                <a:spcPts val="200"/>
+              </a:spcAft>
+              <a:defRPr sz="1000" b="1">
                 <a:solidFill>
                   <a:srgbClr val="FFB612"/>
                 </a:solidFill>
               </a:defRPr>
             </a:pPr>
             <a:r>
-              <a:t>DETALLE PASO A PASO POR JUEGO</a:t>
-            </a:r>
-          </a:p>
-          <a:p>
-            <a:pPr>
-              <a:defRPr sz="2400" b="1">
+              <a:t>JUEGO POR JUEGO EN DETALLE</a:t>
+            </a:r>
+          </a:p>
+          <a:p>
+            <a:pPr>
+              <a:defRPr sz="2300" b="1">
                 <a:solidFill>
                   <a:srgbClr val="FFFFFF"/>
                 </a:solidFill>
               </a:defRPr>
             </a:pPr>
             <a:r>
-              <a:t>Juego 2: Football Grids (100 Casillas Digitales)</a:t>
+              <a:t>Football Grids (100 Casillas NFL): Dinámica y Creación</a:t>
             </a:r>
           </a:p>
         </p:txBody>
@@ -5733,7 +6345,7 @@
         <p:spPr>
           <a:xfrm>
             <a:off x="731520" y="1645920"/>
-            <a:ext cx="6858000" cy="4572000"/>
+            <a:ext cx="6858000" cy="4663440"/>
           </a:xfrm>
           <a:prstGeom prst="roundRect">
             <a:avLst/>
@@ -5778,7 +6390,7 @@
         <p:spPr>
           <a:xfrm>
             <a:off x="1005840" y="1828800"/>
-            <a:ext cx="6309360" cy="4114800"/>
+            <a:ext cx="6309360" cy="4206240"/>
           </a:xfrm>
           <a:prstGeom prst="rect">
             <a:avLst/>
@@ -5795,14 +6407,14 @@
               <a:spcAft>
                 <a:spcPts val="200"/>
               </a:spcAft>
-              <a:defRPr sz="1400" b="1">
+              <a:defRPr sz="1350" b="1">
                 <a:solidFill>
                   <a:srgbClr val="FF5722"/>
                 </a:solidFill>
               </a:defRPr>
             </a:pPr>
             <a:r>
-              <a:t>🛠️ 1. CÓMO LO CREA EL GERENTE (30 seg)</a:t>
+              <a:t>🛠️ CÓMO LO CREA EL GERENTE (30 segundos)</a:t>
             </a:r>
           </a:p>
           <a:p>
@@ -5817,7 +6429,7 @@
               </a:defRPr>
             </a:pPr>
             <a:r>
-              <a:t>Selecciona el partido estelar de NFL (Sunday Night o Steelers). El sistema genera la cuadrícula digital de 10x10 (100 casillas) con los logotipos oficiales de los dos equipos rivales.</a:t>
+              <a:t>Entra al panel Admin, elige el partido estelar de la NFL (ej. Steelers vs Bills). Con un solo clic, el sistema genera la cuadrícula digital de 10x10 (100 casillas) con los logotipos oficiales de los dos equipos.</a:t>
             </a:r>
           </a:p>
           <a:p>
@@ -5825,14 +6437,14 @@
               <a:spcAft>
                 <a:spcPts val="200"/>
               </a:spcAft>
-              <a:defRPr sz="1400" b="1">
+              <a:defRPr sz="1350" b="1">
                 <a:solidFill>
                   <a:srgbClr val="FF5722"/>
                 </a:solidFill>
               </a:defRPr>
             </a:pPr>
             <a:r>
-              <a:t>📱 2. CÓMO ENTRA Y JUEGA EL CLIENTE</a:t>
+              <a:t>📱 CÓMO JUEGA EL CLIENTE EN MESA</a:t>
             </a:r>
           </a:p>
           <a:p>
@@ -5847,7 +6459,7 @@
               </a:defRPr>
             </a:pPr>
             <a:r>
-              <a:t>Escanea el QR en mesa, ve la cuadrícula en su celular y toca las casillas vacías que desea apartar con su nombre o apodo, apoyando a su equipo con amigos.</a:t>
+              <a:t>El comensal escanea el QR, ve la cuadrícula en su smartphone y toca las casillas vacías que desea apartar con su nombre o apodo para competir amistosamente con sus amigos.</a:t>
             </a:r>
           </a:p>
           <a:p>
@@ -5855,14 +6467,14 @@
               <a:spcAft>
                 <a:spcPts val="200"/>
               </a:spcAft>
-              <a:defRPr sz="1400" b="1">
+              <a:defRPr sz="1350" b="1">
                 <a:solidFill>
                   <a:srgbClr val="FF5722"/>
                 </a:solidFill>
               </a:defRPr>
             </a:pPr>
             <a:r>
-              <a:t>🏆 3. CÓMO GANA Y MANTIENE EL CONSUMO</a:t>
+              <a:t>🏆 CÓMO GANA Y POR QUÉ VENDE TANTO</a:t>
             </a:r>
           </a:p>
           <a:p>
@@ -5877,7 +6489,7 @@
               </a:defRPr>
             </a:pPr>
             <a:r>
-              <a:t>Al inicio del partido, el sistema sortea los dígitos del 0 al 9 en filas y columnas. ¡Hay 4 GANADORES por partido! (Al término del 1Q, Medio Tiempo, 3Q y Final según el último dígito del marcador). Mantiene a la mesa comiendo y bebiendo durante las 3 horas completas.</a:t>
+              <a:t>Al inicio del partido, el sistema sortea automáticamente los dígitos del 0 al 9 en filas y columnas. ¡Hay 4 GANADORES por partido! (Al final del 1Q, 2Q, 3Q y Final según el último dígito del marcador). Esto mantiene a la mesa consumiendo cervezas y botanas durante las 3 horas de transmisión.</a:t>
             </a:r>
           </a:p>
         </p:txBody>
@@ -5899,7 +6511,7 @@
         <p:spPr>
           <a:xfrm>
             <a:off x="7955279" y="1645920"/>
-            <a:ext cx="2571750" cy="4572000"/>
+            <a:ext cx="2623185" cy="4663440"/>
           </a:xfrm>
           <a:prstGeom prst="rect">
             <a:avLst/>
@@ -5940,7 +6552,7 @@
         </p:nvSpPr>
         <p:spPr>
           <a:xfrm>
-            <a:off x="731520" y="411480"/>
+            <a:off x="731520" y="365760"/>
             <a:ext cx="10698480" cy="1005840"/>
           </a:xfrm>
           <a:prstGeom prst="rect">
@@ -5956,28 +6568,28 @@
           <a:p>
             <a:pPr>
               <a:spcAft>
-                <a:spcPts val="300"/>
-              </a:spcAft>
-              <a:defRPr sz="1050" b="1">
+                <a:spcPts val="200"/>
+              </a:spcAft>
+              <a:defRPr sz="1000" b="1">
                 <a:solidFill>
                   <a:srgbClr val="FFB612"/>
                 </a:solidFill>
               </a:defRPr>
             </a:pPr>
             <a:r>
-              <a:t>DETALLE PASO A PASO POR JUEGO</a:t>
-            </a:r>
-          </a:p>
-          <a:p>
-            <a:pPr>
-              <a:defRPr sz="2400" b="1">
+              <a:t>JUEGO POR JUEGO EN DETALLE</a:t>
+            </a:r>
+          </a:p>
+          <a:p>
+            <a:pPr>
+              <a:defRPr sz="2300" b="1">
                 <a:solidFill>
                   <a:srgbClr val="FFFFFF"/>
                 </a:solidFill>
               </a:defRPr>
             </a:pPr>
             <a:r>
-              <a:t>Juego 3: First Striker Wins (El Gol del Partido)</a:t>
+              <a:t>Quinielas Pick'em (NFL y Liga MX): Reglas y Resultados en Vivo</a:t>
             </a:r>
           </a:p>
         </p:txBody>
@@ -5991,7 +6603,7 @@
         <p:spPr>
           <a:xfrm>
             <a:off x="731520" y="1645920"/>
-            <a:ext cx="6858000" cy="4572000"/>
+            <a:ext cx="6858000" cy="4663440"/>
           </a:xfrm>
           <a:prstGeom prst="roundRect">
             <a:avLst/>
@@ -6036,7 +6648,7 @@
         <p:spPr>
           <a:xfrm>
             <a:off x="1005840" y="1828800"/>
-            <a:ext cx="6309360" cy="4114800"/>
+            <a:ext cx="6309360" cy="4206240"/>
           </a:xfrm>
           <a:prstGeom prst="rect">
             <a:avLst/>
@@ -6053,14 +6665,14 @@
               <a:spcAft>
                 <a:spcPts val="200"/>
               </a:spcAft>
-              <a:defRPr sz="1400" b="1">
-                <a:solidFill>
-                  <a:srgbClr val="00E676"/>
-                </a:solidFill>
-              </a:defRPr>
-            </a:pPr>
-            <a:r>
-              <a:t>🛠️ 1. CÓMO LO CREA EL GERENTE (30 seg)</a:t>
+              <a:defRPr sz="1350" b="1">
+                <a:solidFill>
+                  <a:srgbClr val="FFB612"/>
+                </a:solidFill>
+              </a:defRPr>
+            </a:pPr>
+            <a:r>
+              <a:t>🛠️ CÓMO LO CREA EL GERENTE (60 segundos)</a:t>
             </a:r>
           </a:p>
           <a:p>
@@ -6075,7 +6687,7 @@
               </a:defRPr>
             </a:pPr>
             <a:r>
-              <a:t>Elige el partido estelar de fútbol (ej. Clásico Nacional o Champions League) y define el premio inmediato (ej. Jarra de Cerveza o 1 Orden de Boneless para la mesa).</a:t>
+              <a:t>Entra a Admin, elige la liga (NFL o Liga MX) y la jornada. La conexión con ESPN jala automáticamente partidos, horarios y escudos oficiales. El gerente toca los partidos deseados, define el premio (ej. Orden de Alitas + Cerveza) y presiona 'Crear Quiniela'.</a:t>
             </a:r>
           </a:p>
           <a:p>
@@ -6083,14 +6695,14 @@
               <a:spcAft>
                 <a:spcPts val="200"/>
               </a:spcAft>
-              <a:defRPr sz="1400" b="1">
-                <a:solidFill>
-                  <a:srgbClr val="00E676"/>
-                </a:solidFill>
-              </a:defRPr>
-            </a:pPr>
-            <a:r>
-              <a:t>📱 2. CÓMO ENTRA Y JUEGA EL CLIENTE</a:t>
+              <a:defRPr sz="1350" b="1">
+                <a:solidFill>
+                  <a:srgbClr val="FFB612"/>
+                </a:solidFill>
+              </a:defRPr>
+            </a:pPr>
+            <a:r>
+              <a:t>📱 CÓMO JUEGA EL CLIENTE</a:t>
             </a:r>
           </a:p>
           <a:p>
@@ -6105,7 +6717,7 @@
               </a:defRPr>
             </a:pPr>
             <a:r>
-              <a:t>Desde su celular, el comensal selecciona qué equipo anotará primero y en qué bloque de 15 minutos caerá el gol (1-15', 16-30', 31-45', etc.), o la opción de 'Sin Goles'.</a:t>
+              <a:t>Abre la quiniela desde el QR, selecciona a su mesero e introduce sus pronósticos en pantalla. Se bloquean en automático cuando arranca el primer partido para garantizar 100% de transparencia.</a:t>
             </a:r>
           </a:p>
           <a:p>
@@ -6113,14 +6725,14 @@
               <a:spcAft>
                 <a:spcPts val="200"/>
               </a:spcAft>
-              <a:defRPr sz="1400" b="1">
-                <a:solidFill>
-                  <a:srgbClr val="00E676"/>
-                </a:solidFill>
-              </a:defRPr>
-            </a:pPr>
-            <a:r>
-              <a:t>🏆 3. CÓMO GANA: ADRENALINA DESDE EL MINUTO 1</a:t>
+              <a:defRPr sz="1350" b="1">
+                <a:solidFill>
+                  <a:srgbClr val="FFB612"/>
+                </a:solidFill>
+              </a:defRPr>
+            </a:pPr>
+            <a:r>
+              <a:t>🏆 CÓMO GANA Y SE PREMIA</a:t>
             </a:r>
           </a:p>
           <a:p>
@@ -6135,14 +6747,14 @@
               </a:defRPr>
             </a:pPr>
             <a:r>
-              <a:t>En cuanto cae la primera anotación del partido, el sistema valida el minuto oficial de juego. El comensal que acertó el bloque de tiempo gana en el acto, generando gritos de festejo en el bar y rondas de brindis.</a:t>
+              <a:t>La API de ESPN actualiza la tabla en tiempo real: Marcador Exacto = +3 pts (verde esmeralda), Ganador = +1 pt (dorado), Fallo = 0 pts (rojo). Al terminar, se proclama al Campeón Oficial en el podio digital con corona 👑 para canje en barra.</a:t>
             </a:r>
           </a:p>
         </p:txBody>
       </p:sp>
       <p:pic>
         <p:nvPicPr>
-          <p:cNvPr id="5" name="Picture 4" descr="tarjeta_3_instinto_goleador.png"/>
+          <p:cNvPr id="5" name="Picture 4" descr="screenshot_podium_standings.png"/>
           <p:cNvPicPr>
             <a:picLocks noChangeAspect="1"/>
           </p:cNvPicPr>
@@ -6156,8 +6768,8 @@
         </p:blipFill>
         <p:spPr>
           <a:xfrm>
-            <a:off x="7955279" y="1645920"/>
-            <a:ext cx="2571750" cy="4572000"/>
+            <a:off x="7863840" y="1645920"/>
+            <a:ext cx="8843264" cy="4663440"/>
           </a:xfrm>
           <a:prstGeom prst="rect">
             <a:avLst/>
@@ -6198,7 +6810,7 @@
         </p:nvSpPr>
         <p:spPr>
           <a:xfrm>
-            <a:off x="731520" y="411480"/>
+            <a:off x="731520" y="365760"/>
             <a:ext cx="10698480" cy="1005840"/>
           </a:xfrm>
           <a:prstGeom prst="rect">
@@ -6214,28 +6826,28 @@
           <a:p>
             <a:pPr>
               <a:spcAft>
-                <a:spcPts val="300"/>
-              </a:spcAft>
-              <a:defRPr sz="1050" b="1">
+                <a:spcPts val="200"/>
+              </a:spcAft>
+              <a:defRPr sz="1000" b="1">
                 <a:solidFill>
                   <a:srgbClr val="FFB612"/>
                 </a:solidFill>
               </a:defRPr>
             </a:pPr>
             <a:r>
-              <a:t>DETALLE PASO A PASO POR JUEGO</a:t>
-            </a:r>
-          </a:p>
-          <a:p>
-            <a:pPr>
-              <a:defRPr sz="2400" b="1">
+              <a:t>JUEGO POR JUEGO EN DETALLE</a:t>
+            </a:r>
+          </a:p>
+          <a:p>
+            <a:pPr>
+              <a:defRPr sz="2300" b="1">
                 <a:solidFill>
                   <a:srgbClr val="FFFFFF"/>
                 </a:solidFill>
               </a:defRPr>
             </a:pPr>
             <a:r>
-              <a:t>Juegos 4 y 5: Trivia en Pantallas y Survivor NFL</a:t>
+              <a:t>First Striker Wins (Fútbol): Adrenalina Inmediata en el Minuto 1</a:t>
             </a:r>
           </a:p>
         </p:txBody>
@@ -6249,7 +6861,7 @@
         <p:spPr>
           <a:xfrm>
             <a:off x="731520" y="1645920"/>
-            <a:ext cx="5212080" cy="4572000"/>
+            <a:ext cx="6858000" cy="4663440"/>
           </a:xfrm>
           <a:prstGeom prst="roundRect">
             <a:avLst/>
@@ -6294,7 +6906,7 @@
         <p:spPr>
           <a:xfrm>
             <a:off x="1005840" y="1828800"/>
-            <a:ext cx="4663440" cy="4114800"/>
+            <a:ext cx="6309360" cy="4206240"/>
           </a:xfrm>
           <a:prstGeom prst="rect">
             <a:avLst/>
@@ -6309,283 +6921,119 @@
           <a:p>
             <a:pPr>
               <a:spcAft>
-                <a:spcPts val="800"/>
-              </a:spcAft>
-              <a:defRPr sz="1650" b="1">
-                <a:solidFill>
-                  <a:srgbClr val="FFB612"/>
-                </a:solidFill>
-              </a:defRPr>
-            </a:pPr>
-            <a:r>
-              <a:t>🧠 Trivia en Vivo en Pantallas de TV</a:t>
-            </a:r>
-          </a:p>
-          <a:p>
-            <a:pPr>
-              <a:spcAft>
-                <a:spcPts val="100"/>
-              </a:spcAft>
-              <a:defRPr sz="1300" b="1">
-                <a:solidFill>
-                  <a:srgbClr val="FF5722"/>
-                </a:solidFill>
-              </a:defRPr>
-            </a:pPr>
-            <a:r>
-              <a:t>🛠️ Creación con IA</a:t>
-            </a:r>
-          </a:p>
-          <a:p>
-            <a:pPr>
-              <a:spcAft>
-                <a:spcPts val="600"/>
-              </a:spcAft>
-              <a:defRPr sz="1100">
+                <a:spcPts val="200"/>
+              </a:spcAft>
+              <a:defRPr sz="1350" b="1">
+                <a:solidFill>
+                  <a:srgbClr val="00E676"/>
+                </a:solidFill>
+              </a:defRPr>
+            </a:pPr>
+            <a:r>
+              <a:t>🛠️ CÓMO LO CREA EL GERENTE (30 segundos)</a:t>
+            </a:r>
+          </a:p>
+          <a:p>
+            <a:pPr>
+              <a:spcAft>
+                <a:spcPts val="1000"/>
+              </a:spcAft>
+              <a:defRPr sz="1150">
                 <a:solidFill>
                   <a:srgbClr val="FFFFFF"/>
                 </a:solidFill>
               </a:defRPr>
             </a:pPr>
             <a:r>
-              <a:t>El gerente genera 10 preguntas deportivas temáticas con IA en 10 segundos.</a:t>
-            </a:r>
-          </a:p>
-          <a:p>
-            <a:pPr>
-              <a:spcAft>
-                <a:spcPts val="100"/>
-              </a:spcAft>
-              <a:defRPr sz="1300" b="1">
-                <a:solidFill>
-                  <a:srgbClr val="FF5722"/>
-                </a:solidFill>
-              </a:defRPr>
-            </a:pPr>
-            <a:r>
-              <a:t>📱 Juego en Vivo</a:t>
-            </a:r>
-          </a:p>
-          <a:p>
-            <a:pPr>
-              <a:spcAft>
-                <a:spcPts val="600"/>
-              </a:spcAft>
-              <a:defRPr sz="1100">
+              <a:t>Elige el partido de fútbol (Liga MX, Champions League o Selección Nacional) y asigna un premio dinámico (ej. 1 ronda de cervezas o botana en mesa).</a:t>
+            </a:r>
+          </a:p>
+          <a:p>
+            <a:pPr>
+              <a:spcAft>
+                <a:spcPts val="200"/>
+              </a:spcAft>
+              <a:defRPr sz="1350" b="1">
+                <a:solidFill>
+                  <a:srgbClr val="00E676"/>
+                </a:solidFill>
+              </a:defRPr>
+            </a:pPr>
+            <a:r>
+              <a:t>📱 CÓMO JUEGA EL CLIENTE</a:t>
+            </a:r>
+          </a:p>
+          <a:p>
+            <a:pPr>
+              <a:spcAft>
+                <a:spcPts val="1000"/>
+              </a:spcAft>
+              <a:defRPr sz="1150">
                 <a:solidFill>
                   <a:srgbClr val="FFFFFF"/>
                 </a:solidFill>
               </a:defRPr>
             </a:pPr>
             <a:r>
-              <a:t>En el medio tiempo, la TV del bar muestra la pregunta con cuenta regresiva. Los clientes responden contrarreloj desde su smartphone.</a:t>
-            </a:r>
-          </a:p>
-          <a:p>
-            <a:pPr>
-              <a:spcAft>
-                <a:spcPts val="100"/>
-              </a:spcAft>
-              <a:defRPr sz="1300" b="1">
-                <a:solidFill>
-                  <a:srgbClr val="FF5722"/>
-                </a:solidFill>
-              </a:defRPr>
-            </a:pPr>
-            <a:r>
-              <a:t>🏆 Ganador</a:t>
-            </a:r>
-          </a:p>
-          <a:p>
-            <a:pPr>
-              <a:spcAft>
-                <a:spcPts val="600"/>
-              </a:spcAft>
-              <a:defRPr sz="1100">
+              <a:t>Elige qué equipo meterá el primer gol y en qué bloque de 15 minutos caerá (1-15', 16-30', 31-45', etc.), o la opción de 'Sin Goles en el Partido'.</a:t>
+            </a:r>
+          </a:p>
+          <a:p>
+            <a:pPr>
+              <a:spcAft>
+                <a:spcPts val="200"/>
+              </a:spcAft>
+              <a:defRPr sz="1350" b="1">
+                <a:solidFill>
+                  <a:srgbClr val="00E676"/>
+                </a:solidFill>
+              </a:defRPr>
+            </a:pPr>
+            <a:r>
+              <a:t>🏆 CÓMO GANA: EUFORIA DESDE EL INICIO</a:t>
+            </a:r>
+          </a:p>
+          <a:p>
+            <a:pPr>
+              <a:spcAft>
+                <a:spcPts val="1000"/>
+              </a:spcAft>
+              <a:defRPr sz="1150">
                 <a:solidFill>
                   <a:srgbClr val="FFFFFF"/>
                 </a:solidFill>
               </a:defRPr>
             </a:pPr>
             <a:r>
-              <a:t>La pantalla de TV muestra el podio del bar en tiempo real con fanfarrias y aplausos en el restaurante.</a:t>
-            </a:r>
-          </a:p>
-        </p:txBody>
-      </p:sp>
-      <p:sp>
-        <p:nvSpPr>
-          <p:cNvPr id="5" name="Rounded Rectangle 4"/>
-          <p:cNvSpPr/>
+              <a:t>En cuanto cae la primera anotación, el sistema valida el minuto oficial de juego. El comensal que acertó el bloque de tiempo gana en el acto, provocando festejos y más rondas de bebidas en su mesa.</a:t>
+            </a:r>
+          </a:p>
+        </p:txBody>
+      </p:sp>
+      <p:pic>
+        <p:nvPicPr>
+          <p:cNvPr id="5" name="Picture 4" descr="tarjeta_3_instinto_goleador.png"/>
+          <p:cNvPicPr>
+            <a:picLocks noChangeAspect="1"/>
+          </p:cNvPicPr>
           <p:nvPr/>
-        </p:nvSpPr>
-        <p:spPr>
-          <a:xfrm>
-            <a:off x="6217920" y="1645920"/>
-            <a:ext cx="5212080" cy="4572000"/>
-          </a:xfrm>
-          <a:prstGeom prst="roundRect">
-            <a:avLst/>
-          </a:prstGeom>
-          <a:solidFill>
-            <a:srgbClr val="141A26"/>
-          </a:solidFill>
-          <a:ln w="19050">
-            <a:solidFill>
-              <a:srgbClr val="283246"/>
-            </a:solidFill>
-          </a:ln>
-        </p:spPr>
-        <p:style>
-          <a:lnRef idx="1">
-            <a:schemeClr val="accent1"/>
-          </a:lnRef>
-          <a:fillRef idx="3">
-            <a:schemeClr val="accent1"/>
-          </a:fillRef>
-          <a:effectRef idx="2">
-            <a:schemeClr val="accent1"/>
-          </a:effectRef>
-          <a:fontRef idx="minor">
-            <a:schemeClr val="lt1"/>
-          </a:fontRef>
-        </p:style>
-        <p:txBody>
-          <a:bodyPr rtlCol="0" anchor="ctr"/>
-          <a:lstStyle/>
-          <a:p>
-            <a:pPr algn="ctr"/>
-          </a:p>
-        </p:txBody>
-      </p:sp>
-      <p:sp>
-        <p:nvSpPr>
-          <p:cNvPr id="6" name="TextBox 5"/>
-          <p:cNvSpPr txBox="1"/>
-          <p:nvPr/>
-        </p:nvSpPr>
-        <p:spPr>
-          <a:xfrm>
-            <a:off x="6492240" y="1828800"/>
-            <a:ext cx="4663440" cy="4114800"/>
+        </p:nvPicPr>
+        <p:blipFill>
+          <a:blip r:embed="rId2"/>
+          <a:stretch>
+            <a:fillRect/>
+          </a:stretch>
+        </p:blipFill>
+        <p:spPr>
+          <a:xfrm>
+            <a:off x="7955279" y="1645920"/>
+            <a:ext cx="2623185" cy="4663440"/>
           </a:xfrm>
           <a:prstGeom prst="rect">
             <a:avLst/>
           </a:prstGeom>
-          <a:noFill/>
-        </p:spPr>
-        <p:txBody>
-          <a:bodyPr wrap="square">
-            <a:spAutoFit/>
-          </a:bodyPr>
-          <a:lstStyle/>
-          <a:p>
-            <a:pPr>
-              <a:spcAft>
-                <a:spcPts val="800"/>
-              </a:spcAft>
-              <a:defRPr sz="1650" b="1">
-                <a:solidFill>
-                  <a:srgbClr val="00E676"/>
-                </a:solidFill>
-              </a:defRPr>
-            </a:pPr>
-            <a:r>
-              <a:t>🛡️ Survivor NFL: Fidelización Semanal</a:t>
-            </a:r>
-          </a:p>
-          <a:p>
-            <a:pPr>
-              <a:spcAft>
-                <a:spcPts val="100"/>
-              </a:spcAft>
-              <a:defRPr sz="1300" b="1">
-                <a:solidFill>
-                  <a:srgbClr val="FFD100"/>
-                </a:solidFill>
-              </a:defRPr>
-            </a:pPr>
-            <a:r>
-              <a:t>🛠️ Creación Única</a:t>
-            </a:r>
-          </a:p>
-          <a:p>
-            <a:pPr>
-              <a:spcAft>
-                <a:spcPts val="600"/>
-              </a:spcAft>
-              <a:defRPr sz="1100">
-                <a:solidFill>
-                  <a:srgbClr val="FFFFFF"/>
-                </a:solidFill>
-              </a:defRPr>
-            </a:pPr>
-            <a:r>
-              <a:t>Se abre al inicio de la temporada regular de NFL.</a:t>
-            </a:r>
-          </a:p>
-          <a:p>
-            <a:pPr>
-              <a:spcAft>
-                <a:spcPts val="100"/>
-              </a:spcAft>
-              <a:defRPr sz="1300" b="1">
-                <a:solidFill>
-                  <a:srgbClr val="FFD100"/>
-                </a:solidFill>
-              </a:defRPr>
-            </a:pPr>
-            <a:r>
-              <a:t>📱 Elección Semanal</a:t>
-            </a:r>
-          </a:p>
-          <a:p>
-            <a:pPr>
-              <a:spcAft>
-                <a:spcPts val="600"/>
-              </a:spcAft>
-              <a:defRPr sz="1100">
-                <a:solidFill>
-                  <a:srgbClr val="FFFFFF"/>
-                </a:solidFill>
-              </a:defRPr>
-            </a:pPr>
-            <a:r>
-              <a:t>Cada comensal elige 1 equipo ganador por semana sin repetir. Si su equipo gana, sobrevive; si pierde, queda eliminado.</a:t>
-            </a:r>
-          </a:p>
-          <a:p>
-            <a:pPr>
-              <a:spcAft>
-                <a:spcPts val="100"/>
-              </a:spcAft>
-              <a:defRPr sz="1300" b="1">
-                <a:solidFill>
-                  <a:srgbClr val="FFD100"/>
-                </a:solidFill>
-              </a:defRPr>
-            </a:pPr>
-            <a:r>
-              <a:t>🏆 Retención Frecuente</a:t>
-            </a:r>
-          </a:p>
-          <a:p>
-            <a:pPr>
-              <a:spcAft>
-                <a:spcPts val="600"/>
-              </a:spcAft>
-              <a:defRPr sz="1100">
-                <a:solidFill>
-                  <a:srgbClr val="FFFFFF"/>
-                </a:solidFill>
-              </a:defRPr>
-            </a:pPr>
-            <a:r>
-              <a:t>Obliga al cliente a regresar cada semana a la sucursal para defender su boleto de sobreviviente y competir por el premio mayor de la temporada.</a:t>
-            </a:r>
-          </a:p>
-        </p:txBody>
-      </p:sp>
+        </p:spPr>
+      </p:pic>
     </p:spTree>
   </p:cSld>
   <p:clrMapOvr>
@@ -6620,7 +7068,7 @@
         </p:nvSpPr>
         <p:spPr>
           <a:xfrm>
-            <a:off x="731520" y="411480"/>
+            <a:off x="731520" y="365760"/>
             <a:ext cx="10698480" cy="1005840"/>
           </a:xfrm>
           <a:prstGeom prst="rect">
@@ -6636,28 +7084,28 @@
           <a:p>
             <a:pPr>
               <a:spcAft>
-                <a:spcPts val="300"/>
-              </a:spcAft>
-              <a:defRPr sz="1050" b="1">
+                <a:spcPts val="200"/>
+              </a:spcAft>
+              <a:defRPr sz="1000" b="1">
                 <a:solidFill>
                   <a:srgbClr val="FFB612"/>
                 </a:solidFill>
               </a:defRPr>
             </a:pPr>
             <a:r>
-              <a:t>RENTABILIDAD Y VENTAS</a:t>
-            </a:r>
-          </a:p>
-          <a:p>
-            <a:pPr>
-              <a:defRPr sz="2400" b="1">
+              <a:t>JUEGO POR JUEGO EN DETALLE</a:t>
+            </a:r>
+          </a:p>
+          <a:p>
+            <a:pPr>
+              <a:defRPr sz="2300" b="1">
                 <a:solidFill>
                   <a:srgbClr val="FFFFFF"/>
                 </a:solidFill>
               </a:defRPr>
             </a:pPr>
             <a:r>
-              <a:t>Estrategia de Premios: Diseñada para Proteger el Margen</a:t>
+              <a:t>Trivias en TV con IA &amp; Survivor NFL: Medios Tiempos y Fidelidad</a:t>
             </a:r>
           </a:p>
         </p:txBody>
@@ -6671,7 +7119,7 @@
         <p:spPr>
           <a:xfrm>
             <a:off x="731520" y="1645920"/>
-            <a:ext cx="3413455" cy="4572000"/>
+            <a:ext cx="5212080" cy="4663440"/>
           </a:xfrm>
           <a:prstGeom prst="roundRect">
             <a:avLst/>
@@ -6715,8 +7163,8 @@
         </p:nvSpPr>
         <p:spPr>
           <a:xfrm>
-            <a:off x="1005840" y="1920240"/>
-            <a:ext cx="2864815" cy="4023360"/>
+            <a:off x="1005840" y="1828800"/>
+            <a:ext cx="4663440" cy="4206240"/>
           </a:xfrm>
           <a:prstGeom prst="rect">
             <a:avLst/>
@@ -6731,7 +7179,7 @@
           <a:p>
             <a:pPr>
               <a:spcAft>
-                <a:spcPts val="1400"/>
+                <a:spcPts val="800"/>
               </a:spcAft>
               <a:defRPr sz="1650" b="1">
                 <a:solidFill>
@@ -6740,19 +7188,97 @@
               </a:defRPr>
             </a:pPr>
             <a:r>
-              <a:t>🍔 Alto Valor Percibido vs Bajo Costo</a:t>
-            </a:r>
-          </a:p>
-          <a:p>
-            <a:pPr>
-              <a:defRPr sz="1300">
+              <a:t>🧠 Trivia en Pantallas de TV con IA</a:t>
+            </a:r>
+          </a:p>
+          <a:p>
+            <a:pPr>
+              <a:spcAft>
+                <a:spcPts val="100"/>
+              </a:spcAft>
+              <a:defRPr sz="1250" b="1">
+                <a:solidFill>
+                  <a:srgbClr val="FF5722"/>
+                </a:solidFill>
+              </a:defRPr>
+            </a:pPr>
+            <a:r>
+              <a:t>🛠️ Generación IA en 10 seg</a:t>
+            </a:r>
+          </a:p>
+          <a:p>
+            <a:pPr>
+              <a:spcAft>
+                <a:spcPts val="600"/>
+              </a:spcAft>
+              <a:defRPr sz="1100">
                 <a:solidFill>
                   <a:srgbClr val="FFFFFF"/>
                 </a:solidFill>
               </a:defRPr>
             </a:pPr>
             <a:r>
-              <a:t>Una orden de alitas o una cerveza tiene un costo de materia prima muy manejable para la cocina ($30-$50 MXN), pero en la mente del cliente representa un premio valioso de $160 a $240 MXN.</a:t>
+              <a:t>La Inteligencia Artificial genera 10 preguntas deportivas temáticas del partido en cuestión.</a:t>
+            </a:r>
+          </a:p>
+          <a:p>
+            <a:pPr>
+              <a:spcAft>
+                <a:spcPts val="100"/>
+              </a:spcAft>
+              <a:defRPr sz="1250" b="1">
+                <a:solidFill>
+                  <a:srgbClr val="FF5722"/>
+                </a:solidFill>
+              </a:defRPr>
+            </a:pPr>
+            <a:r>
+              <a:t>📱 Medio Tiempo Interactivo</a:t>
+            </a:r>
+          </a:p>
+          <a:p>
+            <a:pPr>
+              <a:spcAft>
+                <a:spcPts val="600"/>
+              </a:spcAft>
+              <a:defRPr sz="1100">
+                <a:solidFill>
+                  <a:srgbClr val="FFFFFF"/>
+                </a:solidFill>
+              </a:defRPr>
+            </a:pPr>
+            <a:r>
+              <a:t>La TV del bar muestra la pregunta con cuenta regresiva. Los clientes responden contrarreloj desde su smartphone compitiendo mesa contra mesa.</a:t>
+            </a:r>
+          </a:p>
+          <a:p>
+            <a:pPr>
+              <a:spcAft>
+                <a:spcPts val="100"/>
+              </a:spcAft>
+              <a:defRPr sz="1250" b="1">
+                <a:solidFill>
+                  <a:srgbClr val="FF5722"/>
+                </a:solidFill>
+              </a:defRPr>
+            </a:pPr>
+            <a:r>
+              <a:t>🏆 Podio en Pantalla Grande</a:t>
+            </a:r>
+          </a:p>
+          <a:p>
+            <a:pPr>
+              <a:spcAft>
+                <a:spcPts val="600"/>
+              </a:spcAft>
+              <a:defRPr sz="1100">
+                <a:solidFill>
+                  <a:srgbClr val="FFFFFF"/>
+                </a:solidFill>
+              </a:defRPr>
+            </a:pPr>
+            <a:r>
+              <a:t>El restaurante entero ve subir el ranking en vivo en la TV.</a:t>
             </a:r>
           </a:p>
         </p:txBody>
@@ -6765,8 +7291,8 @@
         </p:nvSpPr>
         <p:spPr>
           <a:xfrm>
-            <a:off x="4389120" y="1645920"/>
-            <a:ext cx="3413455" cy="4572000"/>
+            <a:off x="6217920" y="1645920"/>
+            <a:ext cx="5212080" cy="4663440"/>
           </a:xfrm>
           <a:prstGeom prst="roundRect">
             <a:avLst/>
@@ -6810,8 +7336,8 @@
         </p:nvSpPr>
         <p:spPr>
           <a:xfrm>
-            <a:off x="4663440" y="1920240"/>
-            <a:ext cx="2864815" cy="4023360"/>
+            <a:off x="6492240" y="1828800"/>
+            <a:ext cx="4663440" cy="4206240"/>
           </a:xfrm>
           <a:prstGeom prst="rect">
             <a:avLst/>
@@ -6826,7 +7352,7 @@
           <a:p>
             <a:pPr>
               <a:spcAft>
-                <a:spcPts val="1400"/>
+                <a:spcPts val="800"/>
               </a:spcAft>
               <a:defRPr sz="1650" b="1">
                 <a:solidFill>
@@ -6835,114 +7361,97 @@
               </a:defRPr>
             </a:pPr>
             <a:r>
-              <a:t>🍻 Festejo y Rondas Adicionales</a:t>
-            </a:r>
-          </a:p>
-          <a:p>
-            <a:pPr>
-              <a:defRPr sz="1300">
+              <a:t>🛡️ Survivor NFL (Fidelidad Semanal)</a:t>
+            </a:r>
+          </a:p>
+          <a:p>
+            <a:pPr>
+              <a:spcAft>
+                <a:spcPts val="100"/>
+              </a:spcAft>
+              <a:defRPr sz="1250" b="1">
+                <a:solidFill>
+                  <a:srgbClr val="FFD100"/>
+                </a:solidFill>
+              </a:defRPr>
+            </a:pPr>
+            <a:r>
+              <a:t>🛠️ Creación Única</a:t>
+            </a:r>
+          </a:p>
+          <a:p>
+            <a:pPr>
+              <a:spcAft>
+                <a:spcPts val="600"/>
+              </a:spcAft>
+              <a:defRPr sz="1100">
                 <a:solidFill>
                   <a:srgbClr val="FFFFFF"/>
                 </a:solidFill>
               </a:defRPr>
             </a:pPr>
             <a:r>
-              <a:t>Nadie gana y se va. El comensal que resulta campeón celebra con su mesa, y el grupo pide cervezas y platillos adicionales para acompañar el premio. El ticket final siempre supera con creces el costo del incentivo.</a:t>
-            </a:r>
-          </a:p>
-        </p:txBody>
-      </p:sp>
-      <p:sp>
-        <p:nvSpPr>
-          <p:cNvPr id="7" name="Rounded Rectangle 6"/>
-          <p:cNvSpPr/>
-          <p:nvPr/>
-        </p:nvSpPr>
-        <p:spPr>
-          <a:xfrm>
-            <a:off x="8046720" y="1645920"/>
-            <a:ext cx="3413455" cy="4572000"/>
-          </a:xfrm>
-          <a:prstGeom prst="roundRect">
-            <a:avLst/>
-          </a:prstGeom>
-          <a:solidFill>
-            <a:srgbClr val="141A26"/>
-          </a:solidFill>
-          <a:ln w="19050">
-            <a:solidFill>
-              <a:srgbClr val="283246"/>
-            </a:solidFill>
-          </a:ln>
-        </p:spPr>
-        <p:style>
-          <a:lnRef idx="1">
-            <a:schemeClr val="accent1"/>
-          </a:lnRef>
-          <a:fillRef idx="3">
-            <a:schemeClr val="accent1"/>
-          </a:fillRef>
-          <a:effectRef idx="2">
-            <a:schemeClr val="accent1"/>
-          </a:effectRef>
-          <a:fontRef idx="minor">
-            <a:schemeClr val="lt1"/>
-          </a:fontRef>
-        </p:style>
-        <p:txBody>
-          <a:bodyPr rtlCol="0" anchor="ctr"/>
-          <a:lstStyle/>
-          <a:p>
-            <a:pPr algn="ctr"/>
-          </a:p>
-        </p:txBody>
-      </p:sp>
-      <p:sp>
-        <p:nvSpPr>
-          <p:cNvPr id="8" name="TextBox 7"/>
-          <p:cNvSpPr txBox="1"/>
-          <p:nvPr/>
-        </p:nvSpPr>
-        <p:spPr>
-          <a:xfrm>
-            <a:off x="8321040" y="1920240"/>
-            <a:ext cx="2864815" cy="4023360"/>
-          </a:xfrm>
-          <a:prstGeom prst="rect">
-            <a:avLst/>
-          </a:prstGeom>
-          <a:noFill/>
-        </p:spPr>
-        <p:txBody>
-          <a:bodyPr wrap="square">
-            <a:spAutoFit/>
-          </a:bodyPr>
-          <a:lstStyle/>
-          <a:p>
-            <a:pPr>
-              <a:spcAft>
-                <a:spcPts val="1400"/>
-              </a:spcAft>
-              <a:defRPr sz="1650" b="1">
-                <a:solidFill>
-                  <a:srgbClr val="FF5722"/>
-                </a:solidFill>
-              </a:defRPr>
-            </a:pPr>
-            <a:r>
-              <a:t>🔄 Retorno Asegurado en Días Bajas</a:t>
-            </a:r>
-          </a:p>
-          <a:p>
-            <a:pPr>
-              <a:defRPr sz="1300">
+              <a:t>Se activa al inicio de la temporada regular de NFL.</a:t>
+            </a:r>
+          </a:p>
+          <a:p>
+            <a:pPr>
+              <a:spcAft>
+                <a:spcPts val="100"/>
+              </a:spcAft>
+              <a:defRPr sz="1250" b="1">
+                <a:solidFill>
+                  <a:srgbClr val="FFD100"/>
+                </a:solidFill>
+              </a:defRPr>
+            </a:pPr>
+            <a:r>
+              <a:t>📱 1 Equipo por Semana</a:t>
+            </a:r>
+          </a:p>
+          <a:p>
+            <a:pPr>
+              <a:spcAft>
+                <a:spcPts val="600"/>
+              </a:spcAft>
+              <a:defRPr sz="1100">
                 <a:solidFill>
                   <a:srgbClr val="FFFFFF"/>
                 </a:solidFill>
               </a:defRPr>
             </a:pPr>
             <a:r>
-              <a:t>Los cupones de 2º y 3º lugar se pueden programar para canjearse de lunes a jueves en su siguiente visita, generando tráfico en días y horarios con menor ocupación.</a:t>
+              <a:t>El cliente elige 1 equipo ganador por semana sin repetir. Si su equipo gana, sobrevive; si pierde, queda eliminado.</a:t>
+            </a:r>
+          </a:p>
+          <a:p>
+            <a:pPr>
+              <a:spcAft>
+                <a:spcPts val="100"/>
+              </a:spcAft>
+              <a:defRPr sz="1250" b="1">
+                <a:solidFill>
+                  <a:srgbClr val="FFD100"/>
+                </a:solidFill>
+              </a:defRPr>
+            </a:pPr>
+            <a:r>
+              <a:t>🏆 Retención Obligatoria</a:t>
+            </a:r>
+          </a:p>
+          <a:p>
+            <a:pPr>
+              <a:spcAft>
+                <a:spcPts val="600"/>
+              </a:spcAft>
+              <a:defRPr sz="1100">
+                <a:solidFill>
+                  <a:srgbClr val="FFFFFF"/>
+                </a:solidFill>
+              </a:defRPr>
+            </a:pPr>
+            <a:r>
+              <a:t>Obliga al cliente a regresar semana tras semana a la sucursal para defender su boleto de sobreviviente.</a:t>
             </a:r>
           </a:p>
         </p:txBody>

--- a/Drinks_and_Wins_Presentacion_Ejecutiva.pptx
+++ b/Drinks_and_Wins_Presentacion_Ejecutiva.pptx
@@ -19,6 +19,7 @@
     <p:sldId id="267" r:id="rId18"/>
     <p:sldId id="268" r:id="rId19"/>
     <p:sldId id="269" r:id="rId20"/>
+    <p:sldId id="270" r:id="rId21"/>
   </p:sldIdLst>
   <p:sldSz cx="12191695" cy="6858000" type="screen4x3"/>
   <p:notesSz cx="6858000" cy="9144000"/>
@@ -3332,7 +3333,7 @@
               </a:defRPr>
             </a:pPr>
             <a:r>
-              <a:t>RENTABILIDAD Y VENTAS</a:t>
+              <a:t>JUEGO POR JUEGO EN DETALLE</a:t>
             </a:r>
           </a:p>
           <a:p>
@@ -3344,7 +3345,7 @@
               </a:defRPr>
             </a:pPr>
             <a:r>
-              <a:t>Estrategia de Premios: Diseñada para Proteger el Margen</a:t>
+              <a:t>Trivias en TV con IA &amp; Survivor NFL: Medios Tiempos y Fidelidad</a:t>
             </a:r>
           </a:p>
         </p:txBody>
@@ -3358,7 +3359,7 @@
         <p:spPr>
           <a:xfrm>
             <a:off x="731520" y="1645920"/>
-            <a:ext cx="3413455" cy="4663440"/>
+            <a:ext cx="5212080" cy="4663440"/>
           </a:xfrm>
           <a:prstGeom prst="roundRect">
             <a:avLst/>
@@ -3402,8 +3403,8 @@
         </p:nvSpPr>
         <p:spPr>
           <a:xfrm>
-            <a:off x="1005840" y="1920240"/>
-            <a:ext cx="2864815" cy="4114800"/>
+            <a:off x="1005840" y="1828800"/>
+            <a:ext cx="4663440" cy="4206240"/>
           </a:xfrm>
           <a:prstGeom prst="rect">
             <a:avLst/>
@@ -3418,28 +3419,106 @@
           <a:p>
             <a:pPr>
               <a:spcAft>
-                <a:spcPts val="1400"/>
-              </a:spcAft>
-              <a:defRPr sz="1600" b="1">
+                <a:spcPts val="800"/>
+              </a:spcAft>
+              <a:defRPr sz="1650" b="1">
                 <a:solidFill>
                   <a:srgbClr val="FFB612"/>
                 </a:solidFill>
               </a:defRPr>
             </a:pPr>
             <a:r>
-              <a:t>🍔 Alto Valor Percibido vs Bajo Costo</a:t>
-            </a:r>
-          </a:p>
-          <a:p>
-            <a:pPr>
-              <a:defRPr sz="1300">
+              <a:t>🧠 Trivia en Pantallas de TV con IA</a:t>
+            </a:r>
+          </a:p>
+          <a:p>
+            <a:pPr>
+              <a:spcAft>
+                <a:spcPts val="100"/>
+              </a:spcAft>
+              <a:defRPr sz="1250" b="1">
+                <a:solidFill>
+                  <a:srgbClr val="FF5722"/>
+                </a:solidFill>
+              </a:defRPr>
+            </a:pPr>
+            <a:r>
+              <a:t>🛠️ Generación IA en 10 seg</a:t>
+            </a:r>
+          </a:p>
+          <a:p>
+            <a:pPr>
+              <a:spcAft>
+                <a:spcPts val="600"/>
+              </a:spcAft>
+              <a:defRPr sz="1100">
                 <a:solidFill>
                   <a:srgbClr val="FFFFFF"/>
                 </a:solidFill>
               </a:defRPr>
             </a:pPr>
             <a:r>
-              <a:t>Una orden de alitas o una cerveza tiene un costo de insumo moderado para cocina/barra ($30-$50 MXN), pero en la mente del cliente representa un premio valioso de $160 a $240 MXN.</a:t>
+              <a:t>La Inteligencia Artificial genera 10 preguntas deportivas temáticas del partido en cuestión.</a:t>
+            </a:r>
+          </a:p>
+          <a:p>
+            <a:pPr>
+              <a:spcAft>
+                <a:spcPts val="100"/>
+              </a:spcAft>
+              <a:defRPr sz="1250" b="1">
+                <a:solidFill>
+                  <a:srgbClr val="FF5722"/>
+                </a:solidFill>
+              </a:defRPr>
+            </a:pPr>
+            <a:r>
+              <a:t>📱 Medio Tiempo Interactivo</a:t>
+            </a:r>
+          </a:p>
+          <a:p>
+            <a:pPr>
+              <a:spcAft>
+                <a:spcPts val="600"/>
+              </a:spcAft>
+              <a:defRPr sz="1100">
+                <a:solidFill>
+                  <a:srgbClr val="FFFFFF"/>
+                </a:solidFill>
+              </a:defRPr>
+            </a:pPr>
+            <a:r>
+              <a:t>La TV del bar muestra la pregunta con cuenta regresiva. Los clientes responden contrarreloj desde su smartphone compitiendo mesa contra mesa.</a:t>
+            </a:r>
+          </a:p>
+          <a:p>
+            <a:pPr>
+              <a:spcAft>
+                <a:spcPts val="100"/>
+              </a:spcAft>
+              <a:defRPr sz="1250" b="1">
+                <a:solidFill>
+                  <a:srgbClr val="FF5722"/>
+                </a:solidFill>
+              </a:defRPr>
+            </a:pPr>
+            <a:r>
+              <a:t>🏆 Podio en Pantalla Grande</a:t>
+            </a:r>
+          </a:p>
+          <a:p>
+            <a:pPr>
+              <a:spcAft>
+                <a:spcPts val="600"/>
+              </a:spcAft>
+              <a:defRPr sz="1100">
+                <a:solidFill>
+                  <a:srgbClr val="FFFFFF"/>
+                </a:solidFill>
+              </a:defRPr>
+            </a:pPr>
+            <a:r>
+              <a:t>El restaurante entero ve subir el ranking en vivo en la TV.</a:t>
             </a:r>
           </a:p>
         </p:txBody>
@@ -3452,8 +3531,8 @@
         </p:nvSpPr>
         <p:spPr>
           <a:xfrm>
-            <a:off x="4389120" y="1645920"/>
-            <a:ext cx="3413455" cy="4663440"/>
+            <a:off x="6217920" y="1645920"/>
+            <a:ext cx="5212080" cy="4663440"/>
           </a:xfrm>
           <a:prstGeom prst="roundRect">
             <a:avLst/>
@@ -3497,8 +3576,8 @@
         </p:nvSpPr>
         <p:spPr>
           <a:xfrm>
-            <a:off x="4663440" y="1920240"/>
-            <a:ext cx="2864815" cy="4114800"/>
+            <a:off x="6492240" y="1828800"/>
+            <a:ext cx="4663440" cy="4206240"/>
           </a:xfrm>
           <a:prstGeom prst="rect">
             <a:avLst/>
@@ -3513,123 +3592,106 @@
           <a:p>
             <a:pPr>
               <a:spcAft>
-                <a:spcPts val="1400"/>
-              </a:spcAft>
-              <a:defRPr sz="1600" b="1">
+                <a:spcPts val="800"/>
+              </a:spcAft>
+              <a:defRPr sz="1650" b="1">
                 <a:solidFill>
                   <a:srgbClr val="00E676"/>
                 </a:solidFill>
               </a:defRPr>
             </a:pPr>
             <a:r>
-              <a:t>🍻 Festejo y Rondas Extra en Mesa</a:t>
-            </a:r>
-          </a:p>
-          <a:p>
-            <a:pPr>
-              <a:defRPr sz="1300">
+              <a:t>🛡️ Survivor NFL (Fidelidad Semanal)</a:t>
+            </a:r>
+          </a:p>
+          <a:p>
+            <a:pPr>
+              <a:spcAft>
+                <a:spcPts val="100"/>
+              </a:spcAft>
+              <a:defRPr sz="1250" b="1">
+                <a:solidFill>
+                  <a:srgbClr val="FFD100"/>
+                </a:solidFill>
+              </a:defRPr>
+            </a:pPr>
+            <a:r>
+              <a:t>🛠️ Creación Única</a:t>
+            </a:r>
+          </a:p>
+          <a:p>
+            <a:pPr>
+              <a:spcAft>
+                <a:spcPts val="600"/>
+              </a:spcAft>
+              <a:defRPr sz="1100">
                 <a:solidFill>
                   <a:srgbClr val="FFFFFF"/>
                 </a:solidFill>
               </a:defRPr>
             </a:pPr>
             <a:r>
-              <a:t>Nadie gana y se va. El comensal que resulta campeón celebra con su mesa, y el grupo pide cervezas y platillos adicionales para acompañar el premio. El ticket final siempre supera con creces el costo del incentivo.</a:t>
-            </a:r>
-          </a:p>
-        </p:txBody>
-      </p:sp>
-      <p:sp>
-        <p:nvSpPr>
-          <p:cNvPr id="7" name="Rounded Rectangle 6"/>
-          <p:cNvSpPr/>
-          <p:nvPr/>
-        </p:nvSpPr>
-        <p:spPr>
-          <a:xfrm>
-            <a:off x="8046720" y="1645920"/>
-            <a:ext cx="3413455" cy="4663440"/>
-          </a:xfrm>
-          <a:prstGeom prst="roundRect">
-            <a:avLst/>
-          </a:prstGeom>
-          <a:solidFill>
-            <a:srgbClr val="141A26"/>
-          </a:solidFill>
-          <a:ln w="19050">
-            <a:solidFill>
-              <a:srgbClr val="283246"/>
-            </a:solidFill>
-          </a:ln>
-        </p:spPr>
-        <p:style>
-          <a:lnRef idx="1">
-            <a:schemeClr val="accent1"/>
-          </a:lnRef>
-          <a:fillRef idx="3">
-            <a:schemeClr val="accent1"/>
-          </a:fillRef>
-          <a:effectRef idx="2">
-            <a:schemeClr val="accent1"/>
-          </a:effectRef>
-          <a:fontRef idx="minor">
-            <a:schemeClr val="lt1"/>
-          </a:fontRef>
-        </p:style>
-        <p:txBody>
-          <a:bodyPr rtlCol="0" anchor="ctr"/>
-          <a:lstStyle/>
-          <a:p>
-            <a:pPr algn="ctr"/>
-          </a:p>
-        </p:txBody>
-      </p:sp>
-      <p:sp>
-        <p:nvSpPr>
-          <p:cNvPr id="8" name="TextBox 7"/>
-          <p:cNvSpPr txBox="1"/>
-          <p:nvPr/>
-        </p:nvSpPr>
-        <p:spPr>
-          <a:xfrm>
-            <a:off x="8321040" y="1920240"/>
-            <a:ext cx="2864815" cy="4114800"/>
-          </a:xfrm>
-          <a:prstGeom prst="rect">
-            <a:avLst/>
-          </a:prstGeom>
-          <a:noFill/>
-        </p:spPr>
-        <p:txBody>
-          <a:bodyPr wrap="square">
-            <a:spAutoFit/>
-          </a:bodyPr>
-          <a:lstStyle/>
-          <a:p>
-            <a:pPr>
-              <a:spcAft>
-                <a:spcPts val="1400"/>
-              </a:spcAft>
-              <a:defRPr sz="1600" b="1">
-                <a:solidFill>
-                  <a:srgbClr val="FF5722"/>
-                </a:solidFill>
-              </a:defRPr>
-            </a:pPr>
-            <a:r>
-              <a:t>🔄 Retorno Asegurado en Días Bajas</a:t>
-            </a:r>
-          </a:p>
-          <a:p>
-            <a:pPr>
-              <a:defRPr sz="1300">
+              <a:t>Se activa al inicio de la temporada regular de NFL.</a:t>
+            </a:r>
+          </a:p>
+          <a:p>
+            <a:pPr>
+              <a:spcAft>
+                <a:spcPts val="100"/>
+              </a:spcAft>
+              <a:defRPr sz="1250" b="1">
+                <a:solidFill>
+                  <a:srgbClr val="FFD100"/>
+                </a:solidFill>
+              </a:defRPr>
+            </a:pPr>
+            <a:r>
+              <a:t>📱 1 Equipo por Semana</a:t>
+            </a:r>
+          </a:p>
+          <a:p>
+            <a:pPr>
+              <a:spcAft>
+                <a:spcPts val="600"/>
+              </a:spcAft>
+              <a:defRPr sz="1100">
                 <a:solidFill>
                   <a:srgbClr val="FFFFFF"/>
                 </a:solidFill>
               </a:defRPr>
             </a:pPr>
             <a:r>
-              <a:t>Los cupones de 2º y 3º lugar se pueden programar para canjearse de lunes a jueves en su siguiente visita, generando tráfico en días y horarios con menor ocupación.</a:t>
+              <a:t>El cliente elige 1 equipo ganador por semana sin repetir. Si su equipo gana, sobrevive; si pierde, queda eliminado.</a:t>
+            </a:r>
+          </a:p>
+          <a:p>
+            <a:pPr>
+              <a:spcAft>
+                <a:spcPts val="100"/>
+              </a:spcAft>
+              <a:defRPr sz="1250" b="1">
+                <a:solidFill>
+                  <a:srgbClr val="FFD100"/>
+                </a:solidFill>
+              </a:defRPr>
+            </a:pPr>
+            <a:r>
+              <a:t>🏆 Retención Obligatoria</a:t>
+            </a:r>
+          </a:p>
+          <a:p>
+            <a:pPr>
+              <a:spcAft>
+                <a:spcPts val="600"/>
+              </a:spcAft>
+              <a:defRPr sz="1100">
+                <a:solidFill>
+                  <a:srgbClr val="FFFFFF"/>
+                </a:solidFill>
+              </a:defRPr>
+            </a:pPr>
+            <a:r>
+              <a:t>Obliga al cliente a regresar semana tras semana a la sucursal para defender su boleto de sobreviviente.</a:t>
             </a:r>
           </a:p>
         </p:txBody>
@@ -3693,7 +3755,7 @@
               </a:defRPr>
             </a:pPr>
             <a:r>
-              <a:t>EQUIPO DE SERVICIO</a:t>
+              <a:t>RENTABILIDAD Y VENTAS</a:t>
             </a:r>
           </a:p>
           <a:p>
@@ -3705,7 +3767,7 @@
               </a:defRPr>
             </a:pPr>
             <a:r>
-              <a:t>Gamificación del Personal: Meseros como Embajadores</a:t>
+              <a:t>Estrategia de Premios: Diseñada para Proteger el Margen</a:t>
             </a:r>
           </a:p>
         </p:txBody>
@@ -3719,7 +3781,7 @@
         <p:spPr>
           <a:xfrm>
             <a:off x="731520" y="1645920"/>
-            <a:ext cx="6858000" cy="4663440"/>
+            <a:ext cx="3413455" cy="4663440"/>
           </a:xfrm>
           <a:prstGeom prst="roundRect">
             <a:avLst/>
@@ -3763,8 +3825,8 @@
         </p:nvSpPr>
         <p:spPr>
           <a:xfrm>
-            <a:off x="1005840" y="1828800"/>
-            <a:ext cx="6309360" cy="4206240"/>
+            <a:off x="1005840" y="1920240"/>
+            <a:ext cx="2864815" cy="4114800"/>
           </a:xfrm>
           <a:prstGeom prst="rect">
             <a:avLst/>
@@ -3779,149 +3841,222 @@
           <a:p>
             <a:pPr>
               <a:spcAft>
-                <a:spcPts val="200"/>
-              </a:spcAft>
-              <a:defRPr sz="1350" b="1">
+                <a:spcPts val="1400"/>
+              </a:spcAft>
+              <a:defRPr sz="1600" b="1">
                 <a:solidFill>
                   <a:srgbClr val="FFB612"/>
                 </a:solidFill>
               </a:defRPr>
             </a:pPr>
             <a:r>
-              <a:t>🙋 Atribución Clara en Cada Mesa</a:t>
-            </a:r>
-          </a:p>
-          <a:p>
-            <a:pPr>
-              <a:spcAft>
-                <a:spcPts val="1000"/>
-              </a:spcAft>
-              <a:defRPr sz="1150">
+              <a:t>🍔 Alto Valor Percibido vs Bajo Costo</a:t>
+            </a:r>
+          </a:p>
+          <a:p>
+            <a:pPr>
+              <a:defRPr sz="1300">
                 <a:solidFill>
                   <a:srgbClr val="FFFFFF"/>
                 </a:solidFill>
               </a:defRPr>
             </a:pPr>
             <a:r>
-              <a:t>Al registrar sus pronósticos, el cliente selecciona el nombre de su mesero en la lista. La gerencia sabe con métricas exactas qué meseros están invitando activamente y cuáles no.</a:t>
-            </a:r>
-          </a:p>
-          <a:p>
-            <a:pPr>
-              <a:spcAft>
-                <a:spcPts val="200"/>
-              </a:spcAft>
-              <a:defRPr sz="1350" b="1">
-                <a:solidFill>
-                  <a:srgbClr val="FFB612"/>
-                </a:solidFill>
-              </a:defRPr>
-            </a:pPr>
-            <a:r>
-              <a:t>💰 Incentivo Económico Directo (Más Propina)</a:t>
-            </a:r>
-          </a:p>
-          <a:p>
-            <a:pPr>
-              <a:spcAft>
-                <a:spcPts val="1000"/>
-              </a:spcAft>
-              <a:defRPr sz="1150">
-                <a:solidFill>
-                  <a:srgbClr val="FFFFFF"/>
-                </a:solidFill>
-              </a:defRPr>
-            </a:pPr>
-            <a:r>
-              <a:t>Los meseros comprenden la fórmula de inmediato: Si la mesa se queda 3 horas compitiendo, consumirá más rondas de cerveza, hamburguesas y alitas, lo que elevará el total de la cuenta y su propina.</a:t>
-            </a:r>
-          </a:p>
-          <a:p>
-            <a:pPr>
-              <a:spcAft>
-                <a:spcPts val="200"/>
-              </a:spcAft>
-              <a:defRPr sz="1350" b="1">
-                <a:solidFill>
-                  <a:srgbClr val="FFB612"/>
-                </a:solidFill>
-              </a:defRPr>
-            </a:pPr>
-            <a:r>
-              <a:t>💬 Rompehielos Natural de Venta Sugerida</a:t>
-            </a:r>
-          </a:p>
-          <a:p>
-            <a:pPr>
-              <a:spcAft>
-                <a:spcPts val="1000"/>
-              </a:spcAft>
-              <a:defRPr sz="1150">
-                <a:solidFill>
-                  <a:srgbClr val="FFFFFF"/>
-                </a:solidFill>
-              </a:defRPr>
-            </a:pPr>
-            <a:r>
-              <a:t>En lugar del genérico '¿Se les ofrece algo más?', el mesero llega sonriendo: '¿Ya metieron su quiniela de hoy con mi nombre? Si ganan, ¡la casa les invita unas alitas!'.</a:t>
-            </a:r>
-          </a:p>
-          <a:p>
-            <a:pPr>
-              <a:spcAft>
-                <a:spcPts val="200"/>
-              </a:spcAft>
-              <a:defRPr sz="1350" b="1">
-                <a:solidFill>
-                  <a:srgbClr val="FFB612"/>
-                </a:solidFill>
-              </a:defRPr>
-            </a:pPr>
-            <a:r>
-              <a:t>🏆 Competencia Interna del Equipo</a:t>
-            </a:r>
-          </a:p>
-          <a:p>
-            <a:pPr>
-              <a:spcAft>
-                <a:spcPts val="1000"/>
-              </a:spcAft>
-              <a:defRPr sz="1150">
-                <a:solidFill>
-                  <a:srgbClr val="FFFFFF"/>
-                </a:solidFill>
-              </a:defRPr>
-            </a:pPr>
-            <a:r>
-              <a:t>Se puede premiar al mesero con más comensales registrados en la semana con turnos preferenciales o un reconocimiento en la junta semanal.</a:t>
-            </a:r>
-          </a:p>
-        </p:txBody>
-      </p:sp>
-      <p:pic>
-        <p:nvPicPr>
-          <p:cNvPr id="5" name="Picture 4" descr="screenshot_admin_player.png"/>
-          <p:cNvPicPr>
-            <a:picLocks noChangeAspect="1"/>
-          </p:cNvPicPr>
+              <a:t>Una orden de alitas o una cerveza tiene un costo de insumo moderado para cocina/barra ($30-$50 MXN), pero en la mente del cliente representa un premio valioso de $160 a $240 MXN.</a:t>
+            </a:r>
+          </a:p>
+        </p:txBody>
+      </p:sp>
+      <p:sp>
+        <p:nvSpPr>
+          <p:cNvPr id="5" name="Rounded Rectangle 4"/>
+          <p:cNvSpPr/>
           <p:nvPr/>
-        </p:nvPicPr>
-        <p:blipFill>
-          <a:blip r:embed="rId2"/>
-          <a:stretch>
-            <a:fillRect/>
-          </a:stretch>
-        </p:blipFill>
-        <p:spPr>
-          <a:xfrm>
-            <a:off x="7863840" y="1828800"/>
-            <a:ext cx="3566160" cy="1308612"/>
+        </p:nvSpPr>
+        <p:spPr>
+          <a:xfrm>
+            <a:off x="4389120" y="1645920"/>
+            <a:ext cx="3413455" cy="4663440"/>
+          </a:xfrm>
+          <a:prstGeom prst="roundRect">
+            <a:avLst/>
+          </a:prstGeom>
+          <a:solidFill>
+            <a:srgbClr val="141A26"/>
+          </a:solidFill>
+          <a:ln w="19050">
+            <a:solidFill>
+              <a:srgbClr val="283246"/>
+            </a:solidFill>
+          </a:ln>
+        </p:spPr>
+        <p:style>
+          <a:lnRef idx="1">
+            <a:schemeClr val="accent1"/>
+          </a:lnRef>
+          <a:fillRef idx="3">
+            <a:schemeClr val="accent1"/>
+          </a:fillRef>
+          <a:effectRef idx="2">
+            <a:schemeClr val="accent1"/>
+          </a:effectRef>
+          <a:fontRef idx="minor">
+            <a:schemeClr val="lt1"/>
+          </a:fontRef>
+        </p:style>
+        <p:txBody>
+          <a:bodyPr rtlCol="0" anchor="ctr"/>
+          <a:lstStyle/>
+          <a:p>
+            <a:pPr algn="ctr"/>
+          </a:p>
+        </p:txBody>
+      </p:sp>
+      <p:sp>
+        <p:nvSpPr>
+          <p:cNvPr id="6" name="TextBox 5"/>
+          <p:cNvSpPr txBox="1"/>
+          <p:nvPr/>
+        </p:nvSpPr>
+        <p:spPr>
+          <a:xfrm>
+            <a:off x="4663440" y="1920240"/>
+            <a:ext cx="2864815" cy="4114800"/>
           </a:xfrm>
           <a:prstGeom prst="rect">
             <a:avLst/>
           </a:prstGeom>
-        </p:spPr>
-      </p:pic>
+          <a:noFill/>
+        </p:spPr>
+        <p:txBody>
+          <a:bodyPr wrap="square">
+            <a:spAutoFit/>
+          </a:bodyPr>
+          <a:lstStyle/>
+          <a:p>
+            <a:pPr>
+              <a:spcAft>
+                <a:spcPts val="1400"/>
+              </a:spcAft>
+              <a:defRPr sz="1600" b="1">
+                <a:solidFill>
+                  <a:srgbClr val="00E676"/>
+                </a:solidFill>
+              </a:defRPr>
+            </a:pPr>
+            <a:r>
+              <a:t>🍻 Festejo y Rondas Extra en Mesa</a:t>
+            </a:r>
+          </a:p>
+          <a:p>
+            <a:pPr>
+              <a:defRPr sz="1300">
+                <a:solidFill>
+                  <a:srgbClr val="FFFFFF"/>
+                </a:solidFill>
+              </a:defRPr>
+            </a:pPr>
+            <a:r>
+              <a:t>Nadie gana y se va. El comensal que resulta campeón celebra con su mesa, y el grupo pide cervezas y platillos adicionales para acompañar el premio. El ticket final siempre supera con creces el costo del incentivo.</a:t>
+            </a:r>
+          </a:p>
+        </p:txBody>
+      </p:sp>
+      <p:sp>
+        <p:nvSpPr>
+          <p:cNvPr id="7" name="Rounded Rectangle 6"/>
+          <p:cNvSpPr/>
+          <p:nvPr/>
+        </p:nvSpPr>
+        <p:spPr>
+          <a:xfrm>
+            <a:off x="8046720" y="1645920"/>
+            <a:ext cx="3413455" cy="4663440"/>
+          </a:xfrm>
+          <a:prstGeom prst="roundRect">
+            <a:avLst/>
+          </a:prstGeom>
+          <a:solidFill>
+            <a:srgbClr val="141A26"/>
+          </a:solidFill>
+          <a:ln w="19050">
+            <a:solidFill>
+              <a:srgbClr val="283246"/>
+            </a:solidFill>
+          </a:ln>
+        </p:spPr>
+        <p:style>
+          <a:lnRef idx="1">
+            <a:schemeClr val="accent1"/>
+          </a:lnRef>
+          <a:fillRef idx="3">
+            <a:schemeClr val="accent1"/>
+          </a:fillRef>
+          <a:effectRef idx="2">
+            <a:schemeClr val="accent1"/>
+          </a:effectRef>
+          <a:fontRef idx="minor">
+            <a:schemeClr val="lt1"/>
+          </a:fontRef>
+        </p:style>
+        <p:txBody>
+          <a:bodyPr rtlCol="0" anchor="ctr"/>
+          <a:lstStyle/>
+          <a:p>
+            <a:pPr algn="ctr"/>
+          </a:p>
+        </p:txBody>
+      </p:sp>
+      <p:sp>
+        <p:nvSpPr>
+          <p:cNvPr id="8" name="TextBox 7"/>
+          <p:cNvSpPr txBox="1"/>
+          <p:nvPr/>
+        </p:nvSpPr>
+        <p:spPr>
+          <a:xfrm>
+            <a:off x="8321040" y="1920240"/>
+            <a:ext cx="2864815" cy="4114800"/>
+          </a:xfrm>
+          <a:prstGeom prst="rect">
+            <a:avLst/>
+          </a:prstGeom>
+          <a:noFill/>
+        </p:spPr>
+        <p:txBody>
+          <a:bodyPr wrap="square">
+            <a:spAutoFit/>
+          </a:bodyPr>
+          <a:lstStyle/>
+          <a:p>
+            <a:pPr>
+              <a:spcAft>
+                <a:spcPts val="1400"/>
+              </a:spcAft>
+              <a:defRPr sz="1600" b="1">
+                <a:solidFill>
+                  <a:srgbClr val="FF5722"/>
+                </a:solidFill>
+              </a:defRPr>
+            </a:pPr>
+            <a:r>
+              <a:t>🔄 Retorno Asegurado en Días Bajas</a:t>
+            </a:r>
+          </a:p>
+          <a:p>
+            <a:pPr>
+              <a:defRPr sz="1300">
+                <a:solidFill>
+                  <a:srgbClr val="FFFFFF"/>
+                </a:solidFill>
+              </a:defRPr>
+            </a:pPr>
+            <a:r>
+              <a:t>Los cupones de 2º y 3º lugar se pueden programar para canjearse de lunes a jueves en su siguiente visita, generando tráfico en días y horarios con menor ocupación.</a:t>
+            </a:r>
+          </a:p>
+        </p:txBody>
+      </p:sp>
     </p:spTree>
   </p:cSld>
   <p:clrMapOvr>
@@ -3981,7 +4116,7 @@
               </a:defRPr>
             </a:pPr>
             <a:r>
-              <a:t>CALENDARIO INTELIGENTE</a:t>
+              <a:t>EQUIPO DE SERVICIO</a:t>
             </a:r>
           </a:p>
           <a:p>
@@ -3993,7 +4128,7 @@
               </a:defRPr>
             </a:pPr>
             <a:r>
-              <a:t>Estrategia Gradual: El Juego Indicado en el Momento Indicado</a:t>
+              <a:t>Gamificación del Personal: Meseros como Embajadores</a:t>
             </a:r>
           </a:p>
         </p:txBody>
@@ -4007,7 +4142,7 @@
         <p:spPr>
           <a:xfrm>
             <a:off x="731520" y="1645920"/>
-            <a:ext cx="10728655" cy="4663440"/>
+            <a:ext cx="6858000" cy="4663440"/>
           </a:xfrm>
           <a:prstGeom prst="roundRect">
             <a:avLst/>
@@ -4051,8 +4186,8 @@
         </p:nvSpPr>
         <p:spPr>
           <a:xfrm>
-            <a:off x="1097280" y="1828800"/>
-            <a:ext cx="9966960" cy="4206240"/>
+            <a:off x="1005840" y="1828800"/>
+            <a:ext cx="6309360" cy="4206240"/>
           </a:xfrm>
           <a:prstGeom prst="rect">
             <a:avLst/>
@@ -4067,16 +4202,31 @@
           <a:p>
             <a:pPr>
               <a:spcAft>
-                <a:spcPts val="1200"/>
-              </a:spcAft>
-              <a:defRPr sz="1700" b="1">
+                <a:spcPts val="200"/>
+              </a:spcAft>
+              <a:defRPr sz="1350" b="1">
                 <a:solidFill>
                   <a:srgbClr val="FFB612"/>
                 </a:solidFill>
               </a:defRPr>
             </a:pPr>
             <a:r>
-              <a:t>🎯 Menos es Más: La Calidad del Momento vs Saturación</a:t>
+              <a:t>🙋 Atribución Clara en Cada Mesa</a:t>
+            </a:r>
+          </a:p>
+          <a:p>
+            <a:pPr>
+              <a:spcAft>
+                <a:spcPts val="1000"/>
+              </a:spcAft>
+              <a:defRPr sz="1150">
+                <a:solidFill>
+                  <a:srgbClr val="FFFFFF"/>
+                </a:solidFill>
+              </a:defRPr>
+            </a:pPr>
+            <a:r>
+              <a:t>Al registrar sus pronósticos, el cliente selecciona el nombre de su mesero en la lista. La gerencia sabe con métricas exactas qué meseros están invitando activamente y cuáles no.</a:t>
             </a:r>
           </a:p>
           <a:p>
@@ -4084,14 +4234,14 @@
               <a:spcAft>
                 <a:spcPts val="200"/>
               </a:spcAft>
-              <a:defRPr sz="1400" b="1">
-                <a:solidFill>
-                  <a:srgbClr val="FFD100"/>
-                </a:solidFill>
-              </a:defRPr>
-            </a:pPr>
-            <a:r>
-              <a:t>🚫 No Jugar Todos los Juegos Todos los Días</a:t>
+              <a:defRPr sz="1350" b="1">
+                <a:solidFill>
+                  <a:srgbClr val="FFB612"/>
+                </a:solidFill>
+              </a:defRPr>
+            </a:pPr>
+            <a:r>
+              <a:t>💰 Incentivo Económico Directo (Más Propina)</a:t>
             </a:r>
           </a:p>
           <a:p>
@@ -4099,14 +4249,14 @@
               <a:spcAft>
                 <a:spcPts val="1000"/>
               </a:spcAft>
-              <a:defRPr sz="1200">
+              <a:defRPr sz="1150">
                 <a:solidFill>
                   <a:srgbClr val="FFFFFF"/>
                 </a:solidFill>
               </a:defRPr>
             </a:pPr>
             <a:r>
-              <a:t>Saturar al cliente o al personal con 5 juegos simultáneos genera fatiga y desinterés. La experiencia debe sentirse especial y esperada cada fin de semana.</a:t>
+              <a:t>Los meseros comprenden la fórmula de inmediato: Si la mesa se queda 3 horas compitiendo, consumirá más rondas de cerveza, hamburguesas y alitas, lo que elevará el total de la cuenta y su propina.</a:t>
             </a:r>
           </a:p>
           <a:p>
@@ -4114,14 +4264,14 @@
               <a:spcAft>
                 <a:spcPts val="200"/>
               </a:spcAft>
-              <a:defRPr sz="1400" b="1">
-                <a:solidFill>
-                  <a:srgbClr val="FFD100"/>
-                </a:solidFill>
-              </a:defRPr>
-            </a:pPr>
-            <a:r>
-              <a:t>📅 Jueves, Domingos y Lunes: Modo NFL</a:t>
+              <a:defRPr sz="1350" b="1">
+                <a:solidFill>
+                  <a:srgbClr val="FFB612"/>
+                </a:solidFill>
+              </a:defRPr>
+            </a:pPr>
+            <a:r>
+              <a:t>💬 Rompehielos Natural de Venta Sugerida</a:t>
             </a:r>
           </a:p>
           <a:p>
@@ -4129,14 +4279,14 @@
               <a:spcAft>
                 <a:spcPts val="1000"/>
               </a:spcAft>
-              <a:defRPr sz="1200">
+              <a:defRPr sz="1150">
                 <a:solidFill>
                   <a:srgbClr val="FFFFFF"/>
                 </a:solidFill>
               </a:defRPr>
             </a:pPr>
             <a:r>
-              <a:t>Exclusivamente Quinielas de Semana NFL y Football Grids en partidos estelares de Steelers, Sunday Night y Monday Night.</a:t>
+              <a:t>En lugar del genérico '¿Se les ofrece algo más?', el mesero llega sonriendo: '¿Ya metieron su quiniela de hoy con mi nombre? Si ganan, ¡la casa les invita unas alitas!'.</a:t>
             </a:r>
           </a:p>
           <a:p>
@@ -4144,14 +4294,14 @@
               <a:spcAft>
                 <a:spcPts val="200"/>
               </a:spcAft>
-              <a:defRPr sz="1400" b="1">
-                <a:solidFill>
-                  <a:srgbClr val="FFD100"/>
-                </a:solidFill>
-              </a:defRPr>
-            </a:pPr>
-            <a:r>
-              <a:t>⚽ Viernes, Sábados y Domingos: Modo Fútbol</a:t>
+              <a:defRPr sz="1350" b="1">
+                <a:solidFill>
+                  <a:srgbClr val="FFB612"/>
+                </a:solidFill>
+              </a:defRPr>
+            </a:pPr>
+            <a:r>
+              <a:t>🏆 Competencia Interna del Equipo</a:t>
             </a:r>
           </a:p>
           <a:p>
@@ -4159,48 +4309,42 @@
               <a:spcAft>
                 <a:spcPts val="1000"/>
               </a:spcAft>
-              <a:defRPr sz="1200">
+              <a:defRPr sz="1150">
                 <a:solidFill>
                   <a:srgbClr val="FFFFFF"/>
                 </a:solidFill>
               </a:defRPr>
             </a:pPr>
             <a:r>
-              <a:t>Quinielas de Jornada de Liga MX y dinámicas de First Striker en Clásicos y liguilla.</a:t>
-            </a:r>
-          </a:p>
-          <a:p>
-            <a:pPr>
-              <a:spcAft>
-                <a:spcPts val="200"/>
-              </a:spcAft>
-              <a:defRPr sz="1400" b="1">
-                <a:solidFill>
-                  <a:srgbClr val="FFD100"/>
-                </a:solidFill>
-              </a:defRPr>
-            </a:pPr>
-            <a:r>
-              <a:t>🧠 Medios Tiempos Selectos: Modo Trivia</a:t>
-            </a:r>
-          </a:p>
-          <a:p>
-            <a:pPr>
-              <a:spcAft>
-                <a:spcPts val="1000"/>
-              </a:spcAft>
-              <a:defRPr sz="1200">
-                <a:solidFill>
-                  <a:srgbClr val="FFFFFF"/>
-                </a:solidFill>
-              </a:defRPr>
-            </a:pPr>
-            <a:r>
-              <a:t>Trivias de 10 minutos exclusivamente en el medio tiempo de partidos de alta audiencia para mantener a la gente entretenida mientras no hay jugadas.</a:t>
-            </a:r>
-          </a:p>
-        </p:txBody>
-      </p:sp>
+              <a:t>Se puede premiar al mesero con más comensales registrados en la semana con turnos preferenciales o un reconocimiento en la junta semanal.</a:t>
+            </a:r>
+          </a:p>
+        </p:txBody>
+      </p:sp>
+      <p:pic>
+        <p:nvPicPr>
+          <p:cNvPr id="5" name="Picture 4" descr="screenshot_admin_player.png"/>
+          <p:cNvPicPr>
+            <a:picLocks noChangeAspect="1"/>
+          </p:cNvPicPr>
+          <p:nvPr/>
+        </p:nvPicPr>
+        <p:blipFill>
+          <a:blip r:embed="rId2"/>
+          <a:stretch>
+            <a:fillRect/>
+          </a:stretch>
+        </p:blipFill>
+        <p:spPr>
+          <a:xfrm>
+            <a:off x="7863840" y="1828800"/>
+            <a:ext cx="3566160" cy="1308612"/>
+          </a:xfrm>
+          <a:prstGeom prst="rect">
+            <a:avLst/>
+          </a:prstGeom>
+        </p:spPr>
+      </p:pic>
     </p:spTree>
   </p:cSld>
   <p:clrMapOvr>
@@ -4260,7 +4404,7 @@
               </a:defRPr>
             </a:pPr>
             <a:r>
-              <a:t>RETORNO DE INVERSIÓN</a:t>
+              <a:t>CALENDARIO INTELIGENTE</a:t>
             </a:r>
           </a:p>
           <a:p>
@@ -4272,7 +4416,7 @@
               </a:defRPr>
             </a:pPr>
             <a:r>
-              <a:t>Métricas Clave de Negocio (KPIs y Rentabilidad)</a:t>
+              <a:t>Estrategia Gradual: El Juego Indicado en el Momento Indicado</a:t>
             </a:r>
           </a:p>
         </p:txBody>
@@ -4286,7 +4430,7 @@
         <p:spPr>
           <a:xfrm>
             <a:off x="731520" y="1645920"/>
-            <a:ext cx="2499055" cy="4663440"/>
+            <a:ext cx="10728655" cy="4663440"/>
           </a:xfrm>
           <a:prstGeom prst="roundRect">
             <a:avLst/>
@@ -4330,8 +4474,8 @@
         </p:nvSpPr>
         <p:spPr>
           <a:xfrm>
-            <a:off x="914400" y="1920240"/>
-            <a:ext cx="2133295" cy="4114800"/>
+            <a:off x="1097280" y="1828800"/>
+            <a:ext cx="9966960" cy="4206240"/>
           </a:xfrm>
           <a:prstGeom prst="rect">
             <a:avLst/>
@@ -4344,375 +4488,138 @@
           </a:bodyPr>
           <a:lstStyle/>
           <a:p>
-            <a:pPr algn="ctr">
-              <a:spcAft>
-                <a:spcPts val="400"/>
-              </a:spcAft>
-              <a:defRPr sz="3600" b="1">
+            <a:pPr>
+              <a:spcAft>
+                <a:spcPts val="1200"/>
+              </a:spcAft>
+              <a:defRPr sz="1700" b="1">
                 <a:solidFill>
                   <a:srgbClr val="FFB612"/>
                 </a:solidFill>
               </a:defRPr>
             </a:pPr>
             <a:r>
-              <a:t>+35%</a:t>
-            </a:r>
-          </a:p>
-          <a:p>
-            <a:pPr algn="ctr">
-              <a:spcAft>
-                <a:spcPts val="1400"/>
-              </a:spcAft>
-              <a:defRPr sz="1100" b="1">
-                <a:solidFill>
-                  <a:srgbClr val="FFB612"/>
-                </a:solidFill>
-              </a:defRPr>
-            </a:pPr>
-            <a:r>
-              <a:t>PERMANENCIA (DWELL TIME)</a:t>
-            </a:r>
-          </a:p>
-          <a:p>
-            <a:pPr algn="ctr">
-              <a:defRPr sz="1150">
-                <a:solidFill>
-                  <a:srgbClr val="94A3B8"/>
-                </a:solidFill>
-              </a:defRPr>
-            </a:pPr>
-            <a:r>
-              <a:t>Las mesas se quedan hasta el silbatazo final para ver si ganan su quiniela.</a:t>
-            </a:r>
-          </a:p>
-        </p:txBody>
-      </p:sp>
-      <p:sp>
-        <p:nvSpPr>
-          <p:cNvPr id="5" name="Rounded Rectangle 4"/>
-          <p:cNvSpPr/>
-          <p:nvPr/>
-        </p:nvSpPr>
-        <p:spPr>
-          <a:xfrm>
-            <a:off x="3474720" y="1645920"/>
-            <a:ext cx="2499055" cy="4663440"/>
-          </a:xfrm>
-          <a:prstGeom prst="roundRect">
-            <a:avLst/>
-          </a:prstGeom>
-          <a:solidFill>
-            <a:srgbClr val="141A26"/>
-          </a:solidFill>
-          <a:ln w="19050">
-            <a:solidFill>
-              <a:srgbClr val="283246"/>
-            </a:solidFill>
-          </a:ln>
-        </p:spPr>
-        <p:style>
-          <a:lnRef idx="1">
-            <a:schemeClr val="accent1"/>
-          </a:lnRef>
-          <a:fillRef idx="3">
-            <a:schemeClr val="accent1"/>
-          </a:fillRef>
-          <a:effectRef idx="2">
-            <a:schemeClr val="accent1"/>
-          </a:effectRef>
-          <a:fontRef idx="minor">
-            <a:schemeClr val="lt1"/>
-          </a:fontRef>
-        </p:style>
-        <p:txBody>
-          <a:bodyPr rtlCol="0" anchor="ctr"/>
-          <a:lstStyle/>
-          <a:p>
-            <a:pPr algn="ctr"/>
-          </a:p>
-        </p:txBody>
-      </p:sp>
-      <p:sp>
-        <p:nvSpPr>
-          <p:cNvPr id="6" name="TextBox 5"/>
-          <p:cNvSpPr txBox="1"/>
-          <p:nvPr/>
-        </p:nvSpPr>
-        <p:spPr>
-          <a:xfrm>
-            <a:off x="3657600" y="1920240"/>
-            <a:ext cx="2133295" cy="4114800"/>
-          </a:xfrm>
-          <a:prstGeom prst="rect">
-            <a:avLst/>
-          </a:prstGeom>
-          <a:noFill/>
-        </p:spPr>
-        <p:txBody>
-          <a:bodyPr wrap="square">
-            <a:spAutoFit/>
-          </a:bodyPr>
-          <a:lstStyle/>
-          <a:p>
-            <a:pPr algn="ctr">
-              <a:spcAft>
-                <a:spcPts val="400"/>
-              </a:spcAft>
-              <a:defRPr sz="3600" b="1">
-                <a:solidFill>
-                  <a:srgbClr val="00E676"/>
-                </a:solidFill>
-              </a:defRPr>
-            </a:pPr>
-            <a:r>
-              <a:t>+22%</a:t>
-            </a:r>
-          </a:p>
-          <a:p>
-            <a:pPr algn="ctr">
-              <a:spcAft>
-                <a:spcPts val="1400"/>
-              </a:spcAft>
-              <a:defRPr sz="1100" b="1">
-                <a:solidFill>
-                  <a:srgbClr val="FFB612"/>
-                </a:solidFill>
-              </a:defRPr>
-            </a:pPr>
-            <a:r>
-              <a:t>TICKET PROMEDIO (AOV)</a:t>
-            </a:r>
-          </a:p>
-          <a:p>
-            <a:pPr algn="ctr">
-              <a:defRPr sz="1150">
-                <a:solidFill>
-                  <a:srgbClr val="94A3B8"/>
-                </a:solidFill>
-              </a:defRPr>
-            </a:pPr>
-            <a:r>
-              <a:t>El ambiente competitivo estimula pedidos repetidos de cerveza y botanas.</a:t>
-            </a:r>
-          </a:p>
-        </p:txBody>
-      </p:sp>
-      <p:sp>
-        <p:nvSpPr>
-          <p:cNvPr id="7" name="Rounded Rectangle 6"/>
-          <p:cNvSpPr/>
-          <p:nvPr/>
-        </p:nvSpPr>
-        <p:spPr>
-          <a:xfrm>
-            <a:off x="6217920" y="1645920"/>
-            <a:ext cx="2499055" cy="4663440"/>
-          </a:xfrm>
-          <a:prstGeom prst="roundRect">
-            <a:avLst/>
-          </a:prstGeom>
-          <a:solidFill>
-            <a:srgbClr val="141A26"/>
-          </a:solidFill>
-          <a:ln w="19050">
-            <a:solidFill>
-              <a:srgbClr val="283246"/>
-            </a:solidFill>
-          </a:ln>
-        </p:spPr>
-        <p:style>
-          <a:lnRef idx="1">
-            <a:schemeClr val="accent1"/>
-          </a:lnRef>
-          <a:fillRef idx="3">
-            <a:schemeClr val="accent1"/>
-          </a:fillRef>
-          <a:effectRef idx="2">
-            <a:schemeClr val="accent1"/>
-          </a:effectRef>
-          <a:fontRef idx="minor">
-            <a:schemeClr val="lt1"/>
-          </a:fontRef>
-        </p:style>
-        <p:txBody>
-          <a:bodyPr rtlCol="0" anchor="ctr"/>
-          <a:lstStyle/>
-          <a:p>
-            <a:pPr algn="ctr"/>
-          </a:p>
-        </p:txBody>
-      </p:sp>
-      <p:sp>
-        <p:nvSpPr>
-          <p:cNvPr id="8" name="TextBox 7"/>
-          <p:cNvSpPr txBox="1"/>
-          <p:nvPr/>
-        </p:nvSpPr>
-        <p:spPr>
-          <a:xfrm>
-            <a:off x="6400800" y="1920240"/>
-            <a:ext cx="2133295" cy="4114800"/>
-          </a:xfrm>
-          <a:prstGeom prst="rect">
-            <a:avLst/>
-          </a:prstGeom>
-          <a:noFill/>
-        </p:spPr>
-        <p:txBody>
-          <a:bodyPr wrap="square">
-            <a:spAutoFit/>
-          </a:bodyPr>
-          <a:lstStyle/>
-          <a:p>
-            <a:pPr algn="ctr">
-              <a:spcAft>
-                <a:spcPts val="400"/>
-              </a:spcAft>
-              <a:defRPr sz="3600" b="1">
-                <a:solidFill>
-                  <a:srgbClr val="FF5722"/>
-                </a:solidFill>
-              </a:defRPr>
-            </a:pPr>
-            <a:r>
-              <a:t>3x</a:t>
-            </a:r>
-          </a:p>
-          <a:p>
-            <a:pPr algn="ctr">
-              <a:spcAft>
-                <a:spcPts val="1400"/>
-              </a:spcAft>
-              <a:defRPr sz="1100" b="1">
-                <a:solidFill>
-                  <a:srgbClr val="FFB612"/>
-                </a:solidFill>
-              </a:defRPr>
-            </a:pPr>
-            <a:r>
-              <a:t>RETENCIÓN Y LEALTAD</a:t>
-            </a:r>
-          </a:p>
-          <a:p>
-            <a:pPr algn="ctr">
-              <a:defRPr sz="1150">
-                <a:solidFill>
-                  <a:srgbClr val="94A3B8"/>
-                </a:solidFill>
-              </a:defRPr>
-            </a:pPr>
-            <a:r>
-              <a:t>El comensal regresa jornada tras jornada para defender su posición en la tabla.</a:t>
-            </a:r>
-          </a:p>
-        </p:txBody>
-      </p:sp>
-      <p:sp>
-        <p:nvSpPr>
-          <p:cNvPr id="9" name="Rounded Rectangle 8"/>
-          <p:cNvSpPr/>
-          <p:nvPr/>
-        </p:nvSpPr>
-        <p:spPr>
-          <a:xfrm>
-            <a:off x="8961120" y="1645920"/>
-            <a:ext cx="2499055" cy="4663440"/>
-          </a:xfrm>
-          <a:prstGeom prst="roundRect">
-            <a:avLst/>
-          </a:prstGeom>
-          <a:solidFill>
-            <a:srgbClr val="141A26"/>
-          </a:solidFill>
-          <a:ln w="19050">
-            <a:solidFill>
-              <a:srgbClr val="283246"/>
-            </a:solidFill>
-          </a:ln>
-        </p:spPr>
-        <p:style>
-          <a:lnRef idx="1">
-            <a:schemeClr val="accent1"/>
-          </a:lnRef>
-          <a:fillRef idx="3">
-            <a:schemeClr val="accent1"/>
-          </a:fillRef>
-          <a:effectRef idx="2">
-            <a:schemeClr val="accent1"/>
-          </a:effectRef>
-          <a:fontRef idx="minor">
-            <a:schemeClr val="lt1"/>
-          </a:fontRef>
-        </p:style>
-        <p:txBody>
-          <a:bodyPr rtlCol="0" anchor="ctr"/>
-          <a:lstStyle/>
-          <a:p>
-            <a:pPr algn="ctr"/>
-          </a:p>
-        </p:txBody>
-      </p:sp>
-      <p:sp>
-        <p:nvSpPr>
-          <p:cNvPr id="10" name="TextBox 9"/>
-          <p:cNvSpPr txBox="1"/>
-          <p:nvPr/>
-        </p:nvSpPr>
-        <p:spPr>
-          <a:xfrm>
-            <a:off x="9144000" y="1920240"/>
-            <a:ext cx="2133295" cy="4114800"/>
-          </a:xfrm>
-          <a:prstGeom prst="rect">
-            <a:avLst/>
-          </a:prstGeom>
-          <a:noFill/>
-        </p:spPr>
-        <p:txBody>
-          <a:bodyPr wrap="square">
-            <a:spAutoFit/>
-          </a:bodyPr>
-          <a:lstStyle/>
-          <a:p>
-            <a:pPr algn="ctr">
-              <a:spcAft>
-                <a:spcPts val="400"/>
-              </a:spcAft>
-              <a:defRPr sz="3600" b="1">
+              <a:t>🎯 Menos es Más: La Calidad del Momento vs Saturación</a:t>
+            </a:r>
+          </a:p>
+          <a:p>
+            <a:pPr>
+              <a:spcAft>
+                <a:spcPts val="200"/>
+              </a:spcAft>
+              <a:defRPr sz="1400" b="1">
+                <a:solidFill>
+                  <a:srgbClr val="FFD100"/>
+                </a:solidFill>
+              </a:defRPr>
+            </a:pPr>
+            <a:r>
+              <a:t>🚫 No Jugar Todos los Juegos Todos los Días</a:t>
+            </a:r>
+          </a:p>
+          <a:p>
+            <a:pPr>
+              <a:spcAft>
+                <a:spcPts val="1000"/>
+              </a:spcAft>
+              <a:defRPr sz="1200">
                 <a:solidFill>
                   <a:srgbClr val="FFFFFF"/>
                 </a:solidFill>
               </a:defRPr>
             </a:pPr>
             <a:r>
-              <a:t>$0</a:t>
-            </a:r>
-          </a:p>
-          <a:p>
-            <a:pPr algn="ctr">
-              <a:spcAft>
-                <a:spcPts val="1400"/>
-              </a:spcAft>
-              <a:defRPr sz="1100" b="1">
-                <a:solidFill>
-                  <a:srgbClr val="FFB612"/>
-                </a:solidFill>
-              </a:defRPr>
-            </a:pPr>
-            <a:r>
-              <a:t>COSTO DE PAPELERÍA</a:t>
-            </a:r>
-          </a:p>
-          <a:p>
-            <a:pPr algn="ctr">
-              <a:defRPr sz="1150">
-                <a:solidFill>
-                  <a:srgbClr val="94A3B8"/>
-                </a:solidFill>
-              </a:defRPr>
-            </a:pPr>
-            <a:r>
-              <a:t>Eliminación total de impresiones, papeletas extraviadas y errores de conteo.</a:t>
+              <a:t>Saturar al cliente o al personal con 5 juegos simultáneos genera fatiga y desinterés. La experiencia debe sentirse especial y esperada cada fin de semana.</a:t>
+            </a:r>
+          </a:p>
+          <a:p>
+            <a:pPr>
+              <a:spcAft>
+                <a:spcPts val="200"/>
+              </a:spcAft>
+              <a:defRPr sz="1400" b="1">
+                <a:solidFill>
+                  <a:srgbClr val="FFD100"/>
+                </a:solidFill>
+              </a:defRPr>
+            </a:pPr>
+            <a:r>
+              <a:t>📅 Jueves, Domingos y Lunes: Modo NFL</a:t>
+            </a:r>
+          </a:p>
+          <a:p>
+            <a:pPr>
+              <a:spcAft>
+                <a:spcPts val="1000"/>
+              </a:spcAft>
+              <a:defRPr sz="1200">
+                <a:solidFill>
+                  <a:srgbClr val="FFFFFF"/>
+                </a:solidFill>
+              </a:defRPr>
+            </a:pPr>
+            <a:r>
+              <a:t>Exclusivamente Quinielas de Semana NFL y Football Grids en partidos estelares de Steelers, Sunday Night y Monday Night.</a:t>
+            </a:r>
+          </a:p>
+          <a:p>
+            <a:pPr>
+              <a:spcAft>
+                <a:spcPts val="200"/>
+              </a:spcAft>
+              <a:defRPr sz="1400" b="1">
+                <a:solidFill>
+                  <a:srgbClr val="FFD100"/>
+                </a:solidFill>
+              </a:defRPr>
+            </a:pPr>
+            <a:r>
+              <a:t>⚽ Viernes, Sábados y Domingos: Modo Fútbol</a:t>
+            </a:r>
+          </a:p>
+          <a:p>
+            <a:pPr>
+              <a:spcAft>
+                <a:spcPts val="1000"/>
+              </a:spcAft>
+              <a:defRPr sz="1200">
+                <a:solidFill>
+                  <a:srgbClr val="FFFFFF"/>
+                </a:solidFill>
+              </a:defRPr>
+            </a:pPr>
+            <a:r>
+              <a:t>Quinielas de Jornada de Liga MX y dinámicas de First Striker en Clásicos y liguilla.</a:t>
+            </a:r>
+          </a:p>
+          <a:p>
+            <a:pPr>
+              <a:spcAft>
+                <a:spcPts val="200"/>
+              </a:spcAft>
+              <a:defRPr sz="1400" b="1">
+                <a:solidFill>
+                  <a:srgbClr val="FFD100"/>
+                </a:solidFill>
+              </a:defRPr>
+            </a:pPr>
+            <a:r>
+              <a:t>🧠 Medios Tiempos Selectos: Modo Trivia</a:t>
+            </a:r>
+          </a:p>
+          <a:p>
+            <a:pPr>
+              <a:spcAft>
+                <a:spcPts val="1000"/>
+              </a:spcAft>
+              <a:defRPr sz="1200">
+                <a:solidFill>
+                  <a:srgbClr val="FFFFFF"/>
+                </a:solidFill>
+              </a:defRPr>
+            </a:pPr>
+            <a:r>
+              <a:t>Trivias de 10 minutos exclusivamente en el medio tiempo de partidos de alta audiencia para mantener a la gente entretenida mientras no hay jugadas.</a:t>
             </a:r>
           </a:p>
         </p:txBody>
@@ -4776,6 +4683,522 @@
               </a:defRPr>
             </a:pPr>
             <a:r>
+              <a:t>RETORNO DE INVERSIÓN</a:t>
+            </a:r>
+          </a:p>
+          <a:p>
+            <a:pPr>
+              <a:defRPr sz="2300" b="1">
+                <a:solidFill>
+                  <a:srgbClr val="FFFFFF"/>
+                </a:solidFill>
+              </a:defRPr>
+            </a:pPr>
+            <a:r>
+              <a:t>Métricas Clave de Negocio (KPIs y Rentabilidad)</a:t>
+            </a:r>
+          </a:p>
+        </p:txBody>
+      </p:sp>
+      <p:sp>
+        <p:nvSpPr>
+          <p:cNvPr id="3" name="Rounded Rectangle 2"/>
+          <p:cNvSpPr/>
+          <p:nvPr/>
+        </p:nvSpPr>
+        <p:spPr>
+          <a:xfrm>
+            <a:off x="731520" y="1645920"/>
+            <a:ext cx="2499055" cy="4663440"/>
+          </a:xfrm>
+          <a:prstGeom prst="roundRect">
+            <a:avLst/>
+          </a:prstGeom>
+          <a:solidFill>
+            <a:srgbClr val="141A26"/>
+          </a:solidFill>
+          <a:ln w="19050">
+            <a:solidFill>
+              <a:srgbClr val="283246"/>
+            </a:solidFill>
+          </a:ln>
+        </p:spPr>
+        <p:style>
+          <a:lnRef idx="1">
+            <a:schemeClr val="accent1"/>
+          </a:lnRef>
+          <a:fillRef idx="3">
+            <a:schemeClr val="accent1"/>
+          </a:fillRef>
+          <a:effectRef idx="2">
+            <a:schemeClr val="accent1"/>
+          </a:effectRef>
+          <a:fontRef idx="minor">
+            <a:schemeClr val="lt1"/>
+          </a:fontRef>
+        </p:style>
+        <p:txBody>
+          <a:bodyPr rtlCol="0" anchor="ctr"/>
+          <a:lstStyle/>
+          <a:p>
+            <a:pPr algn="ctr"/>
+          </a:p>
+        </p:txBody>
+      </p:sp>
+      <p:sp>
+        <p:nvSpPr>
+          <p:cNvPr id="4" name="TextBox 3"/>
+          <p:cNvSpPr txBox="1"/>
+          <p:nvPr/>
+        </p:nvSpPr>
+        <p:spPr>
+          <a:xfrm>
+            <a:off x="914400" y="1920240"/>
+            <a:ext cx="2133295" cy="4114800"/>
+          </a:xfrm>
+          <a:prstGeom prst="rect">
+            <a:avLst/>
+          </a:prstGeom>
+          <a:noFill/>
+        </p:spPr>
+        <p:txBody>
+          <a:bodyPr wrap="square">
+            <a:spAutoFit/>
+          </a:bodyPr>
+          <a:lstStyle/>
+          <a:p>
+            <a:pPr algn="ctr">
+              <a:spcAft>
+                <a:spcPts val="400"/>
+              </a:spcAft>
+              <a:defRPr sz="3600" b="1">
+                <a:solidFill>
+                  <a:srgbClr val="FFB612"/>
+                </a:solidFill>
+              </a:defRPr>
+            </a:pPr>
+            <a:r>
+              <a:t>+35%</a:t>
+            </a:r>
+          </a:p>
+          <a:p>
+            <a:pPr algn="ctr">
+              <a:spcAft>
+                <a:spcPts val="1400"/>
+              </a:spcAft>
+              <a:defRPr sz="1100" b="1">
+                <a:solidFill>
+                  <a:srgbClr val="FFB612"/>
+                </a:solidFill>
+              </a:defRPr>
+            </a:pPr>
+            <a:r>
+              <a:t>PERMANENCIA (DWELL TIME)</a:t>
+            </a:r>
+          </a:p>
+          <a:p>
+            <a:pPr algn="ctr">
+              <a:defRPr sz="1150">
+                <a:solidFill>
+                  <a:srgbClr val="94A3B8"/>
+                </a:solidFill>
+              </a:defRPr>
+            </a:pPr>
+            <a:r>
+              <a:t>Las mesas se quedan hasta el silbatazo final para ver si ganan su quiniela.</a:t>
+            </a:r>
+          </a:p>
+        </p:txBody>
+      </p:sp>
+      <p:sp>
+        <p:nvSpPr>
+          <p:cNvPr id="5" name="Rounded Rectangle 4"/>
+          <p:cNvSpPr/>
+          <p:nvPr/>
+        </p:nvSpPr>
+        <p:spPr>
+          <a:xfrm>
+            <a:off x="3474720" y="1645920"/>
+            <a:ext cx="2499055" cy="4663440"/>
+          </a:xfrm>
+          <a:prstGeom prst="roundRect">
+            <a:avLst/>
+          </a:prstGeom>
+          <a:solidFill>
+            <a:srgbClr val="141A26"/>
+          </a:solidFill>
+          <a:ln w="19050">
+            <a:solidFill>
+              <a:srgbClr val="283246"/>
+            </a:solidFill>
+          </a:ln>
+        </p:spPr>
+        <p:style>
+          <a:lnRef idx="1">
+            <a:schemeClr val="accent1"/>
+          </a:lnRef>
+          <a:fillRef idx="3">
+            <a:schemeClr val="accent1"/>
+          </a:fillRef>
+          <a:effectRef idx="2">
+            <a:schemeClr val="accent1"/>
+          </a:effectRef>
+          <a:fontRef idx="minor">
+            <a:schemeClr val="lt1"/>
+          </a:fontRef>
+        </p:style>
+        <p:txBody>
+          <a:bodyPr rtlCol="0" anchor="ctr"/>
+          <a:lstStyle/>
+          <a:p>
+            <a:pPr algn="ctr"/>
+          </a:p>
+        </p:txBody>
+      </p:sp>
+      <p:sp>
+        <p:nvSpPr>
+          <p:cNvPr id="6" name="TextBox 5"/>
+          <p:cNvSpPr txBox="1"/>
+          <p:nvPr/>
+        </p:nvSpPr>
+        <p:spPr>
+          <a:xfrm>
+            <a:off x="3657600" y="1920240"/>
+            <a:ext cx="2133295" cy="4114800"/>
+          </a:xfrm>
+          <a:prstGeom prst="rect">
+            <a:avLst/>
+          </a:prstGeom>
+          <a:noFill/>
+        </p:spPr>
+        <p:txBody>
+          <a:bodyPr wrap="square">
+            <a:spAutoFit/>
+          </a:bodyPr>
+          <a:lstStyle/>
+          <a:p>
+            <a:pPr algn="ctr">
+              <a:spcAft>
+                <a:spcPts val="400"/>
+              </a:spcAft>
+              <a:defRPr sz="3600" b="1">
+                <a:solidFill>
+                  <a:srgbClr val="00E676"/>
+                </a:solidFill>
+              </a:defRPr>
+            </a:pPr>
+            <a:r>
+              <a:t>+22%</a:t>
+            </a:r>
+          </a:p>
+          <a:p>
+            <a:pPr algn="ctr">
+              <a:spcAft>
+                <a:spcPts val="1400"/>
+              </a:spcAft>
+              <a:defRPr sz="1100" b="1">
+                <a:solidFill>
+                  <a:srgbClr val="FFB612"/>
+                </a:solidFill>
+              </a:defRPr>
+            </a:pPr>
+            <a:r>
+              <a:t>TICKET PROMEDIO (AOV)</a:t>
+            </a:r>
+          </a:p>
+          <a:p>
+            <a:pPr algn="ctr">
+              <a:defRPr sz="1150">
+                <a:solidFill>
+                  <a:srgbClr val="94A3B8"/>
+                </a:solidFill>
+              </a:defRPr>
+            </a:pPr>
+            <a:r>
+              <a:t>El ambiente competitivo estimula pedidos repetidos de cerveza y botanas.</a:t>
+            </a:r>
+          </a:p>
+        </p:txBody>
+      </p:sp>
+      <p:sp>
+        <p:nvSpPr>
+          <p:cNvPr id="7" name="Rounded Rectangle 6"/>
+          <p:cNvSpPr/>
+          <p:nvPr/>
+        </p:nvSpPr>
+        <p:spPr>
+          <a:xfrm>
+            <a:off x="6217920" y="1645920"/>
+            <a:ext cx="2499055" cy="4663440"/>
+          </a:xfrm>
+          <a:prstGeom prst="roundRect">
+            <a:avLst/>
+          </a:prstGeom>
+          <a:solidFill>
+            <a:srgbClr val="141A26"/>
+          </a:solidFill>
+          <a:ln w="19050">
+            <a:solidFill>
+              <a:srgbClr val="283246"/>
+            </a:solidFill>
+          </a:ln>
+        </p:spPr>
+        <p:style>
+          <a:lnRef idx="1">
+            <a:schemeClr val="accent1"/>
+          </a:lnRef>
+          <a:fillRef idx="3">
+            <a:schemeClr val="accent1"/>
+          </a:fillRef>
+          <a:effectRef idx="2">
+            <a:schemeClr val="accent1"/>
+          </a:effectRef>
+          <a:fontRef idx="minor">
+            <a:schemeClr val="lt1"/>
+          </a:fontRef>
+        </p:style>
+        <p:txBody>
+          <a:bodyPr rtlCol="0" anchor="ctr"/>
+          <a:lstStyle/>
+          <a:p>
+            <a:pPr algn="ctr"/>
+          </a:p>
+        </p:txBody>
+      </p:sp>
+      <p:sp>
+        <p:nvSpPr>
+          <p:cNvPr id="8" name="TextBox 7"/>
+          <p:cNvSpPr txBox="1"/>
+          <p:nvPr/>
+        </p:nvSpPr>
+        <p:spPr>
+          <a:xfrm>
+            <a:off x="6400800" y="1920240"/>
+            <a:ext cx="2133295" cy="4114800"/>
+          </a:xfrm>
+          <a:prstGeom prst="rect">
+            <a:avLst/>
+          </a:prstGeom>
+          <a:noFill/>
+        </p:spPr>
+        <p:txBody>
+          <a:bodyPr wrap="square">
+            <a:spAutoFit/>
+          </a:bodyPr>
+          <a:lstStyle/>
+          <a:p>
+            <a:pPr algn="ctr">
+              <a:spcAft>
+                <a:spcPts val="400"/>
+              </a:spcAft>
+              <a:defRPr sz="3600" b="1">
+                <a:solidFill>
+                  <a:srgbClr val="FF5722"/>
+                </a:solidFill>
+              </a:defRPr>
+            </a:pPr>
+            <a:r>
+              <a:t>3x</a:t>
+            </a:r>
+          </a:p>
+          <a:p>
+            <a:pPr algn="ctr">
+              <a:spcAft>
+                <a:spcPts val="1400"/>
+              </a:spcAft>
+              <a:defRPr sz="1100" b="1">
+                <a:solidFill>
+                  <a:srgbClr val="FFB612"/>
+                </a:solidFill>
+              </a:defRPr>
+            </a:pPr>
+            <a:r>
+              <a:t>RETENCIÓN Y LEALTAD</a:t>
+            </a:r>
+          </a:p>
+          <a:p>
+            <a:pPr algn="ctr">
+              <a:defRPr sz="1150">
+                <a:solidFill>
+                  <a:srgbClr val="94A3B8"/>
+                </a:solidFill>
+              </a:defRPr>
+            </a:pPr>
+            <a:r>
+              <a:t>El comensal regresa jornada tras jornada para defender su posición en la tabla.</a:t>
+            </a:r>
+          </a:p>
+        </p:txBody>
+      </p:sp>
+      <p:sp>
+        <p:nvSpPr>
+          <p:cNvPr id="9" name="Rounded Rectangle 8"/>
+          <p:cNvSpPr/>
+          <p:nvPr/>
+        </p:nvSpPr>
+        <p:spPr>
+          <a:xfrm>
+            <a:off x="8961120" y="1645920"/>
+            <a:ext cx="2499055" cy="4663440"/>
+          </a:xfrm>
+          <a:prstGeom prst="roundRect">
+            <a:avLst/>
+          </a:prstGeom>
+          <a:solidFill>
+            <a:srgbClr val="141A26"/>
+          </a:solidFill>
+          <a:ln w="19050">
+            <a:solidFill>
+              <a:srgbClr val="283246"/>
+            </a:solidFill>
+          </a:ln>
+        </p:spPr>
+        <p:style>
+          <a:lnRef idx="1">
+            <a:schemeClr val="accent1"/>
+          </a:lnRef>
+          <a:fillRef idx="3">
+            <a:schemeClr val="accent1"/>
+          </a:fillRef>
+          <a:effectRef idx="2">
+            <a:schemeClr val="accent1"/>
+          </a:effectRef>
+          <a:fontRef idx="minor">
+            <a:schemeClr val="lt1"/>
+          </a:fontRef>
+        </p:style>
+        <p:txBody>
+          <a:bodyPr rtlCol="0" anchor="ctr"/>
+          <a:lstStyle/>
+          <a:p>
+            <a:pPr algn="ctr"/>
+          </a:p>
+        </p:txBody>
+      </p:sp>
+      <p:sp>
+        <p:nvSpPr>
+          <p:cNvPr id="10" name="TextBox 9"/>
+          <p:cNvSpPr txBox="1"/>
+          <p:nvPr/>
+        </p:nvSpPr>
+        <p:spPr>
+          <a:xfrm>
+            <a:off x="9144000" y="1920240"/>
+            <a:ext cx="2133295" cy="4114800"/>
+          </a:xfrm>
+          <a:prstGeom prst="rect">
+            <a:avLst/>
+          </a:prstGeom>
+          <a:noFill/>
+        </p:spPr>
+        <p:txBody>
+          <a:bodyPr wrap="square">
+            <a:spAutoFit/>
+          </a:bodyPr>
+          <a:lstStyle/>
+          <a:p>
+            <a:pPr algn="ctr">
+              <a:spcAft>
+                <a:spcPts val="400"/>
+              </a:spcAft>
+              <a:defRPr sz="3600" b="1">
+                <a:solidFill>
+                  <a:srgbClr val="FFFFFF"/>
+                </a:solidFill>
+              </a:defRPr>
+            </a:pPr>
+            <a:r>
+              <a:t>$0</a:t>
+            </a:r>
+          </a:p>
+          <a:p>
+            <a:pPr algn="ctr">
+              <a:spcAft>
+                <a:spcPts val="1400"/>
+              </a:spcAft>
+              <a:defRPr sz="1100" b="1">
+                <a:solidFill>
+                  <a:srgbClr val="FFB612"/>
+                </a:solidFill>
+              </a:defRPr>
+            </a:pPr>
+            <a:r>
+              <a:t>COSTO DE PAPELERÍA</a:t>
+            </a:r>
+          </a:p>
+          <a:p>
+            <a:pPr algn="ctr">
+              <a:defRPr sz="1150">
+                <a:solidFill>
+                  <a:srgbClr val="94A3B8"/>
+                </a:solidFill>
+              </a:defRPr>
+            </a:pPr>
+            <a:r>
+              <a:t>Eliminación total de impresiones, papeletas extraviadas y errores de conteo.</a:t>
+            </a:r>
+          </a:p>
+        </p:txBody>
+      </p:sp>
+    </p:spTree>
+  </p:cSld>
+  <p:clrMapOvr>
+    <a:masterClrMapping/>
+  </p:clrMapOvr>
+</p:sld>
+</file>
+
+<file path=ppt/slides/slide15.xml><?xml version="1.0" encoding="utf-8"?>
+<p:sld xmlns:a="http://schemas.openxmlformats.org/drawingml/2006/main" xmlns:p="http://schemas.openxmlformats.org/presentationml/2006/main" xmlns:r="http://schemas.openxmlformats.org/officeDocument/2006/relationships">
+  <p:cSld>
+    <p:bg>
+      <p:bgPr>
+        <a:solidFill>
+          <a:srgbClr val="0B0F17"/>
+        </a:solidFill>
+        <a:effectLst/>
+      </p:bgPr>
+    </p:bg>
+    <p:spTree>
+      <p:nvGrpSpPr>
+        <p:cNvPr id="1" name=""/>
+        <p:cNvGrpSpPr/>
+        <p:nvPr/>
+      </p:nvGrpSpPr>
+      <p:grpSpPr/>
+      <p:sp>
+        <p:nvSpPr>
+          <p:cNvPr id="2" name="TextBox 1"/>
+          <p:cNvSpPr txBox="1"/>
+          <p:nvPr/>
+        </p:nvSpPr>
+        <p:spPr>
+          <a:xfrm>
+            <a:off x="731520" y="365760"/>
+            <a:ext cx="10698480" cy="1005840"/>
+          </a:xfrm>
+          <a:prstGeom prst="rect">
+            <a:avLst/>
+          </a:prstGeom>
+          <a:noFill/>
+        </p:spPr>
+        <p:txBody>
+          <a:bodyPr wrap="square" lIns="0" tIns="0" rIns="0" bIns="0">
+            <a:spAutoFit/>
+          </a:bodyPr>
+          <a:lstStyle/>
+          <a:p>
+            <a:pPr>
+              <a:spcAft>
+                <a:spcPts val="200"/>
+              </a:spcAft>
+              <a:defRPr sz="1000" b="1">
+                <a:solidFill>
+                  <a:srgbClr val="FFB612"/>
+                </a:solidFill>
+              </a:defRPr>
+            </a:pPr>
+            <a:r>
               <a:t>PRÓXIMOS PASOS</a:t>
             </a:r>
           </a:p>
@@ -5040,7 +5463,7 @@
               </a:defRPr>
             </a:pPr>
             <a:r>
-              <a:t>HISTORIA REAL • MOTIVACIÓN Y PROPÓSITO</a:t>
+              <a:t>PROPUESTA DE VALOR</a:t>
             </a:r>
           </a:p>
           <a:p>
@@ -5052,7 +5475,7 @@
               </a:defRPr>
             </a:pPr>
             <a:r>
-              <a:t>El Corazón del Proyecto: La Historia de un Barman en Álamos</a:t>
+              <a:t>¿Qué es Drinks &amp; Wins? Definición, Objetivo y Metas</a:t>
             </a:r>
           </a:p>
         </p:txBody>
@@ -5066,7 +5489,7 @@
         <p:spPr>
           <a:xfrm>
             <a:off x="731520" y="1645920"/>
-            <a:ext cx="10728655" cy="4663440"/>
+            <a:ext cx="10728655" cy="1645920"/>
           </a:xfrm>
           <a:prstGeom prst="roundRect">
             <a:avLst/>
@@ -5110,8 +5533,8 @@
         </p:nvSpPr>
         <p:spPr>
           <a:xfrm>
-            <a:off x="1097280" y="1828800"/>
-            <a:ext cx="9966960" cy="4206240"/>
+            <a:off x="1005840" y="1783080"/>
+            <a:ext cx="10149840" cy="1371600"/>
           </a:xfrm>
           <a:prstGeom prst="rect">
             <a:avLst/>
@@ -5126,38 +5549,20 @@
           <a:p>
             <a:pPr>
               <a:spcAft>
-                <a:spcPts val="1200"/>
-              </a:spcAft>
-              <a:defRPr sz="1700" b="1">
+                <a:spcPts val="400"/>
+              </a:spcAft>
+              <a:defRPr sz="1500" b="1">
                 <a:solidFill>
                   <a:srgbClr val="FFB612"/>
                 </a:solidFill>
               </a:defRPr>
             </a:pPr>
             <a:r>
-              <a:t>❤️ «El cliente debe estar contento: aún si su equipo pierde o el partido está aburrido»</a:t>
-            </a:r>
-          </a:p>
-          <a:p>
-            <a:pPr>
-              <a:spcAft>
-                <a:spcPts val="200"/>
-              </a:spcAft>
-              <a:defRPr sz="1400" b="1">
-                <a:solidFill>
-                  <a:srgbClr val="FFD100"/>
-                </a:solidFill>
-              </a:defRPr>
-            </a:pPr>
-            <a:r>
-              <a:t>🍺 El Origen Detrás de la Barra en Álamos</a:t>
-            </a:r>
-          </a:p>
-          <a:p>
-            <a:pPr>
-              <a:spcAft>
-                <a:spcPts val="1000"/>
-              </a:spcAft>
+              <a:t>📱 ¿QUÉ ES DRINKS &amp; WINS?</a:t>
+            </a:r>
+          </a:p>
+          <a:p>
+            <a:pPr>
               <a:defRPr sz="1200">
                 <a:solidFill>
                   <a:srgbClr val="FFFFFF"/>
@@ -5165,67 +5570,278 @@
               </a:defRPr>
             </a:pPr>
             <a:r>
-              <a:t>Esto comenzó cuando yo era barman en la sucursal de Álamos. Mi meta siempre fue clara: que cada persona se fuera feliz del restaurante. Por naturaleza, al ser humano le fascina competir. Empecé a inventar quinielas y trivias entre las mesas; de repente, la gente no solo veía la tele, ¡estaban conviviendo, gritando y pidiendo más rondas!</a:t>
-            </a:r>
-          </a:p>
-          <a:p>
-            <a:pPr>
-              <a:spcAft>
-                <a:spcPts val="200"/>
-              </a:spcAft>
-              <a:defRPr sz="1400" b="1">
-                <a:solidFill>
-                  <a:srgbClr val="FFD100"/>
-                </a:solidFill>
-              </a:defRPr>
-            </a:pPr>
-            <a:r>
-              <a:t>🙏 Una Comunidad Fiel que Impulsa a Mi Familia</a:t>
-            </a:r>
-          </a:p>
-          <a:p>
-            <a:pPr>
-              <a:spcAft>
-                <a:spcPts val="1000"/>
-              </a:spcAft>
-              <a:defRPr sz="1200">
+              <a:t>Es una plataforma web interactiva (PWA) de gamificación deportiva en mesa para restaurantes y sports bars. Conecta las pantallas de TV con el celular de cada cliente mediante códigos QR (sin descargas de App Store). Permite a las mesas competir en tiempo real en quinielas, cuadrículas (Grids) y trivias, todo automatizado al 80% con Inteligencia Artificial y resultados oficiales de ESPN.</a:t>
+            </a:r>
+          </a:p>
+        </p:txBody>
+      </p:sp>
+      <p:sp>
+        <p:nvSpPr>
+          <p:cNvPr id="5" name="Rounded Rectangle 4"/>
+          <p:cNvSpPr/>
+          <p:nvPr/>
+        </p:nvSpPr>
+        <p:spPr>
+          <a:xfrm>
+            <a:off x="731520" y="3474720"/>
+            <a:ext cx="5212080" cy="2834640"/>
+          </a:xfrm>
+          <a:prstGeom prst="roundRect">
+            <a:avLst/>
+          </a:prstGeom>
+          <a:solidFill>
+            <a:srgbClr val="141A26"/>
+          </a:solidFill>
+          <a:ln w="19050">
+            <a:solidFill>
+              <a:srgbClr val="283246"/>
+            </a:solidFill>
+          </a:ln>
+        </p:spPr>
+        <p:style>
+          <a:lnRef idx="1">
+            <a:schemeClr val="accent1"/>
+          </a:lnRef>
+          <a:fillRef idx="3">
+            <a:schemeClr val="accent1"/>
+          </a:fillRef>
+          <a:effectRef idx="2">
+            <a:schemeClr val="accent1"/>
+          </a:effectRef>
+          <a:fontRef idx="minor">
+            <a:schemeClr val="lt1"/>
+          </a:fontRef>
+        </p:style>
+        <p:txBody>
+          <a:bodyPr rtlCol="0" anchor="ctr"/>
+          <a:lstStyle/>
+          <a:p>
+            <a:pPr algn="ctr"/>
+          </a:p>
+        </p:txBody>
+      </p:sp>
+      <p:sp>
+        <p:nvSpPr>
+          <p:cNvPr id="6" name="TextBox 5"/>
+          <p:cNvSpPr txBox="1"/>
+          <p:nvPr/>
+        </p:nvSpPr>
+        <p:spPr>
+          <a:xfrm>
+            <a:off x="1005840" y="3611880"/>
+            <a:ext cx="4663440" cy="2560320"/>
+          </a:xfrm>
+          <a:prstGeom prst="rect">
+            <a:avLst/>
+          </a:prstGeom>
+          <a:noFill/>
+        </p:spPr>
+        <p:txBody>
+          <a:bodyPr wrap="square">
+            <a:spAutoFit/>
+          </a:bodyPr>
+          <a:lstStyle/>
+          <a:p>
+            <a:pPr>
+              <a:spcAft>
+                <a:spcPts val="600"/>
+              </a:spcAft>
+              <a:defRPr sz="1500" b="1">
+                <a:solidFill>
+                  <a:srgbClr val="FF5722"/>
+                </a:solidFill>
+              </a:defRPr>
+            </a:pPr>
+            <a:r>
+              <a:t>🎯 OBJETIVO ESTRATÉGICO</a:t>
+            </a:r>
+          </a:p>
+          <a:p>
+            <a:pPr>
+              <a:spcAft>
+                <a:spcPts val="400"/>
+              </a:spcAft>
+              <a:defRPr sz="1150">
                 <a:solidFill>
                   <a:srgbClr val="FFFFFF"/>
                 </a:solidFill>
               </a:defRPr>
             </a:pPr>
             <a:r>
-              <a:t>Esas dinámicas crearon clientes tan frecuentes y leales que hasta el día de hoy me ven en la calle en Querétaro y me dicen con una sonrisa: '¡Beto, qué onda! ¿Para cuándo otra quiniela o trivia?'. Gracias a esos clientes y a las propinas que dejan en mesa, he podido sacar adelante a mi familia.</a:t>
-            </a:r>
-          </a:p>
-          <a:p>
-            <a:pPr>
-              <a:spcAft>
-                <a:spcPts val="200"/>
-              </a:spcAft>
-              <a:defRPr sz="1400" b="1">
-                <a:solidFill>
-                  <a:srgbClr val="FFD100"/>
-                </a:solidFill>
-              </a:defRPr>
-            </a:pPr>
-            <a:r>
-              <a:t>💡 No Soy Programador ni Ingeniero: Soy Alguien que Ama Este Lugar</a:t>
-            </a:r>
-          </a:p>
-          <a:p>
-            <a:pPr>
-              <a:spcAft>
-                <a:spcPts val="1000"/>
-              </a:spcAft>
-              <a:defRPr sz="1200">
+              <a:t>• Transformar comensales pasivos en fanáticos activos y entretenidos.</a:t>
+            </a:r>
+          </a:p>
+          <a:p>
+            <a:pPr>
+              <a:spcAft>
+                <a:spcPts val="400"/>
+              </a:spcAft>
+              <a:defRPr sz="1150">
                 <a:solidFill>
                   <a:srgbClr val="FFFFFF"/>
                 </a:solidFill>
               </a:defRPr>
             </a:pPr>
             <a:r>
-              <a:t>No soy desarrollador de software ni diseñador gráfico. Construí esta plataforma con todo el corazón, utilizando Inteligencia Artificial y herramientas modernas, por el inmenso cariño que le tengo a la marca y a este equipo.</a:t>
+              <a:t>• Maximizar el consumo en mesa durante las horas muertas de las transmisiones.</a:t>
+            </a:r>
+          </a:p>
+          <a:p>
+            <a:pPr>
+              <a:spcAft>
+                <a:spcPts val="400"/>
+              </a:spcAft>
+              <a:defRPr sz="1150">
+                <a:solidFill>
+                  <a:srgbClr val="FFFFFF"/>
+                </a:solidFill>
+              </a:defRPr>
+            </a:pPr>
+            <a:r>
+              <a:t>• Fidelizar al cliente para que regrese semana tras semana a la misma sucursal.</a:t>
+            </a:r>
+          </a:p>
+        </p:txBody>
+      </p:sp>
+      <p:sp>
+        <p:nvSpPr>
+          <p:cNvPr id="7" name="Rounded Rectangle 6"/>
+          <p:cNvSpPr/>
+          <p:nvPr/>
+        </p:nvSpPr>
+        <p:spPr>
+          <a:xfrm>
+            <a:off x="6217920" y="3474720"/>
+            <a:ext cx="5212080" cy="2834640"/>
+          </a:xfrm>
+          <a:prstGeom prst="roundRect">
+            <a:avLst/>
+          </a:prstGeom>
+          <a:solidFill>
+            <a:srgbClr val="141A26"/>
+          </a:solidFill>
+          <a:ln w="19050">
+            <a:solidFill>
+              <a:srgbClr val="283246"/>
+            </a:solidFill>
+          </a:ln>
+        </p:spPr>
+        <p:style>
+          <a:lnRef idx="1">
+            <a:schemeClr val="accent1"/>
+          </a:lnRef>
+          <a:fillRef idx="3">
+            <a:schemeClr val="accent1"/>
+          </a:fillRef>
+          <a:effectRef idx="2">
+            <a:schemeClr val="accent1"/>
+          </a:effectRef>
+          <a:fontRef idx="minor">
+            <a:schemeClr val="lt1"/>
+          </a:fontRef>
+        </p:style>
+        <p:txBody>
+          <a:bodyPr rtlCol="0" anchor="ctr"/>
+          <a:lstStyle/>
+          <a:p>
+            <a:pPr algn="ctr"/>
+          </a:p>
+        </p:txBody>
+      </p:sp>
+      <p:sp>
+        <p:nvSpPr>
+          <p:cNvPr id="8" name="TextBox 7"/>
+          <p:cNvSpPr txBox="1"/>
+          <p:nvPr/>
+        </p:nvSpPr>
+        <p:spPr>
+          <a:xfrm>
+            <a:off x="6492240" y="3611880"/>
+            <a:ext cx="4663440" cy="2560320"/>
+          </a:xfrm>
+          <a:prstGeom prst="rect">
+            <a:avLst/>
+          </a:prstGeom>
+          <a:noFill/>
+        </p:spPr>
+        <p:txBody>
+          <a:bodyPr wrap="square">
+            <a:spAutoFit/>
+          </a:bodyPr>
+          <a:lstStyle/>
+          <a:p>
+            <a:pPr>
+              <a:spcAft>
+                <a:spcPts val="600"/>
+              </a:spcAft>
+              <a:defRPr sz="1500" b="1">
+                <a:solidFill>
+                  <a:srgbClr val="00E676"/>
+                </a:solidFill>
+              </a:defRPr>
+            </a:pPr>
+            <a:r>
+              <a:t>🏆 METAS CLAVE DEL PROYECTO</a:t>
+            </a:r>
+          </a:p>
+          <a:p>
+            <a:pPr>
+              <a:spcAft>
+                <a:spcPts val="400"/>
+              </a:spcAft>
+              <a:defRPr sz="1150">
+                <a:solidFill>
+                  <a:srgbClr val="FFFFFF"/>
+                </a:solidFill>
+              </a:defRPr>
+            </a:pPr>
+            <a:r>
+              <a:t>1. +20% a +25% en Ticket Promedio (AOV) en bebidas y botanas.</a:t>
+            </a:r>
+          </a:p>
+          <a:p>
+            <a:pPr>
+              <a:spcAft>
+                <a:spcPts val="400"/>
+              </a:spcAft>
+              <a:defRPr sz="1150">
+                <a:solidFill>
+                  <a:srgbClr val="FFFFFF"/>
+                </a:solidFill>
+              </a:defRPr>
+            </a:pPr>
+            <a:r>
+              <a:t>2. +35% en Tiempo de Estancia (comensales hasta el último cuarto).</a:t>
+            </a:r>
+          </a:p>
+          <a:p>
+            <a:pPr>
+              <a:spcAft>
+                <a:spcPts val="400"/>
+              </a:spcAft>
+              <a:defRPr sz="1150">
+                <a:solidFill>
+                  <a:srgbClr val="FFFFFF"/>
+                </a:solidFill>
+              </a:defRPr>
+            </a:pPr>
+            <a:r>
+              <a:t>3. Retención 3x: Clientes que regresan 3 a 4 veces por mes.</a:t>
+            </a:r>
+          </a:p>
+          <a:p>
+            <a:pPr>
+              <a:spcAft>
+                <a:spcPts val="400"/>
+              </a:spcAft>
+              <a:defRPr sz="1150">
+                <a:solidFill>
+                  <a:srgbClr val="FFFFFF"/>
+                </a:solidFill>
+              </a:defRPr>
+            </a:pPr>
+            <a:r>
+              <a:t>4. $0 en Papelería: Cero hojas impresas y cero errores manuales.</a:t>
             </a:r>
           </a:p>
         </p:txBody>
@@ -5289,7 +5905,7 @@
               </a:defRPr>
             </a:pPr>
             <a:r>
-              <a:t>SOLUCIÓN OPERATIVA</a:t>
+              <a:t>HISTORIA REAL • MOTIVACIÓN Y PROPÓSITO</a:t>
             </a:r>
           </a:p>
           <a:p>
@@ -5301,7 +5917,7 @@
               </a:defRPr>
             </a:pPr>
             <a:r>
-              <a:t>De Álamos a Juriquilla: El Reto Operativo y la Automatización</a:t>
+              <a:t>El Corazón del Proyecto: La Historia de un Barman en Álamos</a:t>
             </a:r>
           </a:p>
         </p:txBody>
@@ -5315,7 +5931,7 @@
         <p:spPr>
           <a:xfrm>
             <a:off x="731520" y="1645920"/>
-            <a:ext cx="5212080" cy="4663440"/>
+            <a:ext cx="10728655" cy="4663440"/>
           </a:xfrm>
           <a:prstGeom prst="roundRect">
             <a:avLst/>
@@ -5359,8 +5975,8 @@
         </p:nvSpPr>
         <p:spPr>
           <a:xfrm>
-            <a:off x="1005840" y="1828800"/>
-            <a:ext cx="4663440" cy="4206240"/>
+            <a:off x="1097280" y="1828800"/>
+            <a:ext cx="9966960" cy="4206240"/>
           </a:xfrm>
           <a:prstGeom prst="rect">
             <a:avLst/>
@@ -5375,31 +5991,61 @@
           <a:p>
             <a:pPr>
               <a:spcAft>
+                <a:spcPts val="1200"/>
+              </a:spcAft>
+              <a:defRPr sz="1700" b="1">
+                <a:solidFill>
+                  <a:srgbClr val="FFB612"/>
+                </a:solidFill>
+              </a:defRPr>
+            </a:pPr>
+            <a:r>
+              <a:t>❤️ «El cliente debe estar contento: aún si su equipo pierde o el partido está aburrido»</a:t>
+            </a:r>
+          </a:p>
+          <a:p>
+            <a:pPr>
+              <a:spcAft>
+                <a:spcPts val="200"/>
+              </a:spcAft>
+              <a:defRPr sz="1400" b="1">
+                <a:solidFill>
+                  <a:srgbClr val="FFD100"/>
+                </a:solidFill>
+              </a:defRPr>
+            </a:pPr>
+            <a:r>
+              <a:t>🍺 El Origen Detrás de la Barra en Álamos</a:t>
+            </a:r>
+          </a:p>
+          <a:p>
+            <a:pPr>
+              <a:spcAft>
                 <a:spcPts val="1000"/>
               </a:spcAft>
-              <a:defRPr sz="1700" b="1">
-                <a:solidFill>
-                  <a:srgbClr val="FF5722"/>
-                </a:solidFill>
-              </a:defRPr>
-            </a:pPr>
-            <a:r>
-              <a:t>⚠️ El Dilema Operativo Actual</a:t>
-            </a:r>
-          </a:p>
-          <a:p>
-            <a:pPr>
-              <a:spcAft>
-                <a:spcPts val="100"/>
-              </a:spcAft>
-              <a:defRPr sz="1300" b="1">
+              <a:defRPr sz="1200">
+                <a:solidFill>
+                  <a:srgbClr val="FFFFFF"/>
+                </a:solidFill>
+              </a:defRPr>
+            </a:pPr>
+            <a:r>
+              <a:t>Esto comenzó cuando yo era barman en la sucursal de Álamos. Mi meta siempre fue clara: que cada persona se fuera feliz del restaurante. Por naturaleza, al ser humano le fascina competir. Empecé a inventar quinielas y trivias entre las mesas; de repente, la gente no solo veía la tele, ¡estaban conviviendo, gritando y pidiendo más rondas de cerveza y alitas!</a:t>
+            </a:r>
+          </a:p>
+          <a:p>
+            <a:pPr>
+              <a:spcAft>
+                <a:spcPts val="200"/>
+              </a:spcAft>
+              <a:defRPr sz="1400" b="1">
                 <a:solidFill>
                   <a:srgbClr val="FFD100"/>
                 </a:solidFill>
               </a:defRPr>
             </a:pPr>
             <a:r>
-              <a:t>📍 Cambio a Juriquilla</a:t>
+              <a:t>🙏 Una Comunidad Fiel que Impulsa a Mi Familia</a:t>
             </a:r>
           </a:p>
           <a:p>
@@ -5407,29 +6053,29 @@
               <a:spcAft>
                 <a:spcPts val="1000"/>
               </a:spcAft>
-              <a:defRPr sz="1150">
+              <a:defRPr sz="1200">
                 <a:solidFill>
                   <a:srgbClr val="FFFFFF"/>
                 </a:solidFill>
               </a:defRPr>
             </a:pPr>
             <a:r>
-              <a:t>Ahora que estoy en Juriquilla, muchos comensales van buscando exactamente esas dinámicas divertidas que vivieron en Álamos.</a:t>
-            </a:r>
-          </a:p>
-          <a:p>
-            <a:pPr>
-              <a:spcAft>
-                <a:spcPts val="100"/>
-              </a:spcAft>
-              <a:defRPr sz="1300" b="1">
+              <a:t>Esas dinámicas crearon clientes tan frecuentes y leales que hasta el día de hoy me ven en la calle en Querétaro y me dicen con una sonrisa: '¡Beto, qué onda! ¿Para cuándo otra quiniela o trivia?'. Gracias a esos clientes y a las propinas que dejan en mesa, he podido sacar adelante a mi familia.</a:t>
+            </a:r>
+          </a:p>
+          <a:p>
+            <a:pPr>
+              <a:spcAft>
+                <a:spcPts val="200"/>
+              </a:spcAft>
+              <a:defRPr sz="1400" b="1">
                 <a:solidFill>
                   <a:srgbClr val="FFD100"/>
                 </a:solidFill>
               </a:defRPr>
             </a:pPr>
             <a:r>
-              <a:t>⏱️ La Operación No Puede Descuidarse</a:t>
+              <a:t>💡 No Soy Programador ni Ingeniero: Soy Alguien que Ama Este Lugar</a:t>
             </a:r>
           </a:p>
           <a:p>
@@ -5437,187 +6083,14 @@
               <a:spcAft>
                 <a:spcPts val="1000"/>
               </a:spcAft>
-              <a:defRPr sz="1150">
+              <a:defRPr sz="1200">
                 <a:solidFill>
                   <a:srgbClr val="FFFFFF"/>
                 </a:solidFill>
               </a:defRPr>
             </a:pPr>
             <a:r>
-              <a:t>Hoy mis deberes ya no son solo atender la barra, sino estar pendiente de la operación completa del restaurante. Es imposible descuidar el servicio para andar contando papeletas de papel o sumando puntos a mano.</a:t>
-            </a:r>
-          </a:p>
-        </p:txBody>
-      </p:sp>
-      <p:sp>
-        <p:nvSpPr>
-          <p:cNvPr id="5" name="Rounded Rectangle 4"/>
-          <p:cNvSpPr/>
-          <p:nvPr/>
-        </p:nvSpPr>
-        <p:spPr>
-          <a:xfrm>
-            <a:off x="6217920" y="1645920"/>
-            <a:ext cx="5212080" cy="4663440"/>
-          </a:xfrm>
-          <a:prstGeom prst="roundRect">
-            <a:avLst/>
-          </a:prstGeom>
-          <a:solidFill>
-            <a:srgbClr val="141A26"/>
-          </a:solidFill>
-          <a:ln w="19050">
-            <a:solidFill>
-              <a:srgbClr val="283246"/>
-            </a:solidFill>
-          </a:ln>
-        </p:spPr>
-        <p:style>
-          <a:lnRef idx="1">
-            <a:schemeClr val="accent1"/>
-          </a:lnRef>
-          <a:fillRef idx="3">
-            <a:schemeClr val="accent1"/>
-          </a:fillRef>
-          <a:effectRef idx="2">
-            <a:schemeClr val="accent1"/>
-          </a:effectRef>
-          <a:fontRef idx="minor">
-            <a:schemeClr val="lt1"/>
-          </a:fontRef>
-        </p:style>
-        <p:txBody>
-          <a:bodyPr rtlCol="0" anchor="ctr"/>
-          <a:lstStyle/>
-          <a:p>
-            <a:pPr algn="ctr"/>
-          </a:p>
-        </p:txBody>
-      </p:sp>
-      <p:sp>
-        <p:nvSpPr>
-          <p:cNvPr id="6" name="TextBox 5"/>
-          <p:cNvSpPr txBox="1"/>
-          <p:nvPr/>
-        </p:nvSpPr>
-        <p:spPr>
-          <a:xfrm>
-            <a:off x="6492240" y="1828800"/>
-            <a:ext cx="4663440" cy="4206240"/>
-          </a:xfrm>
-          <a:prstGeom prst="rect">
-            <a:avLst/>
-          </a:prstGeom>
-          <a:noFill/>
-        </p:spPr>
-        <p:txBody>
-          <a:bodyPr wrap="square">
-            <a:spAutoFit/>
-          </a:bodyPr>
-          <a:lstStyle/>
-          <a:p>
-            <a:pPr>
-              <a:spcAft>
-                <a:spcPts val="1000"/>
-              </a:spcAft>
-              <a:defRPr sz="1700" b="1">
-                <a:solidFill>
-                  <a:srgbClr val="00E676"/>
-                </a:solidFill>
-              </a:defRPr>
-            </a:pPr>
-            <a:r>
-              <a:t>🤖 La Solución: 80% Autónoma con IA</a:t>
-            </a:r>
-          </a:p>
-          <a:p>
-            <a:pPr>
-              <a:spcAft>
-                <a:spcPts val="100"/>
-              </a:spcAft>
-              <a:defRPr sz="1300" b="1">
-                <a:solidFill>
-                  <a:srgbClr val="FFD100"/>
-                </a:solidFill>
-              </a:defRPr>
-            </a:pPr>
-            <a:r>
-              <a:t>⚡ Cero Tiempo Perdido por el Gerente</a:t>
-            </a:r>
-          </a:p>
-          <a:p>
-            <a:pPr>
-              <a:spcAft>
-                <a:spcPts val="1000"/>
-              </a:spcAft>
-              <a:defRPr sz="1150">
-                <a:solidFill>
-                  <a:srgbClr val="FFFFFF"/>
-                </a:solidFill>
-              </a:defRPr>
-            </a:pPr>
-            <a:r>
-              <a:t>La app se administra sola en un 80%. Se conecta en vivo a ESPN y calcula marcadores oficiales sin intervención humana.</a:t>
-            </a:r>
-          </a:p>
-          <a:p>
-            <a:pPr>
-              <a:spcAft>
-                <a:spcPts val="100"/>
-              </a:spcAft>
-              <a:defRPr sz="1300" b="1">
-                <a:solidFill>
-                  <a:srgbClr val="FFD100"/>
-                </a:solidFill>
-              </a:defRPr>
-            </a:pPr>
-            <a:r>
-              <a:t>🧠 Creación con IA en Segundos</a:t>
-            </a:r>
-          </a:p>
-          <a:p>
-            <a:pPr>
-              <a:spcAft>
-                <a:spcPts val="1000"/>
-              </a:spcAft>
-              <a:defRPr sz="1150">
-                <a:solidFill>
-                  <a:srgbClr val="FFFFFF"/>
-                </a:solidFill>
-              </a:defRPr>
-            </a:pPr>
-            <a:r>
-              <a:t>La IA genera trivias deportivas y redacta preguntas temáticas para días de partido en 10 segundos.</a:t>
-            </a:r>
-          </a:p>
-          <a:p>
-            <a:pPr>
-              <a:spcAft>
-                <a:spcPts val="100"/>
-              </a:spcAft>
-              <a:defRPr sz="1300" b="1">
-                <a:solidFill>
-                  <a:srgbClr val="FFD100"/>
-                </a:solidFill>
-              </a:defRPr>
-            </a:pPr>
-            <a:r>
-              <a:t>📊 Cero Papel y Cero Errores</a:t>
-            </a:r>
-          </a:p>
-          <a:p>
-            <a:pPr>
-              <a:spcAft>
-                <a:spcPts val="1000"/>
-              </a:spcAft>
-              <a:defRPr sz="1150">
-                <a:solidFill>
-                  <a:srgbClr val="FFFFFF"/>
-                </a:solidFill>
-              </a:defRPr>
-            </a:pPr>
-            <a:r>
-              <a:t>Elimina impresiones, plumas y quejas de clientes por conteos incorrectos. Todo es transparente y en vivo en el celular del cliente.</a:t>
+              <a:t>No soy desarrollador de software ni diseñador gráfico. Construí esta plataforma con todo el corazón, utilizando Inteligencia Artificial y herramientas modernas, por el inmenso cariño que le tengo a la marca y a este equipo.</a:t>
             </a:r>
           </a:p>
         </p:txBody>
@@ -5681,7 +6154,7 @@
               </a:defRPr>
             </a:pPr>
             <a:r>
-              <a:t>TRACCIÓN REAL EN QUERÉTARO</a:t>
+              <a:t>SOLUCIÓN OPERATIVA</a:t>
             </a:r>
           </a:p>
           <a:p>
@@ -5693,7 +6166,7 @@
               </a:defRPr>
             </a:pPr>
             <a:r>
-              <a:t>Potencial Inmediato: 71 Fans en 2 Semanas de una Base de +350</a:t>
+              <a:t>De Álamos a Juriquilla: El Reto Operativo y la Automatización</a:t>
             </a:r>
           </a:p>
         </p:txBody>
@@ -5707,7 +6180,7 @@
         <p:spPr>
           <a:xfrm>
             <a:off x="731520" y="1645920"/>
-            <a:ext cx="10728655" cy="4663440"/>
+            <a:ext cx="5212080" cy="4663440"/>
           </a:xfrm>
           <a:prstGeom prst="roundRect">
             <a:avLst/>
@@ -5751,8 +6224,8 @@
         </p:nvSpPr>
         <p:spPr>
           <a:xfrm>
-            <a:off x="1097280" y="1828800"/>
-            <a:ext cx="9966960" cy="4206240"/>
+            <a:off x="1005840" y="1828800"/>
+            <a:ext cx="4663440" cy="4206240"/>
           </a:xfrm>
           <a:prstGeom prst="rect">
             <a:avLst/>
@@ -5767,31 +6240,31 @@
           <a:p>
             <a:pPr>
               <a:spcAft>
-                <a:spcPts val="1200"/>
+                <a:spcPts val="1000"/>
               </a:spcAft>
               <a:defRPr sz="1700" b="1">
                 <a:solidFill>
-                  <a:srgbClr val="FFB612"/>
-                </a:solidFill>
-              </a:defRPr>
-            </a:pPr>
-            <a:r>
-              <a:t>🏈 La Punta de Lanza: Steelers Nation Querétaro</a:t>
-            </a:r>
-          </a:p>
-          <a:p>
-            <a:pPr>
-              <a:spcAft>
-                <a:spcPts val="200"/>
-              </a:spcAft>
-              <a:defRPr sz="1400" b="1">
+                  <a:srgbClr val="FF5722"/>
+                </a:solidFill>
+              </a:defRPr>
+            </a:pPr>
+            <a:r>
+              <a:t>⚠️ El Dilema Operativo Actual</a:t>
+            </a:r>
+          </a:p>
+          <a:p>
+            <a:pPr>
+              <a:spcAft>
+                <a:spcPts val="100"/>
+              </a:spcAft>
+              <a:defRPr sz="1300" b="1">
                 <a:solidFill>
                   <a:srgbClr val="FFD100"/>
                 </a:solidFill>
               </a:defRPr>
             </a:pPr>
             <a:r>
-              <a:t>📈 Crecimiento Explosivo Orgánico</a:t>
+              <a:t>📍 Cambio a Juriquilla</a:t>
             </a:r>
           </a:p>
           <a:p>
@@ -5799,29 +6272,29 @@
               <a:spcAft>
                 <a:spcPts val="1000"/>
               </a:spcAft>
-              <a:defRPr sz="1200">
+              <a:defRPr sz="1150">
                 <a:solidFill>
                   <a:srgbClr val="FFFFFF"/>
                 </a:solidFill>
               </a:defRPr>
             </a:pPr>
             <a:r>
-              <a:t>En tan solo 2 semanas desde el lanzamiento de la Credencial Digital de Steelers Nation QRO, ya se han registrado 71 miembros oficiales en la app. Pero son más de 350 fanáticos activos en la comunidad de Querétaro.</a:t>
-            </a:r>
-          </a:p>
-          <a:p>
-            <a:pPr>
-              <a:spcAft>
-                <a:spcPts val="200"/>
-              </a:spcAft>
-              <a:defRPr sz="1400" b="1">
+              <a:t>Ahora que estoy en Juriquilla, muchos comensales van buscando exactamente esas dinámicas divertidas que vivieron en Álamos.</a:t>
+            </a:r>
+          </a:p>
+          <a:p>
+            <a:pPr>
+              <a:spcAft>
+                <a:spcPts val="100"/>
+              </a:spcAft>
+              <a:defRPr sz="1300" b="1">
                 <a:solidFill>
                   <a:srgbClr val="FFD100"/>
                 </a:solidFill>
               </a:defRPr>
             </a:pPr>
             <a:r>
-              <a:t>📲 Conexión Directa desde su Credencial Digital (PWA)</a:t>
+              <a:t>⏱️ La Operación No Puede Descuidarse</a:t>
             </a:r>
           </a:p>
           <a:p>
@@ -5829,29 +6302,112 @@
               <a:spcAft>
                 <a:spcPts val="1000"/>
               </a:spcAft>
-              <a:defRPr sz="1200">
+              <a:defRPr sz="1150">
                 <a:solidFill>
                   <a:srgbClr val="FFFFFF"/>
                 </a:solidFill>
               </a:defRPr>
             </a:pPr>
             <a:r>
-              <a:t>La credencial digital de los fans tiene un botón especial integrado que los manda directamente a Drinks &amp; Wins para participar en las dinámicas de cada juego. Es una audiencia cautiva que ya ama la marca.</a:t>
-            </a:r>
-          </a:p>
-          <a:p>
-            <a:pPr>
-              <a:spcAft>
-                <a:spcPts val="200"/>
-              </a:spcAft>
-              <a:defRPr sz="1400" b="1">
+              <a:t>Hoy mis deberes ya no son solo atender la barra, sino estar pendiente de la operación completa del restaurante. Es imposible descuidar el servicio para andar contando papeletas de papel o sumando puntos a mano.</a:t>
+            </a:r>
+          </a:p>
+        </p:txBody>
+      </p:sp>
+      <p:sp>
+        <p:nvSpPr>
+          <p:cNvPr id="5" name="Rounded Rectangle 4"/>
+          <p:cNvSpPr/>
+          <p:nvPr/>
+        </p:nvSpPr>
+        <p:spPr>
+          <a:xfrm>
+            <a:off x="6217920" y="1645920"/>
+            <a:ext cx="5212080" cy="4663440"/>
+          </a:xfrm>
+          <a:prstGeom prst="roundRect">
+            <a:avLst/>
+          </a:prstGeom>
+          <a:solidFill>
+            <a:srgbClr val="141A26"/>
+          </a:solidFill>
+          <a:ln w="19050">
+            <a:solidFill>
+              <a:srgbClr val="283246"/>
+            </a:solidFill>
+          </a:ln>
+        </p:spPr>
+        <p:style>
+          <a:lnRef idx="1">
+            <a:schemeClr val="accent1"/>
+          </a:lnRef>
+          <a:fillRef idx="3">
+            <a:schemeClr val="accent1"/>
+          </a:fillRef>
+          <a:effectRef idx="2">
+            <a:schemeClr val="accent1"/>
+          </a:effectRef>
+          <a:fontRef idx="minor">
+            <a:schemeClr val="lt1"/>
+          </a:fontRef>
+        </p:style>
+        <p:txBody>
+          <a:bodyPr rtlCol="0" anchor="ctr"/>
+          <a:lstStyle/>
+          <a:p>
+            <a:pPr algn="ctr"/>
+          </a:p>
+        </p:txBody>
+      </p:sp>
+      <p:sp>
+        <p:nvSpPr>
+          <p:cNvPr id="6" name="TextBox 5"/>
+          <p:cNvSpPr txBox="1"/>
+          <p:nvPr/>
+        </p:nvSpPr>
+        <p:spPr>
+          <a:xfrm>
+            <a:off x="6492240" y="1828800"/>
+            <a:ext cx="4663440" cy="4206240"/>
+          </a:xfrm>
+          <a:prstGeom prst="rect">
+            <a:avLst/>
+          </a:prstGeom>
+          <a:noFill/>
+        </p:spPr>
+        <p:txBody>
+          <a:bodyPr wrap="square">
+            <a:spAutoFit/>
+          </a:bodyPr>
+          <a:lstStyle/>
+          <a:p>
+            <a:pPr>
+              <a:spcAft>
+                <a:spcPts val="1000"/>
+              </a:spcAft>
+              <a:defRPr sz="1700" b="1">
+                <a:solidFill>
+                  <a:srgbClr val="00E676"/>
+                </a:solidFill>
+              </a:defRPr>
+            </a:pPr>
+            <a:r>
+              <a:t>🤖 La Solución: 80% Autónoma con IA</a:t>
+            </a:r>
+          </a:p>
+          <a:p>
+            <a:pPr>
+              <a:spcAft>
+                <a:spcPts val="100"/>
+              </a:spcAft>
+              <a:defRPr sz="1300" b="1">
                 <a:solidFill>
                   <a:srgbClr val="FFD100"/>
                 </a:solidFill>
               </a:defRPr>
             </a:pPr>
             <a:r>
-              <a:t>🍻 Asistencia y Consumo Comprobado</a:t>
+              <a:t>⚡ Cero Tiempo Perdido por el Gerente</a:t>
             </a:r>
           </a:p>
           <a:p>
@@ -5859,14 +6415,74 @@
               <a:spcAft>
                 <a:spcPts val="1000"/>
               </a:spcAft>
-              <a:defRPr sz="1200">
+              <a:defRPr sz="1150">
                 <a:solidFill>
                   <a:srgbClr val="FFFFFF"/>
                 </a:solidFill>
               </a:defRPr>
             </a:pPr>
             <a:r>
-              <a:t>Este grupo no viene solo por una cerveza: llenan mesas enteras, piden cubetazos, rondas continuas de alitas y se quedan durante toda la transmisión del partido. Es el motor perfecto para arrancar en Juriquilla.</a:t>
+              <a:t>La app se administra sola en un 80%. Se conecta en vivo a ESPN y calcula marcadores oficiales sin intervención humana.</a:t>
+            </a:r>
+          </a:p>
+          <a:p>
+            <a:pPr>
+              <a:spcAft>
+                <a:spcPts val="100"/>
+              </a:spcAft>
+              <a:defRPr sz="1300" b="1">
+                <a:solidFill>
+                  <a:srgbClr val="FFD100"/>
+                </a:solidFill>
+              </a:defRPr>
+            </a:pPr>
+            <a:r>
+              <a:t>🧠 Creación con IA en Segundos</a:t>
+            </a:r>
+          </a:p>
+          <a:p>
+            <a:pPr>
+              <a:spcAft>
+                <a:spcPts val="1000"/>
+              </a:spcAft>
+              <a:defRPr sz="1150">
+                <a:solidFill>
+                  <a:srgbClr val="FFFFFF"/>
+                </a:solidFill>
+              </a:defRPr>
+            </a:pPr>
+            <a:r>
+              <a:t>La IA genera trivias deportivas y redacta preguntas temáticas para días de partido en 10 segundos.</a:t>
+            </a:r>
+          </a:p>
+          <a:p>
+            <a:pPr>
+              <a:spcAft>
+                <a:spcPts val="100"/>
+              </a:spcAft>
+              <a:defRPr sz="1300" b="1">
+                <a:solidFill>
+                  <a:srgbClr val="FFD100"/>
+                </a:solidFill>
+              </a:defRPr>
+            </a:pPr>
+            <a:r>
+              <a:t>📊 Cero Papel y Cero Errores</a:t>
+            </a:r>
+          </a:p>
+          <a:p>
+            <a:pPr>
+              <a:spcAft>
+                <a:spcPts val="1000"/>
+              </a:spcAft>
+              <a:defRPr sz="1150">
+                <a:solidFill>
+                  <a:srgbClr val="FFFFFF"/>
+                </a:solidFill>
+              </a:defRPr>
+            </a:pPr>
+            <a:r>
+              <a:t>Elimina impresiones, plumas y quejas de clientes por conteos incorrectos. Todo es transparente y en vivo en el celular del cliente.</a:t>
             </a:r>
           </a:p>
         </p:txBody>
@@ -5930,7 +6546,7 @@
               </a:defRPr>
             </a:pPr>
             <a:r>
-              <a:t>EXPERIENCIA DE USUARIO SIN FRICCIÓN</a:t>
+              <a:t>TRACCIÓN REAL EN QUERÉTARO</a:t>
             </a:r>
           </a:p>
           <a:p>
@@ -5942,7 +6558,7 @@
               </a:defRPr>
             </a:pPr>
             <a:r>
-              <a:t>Guía del Cliente: Cómo Ingresar, Registrarse e Instalar la App</a:t>
+              <a:t>Potencial Inmediato: 71 Fans en 2 Semanas de una Base de +350</a:t>
             </a:r>
           </a:p>
         </p:txBody>
@@ -5956,7 +6572,7 @@
         <p:spPr>
           <a:xfrm>
             <a:off x="731520" y="1645920"/>
-            <a:ext cx="3413455" cy="4663440"/>
+            <a:ext cx="10728655" cy="4663440"/>
           </a:xfrm>
           <a:prstGeom prst="roundRect">
             <a:avLst/>
@@ -6000,8 +6616,8 @@
         </p:nvSpPr>
         <p:spPr>
           <a:xfrm>
-            <a:off x="1005840" y="1828800"/>
-            <a:ext cx="2864815" cy="4206240"/>
+            <a:off x="1097280" y="1828800"/>
+            <a:ext cx="9966960" cy="4206240"/>
           </a:xfrm>
           <a:prstGeom prst="rect">
             <a:avLst/>
@@ -6016,246 +6632,106 @@
           <a:p>
             <a:pPr>
               <a:spcAft>
-                <a:spcPts val="1400"/>
-              </a:spcAft>
-              <a:defRPr sz="1600" b="1">
+                <a:spcPts val="1200"/>
+              </a:spcAft>
+              <a:defRPr sz="1700" b="1">
                 <a:solidFill>
                   <a:srgbClr val="FFB612"/>
                 </a:solidFill>
               </a:defRPr>
             </a:pPr>
             <a:r>
-              <a:t>1. CÓMO INGRESA</a:t>
-            </a:r>
-          </a:p>
-          <a:p>
-            <a:pPr>
-              <a:defRPr sz="1250">
+              <a:t>🏈 La Punta de Lanza: Steelers Nation Querétaro</a:t>
+            </a:r>
+          </a:p>
+          <a:p>
+            <a:pPr>
+              <a:spcAft>
+                <a:spcPts val="200"/>
+              </a:spcAft>
+              <a:defRPr sz="1400" b="1">
+                <a:solidFill>
+                  <a:srgbClr val="FFD100"/>
+                </a:solidFill>
+              </a:defRPr>
+            </a:pPr>
+            <a:r>
+              <a:t>📈 Crecimiento Explosivo Orgánico</a:t>
+            </a:r>
+          </a:p>
+          <a:p>
+            <a:pPr>
+              <a:spcAft>
+                <a:spcPts val="1000"/>
+              </a:spcAft>
+              <a:defRPr sz="1200">
                 <a:solidFill>
                   <a:srgbClr val="FFFFFF"/>
                 </a:solidFill>
               </a:defRPr>
             </a:pPr>
             <a:r>
-              <a:t>📱 En su mesa encuentra el código QR en el acrílico.</a:t>
-            </a:r>
-            <a:br/>
-            <a:r>
-              <a:t>• Abre la cámara de su celular y apunta al QR.</a:t>
-            </a:r>
-            <a:br/>
-            <a:r>
-              <a:t>• Entra en 3 segundos en su navegador web sin descargas pesadas ni tiendas de aplicaciones.</a:t>
-            </a:r>
-          </a:p>
-        </p:txBody>
-      </p:sp>
-      <p:sp>
-        <p:nvSpPr>
-          <p:cNvPr id="5" name="Rounded Rectangle 4"/>
-          <p:cNvSpPr/>
-          <p:nvPr/>
-        </p:nvSpPr>
-        <p:spPr>
-          <a:xfrm>
-            <a:off x="4389120" y="1645920"/>
-            <a:ext cx="3413455" cy="4663440"/>
-          </a:xfrm>
-          <a:prstGeom prst="roundRect">
-            <a:avLst/>
-          </a:prstGeom>
-          <a:solidFill>
-            <a:srgbClr val="141A26"/>
-          </a:solidFill>
-          <a:ln w="19050">
-            <a:solidFill>
-              <a:srgbClr val="283246"/>
-            </a:solidFill>
-          </a:ln>
-        </p:spPr>
-        <p:style>
-          <a:lnRef idx="1">
-            <a:schemeClr val="accent1"/>
-          </a:lnRef>
-          <a:fillRef idx="3">
-            <a:schemeClr val="accent1"/>
-          </a:fillRef>
-          <a:effectRef idx="2">
-            <a:schemeClr val="accent1"/>
-          </a:effectRef>
-          <a:fontRef idx="minor">
-            <a:schemeClr val="lt1"/>
-          </a:fontRef>
-        </p:style>
-        <p:txBody>
-          <a:bodyPr rtlCol="0" anchor="ctr"/>
-          <a:lstStyle/>
-          <a:p>
-            <a:pPr algn="ctr"/>
-          </a:p>
-        </p:txBody>
-      </p:sp>
-      <p:sp>
-        <p:nvSpPr>
-          <p:cNvPr id="6" name="TextBox 5"/>
-          <p:cNvSpPr txBox="1"/>
-          <p:nvPr/>
-        </p:nvSpPr>
-        <p:spPr>
-          <a:xfrm>
-            <a:off x="4663440" y="1828800"/>
-            <a:ext cx="2864815" cy="4206240"/>
-          </a:xfrm>
-          <a:prstGeom prst="rect">
-            <a:avLst/>
-          </a:prstGeom>
-          <a:noFill/>
-        </p:spPr>
-        <p:txBody>
-          <a:bodyPr wrap="square">
-            <a:spAutoFit/>
-          </a:bodyPr>
-          <a:lstStyle/>
-          <a:p>
-            <a:pPr>
-              <a:spcAft>
-                <a:spcPts val="1400"/>
-              </a:spcAft>
-              <a:defRPr sz="1600" b="1">
-                <a:solidFill>
-                  <a:srgbClr val="FF5722"/>
-                </a:solidFill>
-              </a:defRPr>
-            </a:pPr>
-            <a:r>
-              <a:t>2. CÓMO SE REGISTRA</a:t>
-            </a:r>
-          </a:p>
-          <a:p>
-            <a:pPr>
-              <a:defRPr sz="1250">
+              <a:t>En tan solo 2 semanas desde el lanzamiento de la Credencial Digital de Steelers Nation QRO, ya se han registrado 71 miembros oficiales en la app. Pero son más de 350 fanáticos activos en la comunidad de Querétaro.</a:t>
+            </a:r>
+          </a:p>
+          <a:p>
+            <a:pPr>
+              <a:spcAft>
+                <a:spcPts val="200"/>
+              </a:spcAft>
+              <a:defRPr sz="1400" b="1">
+                <a:solidFill>
+                  <a:srgbClr val="FFD100"/>
+                </a:solidFill>
+              </a:defRPr>
+            </a:pPr>
+            <a:r>
+              <a:t>📲 Conexión Directa desde su Credencial Digital (PWA)</a:t>
+            </a:r>
+          </a:p>
+          <a:p>
+            <a:pPr>
+              <a:spcAft>
+                <a:spcPts val="1000"/>
+              </a:spcAft>
+              <a:defRPr sz="1200">
                 <a:solidFill>
                   <a:srgbClr val="FFFFFF"/>
                 </a:solidFill>
               </a:defRPr>
             </a:pPr>
             <a:r>
-              <a:t>👤 Con un solo toque inicia sesión con su cuenta de Google o escribe su nombre/apodo.</a:t>
-            </a:r>
-            <a:br/>
-            <a:r>
-              <a:t>• Selecciona el nombre del mesero que lo atiende.</a:t>
-            </a:r>
-            <a:br/>
-            <a:r>
-              <a:t>• Todo queda guardado en la nube al instante.</a:t>
-            </a:r>
-          </a:p>
-        </p:txBody>
-      </p:sp>
-      <p:sp>
-        <p:nvSpPr>
-          <p:cNvPr id="7" name="Rounded Rectangle 6"/>
-          <p:cNvSpPr/>
-          <p:nvPr/>
-        </p:nvSpPr>
-        <p:spPr>
-          <a:xfrm>
-            <a:off x="8046720" y="1645920"/>
-            <a:ext cx="3413455" cy="4663440"/>
-          </a:xfrm>
-          <a:prstGeom prst="roundRect">
-            <a:avLst/>
-          </a:prstGeom>
-          <a:solidFill>
-            <a:srgbClr val="141A26"/>
-          </a:solidFill>
-          <a:ln w="19050">
-            <a:solidFill>
-              <a:srgbClr val="283246"/>
-            </a:solidFill>
-          </a:ln>
-        </p:spPr>
-        <p:style>
-          <a:lnRef idx="1">
-            <a:schemeClr val="accent1"/>
-          </a:lnRef>
-          <a:fillRef idx="3">
-            <a:schemeClr val="accent1"/>
-          </a:fillRef>
-          <a:effectRef idx="2">
-            <a:schemeClr val="accent1"/>
-          </a:effectRef>
-          <a:fontRef idx="minor">
-            <a:schemeClr val="lt1"/>
-          </a:fontRef>
-        </p:style>
-        <p:txBody>
-          <a:bodyPr rtlCol="0" anchor="ctr"/>
-          <a:lstStyle/>
-          <a:p>
-            <a:pPr algn="ctr"/>
-          </a:p>
-        </p:txBody>
-      </p:sp>
-      <p:sp>
-        <p:nvSpPr>
-          <p:cNvPr id="8" name="TextBox 7"/>
-          <p:cNvSpPr txBox="1"/>
-          <p:nvPr/>
-        </p:nvSpPr>
-        <p:spPr>
-          <a:xfrm>
-            <a:off x="8321040" y="1828800"/>
-            <a:ext cx="2864815" cy="4206240"/>
-          </a:xfrm>
-          <a:prstGeom prst="rect">
-            <a:avLst/>
-          </a:prstGeom>
-          <a:noFill/>
-        </p:spPr>
-        <p:txBody>
-          <a:bodyPr wrap="square">
-            <a:spAutoFit/>
-          </a:bodyPr>
-          <a:lstStyle/>
-          <a:p>
-            <a:pPr>
-              <a:spcAft>
-                <a:spcPts val="1400"/>
-              </a:spcAft>
-              <a:defRPr sz="1600" b="1">
-                <a:solidFill>
-                  <a:srgbClr val="00E676"/>
-                </a:solidFill>
-              </a:defRPr>
-            </a:pPr>
-            <a:r>
-              <a:t>3. CÓMO SE INSTALA (PWA)</a:t>
-            </a:r>
-          </a:p>
-          <a:p>
-            <a:pPr>
-              <a:defRPr sz="1250">
+              <a:t>La credencial digital de los fans tiene un botón especial integrado que los manda directamente a Drinks &amp; Wins para participar en las dinámicas de cada juego. Es una audiencia cautiva que ya ama la marca.</a:t>
+            </a:r>
+          </a:p>
+          <a:p>
+            <a:pPr>
+              <a:spcAft>
+                <a:spcPts val="200"/>
+              </a:spcAft>
+              <a:defRPr sz="1400" b="1">
+                <a:solidFill>
+                  <a:srgbClr val="FFD100"/>
+                </a:solidFill>
+              </a:defRPr>
+            </a:pPr>
+            <a:r>
+              <a:t>🍻 Asistencia y Consumo Comprobado</a:t>
+            </a:r>
+          </a:p>
+          <a:p>
+            <a:pPr>
+              <a:spcAft>
+                <a:spcPts val="1000"/>
+              </a:spcAft>
+              <a:defRPr sz="1200">
                 <a:solidFill>
                   <a:srgbClr val="FFFFFF"/>
                 </a:solidFill>
               </a:defRPr>
             </a:pPr>
             <a:r>
-              <a:t>📲 Se instala como una app nativa en 1 clic:</a:t>
-            </a:r>
-            <a:br/>
-            <a:r>
-              <a:t>• En iPhone: Compartir ➔ 'Agregar a pantalla de inicio'.</a:t>
-            </a:r>
-            <a:br/>
-            <a:r>
-              <a:t>• En Android: Toca el aviso 'Instalar App'.</a:t>
-            </a:r>
-            <a:br/>
-            <a:r>
-              <a:t>• ¡Queda el icono oficial en su celular para siempre!</a:t>
+              <a:t>Este grupo no viene solo por una cerveza: llenan mesas enteras, piden cubetazos, rondas continuas de alitas y se quedan durante toda la transmisión del partido. Es el motor perfecto para arrancar en Juriquilla.</a:t>
             </a:r>
           </a:p>
         </p:txBody>
@@ -6319,7 +6795,7 @@
               </a:defRPr>
             </a:pPr>
             <a:r>
-              <a:t>JUEGO POR JUEGO EN DETALLE</a:t>
+              <a:t>EXPERIENCIA DE USUARIO SIN FRICCIÓN</a:t>
             </a:r>
           </a:p>
           <a:p>
@@ -6331,7 +6807,7 @@
               </a:defRPr>
             </a:pPr>
             <a:r>
-              <a:t>Football Grids (100 Casillas NFL): Dinámica y Creación</a:t>
+              <a:t>Guía del Cliente: Cómo Ingresar, Registrarse e Instalar la App</a:t>
             </a:r>
           </a:p>
         </p:txBody>
@@ -6345,7 +6821,7 @@
         <p:spPr>
           <a:xfrm>
             <a:off x="731520" y="1645920"/>
-            <a:ext cx="6858000" cy="4663440"/>
+            <a:ext cx="3413455" cy="4663440"/>
           </a:xfrm>
           <a:prstGeom prst="roundRect">
             <a:avLst/>
@@ -6390,7 +6866,7 @@
         <p:spPr>
           <a:xfrm>
             <a:off x="1005840" y="1828800"/>
-            <a:ext cx="6309360" cy="4206240"/>
+            <a:ext cx="2864815" cy="4206240"/>
           </a:xfrm>
           <a:prstGeom prst="rect">
             <a:avLst/>
@@ -6405,119 +6881,250 @@
           <a:p>
             <a:pPr>
               <a:spcAft>
-                <a:spcPts val="200"/>
-              </a:spcAft>
-              <a:defRPr sz="1350" b="1">
-                <a:solidFill>
-                  <a:srgbClr val="FF5722"/>
-                </a:solidFill>
-              </a:defRPr>
-            </a:pPr>
-            <a:r>
-              <a:t>🛠️ CÓMO LO CREA EL GERENTE (30 segundos)</a:t>
-            </a:r>
-          </a:p>
-          <a:p>
-            <a:pPr>
-              <a:spcAft>
-                <a:spcPts val="1000"/>
-              </a:spcAft>
-              <a:defRPr sz="1150">
+                <a:spcPts val="1400"/>
+              </a:spcAft>
+              <a:defRPr sz="1600" b="1">
+                <a:solidFill>
+                  <a:srgbClr val="FFB612"/>
+                </a:solidFill>
+              </a:defRPr>
+            </a:pPr>
+            <a:r>
+              <a:t>1. CÓMO INGRESA</a:t>
+            </a:r>
+          </a:p>
+          <a:p>
+            <a:pPr>
+              <a:defRPr sz="1250">
                 <a:solidFill>
                   <a:srgbClr val="FFFFFF"/>
                 </a:solidFill>
               </a:defRPr>
             </a:pPr>
             <a:r>
-              <a:t>Entra al panel Admin, elige el partido estelar de la NFL (ej. Steelers vs Bills). Con un solo clic, el sistema genera la cuadrícula digital de 10x10 (100 casillas) con los logotipos oficiales de los dos equipos.</a:t>
-            </a:r>
-          </a:p>
-          <a:p>
-            <a:pPr>
-              <a:spcAft>
-                <a:spcPts val="200"/>
-              </a:spcAft>
-              <a:defRPr sz="1350" b="1">
-                <a:solidFill>
-                  <a:srgbClr val="FF5722"/>
-                </a:solidFill>
-              </a:defRPr>
-            </a:pPr>
-            <a:r>
-              <a:t>📱 CÓMO JUEGA EL CLIENTE EN MESA</a:t>
-            </a:r>
-          </a:p>
-          <a:p>
-            <a:pPr>
-              <a:spcAft>
-                <a:spcPts val="1000"/>
-              </a:spcAft>
-              <a:defRPr sz="1150">
-                <a:solidFill>
-                  <a:srgbClr val="FFFFFF"/>
-                </a:solidFill>
-              </a:defRPr>
-            </a:pPr>
-            <a:r>
-              <a:t>El comensal escanea el QR, ve la cuadrícula en su smartphone y toca las casillas vacías que desea apartar con su nombre o apodo para competir amistosamente con sus amigos.</a:t>
-            </a:r>
-          </a:p>
-          <a:p>
-            <a:pPr>
-              <a:spcAft>
-                <a:spcPts val="200"/>
-              </a:spcAft>
-              <a:defRPr sz="1350" b="1">
-                <a:solidFill>
-                  <a:srgbClr val="FF5722"/>
-                </a:solidFill>
-              </a:defRPr>
-            </a:pPr>
-            <a:r>
-              <a:t>🏆 CÓMO GANA Y POR QUÉ VENDE TANTO</a:t>
-            </a:r>
-          </a:p>
-          <a:p>
-            <a:pPr>
-              <a:spcAft>
-                <a:spcPts val="1000"/>
-              </a:spcAft>
-              <a:defRPr sz="1150">
-                <a:solidFill>
-                  <a:srgbClr val="FFFFFF"/>
-                </a:solidFill>
-              </a:defRPr>
-            </a:pPr>
-            <a:r>
-              <a:t>Al inicio del partido, el sistema sortea automáticamente los dígitos del 0 al 9 en filas y columnas. ¡Hay 4 GANADORES por partido! (Al final del 1Q, 2Q, 3Q y Final según el último dígito del marcador). Esto mantiene a la mesa consumiendo cervezas y botanas durante las 3 horas de transmisión.</a:t>
-            </a:r>
-          </a:p>
-        </p:txBody>
-      </p:sp>
-      <p:pic>
-        <p:nvPicPr>
-          <p:cNvPr id="5" name="Picture 4" descr="tarjeta_2_vive_la_nfl.png"/>
-          <p:cNvPicPr>
-            <a:picLocks noChangeAspect="1"/>
-          </p:cNvPicPr>
+              <a:t>📱 En su mesa encuentra el código QR en el acrílico.</a:t>
+            </a:r>
+            <a:br/>
+            <a:r>
+              <a:t>• Abre la cámara de su celular y apunta al QR.</a:t>
+            </a:r>
+            <a:br/>
+            <a:r>
+              <a:t>• Entra en 3 segundos en su navegador web sin descargas pesadas ni tiendas de aplicaciones.</a:t>
+            </a:r>
+          </a:p>
+        </p:txBody>
+      </p:sp>
+      <p:sp>
+        <p:nvSpPr>
+          <p:cNvPr id="5" name="Rounded Rectangle 4"/>
+          <p:cNvSpPr/>
           <p:nvPr/>
-        </p:nvPicPr>
-        <p:blipFill>
-          <a:blip r:embed="rId2"/>
-          <a:stretch>
-            <a:fillRect/>
-          </a:stretch>
-        </p:blipFill>
-        <p:spPr>
-          <a:xfrm>
-            <a:off x="7955279" y="1645920"/>
-            <a:ext cx="2623185" cy="4663440"/>
+        </p:nvSpPr>
+        <p:spPr>
+          <a:xfrm>
+            <a:off x="4389120" y="1645920"/>
+            <a:ext cx="3413455" cy="4663440"/>
+          </a:xfrm>
+          <a:prstGeom prst="roundRect">
+            <a:avLst/>
+          </a:prstGeom>
+          <a:solidFill>
+            <a:srgbClr val="141A26"/>
+          </a:solidFill>
+          <a:ln w="19050">
+            <a:solidFill>
+              <a:srgbClr val="283246"/>
+            </a:solidFill>
+          </a:ln>
+        </p:spPr>
+        <p:style>
+          <a:lnRef idx="1">
+            <a:schemeClr val="accent1"/>
+          </a:lnRef>
+          <a:fillRef idx="3">
+            <a:schemeClr val="accent1"/>
+          </a:fillRef>
+          <a:effectRef idx="2">
+            <a:schemeClr val="accent1"/>
+          </a:effectRef>
+          <a:fontRef idx="minor">
+            <a:schemeClr val="lt1"/>
+          </a:fontRef>
+        </p:style>
+        <p:txBody>
+          <a:bodyPr rtlCol="0" anchor="ctr"/>
+          <a:lstStyle/>
+          <a:p>
+            <a:pPr algn="ctr"/>
+          </a:p>
+        </p:txBody>
+      </p:sp>
+      <p:sp>
+        <p:nvSpPr>
+          <p:cNvPr id="6" name="TextBox 5"/>
+          <p:cNvSpPr txBox="1"/>
+          <p:nvPr/>
+        </p:nvSpPr>
+        <p:spPr>
+          <a:xfrm>
+            <a:off x="4663440" y="1828800"/>
+            <a:ext cx="2864815" cy="4206240"/>
           </a:xfrm>
           <a:prstGeom prst="rect">
             <a:avLst/>
           </a:prstGeom>
-        </p:spPr>
-      </p:pic>
+          <a:noFill/>
+        </p:spPr>
+        <p:txBody>
+          <a:bodyPr wrap="square">
+            <a:spAutoFit/>
+          </a:bodyPr>
+          <a:lstStyle/>
+          <a:p>
+            <a:pPr>
+              <a:spcAft>
+                <a:spcPts val="1400"/>
+              </a:spcAft>
+              <a:defRPr sz="1600" b="1">
+                <a:solidFill>
+                  <a:srgbClr val="FF5722"/>
+                </a:solidFill>
+              </a:defRPr>
+            </a:pPr>
+            <a:r>
+              <a:t>2. CÓMO SE REGISTRA</a:t>
+            </a:r>
+          </a:p>
+          <a:p>
+            <a:pPr>
+              <a:defRPr sz="1250">
+                <a:solidFill>
+                  <a:srgbClr val="FFFFFF"/>
+                </a:solidFill>
+              </a:defRPr>
+            </a:pPr>
+            <a:r>
+              <a:t>👤 Con un solo toque inicia sesión con su cuenta de Google o escribe su nombre/apodo.</a:t>
+            </a:r>
+            <a:br/>
+            <a:r>
+              <a:t>• Selecciona el nombre del mesero que lo atiende.</a:t>
+            </a:r>
+            <a:br/>
+            <a:r>
+              <a:t>• Todo queda guardado en la nube al instante.</a:t>
+            </a:r>
+          </a:p>
+        </p:txBody>
+      </p:sp>
+      <p:sp>
+        <p:nvSpPr>
+          <p:cNvPr id="7" name="Rounded Rectangle 6"/>
+          <p:cNvSpPr/>
+          <p:nvPr/>
+        </p:nvSpPr>
+        <p:spPr>
+          <a:xfrm>
+            <a:off x="8046720" y="1645920"/>
+            <a:ext cx="3413455" cy="4663440"/>
+          </a:xfrm>
+          <a:prstGeom prst="roundRect">
+            <a:avLst/>
+          </a:prstGeom>
+          <a:solidFill>
+            <a:srgbClr val="141A26"/>
+          </a:solidFill>
+          <a:ln w="19050">
+            <a:solidFill>
+              <a:srgbClr val="283246"/>
+            </a:solidFill>
+          </a:ln>
+        </p:spPr>
+        <p:style>
+          <a:lnRef idx="1">
+            <a:schemeClr val="accent1"/>
+          </a:lnRef>
+          <a:fillRef idx="3">
+            <a:schemeClr val="accent1"/>
+          </a:fillRef>
+          <a:effectRef idx="2">
+            <a:schemeClr val="accent1"/>
+          </a:effectRef>
+          <a:fontRef idx="minor">
+            <a:schemeClr val="lt1"/>
+          </a:fontRef>
+        </p:style>
+        <p:txBody>
+          <a:bodyPr rtlCol="0" anchor="ctr"/>
+          <a:lstStyle/>
+          <a:p>
+            <a:pPr algn="ctr"/>
+          </a:p>
+        </p:txBody>
+      </p:sp>
+      <p:sp>
+        <p:nvSpPr>
+          <p:cNvPr id="8" name="TextBox 7"/>
+          <p:cNvSpPr txBox="1"/>
+          <p:nvPr/>
+        </p:nvSpPr>
+        <p:spPr>
+          <a:xfrm>
+            <a:off x="8321040" y="1828800"/>
+            <a:ext cx="2864815" cy="4206240"/>
+          </a:xfrm>
+          <a:prstGeom prst="rect">
+            <a:avLst/>
+          </a:prstGeom>
+          <a:noFill/>
+        </p:spPr>
+        <p:txBody>
+          <a:bodyPr wrap="square">
+            <a:spAutoFit/>
+          </a:bodyPr>
+          <a:lstStyle/>
+          <a:p>
+            <a:pPr>
+              <a:spcAft>
+                <a:spcPts val="1400"/>
+              </a:spcAft>
+              <a:defRPr sz="1600" b="1">
+                <a:solidFill>
+                  <a:srgbClr val="00E676"/>
+                </a:solidFill>
+              </a:defRPr>
+            </a:pPr>
+            <a:r>
+              <a:t>3. CÓMO SE INSTALA (PWA)</a:t>
+            </a:r>
+          </a:p>
+          <a:p>
+            <a:pPr>
+              <a:defRPr sz="1250">
+                <a:solidFill>
+                  <a:srgbClr val="FFFFFF"/>
+                </a:solidFill>
+              </a:defRPr>
+            </a:pPr>
+            <a:r>
+              <a:t>📲 Se instala como una app nativa en 1 clic:</a:t>
+            </a:r>
+            <a:br/>
+            <a:r>
+              <a:t>• En iPhone: Compartir ➔ 'Agregar a pantalla de inicio'.</a:t>
+            </a:r>
+            <a:br/>
+            <a:r>
+              <a:t>• En Android: Toca el aviso 'Instalar App'.</a:t>
+            </a:r>
+            <a:br/>
+            <a:r>
+              <a:t>• ¡Queda el icono oficial en su celular para siempre!</a:t>
+            </a:r>
+          </a:p>
+        </p:txBody>
+      </p:sp>
     </p:spTree>
   </p:cSld>
   <p:clrMapOvr>
@@ -6589,7 +7196,7 @@
               </a:defRPr>
             </a:pPr>
             <a:r>
-              <a:t>Quinielas Pick'em (NFL y Liga MX): Reglas y Resultados en Vivo</a:t>
+              <a:t>Football Grids (100 Casillas NFL): Dinámica y Creación</a:t>
             </a:r>
           </a:p>
         </p:txBody>
@@ -6667,12 +7274,12 @@
               </a:spcAft>
               <a:defRPr sz="1350" b="1">
                 <a:solidFill>
-                  <a:srgbClr val="FFB612"/>
-                </a:solidFill>
-              </a:defRPr>
-            </a:pPr>
-            <a:r>
-              <a:t>🛠️ CÓMO LO CREA EL GERENTE (60 segundos)</a:t>
+                  <a:srgbClr val="FF5722"/>
+                </a:solidFill>
+              </a:defRPr>
+            </a:pPr>
+            <a:r>
+              <a:t>🛠️ CÓMO LO CREA EL GERENTE (30 segundos)</a:t>
             </a:r>
           </a:p>
           <a:p>
@@ -6687,7 +7294,7 @@
               </a:defRPr>
             </a:pPr>
             <a:r>
-              <a:t>Entra a Admin, elige la liga (NFL o Liga MX) y la jornada. La conexión con ESPN jala automáticamente partidos, horarios y escudos oficiales. El gerente toca los partidos deseados, define el premio (ej. Orden de Alitas + Cerveza) y presiona 'Crear Quiniela'.</a:t>
+              <a:t>Entra al panel Admin, elige el partido estelar de la NFL (ej. Steelers vs Bills). Con un solo clic, el sistema genera la cuadrícula digital de 10x10 (100 casillas) con los logotipos oficiales de los dos equipos.</a:t>
             </a:r>
           </a:p>
           <a:p>
@@ -6697,12 +7304,12 @@
               </a:spcAft>
               <a:defRPr sz="1350" b="1">
                 <a:solidFill>
-                  <a:srgbClr val="FFB612"/>
-                </a:solidFill>
-              </a:defRPr>
-            </a:pPr>
-            <a:r>
-              <a:t>📱 CÓMO JUEGA EL CLIENTE</a:t>
+                  <a:srgbClr val="FF5722"/>
+                </a:solidFill>
+              </a:defRPr>
+            </a:pPr>
+            <a:r>
+              <a:t>📱 CÓMO JUEGA EL CLIENTE EN MESA</a:t>
             </a:r>
           </a:p>
           <a:p>
@@ -6717,7 +7324,7 @@
               </a:defRPr>
             </a:pPr>
             <a:r>
-              <a:t>Abre la quiniela desde el QR, selecciona a su mesero e introduce sus pronósticos en pantalla. Se bloquean en automático cuando arranca el primer partido para garantizar 100% de transparencia.</a:t>
+              <a:t>El comensal escanea el QR, ve la cuadrícula en su smartphone y toca las casillas vacías que desea apartar con su nombre o apodo para competir amistosamente con sus amigos.</a:t>
             </a:r>
           </a:p>
           <a:p>
@@ -6727,12 +7334,12 @@
               </a:spcAft>
               <a:defRPr sz="1350" b="1">
                 <a:solidFill>
-                  <a:srgbClr val="FFB612"/>
-                </a:solidFill>
-              </a:defRPr>
-            </a:pPr>
-            <a:r>
-              <a:t>🏆 CÓMO GANA Y SE PREMIA</a:t>
+                  <a:srgbClr val="FF5722"/>
+                </a:solidFill>
+              </a:defRPr>
+            </a:pPr>
+            <a:r>
+              <a:t>🏆 CÓMO GANA Y POR QUÉ VENDE TANTO</a:t>
             </a:r>
           </a:p>
           <a:p>
@@ -6747,14 +7354,14 @@
               </a:defRPr>
             </a:pPr>
             <a:r>
-              <a:t>La API de ESPN actualiza la tabla en tiempo real: Marcador Exacto = +3 pts (verde esmeralda), Ganador = +1 pt (dorado), Fallo = 0 pts (rojo). Al terminar, se proclama al Campeón Oficial en el podio digital con corona 👑 para canje en barra.</a:t>
+              <a:t>Al inicio del partido, el sistema sortea automáticamente los dígitos del 0 al 9 en filas y columnas. ¡Hay 4 GANADORES por partido! (Al final del 1Q, 2Q, 3Q y Final según el último dígito del marcador). Esto mantiene a la mesa consumiendo cervezas y botanas durante las 3 horas de transmisión.</a:t>
             </a:r>
           </a:p>
         </p:txBody>
       </p:sp>
       <p:pic>
         <p:nvPicPr>
-          <p:cNvPr id="5" name="Picture 4" descr="screenshot_podium_standings.png"/>
+          <p:cNvPr id="5" name="Picture 4" descr="tarjeta_2_vive_la_nfl.png"/>
           <p:cNvPicPr>
             <a:picLocks noChangeAspect="1"/>
           </p:cNvPicPr>
@@ -6768,8 +7375,8 @@
         </p:blipFill>
         <p:spPr>
           <a:xfrm>
-            <a:off x="7863840" y="1645920"/>
-            <a:ext cx="8843264" cy="4663440"/>
+            <a:off x="7955279" y="1645920"/>
+            <a:ext cx="2623185" cy="4663440"/>
           </a:xfrm>
           <a:prstGeom prst="rect">
             <a:avLst/>
@@ -6847,7 +7454,7 @@
               </a:defRPr>
             </a:pPr>
             <a:r>
-              <a:t>First Striker Wins (Fútbol): Adrenalina Inmediata en el Minuto 1</a:t>
+              <a:t>Quinielas Pick'em (NFL y Liga MX): Reglas y Resultados en Vivo</a:t>
             </a:r>
           </a:p>
         </p:txBody>
@@ -6925,12 +7532,12 @@
               </a:spcAft>
               <a:defRPr sz="1350" b="1">
                 <a:solidFill>
-                  <a:srgbClr val="00E676"/>
-                </a:solidFill>
-              </a:defRPr>
-            </a:pPr>
-            <a:r>
-              <a:t>🛠️ CÓMO LO CREA EL GERENTE (30 segundos)</a:t>
+                  <a:srgbClr val="FFB612"/>
+                </a:solidFill>
+              </a:defRPr>
+            </a:pPr>
+            <a:r>
+              <a:t>🛠️ CÓMO LO CREA EL GERENTE (60 segundos)</a:t>
             </a:r>
           </a:p>
           <a:p>
@@ -6945,7 +7552,7 @@
               </a:defRPr>
             </a:pPr>
             <a:r>
-              <a:t>Elige el partido de fútbol (Liga MX, Champions League o Selección Nacional) y asigna un premio dinámico (ej. 1 ronda de cervezas o botana en mesa).</a:t>
+              <a:t>Entra a Admin, elige la liga (NFL o Liga MX) y la jornada. La conexión con ESPN jala automáticamente partidos, horarios y escudos oficiales. El gerente toca los partidos deseados, define el premio (ej. Orden de Alitas + Cerveza) y presiona 'Crear Quiniela'.</a:t>
             </a:r>
           </a:p>
           <a:p>
@@ -6955,7 +7562,7 @@
               </a:spcAft>
               <a:defRPr sz="1350" b="1">
                 <a:solidFill>
-                  <a:srgbClr val="00E676"/>
+                  <a:srgbClr val="FFB612"/>
                 </a:solidFill>
               </a:defRPr>
             </a:pPr>
@@ -6975,7 +7582,7 @@
               </a:defRPr>
             </a:pPr>
             <a:r>
-              <a:t>Elige qué equipo meterá el primer gol y en qué bloque de 15 minutos caerá (1-15', 16-30', 31-45', etc.), o la opción de 'Sin Goles en el Partido'.</a:t>
+              <a:t>Abre la quiniela desde el QR, selecciona a su mesero e introduce sus pronósticos en pantalla. Se bloquean en automático cuando arranca el primer partido para garantizar 100% de transparencia.</a:t>
             </a:r>
           </a:p>
           <a:p>
@@ -6985,12 +7592,12 @@
               </a:spcAft>
               <a:defRPr sz="1350" b="1">
                 <a:solidFill>
-                  <a:srgbClr val="00E676"/>
-                </a:solidFill>
-              </a:defRPr>
-            </a:pPr>
-            <a:r>
-              <a:t>🏆 CÓMO GANA: EUFORIA DESDE EL INICIO</a:t>
+                  <a:srgbClr val="FFB612"/>
+                </a:solidFill>
+              </a:defRPr>
+            </a:pPr>
+            <a:r>
+              <a:t>🏆 CÓMO GANA Y SE PREMIA</a:t>
             </a:r>
           </a:p>
           <a:p>
@@ -7005,14 +7612,14 @@
               </a:defRPr>
             </a:pPr>
             <a:r>
-              <a:t>En cuanto cae la primera anotación, el sistema valida el minuto oficial de juego. El comensal que acertó el bloque de tiempo gana en el acto, provocando festejos y más rondas de bebidas en su mesa.</a:t>
+              <a:t>La API de ESPN actualiza la tabla en tiempo real: Marcador Exacto = +3 pts (verde esmeralda), Ganador = +1 pt (dorado), Fallo = 0 pts (rojo). Al terminar, se proclama al Campeón Oficial en el podio digital con corona 👑 para canje en barra.</a:t>
             </a:r>
           </a:p>
         </p:txBody>
       </p:sp>
       <p:pic>
         <p:nvPicPr>
-          <p:cNvPr id="5" name="Picture 4" descr="tarjeta_3_instinto_goleador.png"/>
+          <p:cNvPr id="5" name="Picture 4" descr="screenshot_podium_standings.png"/>
           <p:cNvPicPr>
             <a:picLocks noChangeAspect="1"/>
           </p:cNvPicPr>
@@ -7026,8 +7633,8 @@
         </p:blipFill>
         <p:spPr>
           <a:xfrm>
-            <a:off x="7955279" y="1645920"/>
-            <a:ext cx="2623185" cy="4663440"/>
+            <a:off x="7863840" y="1645920"/>
+            <a:ext cx="8843264" cy="4663440"/>
           </a:xfrm>
           <a:prstGeom prst="rect">
             <a:avLst/>
@@ -7105,7 +7712,7 @@
               </a:defRPr>
             </a:pPr>
             <a:r>
-              <a:t>Trivias en TV con IA &amp; Survivor NFL: Medios Tiempos y Fidelidad</a:t>
+              <a:t>First Striker Wins (Fútbol): Adrenalina Inmediata en el Minuto 1</a:t>
             </a:r>
           </a:p>
         </p:txBody>
@@ -7119,7 +7726,7 @@
         <p:spPr>
           <a:xfrm>
             <a:off x="731520" y="1645920"/>
-            <a:ext cx="5212080" cy="4663440"/>
+            <a:ext cx="6858000" cy="4663440"/>
           </a:xfrm>
           <a:prstGeom prst="roundRect">
             <a:avLst/>
@@ -7164,7 +7771,7 @@
         <p:spPr>
           <a:xfrm>
             <a:off x="1005840" y="1828800"/>
-            <a:ext cx="4663440" cy="4206240"/>
+            <a:ext cx="6309360" cy="4206240"/>
           </a:xfrm>
           <a:prstGeom prst="rect">
             <a:avLst/>
@@ -7179,283 +7786,119 @@
           <a:p>
             <a:pPr>
               <a:spcAft>
-                <a:spcPts val="800"/>
-              </a:spcAft>
-              <a:defRPr sz="1650" b="1">
-                <a:solidFill>
-                  <a:srgbClr val="FFB612"/>
-                </a:solidFill>
-              </a:defRPr>
-            </a:pPr>
-            <a:r>
-              <a:t>🧠 Trivia en Pantallas de TV con IA</a:t>
-            </a:r>
-          </a:p>
-          <a:p>
-            <a:pPr>
-              <a:spcAft>
-                <a:spcPts val="100"/>
-              </a:spcAft>
-              <a:defRPr sz="1250" b="1">
-                <a:solidFill>
-                  <a:srgbClr val="FF5722"/>
-                </a:solidFill>
-              </a:defRPr>
-            </a:pPr>
-            <a:r>
-              <a:t>🛠️ Generación IA en 10 seg</a:t>
-            </a:r>
-          </a:p>
-          <a:p>
-            <a:pPr>
-              <a:spcAft>
-                <a:spcPts val="600"/>
-              </a:spcAft>
-              <a:defRPr sz="1100">
+                <a:spcPts val="200"/>
+              </a:spcAft>
+              <a:defRPr sz="1350" b="1">
+                <a:solidFill>
+                  <a:srgbClr val="00E676"/>
+                </a:solidFill>
+              </a:defRPr>
+            </a:pPr>
+            <a:r>
+              <a:t>🛠️ CÓMO LO CREA EL GERENTE (30 segundos)</a:t>
+            </a:r>
+          </a:p>
+          <a:p>
+            <a:pPr>
+              <a:spcAft>
+                <a:spcPts val="1000"/>
+              </a:spcAft>
+              <a:defRPr sz="1150">
                 <a:solidFill>
                   <a:srgbClr val="FFFFFF"/>
                 </a:solidFill>
               </a:defRPr>
             </a:pPr>
             <a:r>
-              <a:t>La Inteligencia Artificial genera 10 preguntas deportivas temáticas del partido en cuestión.</a:t>
-            </a:r>
-          </a:p>
-          <a:p>
-            <a:pPr>
-              <a:spcAft>
-                <a:spcPts val="100"/>
-              </a:spcAft>
-              <a:defRPr sz="1250" b="1">
-                <a:solidFill>
-                  <a:srgbClr val="FF5722"/>
-                </a:solidFill>
-              </a:defRPr>
-            </a:pPr>
-            <a:r>
-              <a:t>📱 Medio Tiempo Interactivo</a:t>
-            </a:r>
-          </a:p>
-          <a:p>
-            <a:pPr>
-              <a:spcAft>
-                <a:spcPts val="600"/>
-              </a:spcAft>
-              <a:defRPr sz="1100">
+              <a:t>Elige el partido de fútbol (Liga MX, Champions League o Selección Nacional) y asigna un premio dinámico (ej. 1 ronda de cervezas o botana en mesa).</a:t>
+            </a:r>
+          </a:p>
+          <a:p>
+            <a:pPr>
+              <a:spcAft>
+                <a:spcPts val="200"/>
+              </a:spcAft>
+              <a:defRPr sz="1350" b="1">
+                <a:solidFill>
+                  <a:srgbClr val="00E676"/>
+                </a:solidFill>
+              </a:defRPr>
+            </a:pPr>
+            <a:r>
+              <a:t>📱 CÓMO JUEGA EL CLIENTE</a:t>
+            </a:r>
+          </a:p>
+          <a:p>
+            <a:pPr>
+              <a:spcAft>
+                <a:spcPts val="1000"/>
+              </a:spcAft>
+              <a:defRPr sz="1150">
                 <a:solidFill>
                   <a:srgbClr val="FFFFFF"/>
                 </a:solidFill>
               </a:defRPr>
             </a:pPr>
             <a:r>
-              <a:t>La TV del bar muestra la pregunta con cuenta regresiva. Los clientes responden contrarreloj desde su smartphone compitiendo mesa contra mesa.</a:t>
-            </a:r>
-          </a:p>
-          <a:p>
-            <a:pPr>
-              <a:spcAft>
-                <a:spcPts val="100"/>
-              </a:spcAft>
-              <a:defRPr sz="1250" b="1">
-                <a:solidFill>
-                  <a:srgbClr val="FF5722"/>
-                </a:solidFill>
-              </a:defRPr>
-            </a:pPr>
-            <a:r>
-              <a:t>🏆 Podio en Pantalla Grande</a:t>
-            </a:r>
-          </a:p>
-          <a:p>
-            <a:pPr>
-              <a:spcAft>
-                <a:spcPts val="600"/>
-              </a:spcAft>
-              <a:defRPr sz="1100">
+              <a:t>Elige qué equipo meterá el primer gol y en qué bloque de 15 minutos caerá (1-15', 16-30', 31-45', etc.), o la opción de 'Sin Goles en el Partido'.</a:t>
+            </a:r>
+          </a:p>
+          <a:p>
+            <a:pPr>
+              <a:spcAft>
+                <a:spcPts val="200"/>
+              </a:spcAft>
+              <a:defRPr sz="1350" b="1">
+                <a:solidFill>
+                  <a:srgbClr val="00E676"/>
+                </a:solidFill>
+              </a:defRPr>
+            </a:pPr>
+            <a:r>
+              <a:t>🏆 CÓMO GANA: EUFORIA DESDE EL INICIO</a:t>
+            </a:r>
+          </a:p>
+          <a:p>
+            <a:pPr>
+              <a:spcAft>
+                <a:spcPts val="1000"/>
+              </a:spcAft>
+              <a:defRPr sz="1150">
                 <a:solidFill>
                   <a:srgbClr val="FFFFFF"/>
                 </a:solidFill>
               </a:defRPr>
             </a:pPr>
             <a:r>
-              <a:t>El restaurante entero ve subir el ranking en vivo en la TV.</a:t>
-            </a:r>
-          </a:p>
-        </p:txBody>
-      </p:sp>
-      <p:sp>
-        <p:nvSpPr>
-          <p:cNvPr id="5" name="Rounded Rectangle 4"/>
-          <p:cNvSpPr/>
+              <a:t>En cuanto cae la primera anotación, el sistema valida el minuto oficial de juego. El comensal que acertó el bloque de tiempo gana en el acto, provocando festejos y más rondas de bebidas en su mesa.</a:t>
+            </a:r>
+          </a:p>
+        </p:txBody>
+      </p:sp>
+      <p:pic>
+        <p:nvPicPr>
+          <p:cNvPr id="5" name="Picture 4" descr="tarjeta_3_instinto_goleador.png"/>
+          <p:cNvPicPr>
+            <a:picLocks noChangeAspect="1"/>
+          </p:cNvPicPr>
           <p:nvPr/>
-        </p:nvSpPr>
-        <p:spPr>
-          <a:xfrm>
-            <a:off x="6217920" y="1645920"/>
-            <a:ext cx="5212080" cy="4663440"/>
-          </a:xfrm>
-          <a:prstGeom prst="roundRect">
-            <a:avLst/>
-          </a:prstGeom>
-          <a:solidFill>
-            <a:srgbClr val="141A26"/>
-          </a:solidFill>
-          <a:ln w="19050">
-            <a:solidFill>
-              <a:srgbClr val="283246"/>
-            </a:solidFill>
-          </a:ln>
-        </p:spPr>
-        <p:style>
-          <a:lnRef idx="1">
-            <a:schemeClr val="accent1"/>
-          </a:lnRef>
-          <a:fillRef idx="3">
-            <a:schemeClr val="accent1"/>
-          </a:fillRef>
-          <a:effectRef idx="2">
-            <a:schemeClr val="accent1"/>
-          </a:effectRef>
-          <a:fontRef idx="minor">
-            <a:schemeClr val="lt1"/>
-          </a:fontRef>
-        </p:style>
-        <p:txBody>
-          <a:bodyPr rtlCol="0" anchor="ctr"/>
-          <a:lstStyle/>
-          <a:p>
-            <a:pPr algn="ctr"/>
-          </a:p>
-        </p:txBody>
-      </p:sp>
-      <p:sp>
-        <p:nvSpPr>
-          <p:cNvPr id="6" name="TextBox 5"/>
-          <p:cNvSpPr txBox="1"/>
-          <p:nvPr/>
-        </p:nvSpPr>
-        <p:spPr>
-          <a:xfrm>
-            <a:off x="6492240" y="1828800"/>
-            <a:ext cx="4663440" cy="4206240"/>
+        </p:nvPicPr>
+        <p:blipFill>
+          <a:blip r:embed="rId2"/>
+          <a:stretch>
+            <a:fillRect/>
+          </a:stretch>
+        </p:blipFill>
+        <p:spPr>
+          <a:xfrm>
+            <a:off x="7955279" y="1645920"/>
+            <a:ext cx="2623185" cy="4663440"/>
           </a:xfrm>
           <a:prstGeom prst="rect">
             <a:avLst/>
           </a:prstGeom>
-          <a:noFill/>
-        </p:spPr>
-        <p:txBody>
-          <a:bodyPr wrap="square">
-            <a:spAutoFit/>
-          </a:bodyPr>
-          <a:lstStyle/>
-          <a:p>
-            <a:pPr>
-              <a:spcAft>
-                <a:spcPts val="800"/>
-              </a:spcAft>
-              <a:defRPr sz="1650" b="1">
-                <a:solidFill>
-                  <a:srgbClr val="00E676"/>
-                </a:solidFill>
-              </a:defRPr>
-            </a:pPr>
-            <a:r>
-              <a:t>🛡️ Survivor NFL (Fidelidad Semanal)</a:t>
-            </a:r>
-          </a:p>
-          <a:p>
-            <a:pPr>
-              <a:spcAft>
-                <a:spcPts val="100"/>
-              </a:spcAft>
-              <a:defRPr sz="1250" b="1">
-                <a:solidFill>
-                  <a:srgbClr val="FFD100"/>
-                </a:solidFill>
-              </a:defRPr>
-            </a:pPr>
-            <a:r>
-              <a:t>🛠️ Creación Única</a:t>
-            </a:r>
-          </a:p>
-          <a:p>
-            <a:pPr>
-              <a:spcAft>
-                <a:spcPts val="600"/>
-              </a:spcAft>
-              <a:defRPr sz="1100">
-                <a:solidFill>
-                  <a:srgbClr val="FFFFFF"/>
-                </a:solidFill>
-              </a:defRPr>
-            </a:pPr>
-            <a:r>
-              <a:t>Se activa al inicio de la temporada regular de NFL.</a:t>
-            </a:r>
-          </a:p>
-          <a:p>
-            <a:pPr>
-              <a:spcAft>
-                <a:spcPts val="100"/>
-              </a:spcAft>
-              <a:defRPr sz="1250" b="1">
-                <a:solidFill>
-                  <a:srgbClr val="FFD100"/>
-                </a:solidFill>
-              </a:defRPr>
-            </a:pPr>
-            <a:r>
-              <a:t>📱 1 Equipo por Semana</a:t>
-            </a:r>
-          </a:p>
-          <a:p>
-            <a:pPr>
-              <a:spcAft>
-                <a:spcPts val="600"/>
-              </a:spcAft>
-              <a:defRPr sz="1100">
-                <a:solidFill>
-                  <a:srgbClr val="FFFFFF"/>
-                </a:solidFill>
-              </a:defRPr>
-            </a:pPr>
-            <a:r>
-              <a:t>El cliente elige 1 equipo ganador por semana sin repetir. Si su equipo gana, sobrevive; si pierde, queda eliminado.</a:t>
-            </a:r>
-          </a:p>
-          <a:p>
-            <a:pPr>
-              <a:spcAft>
-                <a:spcPts val="100"/>
-              </a:spcAft>
-              <a:defRPr sz="1250" b="1">
-                <a:solidFill>
-                  <a:srgbClr val="FFD100"/>
-                </a:solidFill>
-              </a:defRPr>
-            </a:pPr>
-            <a:r>
-              <a:t>🏆 Retención Obligatoria</a:t>
-            </a:r>
-          </a:p>
-          <a:p>
-            <a:pPr>
-              <a:spcAft>
-                <a:spcPts val="600"/>
-              </a:spcAft>
-              <a:defRPr sz="1100">
-                <a:solidFill>
-                  <a:srgbClr val="FFFFFF"/>
-                </a:solidFill>
-              </a:defRPr>
-            </a:pPr>
-            <a:r>
-              <a:t>Obliga al cliente a regresar semana tras semana a la sucursal para defender su boleto de sobreviviente.</a:t>
-            </a:r>
-          </a:p>
-        </p:txBody>
-      </p:sp>
+        </p:spPr>
+      </p:pic>
     </p:spTree>
   </p:cSld>
   <p:clrMapOvr>

--- a/Drinks_and_Wins_Presentacion_Ejecutiva.pptx
+++ b/Drinks_and_Wins_Presentacion_Ejecutiva.pptx
@@ -20,6 +20,14 @@
     <p:sldId id="268" r:id="rId19"/>
     <p:sldId id="269" r:id="rId20"/>
     <p:sldId id="270" r:id="rId21"/>
+    <p:sldId id="271" r:id="rId22"/>
+    <p:sldId id="272" r:id="rId23"/>
+    <p:sldId id="273" r:id="rId24"/>
+    <p:sldId id="274" r:id="rId25"/>
+    <p:sldId id="275" r:id="rId26"/>
+    <p:sldId id="276" r:id="rId27"/>
+    <p:sldId id="277" r:id="rId28"/>
+    <p:sldId id="278" r:id="rId29"/>
   </p:sldIdLst>
   <p:sldSz cx="12191695" cy="6858000" type="screen4x3"/>
   <p:notesSz cx="6858000" cy="9144000"/>
@@ -3212,7 +3220,7 @@
               </a:defRPr>
             </a:pPr>
             <a:r>
-              <a:t>PROYECTO DE GAMIFICACIÓN EN MESA • DE LA BARRA A LA OPERACIÓN</a:t>
+              <a:t>PROYECTO DE GAMIFICACIÓN EN MESA • MANUAL OPERATIVO &amp; BLUEPRINT EJECUTIVO</a:t>
             </a:r>
           </a:p>
           <a:p>
@@ -3233,9 +3241,9 @@
           <a:p>
             <a:pPr>
               <a:spcAft>
-                <a:spcPts val="1800"/>
-              </a:spcAft>
-              <a:defRPr sz="1900">
+                <a:spcPts val="1600"/>
+              </a:spcAft>
+              <a:defRPr sz="1800">
                 <a:solidFill>
                   <a:srgbClr val="FFD100"/>
                 </a:solidFill>
@@ -3250,7 +3258,7 @@
               <a:spcAft>
                 <a:spcPts val="400"/>
               </a:spcAft>
-              <a:defRPr sz="1350">
+              <a:defRPr sz="1300">
                 <a:solidFill>
                   <a:srgbClr val="FFFFFF"/>
                 </a:solidFill>
@@ -3262,7 +3270,7 @@
           </a:p>
           <a:p>
             <a:pPr>
-              <a:defRPr sz="1200" i="1">
+              <a:defRPr sz="1150" i="1">
                 <a:solidFill>
                   <a:srgbClr val="94A3B8"/>
                 </a:solidFill>
@@ -3308,7 +3316,7 @@
         </p:nvSpPr>
         <p:spPr>
           <a:xfrm>
-            <a:off x="731520" y="365760"/>
+            <a:off x="731520" y="320040"/>
             <a:ext cx="10698480" cy="1005840"/>
           </a:xfrm>
           <a:prstGeom prst="rect">
@@ -3333,19 +3341,19 @@
               </a:defRPr>
             </a:pPr>
             <a:r>
-              <a:t>JUEGO POR JUEGO EN DETALLE</a:t>
-            </a:r>
-          </a:p>
-          <a:p>
-            <a:pPr>
-              <a:defRPr sz="2300" b="1">
-                <a:solidFill>
-                  <a:srgbClr val="FFFFFF"/>
-                </a:solidFill>
-              </a:defRPr>
-            </a:pPr>
-            <a:r>
-              <a:t>Trivias en TV con IA &amp; Survivor NFL: Medios Tiempos y Fidelidad</a:t>
+              <a:t>MANUAL OPERATIVO • JUEGO 2: QUINIELAS (ADMIN)</a:t>
+            </a:r>
+          </a:p>
+          <a:p>
+            <a:pPr>
+              <a:defRPr sz="2100" b="1">
+                <a:solidFill>
+                  <a:srgbClr val="FFFFFF"/>
+                </a:solidFill>
+              </a:defRPr>
+            </a:pPr>
+            <a:r>
+              <a:t>Manual: Quinielas &amp; Pick'em — Creación en 45s (admin.html)</a:t>
             </a:r>
           </a:p>
         </p:txBody>
@@ -3358,8 +3366,8 @@
         </p:nvSpPr>
         <p:spPr>
           <a:xfrm>
-            <a:off x="731520" y="1645920"/>
-            <a:ext cx="5212080" cy="4663440"/>
+            <a:off x="731520" y="1463040"/>
+            <a:ext cx="4114800" cy="4846320"/>
           </a:xfrm>
           <a:prstGeom prst="roundRect">
             <a:avLst/>
@@ -3395,134 +3403,30 @@
           </a:p>
         </p:txBody>
       </p:sp>
-      <p:sp>
-        <p:nvSpPr>
-          <p:cNvPr id="4" name="TextBox 3"/>
-          <p:cNvSpPr txBox="1"/>
-          <p:nvPr/>
-        </p:nvSpPr>
-        <p:spPr>
-          <a:xfrm>
-            <a:off x="1005840" y="1828800"/>
-            <a:ext cx="4663440" cy="4206240"/>
+      <p:pic>
+        <p:nvPicPr>
+          <p:cNvPr id="4" name="Picture 3" descr="screenshot_quiniela_picks.png"/>
+          <p:cNvPicPr>
+            <a:picLocks noChangeAspect="1"/>
+          </p:cNvPicPr>
+          <p:nvPr/>
+        </p:nvPicPr>
+        <p:blipFill>
+          <a:blip r:embed="rId2"/>
+          <a:stretch>
+            <a:fillRect/>
+          </a:stretch>
+        </p:blipFill>
+        <p:spPr>
+          <a:xfrm>
+            <a:off x="914400" y="1645920"/>
+            <a:ext cx="3749039" cy="2983854"/>
           </a:xfrm>
           <a:prstGeom prst="rect">
             <a:avLst/>
           </a:prstGeom>
-          <a:noFill/>
-        </p:spPr>
-        <p:txBody>
-          <a:bodyPr wrap="square">
-            <a:spAutoFit/>
-          </a:bodyPr>
-          <a:lstStyle/>
-          <a:p>
-            <a:pPr>
-              <a:spcAft>
-                <a:spcPts val="800"/>
-              </a:spcAft>
-              <a:defRPr sz="1650" b="1">
-                <a:solidFill>
-                  <a:srgbClr val="FFB612"/>
-                </a:solidFill>
-              </a:defRPr>
-            </a:pPr>
-            <a:r>
-              <a:t>🧠 Trivia en Pantallas de TV con IA</a:t>
-            </a:r>
-          </a:p>
-          <a:p>
-            <a:pPr>
-              <a:spcAft>
-                <a:spcPts val="100"/>
-              </a:spcAft>
-              <a:defRPr sz="1250" b="1">
-                <a:solidFill>
-                  <a:srgbClr val="FF5722"/>
-                </a:solidFill>
-              </a:defRPr>
-            </a:pPr>
-            <a:r>
-              <a:t>🛠️ Generación IA en 10 seg</a:t>
-            </a:r>
-          </a:p>
-          <a:p>
-            <a:pPr>
-              <a:spcAft>
-                <a:spcPts val="600"/>
-              </a:spcAft>
-              <a:defRPr sz="1100">
-                <a:solidFill>
-                  <a:srgbClr val="FFFFFF"/>
-                </a:solidFill>
-              </a:defRPr>
-            </a:pPr>
-            <a:r>
-              <a:t>La Inteligencia Artificial genera 10 preguntas deportivas temáticas del partido en cuestión.</a:t>
-            </a:r>
-          </a:p>
-          <a:p>
-            <a:pPr>
-              <a:spcAft>
-                <a:spcPts val="100"/>
-              </a:spcAft>
-              <a:defRPr sz="1250" b="1">
-                <a:solidFill>
-                  <a:srgbClr val="FF5722"/>
-                </a:solidFill>
-              </a:defRPr>
-            </a:pPr>
-            <a:r>
-              <a:t>📱 Medio Tiempo Interactivo</a:t>
-            </a:r>
-          </a:p>
-          <a:p>
-            <a:pPr>
-              <a:spcAft>
-                <a:spcPts val="600"/>
-              </a:spcAft>
-              <a:defRPr sz="1100">
-                <a:solidFill>
-                  <a:srgbClr val="FFFFFF"/>
-                </a:solidFill>
-              </a:defRPr>
-            </a:pPr>
-            <a:r>
-              <a:t>La TV del bar muestra la pregunta con cuenta regresiva. Los clientes responden contrarreloj desde su smartphone compitiendo mesa contra mesa.</a:t>
-            </a:r>
-          </a:p>
-          <a:p>
-            <a:pPr>
-              <a:spcAft>
-                <a:spcPts val="100"/>
-              </a:spcAft>
-              <a:defRPr sz="1250" b="1">
-                <a:solidFill>
-                  <a:srgbClr val="FF5722"/>
-                </a:solidFill>
-              </a:defRPr>
-            </a:pPr>
-            <a:r>
-              <a:t>🏆 Podio en Pantalla Grande</a:t>
-            </a:r>
-          </a:p>
-          <a:p>
-            <a:pPr>
-              <a:spcAft>
-                <a:spcPts val="600"/>
-              </a:spcAft>
-              <a:defRPr sz="1100">
-                <a:solidFill>
-                  <a:srgbClr val="FFFFFF"/>
-                </a:solidFill>
-              </a:defRPr>
-            </a:pPr>
-            <a:r>
-              <a:t>El restaurante entero ve subir el ranking en vivo en la TV.</a:t>
-            </a:r>
-          </a:p>
-        </p:txBody>
-      </p:sp>
+        </p:spPr>
+      </p:pic>
       <p:sp>
         <p:nvSpPr>
           <p:cNvPr id="5" name="Rounded Rectangle 4"/>
@@ -3531,8 +3435,8 @@
         </p:nvSpPr>
         <p:spPr>
           <a:xfrm>
-            <a:off x="6217920" y="1645920"/>
-            <a:ext cx="5212080" cy="4663440"/>
+            <a:off x="5120640" y="1463040"/>
+            <a:ext cx="6309360" cy="4846320"/>
           </a:xfrm>
           <a:prstGeom prst="roundRect">
             <a:avLst/>
@@ -3576,8 +3480,8 @@
         </p:nvSpPr>
         <p:spPr>
           <a:xfrm>
-            <a:off x="6492240" y="1828800"/>
-            <a:ext cx="4663440" cy="4206240"/>
+            <a:off x="5394960" y="1645920"/>
+            <a:ext cx="5760720" cy="4480560"/>
           </a:xfrm>
           <a:prstGeom prst="rect">
             <a:avLst/>
@@ -3594,104 +3498,106 @@
               <a:spcAft>
                 <a:spcPts val="800"/>
               </a:spcAft>
-              <a:defRPr sz="1650" b="1">
+              <a:defRPr sz="1500" b="1">
+                <a:solidFill>
+                  <a:srgbClr val="FFB612"/>
+                </a:solidFill>
+              </a:defRPr>
+            </a:pPr>
+            <a:r>
+              <a:t>📋 Creación y Automatización con ESPN API</a:t>
+            </a:r>
+          </a:p>
+          <a:p>
+            <a:pPr>
+              <a:spcAft>
+                <a:spcPts val="400"/>
+              </a:spcAft>
+            </a:pPr>
+            <a:r>
+              <a:rPr b="1" sz="1050">
+                <a:solidFill>
+                  <a:srgbClr val="FFB612"/>
+                </a:solidFill>
+              </a:rPr>
+              <a:t>1. Asignar Nombre y Modo: </a:t>
+            </a:r>
+            <a:r>
+              <a:rPr sz="1050">
+                <a:solidFill>
+                  <a:srgbClr val="FFFFFF"/>
+                </a:solidFill>
+              </a:rPr>
+              <a:t>Escribir el nombre (ej. «Semana 1 NFL Juriquilla»). Opción de Quiniela Tradicional (marcador exacto) o Quiniela Híbrida (Modo Pick'em solo ganador).</a:t>
+            </a:r>
+          </a:p>
+          <a:p>
+            <a:pPr>
+              <a:spcAft>
+                <a:spcPts val="400"/>
+              </a:spcAft>
+            </a:pPr>
+            <a:r>
+              <a:rPr b="1" sz="1050">
                 <a:solidFill>
                   <a:srgbClr val="00E676"/>
                 </a:solidFill>
-              </a:defRPr>
-            </a:pPr>
-            <a:r>
-              <a:t>🛡️ Survivor NFL (Fidelidad Semanal)</a:t>
-            </a:r>
-          </a:p>
-          <a:p>
-            <a:pPr>
-              <a:spcAft>
-                <a:spcPts val="100"/>
-              </a:spcAft>
-              <a:defRPr sz="1250" b="1">
-                <a:solidFill>
-                  <a:srgbClr val="FFD100"/>
-                </a:solidFill>
-              </a:defRPr>
-            </a:pPr>
-            <a:r>
-              <a:t>🛠️ Creación Única</a:t>
-            </a:r>
-          </a:p>
-          <a:p>
-            <a:pPr>
-              <a:spcAft>
-                <a:spcPts val="600"/>
-              </a:spcAft>
-              <a:defRPr sz="1100">
-                <a:solidFill>
-                  <a:srgbClr val="FFFFFF"/>
-                </a:solidFill>
-              </a:defRPr>
-            </a:pPr>
-            <a:r>
-              <a:t>Se activa al inicio de la temporada regular de NFL.</a:t>
-            </a:r>
-          </a:p>
-          <a:p>
-            <a:pPr>
-              <a:spcAft>
-                <a:spcPts val="100"/>
-              </a:spcAft>
-              <a:defRPr sz="1250" b="1">
-                <a:solidFill>
-                  <a:srgbClr val="FFD100"/>
-                </a:solidFill>
-              </a:defRPr>
-            </a:pPr>
-            <a:r>
-              <a:t>📱 1 Equipo por Semana</a:t>
-            </a:r>
-          </a:p>
-          <a:p>
-            <a:pPr>
-              <a:spcAft>
-                <a:spcPts val="600"/>
-              </a:spcAft>
-              <a:defRPr sz="1100">
-                <a:solidFill>
-                  <a:srgbClr val="FFFFFF"/>
-                </a:solidFill>
-              </a:defRPr>
-            </a:pPr>
-            <a:r>
-              <a:t>El cliente elige 1 equipo ganador por semana sin repetir. Si su equipo gana, sobrevive; si pierde, queda eliminado.</a:t>
-            </a:r>
-          </a:p>
-          <a:p>
-            <a:pPr>
-              <a:spcAft>
-                <a:spcPts val="100"/>
-              </a:spcAft>
-              <a:defRPr sz="1250" b="1">
-                <a:solidFill>
-                  <a:srgbClr val="FFD100"/>
-                </a:solidFill>
-              </a:defRPr>
-            </a:pPr>
-            <a:r>
-              <a:t>🏆 Retención Obligatoria</a:t>
-            </a:r>
-          </a:p>
-          <a:p>
-            <a:pPr>
-              <a:spcAft>
-                <a:spcPts val="600"/>
-              </a:spcAft>
-              <a:defRPr sz="1100">
-                <a:solidFill>
-                  <a:srgbClr val="FFFFFF"/>
-                </a:solidFill>
-              </a:defRPr>
-            </a:pPr>
-            <a:r>
-              <a:t>Obliga al cliente a regresar semana tras semana a la sucursal para defender su boleto de sobreviviente.</a:t>
+              </a:rPr>
+              <a:t>2. Carga Masiva en 1 Clic: </a:t>
+            </a:r>
+            <a:r>
+              <a:rPr sz="1050">
+                <a:solidFill>
+                  <a:srgbClr val="FFFFFF"/>
+                </a:solidFill>
+              </a:rPr>
+              <a:t>Seleccionar deporte (NFL o Liga MX) y rango de fechas (7 a 30 días). Tocar «🔍 Buscar Partidos». El gerente toca los juegos deseados y se importan logos, horarios y líneas oficiales.</a:t>
+            </a:r>
+          </a:p>
+          <a:p>
+            <a:pPr>
+              <a:spcAft>
+                <a:spcPts val="400"/>
+              </a:spcAft>
+            </a:pPr>
+            <a:r>
+              <a:rPr b="1" sz="1050">
+                <a:solidFill>
+                  <a:srgbClr val="FF5722"/>
+                </a:solidFill>
+              </a:rPr>
+              <a:t>3. Bloqueo de Pronósticos: </a:t>
+            </a:r>
+            <a:r>
+              <a:rPr sz="1050">
+                <a:solidFill>
+                  <a:srgbClr val="FFFFFF"/>
+                </a:solidFill>
+              </a:rPr>
+              <a:t>Botón «🔒 Bloquear Pronósticos» se activa antes de arrancar el primer partido para garantizar legalidad y transparencia.</a:t>
+            </a:r>
+          </a:p>
+          <a:p>
+            <a:pPr>
+              <a:spcAft>
+                <a:spcPts val="400"/>
+              </a:spcAft>
+            </a:pPr>
+            <a:r>
+              <a:rPr b="1" sz="1050">
+                <a:solidFill>
+                  <a:srgbClr val="3498DB"/>
+                </a:solidFill>
+              </a:rPr>
+              <a:t>4. Sincronización en Vivo: </a:t>
+            </a:r>
+            <a:r>
+              <a:rPr sz="1050">
+                <a:solidFill>
+                  <a:srgbClr val="FFFFFF"/>
+                </a:solidFill>
+              </a:rPr>
+              <a:t>Botón «🔄 Sincronizar ESPN» jala marcadores finales y recalcula en segundos la tabla de posiciones general de la sucursal.</a:t>
             </a:r>
           </a:p>
         </p:txBody>
@@ -3730,7 +3636,7 @@
         </p:nvSpPr>
         <p:spPr>
           <a:xfrm>
-            <a:off x="731520" y="365760"/>
+            <a:off x="731520" y="320040"/>
             <a:ext cx="10698480" cy="1005840"/>
           </a:xfrm>
           <a:prstGeom prst="rect">
@@ -3755,19 +3661,19 @@
               </a:defRPr>
             </a:pPr>
             <a:r>
-              <a:t>RENTABILIDAD Y VENTAS</a:t>
-            </a:r>
-          </a:p>
-          <a:p>
-            <a:pPr>
-              <a:defRPr sz="2300" b="1">
-                <a:solidFill>
-                  <a:srgbClr val="FFFFFF"/>
-                </a:solidFill>
-              </a:defRPr>
-            </a:pPr>
-            <a:r>
-              <a:t>Estrategia de Premios: Diseñada para Proteger el Margen</a:t>
+              <a:t>MANUAL OPERATIVO • JUEGO 2: QUINIELAS (JUGADOR)</a:t>
+            </a:r>
+          </a:p>
+          <a:p>
+            <a:pPr>
+              <a:defRPr sz="2100" b="1">
+                <a:solidFill>
+                  <a:srgbClr val="FFFFFF"/>
+                </a:solidFill>
+              </a:defRPr>
+            </a:pPr>
+            <a:r>
+              <a:t>Manual: Quinielas &amp; Pick'em — Experiencia del Cliente y Puntos</a:t>
             </a:r>
           </a:p>
         </p:txBody>
@@ -3780,8 +3686,8 @@
         </p:nvSpPr>
         <p:spPr>
           <a:xfrm>
-            <a:off x="731520" y="1645920"/>
-            <a:ext cx="3413455" cy="4663440"/>
+            <a:off x="731520" y="1463040"/>
+            <a:ext cx="4114800" cy="4846320"/>
           </a:xfrm>
           <a:prstGeom prst="roundRect">
             <a:avLst/>
@@ -3817,56 +3723,30 @@
           </a:p>
         </p:txBody>
       </p:sp>
-      <p:sp>
-        <p:nvSpPr>
-          <p:cNvPr id="4" name="TextBox 3"/>
-          <p:cNvSpPr txBox="1"/>
-          <p:nvPr/>
-        </p:nvSpPr>
-        <p:spPr>
-          <a:xfrm>
-            <a:off x="1005840" y="1920240"/>
-            <a:ext cx="2864815" cy="4114800"/>
+      <p:pic>
+        <p:nvPicPr>
+          <p:cNvPr id="4" name="Picture 3" descr="screenshot_quiniela_picks.png"/>
+          <p:cNvPicPr>
+            <a:picLocks noChangeAspect="1"/>
+          </p:cNvPicPr>
+          <p:nvPr/>
+        </p:nvPicPr>
+        <p:blipFill>
+          <a:blip r:embed="rId2"/>
+          <a:stretch>
+            <a:fillRect/>
+          </a:stretch>
+        </p:blipFill>
+        <p:spPr>
+          <a:xfrm>
+            <a:off x="914400" y="1645920"/>
+            <a:ext cx="3749039" cy="2983854"/>
           </a:xfrm>
           <a:prstGeom prst="rect">
             <a:avLst/>
           </a:prstGeom>
-          <a:noFill/>
-        </p:spPr>
-        <p:txBody>
-          <a:bodyPr wrap="square">
-            <a:spAutoFit/>
-          </a:bodyPr>
-          <a:lstStyle/>
-          <a:p>
-            <a:pPr>
-              <a:spcAft>
-                <a:spcPts val="1400"/>
-              </a:spcAft>
-              <a:defRPr sz="1600" b="1">
-                <a:solidFill>
-                  <a:srgbClr val="FFB612"/>
-                </a:solidFill>
-              </a:defRPr>
-            </a:pPr>
-            <a:r>
-              <a:t>🍔 Alto Valor Percibido vs Bajo Costo</a:t>
-            </a:r>
-          </a:p>
-          <a:p>
-            <a:pPr>
-              <a:defRPr sz="1300">
-                <a:solidFill>
-                  <a:srgbClr val="FFFFFF"/>
-                </a:solidFill>
-              </a:defRPr>
-            </a:pPr>
-            <a:r>
-              <a:t>Una orden de alitas o una cerveza tiene un costo de insumo moderado para cocina/barra ($30-$50 MXN), pero en la mente del cliente representa un premio valioso de $160 a $240 MXN.</a:t>
-            </a:r>
-          </a:p>
-        </p:txBody>
-      </p:sp>
+        </p:spPr>
+      </p:pic>
       <p:sp>
         <p:nvSpPr>
           <p:cNvPr id="5" name="Rounded Rectangle 4"/>
@@ -3875,8 +3755,8 @@
         </p:nvSpPr>
         <p:spPr>
           <a:xfrm>
-            <a:off x="4389120" y="1645920"/>
-            <a:ext cx="3413455" cy="4663440"/>
+            <a:off x="5120640" y="1463040"/>
+            <a:ext cx="6309360" cy="4846320"/>
           </a:xfrm>
           <a:prstGeom prst="roundRect">
             <a:avLst/>
@@ -3920,8 +3800,8 @@
         </p:nvSpPr>
         <p:spPr>
           <a:xfrm>
-            <a:off x="4663440" y="1920240"/>
-            <a:ext cx="2864815" cy="4114800"/>
+            <a:off x="5394960" y="1645920"/>
+            <a:ext cx="5760720" cy="4480560"/>
           </a:xfrm>
           <a:prstGeom prst="rect">
             <a:avLst/>
@@ -3936,123 +3816,108 @@
           <a:p>
             <a:pPr>
               <a:spcAft>
-                <a:spcPts val="1400"/>
-              </a:spcAft>
-              <a:defRPr sz="1600" b="1">
+                <a:spcPts val="800"/>
+              </a:spcAft>
+              <a:defRPr sz="1500" b="1">
+                <a:solidFill>
+                  <a:srgbClr val="FFB612"/>
+                </a:solidFill>
+              </a:defRPr>
+            </a:pPr>
+            <a:r>
+              <a:t>🎯 Sistema Visual de Puntuación por Colores</a:t>
+            </a:r>
+          </a:p>
+          <a:p>
+            <a:pPr>
+              <a:spcAft>
+                <a:spcPts val="400"/>
+              </a:spcAft>
+            </a:pPr>
+            <a:r>
+              <a:rPr b="1" sz="1050">
                 <a:solidFill>
                   <a:srgbClr val="00E676"/>
                 </a:solidFill>
-              </a:defRPr>
-            </a:pPr>
-            <a:r>
-              <a:t>🍻 Festejo y Rondas Extra en Mesa</a:t>
-            </a:r>
-          </a:p>
-          <a:p>
-            <a:pPr>
-              <a:defRPr sz="1300">
-                <a:solidFill>
-                  <a:srgbClr val="FFFFFF"/>
-                </a:solidFill>
-              </a:defRPr>
-            </a:pPr>
-            <a:r>
-              <a:t>Nadie gana y se va. El comensal que resulta campeón celebra con su mesa, y el grupo pide cervezas y platillos adicionales para acompañar el premio. El ticket final siempre supera con creces el costo del incentivo.</a:t>
-            </a:r>
-          </a:p>
-        </p:txBody>
-      </p:sp>
-      <p:sp>
-        <p:nvSpPr>
-          <p:cNvPr id="7" name="Rounded Rectangle 6"/>
-          <p:cNvSpPr/>
-          <p:nvPr/>
-        </p:nvSpPr>
-        <p:spPr>
-          <a:xfrm>
-            <a:off x="8046720" y="1645920"/>
-            <a:ext cx="3413455" cy="4663440"/>
-          </a:xfrm>
-          <a:prstGeom prst="roundRect">
-            <a:avLst/>
-          </a:prstGeom>
-          <a:solidFill>
-            <a:srgbClr val="141A26"/>
-          </a:solidFill>
-          <a:ln w="19050">
-            <a:solidFill>
-              <a:srgbClr val="283246"/>
-            </a:solidFill>
-          </a:ln>
-        </p:spPr>
-        <p:style>
-          <a:lnRef idx="1">
-            <a:schemeClr val="accent1"/>
-          </a:lnRef>
-          <a:fillRef idx="3">
-            <a:schemeClr val="accent1"/>
-          </a:fillRef>
-          <a:effectRef idx="2">
-            <a:schemeClr val="accent1"/>
-          </a:effectRef>
-          <a:fontRef idx="minor">
-            <a:schemeClr val="lt1"/>
-          </a:fontRef>
-        </p:style>
-        <p:txBody>
-          <a:bodyPr rtlCol="0" anchor="ctr"/>
-          <a:lstStyle/>
-          <a:p>
-            <a:pPr algn="ctr"/>
-          </a:p>
-        </p:txBody>
-      </p:sp>
-      <p:sp>
-        <p:nvSpPr>
-          <p:cNvPr id="8" name="TextBox 7"/>
-          <p:cNvSpPr txBox="1"/>
-          <p:nvPr/>
-        </p:nvSpPr>
-        <p:spPr>
-          <a:xfrm>
-            <a:off x="8321040" y="1920240"/>
-            <a:ext cx="2864815" cy="4114800"/>
-          </a:xfrm>
-          <a:prstGeom prst="rect">
-            <a:avLst/>
-          </a:prstGeom>
-          <a:noFill/>
-        </p:spPr>
-        <p:txBody>
-          <a:bodyPr wrap="square">
-            <a:spAutoFit/>
-          </a:bodyPr>
-          <a:lstStyle/>
-          <a:p>
-            <a:pPr>
-              <a:spcAft>
-                <a:spcPts val="1400"/>
-              </a:spcAft>
-              <a:defRPr sz="1600" b="1">
+              </a:rPr>
+              <a:t>🟩 +3 Puntos (Verde Esmeralda): </a:t>
+            </a:r>
+            <a:r>
+              <a:rPr sz="1050">
+                <a:solidFill>
+                  <a:srgbClr val="FFFFFF"/>
+                </a:solidFill>
+              </a:rPr>
+              <a:t>Marcador Exacto. Si el cliente pronostica exactamente el resultado del partido, su tarjeta se ilumina en verde brillante y suma 3 puntos.</a:t>
+            </a:r>
+          </a:p>
+          <a:p>
+            <a:pPr>
+              <a:spcAft>
+                <a:spcPts val="400"/>
+              </a:spcAft>
+            </a:pPr>
+            <a:r>
+              <a:rPr b="1" sz="1050">
+                <a:solidFill>
+                  <a:srgbClr val="FFB612"/>
+                </a:solidFill>
+              </a:rPr>
+              <a:t>🟨 +1 Punto (Dorado): </a:t>
+            </a:r>
+            <a:r>
+              <a:rPr sz="1050">
+                <a:solidFill>
+                  <a:srgbClr val="FFFFFF"/>
+                </a:solidFill>
+              </a:rPr>
+              <a:t>Ganador Acertado. Si no acertó el marcador pero sí acertó quién ganó el encuentro, recibe 1 punto con medalla dorada.</a:t>
+            </a:r>
+          </a:p>
+          <a:p>
+            <a:pPr>
+              <a:spcAft>
+                <a:spcPts val="400"/>
+              </a:spcAft>
+            </a:pPr>
+            <a:r>
+              <a:rPr b="1" sz="1050">
+                <a:solidFill>
+                  <a:srgbClr val="FFFFFF"/>
+                </a:solidFill>
+              </a:rPr>
+              <a:t>📊 Tabla de Líderes en Vivo: </a:t>
+            </a:r>
+            <a:r>
+              <a:rPr sz="1050">
+                <a:solidFill>
+                  <a:srgbClr val="94A3B8"/>
+                </a:solidFill>
+              </a:rPr>
+              <a:t>Durante las transmisiones del domingo, el comensal ve su nombre subir y bajar en el Leaderboard en tiempo real.</a:t>
+            </a:r>
+          </a:p>
+          <a:p>
+            <a:pPr>
+              <a:spcAft>
+                <a:spcPts val="400"/>
+              </a:spcAft>
+            </a:pPr>
+            <a:r>
+              <a:rPr b="1" sz="1050">
                 <a:solidFill>
                   <a:srgbClr val="FF5722"/>
                 </a:solidFill>
-              </a:defRPr>
-            </a:pPr>
-            <a:r>
-              <a:t>🔄 Retorno Asegurado en Días Bajas</a:t>
-            </a:r>
-          </a:p>
-          <a:p>
-            <a:pPr>
-              <a:defRPr sz="1300">
-                <a:solidFill>
-                  <a:srgbClr val="FFFFFF"/>
-                </a:solidFill>
-              </a:defRPr>
-            </a:pPr>
-            <a:r>
-              <a:t>Los cupones de 2º y 3º lugar se pueden programar para canjearse de lunes a jueves en su siguiente visita, generando tráfico en días y horarios con menor ocupación.</a:t>
+              </a:rPr>
+              <a:t>🏆 Podio de Campeones Automático: </a:t>
+            </a:r>
+            <a:r>
+              <a:rPr sz="1050">
+                <a:solidFill>
+                  <a:srgbClr val="FFFFFF"/>
+                </a:solidFill>
+              </a:rPr>
+              <a:t>Al concluir el último juego, la app despliega el podio con 1°, 2° y 3° lugar para entrega de premios de la gerencia.</a:t>
             </a:r>
           </a:p>
         </p:txBody>
@@ -4091,7 +3956,7 @@
         </p:nvSpPr>
         <p:spPr>
           <a:xfrm>
-            <a:off x="731520" y="365760"/>
+            <a:off x="731520" y="320040"/>
             <a:ext cx="10698480" cy="1005840"/>
           </a:xfrm>
           <a:prstGeom prst="rect">
@@ -4116,19 +3981,19 @@
               </a:defRPr>
             </a:pPr>
             <a:r>
-              <a:t>EQUIPO DE SERVICIO</a:t>
-            </a:r>
-          </a:p>
-          <a:p>
-            <a:pPr>
-              <a:defRPr sz="2300" b="1">
-                <a:solidFill>
-                  <a:srgbClr val="FFFFFF"/>
-                </a:solidFill>
-              </a:defRPr>
-            </a:pPr>
-            <a:r>
-              <a:t>Gamificación del Personal: Meseros como Embajadores</a:t>
+              <a:t>MANUAL OPERATIVO • JUEGO 3: SURVIVOR (ADMIN)</a:t>
+            </a:r>
+          </a:p>
+          <a:p>
+            <a:pPr>
+              <a:defRPr sz="2100" b="1">
+                <a:solidFill>
+                  <a:srgbClr val="FFFFFF"/>
+                </a:solidFill>
+              </a:defRPr>
+            </a:pPr>
+            <a:r>
+              <a:t>Manual: Survivor Multi-Semana — Panel del Gerente (admin.html)</a:t>
             </a:r>
           </a:p>
         </p:txBody>
@@ -4141,8 +4006,8 @@
         </p:nvSpPr>
         <p:spPr>
           <a:xfrm>
-            <a:off x="731520" y="1645920"/>
-            <a:ext cx="6858000" cy="4663440"/>
+            <a:off x="731520" y="1463040"/>
+            <a:ext cx="4114800" cy="4846320"/>
           </a:xfrm>
           <a:prstGeom prst="roundRect">
             <a:avLst/>
@@ -4178,152 +4043,9 @@
           </a:p>
         </p:txBody>
       </p:sp>
-      <p:sp>
-        <p:nvSpPr>
-          <p:cNvPr id="4" name="TextBox 3"/>
-          <p:cNvSpPr txBox="1"/>
-          <p:nvPr/>
-        </p:nvSpPr>
-        <p:spPr>
-          <a:xfrm>
-            <a:off x="1005840" y="1828800"/>
-            <a:ext cx="6309360" cy="4206240"/>
-          </a:xfrm>
-          <a:prstGeom prst="rect">
-            <a:avLst/>
-          </a:prstGeom>
-          <a:noFill/>
-        </p:spPr>
-        <p:txBody>
-          <a:bodyPr wrap="square">
-            <a:spAutoFit/>
-          </a:bodyPr>
-          <a:lstStyle/>
-          <a:p>
-            <a:pPr>
-              <a:spcAft>
-                <a:spcPts val="200"/>
-              </a:spcAft>
-              <a:defRPr sz="1350" b="1">
-                <a:solidFill>
-                  <a:srgbClr val="FFB612"/>
-                </a:solidFill>
-              </a:defRPr>
-            </a:pPr>
-            <a:r>
-              <a:t>🙋 Atribución Clara en Cada Mesa</a:t>
-            </a:r>
-          </a:p>
-          <a:p>
-            <a:pPr>
-              <a:spcAft>
-                <a:spcPts val="1000"/>
-              </a:spcAft>
-              <a:defRPr sz="1150">
-                <a:solidFill>
-                  <a:srgbClr val="FFFFFF"/>
-                </a:solidFill>
-              </a:defRPr>
-            </a:pPr>
-            <a:r>
-              <a:t>Al registrar sus pronósticos, el cliente selecciona el nombre de su mesero en la lista. La gerencia sabe con métricas exactas qué meseros están invitando activamente y cuáles no.</a:t>
-            </a:r>
-          </a:p>
-          <a:p>
-            <a:pPr>
-              <a:spcAft>
-                <a:spcPts val="200"/>
-              </a:spcAft>
-              <a:defRPr sz="1350" b="1">
-                <a:solidFill>
-                  <a:srgbClr val="FFB612"/>
-                </a:solidFill>
-              </a:defRPr>
-            </a:pPr>
-            <a:r>
-              <a:t>💰 Incentivo Económico Directo (Más Propina)</a:t>
-            </a:r>
-          </a:p>
-          <a:p>
-            <a:pPr>
-              <a:spcAft>
-                <a:spcPts val="1000"/>
-              </a:spcAft>
-              <a:defRPr sz="1150">
-                <a:solidFill>
-                  <a:srgbClr val="FFFFFF"/>
-                </a:solidFill>
-              </a:defRPr>
-            </a:pPr>
-            <a:r>
-              <a:t>Los meseros comprenden la fórmula de inmediato: Si la mesa se queda 3 horas compitiendo, consumirá más rondas de cerveza, hamburguesas y alitas, lo que elevará el total de la cuenta y su propina.</a:t>
-            </a:r>
-          </a:p>
-          <a:p>
-            <a:pPr>
-              <a:spcAft>
-                <a:spcPts val="200"/>
-              </a:spcAft>
-              <a:defRPr sz="1350" b="1">
-                <a:solidFill>
-                  <a:srgbClr val="FFB612"/>
-                </a:solidFill>
-              </a:defRPr>
-            </a:pPr>
-            <a:r>
-              <a:t>💬 Rompehielos Natural de Venta Sugerida</a:t>
-            </a:r>
-          </a:p>
-          <a:p>
-            <a:pPr>
-              <a:spcAft>
-                <a:spcPts val="1000"/>
-              </a:spcAft>
-              <a:defRPr sz="1150">
-                <a:solidFill>
-                  <a:srgbClr val="FFFFFF"/>
-                </a:solidFill>
-              </a:defRPr>
-            </a:pPr>
-            <a:r>
-              <a:t>En lugar del genérico '¿Se les ofrece algo más?', el mesero llega sonriendo: '¿Ya metieron su quiniela de hoy con mi nombre? Si ganan, ¡la casa les invita unas alitas!'.</a:t>
-            </a:r>
-          </a:p>
-          <a:p>
-            <a:pPr>
-              <a:spcAft>
-                <a:spcPts val="200"/>
-              </a:spcAft>
-              <a:defRPr sz="1350" b="1">
-                <a:solidFill>
-                  <a:srgbClr val="FFB612"/>
-                </a:solidFill>
-              </a:defRPr>
-            </a:pPr>
-            <a:r>
-              <a:t>🏆 Competencia Interna del Equipo</a:t>
-            </a:r>
-          </a:p>
-          <a:p>
-            <a:pPr>
-              <a:spcAft>
-                <a:spcPts val="1000"/>
-              </a:spcAft>
-              <a:defRPr sz="1150">
-                <a:solidFill>
-                  <a:srgbClr val="FFFFFF"/>
-                </a:solidFill>
-              </a:defRPr>
-            </a:pPr>
-            <a:r>
-              <a:t>Se puede premiar al mesero con más comensales registrados en la semana con turnos preferenciales o un reconocimiento en la junta semanal.</a:t>
-            </a:r>
-          </a:p>
-        </p:txBody>
-      </p:sp>
       <p:pic>
         <p:nvPicPr>
-          <p:cNvPr id="5" name="Picture 4" descr="screenshot_admin_player.png"/>
+          <p:cNvPr id="4" name="Picture 3" descr="survivor_view.png"/>
           <p:cNvPicPr>
             <a:picLocks noChangeAspect="1"/>
           </p:cNvPicPr>
@@ -4337,14 +4059,189 @@
         </p:blipFill>
         <p:spPr>
           <a:xfrm>
-            <a:off x="7863840" y="1828800"/>
-            <a:ext cx="3566160" cy="1308612"/>
+            <a:off x="914400" y="1645920"/>
+            <a:ext cx="3749039" cy="4670336"/>
           </a:xfrm>
           <a:prstGeom prst="rect">
             <a:avLst/>
           </a:prstGeom>
         </p:spPr>
       </p:pic>
+      <p:sp>
+        <p:nvSpPr>
+          <p:cNvPr id="5" name="Rounded Rectangle 4"/>
+          <p:cNvSpPr/>
+          <p:nvPr/>
+        </p:nvSpPr>
+        <p:spPr>
+          <a:xfrm>
+            <a:off x="5120640" y="1463040"/>
+            <a:ext cx="6309360" cy="4846320"/>
+          </a:xfrm>
+          <a:prstGeom prst="roundRect">
+            <a:avLst/>
+          </a:prstGeom>
+          <a:solidFill>
+            <a:srgbClr val="141A26"/>
+          </a:solidFill>
+          <a:ln w="19050">
+            <a:solidFill>
+              <a:srgbClr val="283246"/>
+            </a:solidFill>
+          </a:ln>
+        </p:spPr>
+        <p:style>
+          <a:lnRef idx="1">
+            <a:schemeClr val="accent1"/>
+          </a:lnRef>
+          <a:fillRef idx="3">
+            <a:schemeClr val="accent1"/>
+          </a:fillRef>
+          <a:effectRef idx="2">
+            <a:schemeClr val="accent1"/>
+          </a:effectRef>
+          <a:fontRef idx="minor">
+            <a:schemeClr val="lt1"/>
+          </a:fontRef>
+        </p:style>
+        <p:txBody>
+          <a:bodyPr rtlCol="0" anchor="ctr"/>
+          <a:lstStyle/>
+          <a:p>
+            <a:pPr algn="ctr"/>
+          </a:p>
+        </p:txBody>
+      </p:sp>
+      <p:sp>
+        <p:nvSpPr>
+          <p:cNvPr id="6" name="TextBox 5"/>
+          <p:cNvSpPr txBox="1"/>
+          <p:nvPr/>
+        </p:nvSpPr>
+        <p:spPr>
+          <a:xfrm>
+            <a:off x="5394960" y="1645920"/>
+            <a:ext cx="5760720" cy="4480560"/>
+          </a:xfrm>
+          <a:prstGeom prst="rect">
+            <a:avLst/>
+          </a:prstGeom>
+          <a:noFill/>
+        </p:spPr>
+        <p:txBody>
+          <a:bodyPr wrap="square">
+            <a:spAutoFit/>
+          </a:bodyPr>
+          <a:lstStyle/>
+          <a:p>
+            <a:pPr>
+              <a:spcAft>
+                <a:spcPts val="800"/>
+              </a:spcAft>
+              <a:defRPr sz="1500" b="1">
+                <a:solidFill>
+                  <a:srgbClr val="FFB612"/>
+                </a:solidFill>
+              </a:defRPr>
+            </a:pPr>
+            <a:r>
+              <a:t>🏆 Arquitectura Multi-Torneo Survivor</a:t>
+            </a:r>
+          </a:p>
+          <a:p>
+            <a:pPr>
+              <a:spcAft>
+                <a:spcPts val="400"/>
+              </a:spcAft>
+            </a:pPr>
+            <a:r>
+              <a:rPr b="1" sz="1050">
+                <a:solidFill>
+                  <a:srgbClr val="FFB612"/>
+                </a:solidFill>
+              </a:rPr>
+              <a:t>1. Crear Torneo Survivor: </a:t>
+            </a:r>
+            <a:r>
+              <a:rPr sz="1050">
+                <a:solidFill>
+                  <a:srgbClr val="FFFFFF"/>
+                </a:solidFill>
+              </a:rPr>
+              <a:t>Clic en «➕ Crear Nuevo Survivor», ingresar nombre (ej. «Survivor NFL 2026 Juriquilla») y definir fecha de inicio.</a:t>
+            </a:r>
+          </a:p>
+          <a:p>
+            <a:pPr>
+              <a:spcAft>
+                <a:spcPts val="400"/>
+              </a:spcAft>
+            </a:pPr>
+            <a:r>
+              <a:rPr b="1" sz="1050">
+                <a:solidFill>
+                  <a:srgbClr val="FF5722"/>
+                </a:solidFill>
+              </a:rPr>
+              <a:t>2. Configuración Semanal: </a:t>
+            </a:r>
+            <a:r>
+              <a:rPr sz="1050">
+                <a:solidFill>
+                  <a:srgbClr val="FFFFFF"/>
+                </a:solidFill>
+              </a:rPr>
+              <a:t>Selector de semana (Semana 1, 2, 3...) con opción de «🔒 Bloquear Pronósticos» antes del partido de jueves o domingo.</a:t>
+            </a:r>
+          </a:p>
+          <a:p>
+            <a:pPr>
+              <a:spcAft>
+                <a:spcPts val="400"/>
+              </a:spcAft>
+            </a:pPr>
+            <a:r>
+              <a:rPr b="1" sz="1050">
+                <a:solidFill>
+                  <a:srgbClr val="00E676"/>
+                </a:solidFill>
+              </a:rPr>
+              <a:t>3. Evaluación Automática con ESPN: </a:t>
+            </a:r>
+            <a:r>
+              <a:rPr sz="1050">
+                <a:solidFill>
+                  <a:srgbClr val="FFFFFF"/>
+                </a:solidFill>
+              </a:rPr>
+              <a:t>Botón «⚡ Evaluar Survivor con ESPN». El sistema compara las elecciones con los resultados oficiales y elimina a quienes eligieron equipos perdedores.</a:t>
+            </a:r>
+          </a:p>
+          <a:p>
+            <a:pPr>
+              <a:spcAft>
+                <a:spcPts val="400"/>
+              </a:spcAft>
+            </a:pPr>
+            <a:r>
+              <a:rPr b="1" sz="1050">
+                <a:solidFill>
+                  <a:srgbClr val="3498DB"/>
+                </a:solidFill>
+              </a:rPr>
+              <a:t>4. Panel de Estado en Vivo: </a:t>
+            </a:r>
+            <a:r>
+              <a:rPr sz="1050">
+                <a:solidFill>
+                  <a:srgbClr val="FFFFFF"/>
+                </a:solidFill>
+              </a:rPr>
+              <a:t>Muestra la lista de participantes activos en verde y eliminados en rojo. Botón para compartir estatus en grupos de WhatsApp.</a:t>
+            </a:r>
+          </a:p>
+        </p:txBody>
+      </p:sp>
     </p:spTree>
   </p:cSld>
   <p:clrMapOvr>
@@ -4379,7 +4276,7 @@
         </p:nvSpPr>
         <p:spPr>
           <a:xfrm>
-            <a:off x="731520" y="365760"/>
+            <a:off x="731520" y="320040"/>
             <a:ext cx="10698480" cy="1005840"/>
           </a:xfrm>
           <a:prstGeom prst="rect">
@@ -4404,19 +4301,19 @@
               </a:defRPr>
             </a:pPr>
             <a:r>
-              <a:t>CALENDARIO INTELIGENTE</a:t>
-            </a:r>
-          </a:p>
-          <a:p>
-            <a:pPr>
-              <a:defRPr sz="2300" b="1">
-                <a:solidFill>
-                  <a:srgbClr val="FFFFFF"/>
-                </a:solidFill>
-              </a:defRPr>
-            </a:pPr>
-            <a:r>
-              <a:t>Estrategia Gradual: El Juego Indicado en el Momento Indicado</a:t>
+              <a:t>MANUAL OPERATIVO • JUEGO 3: SURVIVOR (JUGADOR)</a:t>
+            </a:r>
+          </a:p>
+          <a:p>
+            <a:pPr>
+              <a:defRPr sz="2100" b="1">
+                <a:solidFill>
+                  <a:srgbClr val="FFFFFF"/>
+                </a:solidFill>
+              </a:defRPr>
+            </a:pPr>
+            <a:r>
+              <a:t>Manual: Survivor — Experiencia del Cliente y Tensión Semanal</a:t>
             </a:r>
           </a:p>
         </p:txBody>
@@ -4429,8 +4326,8 @@
         </p:nvSpPr>
         <p:spPr>
           <a:xfrm>
-            <a:off x="731520" y="1645920"/>
-            <a:ext cx="10728655" cy="4663440"/>
+            <a:off x="731520" y="1463040"/>
+            <a:ext cx="10728655" cy="4846320"/>
           </a:xfrm>
           <a:prstGeom prst="roundRect">
             <a:avLst/>
@@ -4474,8 +4371,8 @@
         </p:nvSpPr>
         <p:spPr>
           <a:xfrm>
-            <a:off x="1097280" y="1828800"/>
-            <a:ext cx="9966960" cy="4206240"/>
+            <a:off x="1005840" y="1645920"/>
+            <a:ext cx="10149840" cy="4480560"/>
           </a:xfrm>
           <a:prstGeom prst="rect">
             <a:avLst/>
@@ -4490,136 +4387,108 @@
           <a:p>
             <a:pPr>
               <a:spcAft>
-                <a:spcPts val="1200"/>
-              </a:spcAft>
-              <a:defRPr sz="1700" b="1">
+                <a:spcPts val="1000"/>
+              </a:spcAft>
+              <a:defRPr sz="1600" b="1">
                 <a:solidFill>
                   <a:srgbClr val="FFB612"/>
                 </a:solidFill>
               </a:defRPr>
             </a:pPr>
             <a:r>
-              <a:t>🎯 Menos es Más: La Calidad del Momento vs Saturación</a:t>
-            </a:r>
-          </a:p>
-          <a:p>
-            <a:pPr>
-              <a:spcAft>
-                <a:spcPts val="200"/>
-              </a:spcAft>
-              <a:defRPr sz="1400" b="1">
-                <a:solidFill>
-                  <a:srgbClr val="FFD100"/>
-                </a:solidFill>
-              </a:defRPr>
-            </a:pPr>
-            <a:r>
-              <a:t>🚫 No Jugar Todos los Juegos Todos los Días</a:t>
-            </a:r>
-          </a:p>
-          <a:p>
-            <a:pPr>
-              <a:spcAft>
-                <a:spcPts val="1000"/>
-              </a:spcAft>
-              <a:defRPr sz="1200">
-                <a:solidFill>
-                  <a:srgbClr val="FFFFFF"/>
-                </a:solidFill>
-              </a:defRPr>
-            </a:pPr>
-            <a:r>
-              <a:t>Saturar al cliente o al personal con 5 juegos simultáneos genera fatiga y desinterés. La experiencia debe sentirse especial y esperada cada fin de semana.</a:t>
-            </a:r>
-          </a:p>
-          <a:p>
-            <a:pPr>
-              <a:spcAft>
-                <a:spcPts val="200"/>
-              </a:spcAft>
-              <a:defRPr sz="1400" b="1">
-                <a:solidFill>
-                  <a:srgbClr val="FFD100"/>
-                </a:solidFill>
-              </a:defRPr>
-            </a:pPr>
-            <a:r>
-              <a:t>📅 Jueves, Domingos y Lunes: Modo NFL</a:t>
-            </a:r>
-          </a:p>
-          <a:p>
-            <a:pPr>
-              <a:spcAft>
-                <a:spcPts val="1000"/>
-              </a:spcAft>
-              <a:defRPr sz="1200">
-                <a:solidFill>
-                  <a:srgbClr val="FFFFFF"/>
-                </a:solidFill>
-              </a:defRPr>
-            </a:pPr>
-            <a:r>
-              <a:t>Exclusivamente Quinielas de Semana NFL y Football Grids en partidos estelares de Steelers, Sunday Night y Monday Night.</a:t>
-            </a:r>
-          </a:p>
-          <a:p>
-            <a:pPr>
-              <a:spcAft>
-                <a:spcPts val="200"/>
-              </a:spcAft>
-              <a:defRPr sz="1400" b="1">
-                <a:solidFill>
-                  <a:srgbClr val="FFD100"/>
-                </a:solidFill>
-              </a:defRPr>
-            </a:pPr>
-            <a:r>
-              <a:t>⚽ Viernes, Sábados y Domingos: Modo Fútbol</a:t>
-            </a:r>
-          </a:p>
-          <a:p>
-            <a:pPr>
-              <a:spcAft>
-                <a:spcPts val="1000"/>
-              </a:spcAft>
-              <a:defRPr sz="1200">
-                <a:solidFill>
-                  <a:srgbClr val="FFFFFF"/>
-                </a:solidFill>
-              </a:defRPr>
-            </a:pPr>
-            <a:r>
-              <a:t>Quinielas de Jornada de Liga MX y dinámicas de First Striker en Clásicos y liguilla.</a:t>
-            </a:r>
-          </a:p>
-          <a:p>
-            <a:pPr>
-              <a:spcAft>
-                <a:spcPts val="200"/>
-              </a:spcAft>
-              <a:defRPr sz="1400" b="1">
-                <a:solidFill>
-                  <a:srgbClr val="FFD100"/>
-                </a:solidFill>
-              </a:defRPr>
-            </a:pPr>
-            <a:r>
-              <a:t>🧠 Medios Tiempos Selectos: Modo Trivia</a:t>
-            </a:r>
-          </a:p>
-          <a:p>
-            <a:pPr>
-              <a:spcAft>
-                <a:spcPts val="1000"/>
-              </a:spcAft>
-              <a:defRPr sz="1200">
-                <a:solidFill>
-                  <a:srgbClr val="FFFFFF"/>
-                </a:solidFill>
-              </a:defRPr>
-            </a:pPr>
-            <a:r>
-              <a:t>Trivias de 10 minutos exclusivamente en el medio tiempo de partidos de alta audiencia para mantener a la gente entretenida mientras no hay jugadas.</a:t>
+              <a:t>⚡ La Regla de Oro que Asegura Visitas Cada Semana</a:t>
+            </a:r>
+          </a:p>
+          <a:p>
+            <a:pPr>
+              <a:spcAft>
+                <a:spcPts val="400"/>
+              </a:spcAft>
+            </a:pPr>
+            <a:r>
+              <a:rPr b="1" sz="1100">
+                <a:solidFill>
+                  <a:srgbClr val="FFB612"/>
+                </a:solidFill>
+              </a:rPr>
+              <a:t>1. Una Elección por Semana: </a:t>
+            </a:r>
+            <a:r>
+              <a:rPr sz="1100">
+                <a:solidFill>
+                  <a:srgbClr val="FFFFFF"/>
+                </a:solidFill>
+              </a:rPr>
+              <a:t>El cliente elige un equipo que cree que ganará su partido en la jornada activa.</a:t>
+            </a:r>
+          </a:p>
+          <a:p>
+            <a:pPr>
+              <a:spcAft>
+                <a:spcPts val="400"/>
+              </a:spcAft>
+            </a:pPr>
+            <a:r>
+              <a:rPr b="1" sz="1100">
+                <a:solidFill>
+                  <a:srgbClr val="FF5722"/>
+                </a:solidFill>
+              </a:rPr>
+              <a:t>2. Condición de Vida o Muerte: </a:t>
+            </a:r>
+            <a:r>
+              <a:rPr sz="1100">
+                <a:solidFill>
+                  <a:srgbClr val="FFFFFF"/>
+                </a:solidFill>
+              </a:rPr>
+              <a:t>Si tu equipo gana, sigues con vida en el torneo. Si empata o pierde, quedas ELIMINADO de la competencia.</a:t>
+            </a:r>
+          </a:p>
+          <a:p>
+            <a:pPr>
+              <a:spcAft>
+                <a:spcPts val="400"/>
+              </a:spcAft>
+            </a:pPr>
+            <a:r>
+              <a:rPr b="1" sz="1100">
+                <a:solidFill>
+                  <a:srgbClr val="00E676"/>
+                </a:solidFill>
+              </a:rPr>
+              <a:t>3. Prohibido Repetir Equipo: </a:t>
+            </a:r>
+            <a:r>
+              <a:rPr sz="1100">
+                <a:solidFill>
+                  <a:srgbClr val="FFFFFF"/>
+                </a:solidFill>
+              </a:rPr>
+              <a:t>Una vez que elegiste a un equipo (ej. Chiefs en semana 1), la app lo bloquea; jamás podrás volver a seleccionarlo en toda la temporada.</a:t>
+            </a:r>
+          </a:p>
+          <a:p>
+            <a:pPr>
+              <a:spcAft>
+                <a:spcPts val="400"/>
+              </a:spcAft>
+            </a:pPr>
+            <a:r>
+              <a:rPr b="1" sz="1100">
+                <a:solidFill>
+                  <a:srgbClr val="3498DB"/>
+                </a:solidFill>
+              </a:rPr>
+              <a:t>4. Retención Brutal en Sucursal: </a:t>
+            </a:r>
+            <a:r>
+              <a:rPr sz="1100">
+                <a:solidFill>
+                  <a:srgbClr val="FFFFFF"/>
+                </a:solidFill>
+              </a:rPr>
+              <a:t>Los sobrevivientes asisten religiosamente cada domingo al restaurante para seguir en vivo a su equipo elegido, garantizando consumo continuo durante meses.</a:t>
             </a:r>
           </a:p>
         </p:txBody>
@@ -4658,7 +4527,7 @@
         </p:nvSpPr>
         <p:spPr>
           <a:xfrm>
-            <a:off x="731520" y="365760"/>
+            <a:off x="731520" y="320040"/>
             <a:ext cx="10698480" cy="1005840"/>
           </a:xfrm>
           <a:prstGeom prst="rect">
@@ -4683,19 +4552,19 @@
               </a:defRPr>
             </a:pPr>
             <a:r>
-              <a:t>RETORNO DE INVERSIÓN</a:t>
-            </a:r>
-          </a:p>
-          <a:p>
-            <a:pPr>
-              <a:defRPr sz="2300" b="1">
-                <a:solidFill>
-                  <a:srgbClr val="FFFFFF"/>
-                </a:solidFill>
-              </a:defRPr>
-            </a:pPr>
-            <a:r>
-              <a:t>Métricas Clave de Negocio (KPIs y Rentabilidad)</a:t>
+              <a:t>MANUAL OPERATIVO • JUEGO 4: FIRST STRIKER (ADMIN)</a:t>
+            </a:r>
+          </a:p>
+          <a:p>
+            <a:pPr>
+              <a:defRPr sz="2100" b="1">
+                <a:solidFill>
+                  <a:srgbClr val="FFFFFF"/>
+                </a:solidFill>
+              </a:defRPr>
+            </a:pPr>
+            <a:r>
+              <a:t>Manual: First Striker Wins — Planilla de 15 Minutos (admin.html)</a:t>
             </a:r>
           </a:p>
         </p:txBody>
@@ -4708,8 +4577,8 @@
         </p:nvSpPr>
         <p:spPr>
           <a:xfrm>
-            <a:off x="731520" y="1645920"/>
-            <a:ext cx="2499055" cy="4663440"/>
+            <a:off x="731520" y="1463040"/>
+            <a:ext cx="4114800" cy="4846320"/>
           </a:xfrm>
           <a:prstGeom prst="roundRect">
             <a:avLst/>
@@ -4745,71 +4614,30 @@
           </a:p>
         </p:txBody>
       </p:sp>
-      <p:sp>
-        <p:nvSpPr>
-          <p:cNvPr id="4" name="TextBox 3"/>
-          <p:cNvSpPr txBox="1"/>
-          <p:nvPr/>
-        </p:nvSpPr>
-        <p:spPr>
-          <a:xfrm>
-            <a:off x="914400" y="1920240"/>
-            <a:ext cx="2133295" cy="4114800"/>
+      <p:pic>
+        <p:nvPicPr>
+          <p:cNvPr id="4" name="Picture 3" descr="first_striker_board.png"/>
+          <p:cNvPicPr>
+            <a:picLocks noChangeAspect="1"/>
+          </p:cNvPicPr>
+          <p:nvPr/>
+        </p:nvPicPr>
+        <p:blipFill>
+          <a:blip r:embed="rId2"/>
+          <a:stretch>
+            <a:fillRect/>
+          </a:stretch>
+        </p:blipFill>
+        <p:spPr>
+          <a:xfrm>
+            <a:off x="914400" y="1645920"/>
+            <a:ext cx="3749039" cy="1977032"/>
           </a:xfrm>
           <a:prstGeom prst="rect">
             <a:avLst/>
           </a:prstGeom>
-          <a:noFill/>
-        </p:spPr>
-        <p:txBody>
-          <a:bodyPr wrap="square">
-            <a:spAutoFit/>
-          </a:bodyPr>
-          <a:lstStyle/>
-          <a:p>
-            <a:pPr algn="ctr">
-              <a:spcAft>
-                <a:spcPts val="400"/>
-              </a:spcAft>
-              <a:defRPr sz="3600" b="1">
-                <a:solidFill>
-                  <a:srgbClr val="FFB612"/>
-                </a:solidFill>
-              </a:defRPr>
-            </a:pPr>
-            <a:r>
-              <a:t>+35%</a:t>
-            </a:r>
-          </a:p>
-          <a:p>
-            <a:pPr algn="ctr">
-              <a:spcAft>
-                <a:spcPts val="1400"/>
-              </a:spcAft>
-              <a:defRPr sz="1100" b="1">
-                <a:solidFill>
-                  <a:srgbClr val="FFB612"/>
-                </a:solidFill>
-              </a:defRPr>
-            </a:pPr>
-            <a:r>
-              <a:t>PERMANENCIA (DWELL TIME)</a:t>
-            </a:r>
-          </a:p>
-          <a:p>
-            <a:pPr algn="ctr">
-              <a:defRPr sz="1150">
-                <a:solidFill>
-                  <a:srgbClr val="94A3B8"/>
-                </a:solidFill>
-              </a:defRPr>
-            </a:pPr>
-            <a:r>
-              <a:t>Las mesas se quedan hasta el silbatazo final para ver si ganan su quiniela.</a:t>
-            </a:r>
-          </a:p>
-        </p:txBody>
-      </p:sp>
+        </p:spPr>
+      </p:pic>
       <p:sp>
         <p:nvSpPr>
           <p:cNvPr id="5" name="Rounded Rectangle 4"/>
@@ -4818,8 +4646,8 @@
         </p:nvSpPr>
         <p:spPr>
           <a:xfrm>
-            <a:off x="3474720" y="1645920"/>
-            <a:ext cx="2499055" cy="4663440"/>
+            <a:off x="5120640" y="1463040"/>
+            <a:ext cx="6309360" cy="4846320"/>
           </a:xfrm>
           <a:prstGeom prst="roundRect">
             <a:avLst/>
@@ -4863,8 +4691,8 @@
         </p:nvSpPr>
         <p:spPr>
           <a:xfrm>
-            <a:off x="3657600" y="1920240"/>
-            <a:ext cx="2133295" cy="4114800"/>
+            <a:off x="5394960" y="1645920"/>
+            <a:ext cx="5760720" cy="4480560"/>
           </a:xfrm>
           <a:prstGeom prst="rect">
             <a:avLst/>
@@ -4877,265 +4705,110 @@
           </a:bodyPr>
           <a:lstStyle/>
           <a:p>
-            <a:pPr algn="ctr">
+            <a:pPr>
+              <a:spcAft>
+                <a:spcPts val="800"/>
+              </a:spcAft>
+              <a:defRPr sz="1500" b="1">
+                <a:solidFill>
+                  <a:srgbClr val="FFB612"/>
+                </a:solidFill>
+              </a:defRPr>
+            </a:pPr>
+            <a:r>
+              <a:t>⚽ Gestión del Minuto del Primer Gol</a:t>
+            </a:r>
+          </a:p>
+          <a:p>
+            <a:pPr>
               <a:spcAft>
                 <a:spcPts val="400"/>
               </a:spcAft>
-              <a:defRPr sz="3600" b="1">
+            </a:pPr>
+            <a:r>
+              <a:rPr b="1" sz="1050">
+                <a:solidFill>
+                  <a:srgbClr val="FFB612"/>
+                </a:solidFill>
+              </a:rPr>
+              <a:t>1. Creación en Fútbol (Liga MX / Champions): </a:t>
+            </a:r>
+            <a:r>
+              <a:rPr sz="1050">
+                <a:solidFill>
+                  <a:srgbClr val="FFFFFF"/>
+                </a:solidFill>
+              </a:rPr>
+              <a:t>Buscar partido en ESPN y pulsar «Crear Juego Minuto del Gol». Genera automáticamente los bloques: 0-15', 16-30', 31-45', 46-60', 61-75', 76-90' y Sin Goles.</a:t>
+            </a:r>
+          </a:p>
+          <a:p>
+            <a:pPr>
+              <a:spcAft>
+                <a:spcPts val="400"/>
+              </a:spcAft>
+            </a:pPr>
+            <a:r>
+              <a:rPr b="1" sz="1050">
                 <a:solidFill>
                   <a:srgbClr val="00E676"/>
                 </a:solidFill>
-              </a:defRPr>
-            </a:pPr>
-            <a:r>
-              <a:t>+22%</a:t>
-            </a:r>
-          </a:p>
-          <a:p>
-            <a:pPr algn="ctr">
-              <a:spcAft>
-                <a:spcPts val="1400"/>
-              </a:spcAft>
-              <a:defRPr sz="1100" b="1">
-                <a:solidFill>
-                  <a:srgbClr val="FFB612"/>
-                </a:solidFill>
-              </a:defRPr>
-            </a:pPr>
-            <a:r>
-              <a:t>TICKET PROMEDIO (AOV)</a:t>
-            </a:r>
-          </a:p>
-          <a:p>
-            <a:pPr algn="ctr">
-              <a:defRPr sz="1150">
-                <a:solidFill>
-                  <a:srgbClr val="94A3B8"/>
-                </a:solidFill>
-              </a:defRPr>
-            </a:pPr>
-            <a:r>
-              <a:t>El ambiente competitivo estimula pedidos repetidos de cerveza y botanas.</a:t>
-            </a:r>
-          </a:p>
-        </p:txBody>
-      </p:sp>
-      <p:sp>
-        <p:nvSpPr>
-          <p:cNvPr id="7" name="Rounded Rectangle 6"/>
-          <p:cNvSpPr/>
-          <p:nvPr/>
-        </p:nvSpPr>
-        <p:spPr>
-          <a:xfrm>
-            <a:off x="6217920" y="1645920"/>
-            <a:ext cx="2499055" cy="4663440"/>
-          </a:xfrm>
-          <a:prstGeom prst="roundRect">
-            <a:avLst/>
-          </a:prstGeom>
-          <a:solidFill>
-            <a:srgbClr val="141A26"/>
-          </a:solidFill>
-          <a:ln w="19050">
-            <a:solidFill>
-              <a:srgbClr val="283246"/>
-            </a:solidFill>
-          </a:ln>
-        </p:spPr>
-        <p:style>
-          <a:lnRef idx="1">
-            <a:schemeClr val="accent1"/>
-          </a:lnRef>
-          <a:fillRef idx="3">
-            <a:schemeClr val="accent1"/>
-          </a:fillRef>
-          <a:effectRef idx="2">
-            <a:schemeClr val="accent1"/>
-          </a:effectRef>
-          <a:fontRef idx="minor">
-            <a:schemeClr val="lt1"/>
-          </a:fontRef>
-        </p:style>
-        <p:txBody>
-          <a:bodyPr rtlCol="0" anchor="ctr"/>
-          <a:lstStyle/>
-          <a:p>
-            <a:pPr algn="ctr"/>
-          </a:p>
-        </p:txBody>
-      </p:sp>
-      <p:sp>
-        <p:nvSpPr>
-          <p:cNvPr id="8" name="TextBox 7"/>
-          <p:cNvSpPr txBox="1"/>
-          <p:nvPr/>
-        </p:nvSpPr>
-        <p:spPr>
-          <a:xfrm>
-            <a:off x="6400800" y="1920240"/>
-            <a:ext cx="2133295" cy="4114800"/>
-          </a:xfrm>
-          <a:prstGeom prst="rect">
-            <a:avLst/>
-          </a:prstGeom>
-          <a:noFill/>
-        </p:spPr>
-        <p:txBody>
-          <a:bodyPr wrap="square">
-            <a:spAutoFit/>
-          </a:bodyPr>
-          <a:lstStyle/>
-          <a:p>
-            <a:pPr algn="ctr">
+              </a:rPr>
+              <a:t>2. Detección en Vivo con ESPN: </a:t>
+            </a:r>
+            <a:r>
+              <a:rPr sz="1050">
+                <a:solidFill>
+                  <a:srgbClr val="FFFFFF"/>
+                </a:solidFill>
+              </a:rPr>
+              <a:t>Botón «⚡ Detectar 1er Gol en Vivo (ESPN)». La app extrae minuto y segundo oficial de la anotación automáticamente.</a:t>
+            </a:r>
+          </a:p>
+          <a:p>
+            <a:pPr>
               <a:spcAft>
                 <a:spcPts val="400"/>
               </a:spcAft>
-              <a:defRPr sz="3600" b="1">
+            </a:pPr>
+            <a:r>
+              <a:rPr b="1" sz="1050">
                 <a:solidFill>
                   <a:srgbClr val="FF5722"/>
                 </a:solidFill>
-              </a:defRPr>
-            </a:pPr>
-            <a:r>
-              <a:t>3x</a:t>
-            </a:r>
-          </a:p>
-          <a:p>
-            <a:pPr algn="ctr">
-              <a:spcAft>
-                <a:spcPts val="1400"/>
-              </a:spcAft>
-              <a:defRPr sz="1100" b="1">
-                <a:solidFill>
-                  <a:srgbClr val="FFB612"/>
-                </a:solidFill>
-              </a:defRPr>
-            </a:pPr>
-            <a:r>
-              <a:t>RETENCIÓN Y LEALTAD</a:t>
-            </a:r>
-          </a:p>
-          <a:p>
-            <a:pPr algn="ctr">
-              <a:defRPr sz="1150">
-                <a:solidFill>
-                  <a:srgbClr val="94A3B8"/>
-                </a:solidFill>
-              </a:defRPr>
-            </a:pPr>
-            <a:r>
-              <a:t>El comensal regresa jornada tras jornada para defender su posición en la tabla.</a:t>
-            </a:r>
-          </a:p>
-        </p:txBody>
-      </p:sp>
-      <p:sp>
-        <p:nvSpPr>
-          <p:cNvPr id="9" name="Rounded Rectangle 8"/>
-          <p:cNvSpPr/>
-          <p:nvPr/>
-        </p:nvSpPr>
-        <p:spPr>
-          <a:xfrm>
-            <a:off x="8961120" y="1645920"/>
-            <a:ext cx="2499055" cy="4663440"/>
-          </a:xfrm>
-          <a:prstGeom prst="roundRect">
-            <a:avLst/>
-          </a:prstGeom>
-          <a:solidFill>
-            <a:srgbClr val="141A26"/>
-          </a:solidFill>
-          <a:ln w="19050">
-            <a:solidFill>
-              <a:srgbClr val="283246"/>
-            </a:solidFill>
-          </a:ln>
-        </p:spPr>
-        <p:style>
-          <a:lnRef idx="1">
-            <a:schemeClr val="accent1"/>
-          </a:lnRef>
-          <a:fillRef idx="3">
-            <a:schemeClr val="accent1"/>
-          </a:fillRef>
-          <a:effectRef idx="2">
-            <a:schemeClr val="accent1"/>
-          </a:effectRef>
-          <a:fontRef idx="minor">
-            <a:schemeClr val="lt1"/>
-          </a:fontRef>
-        </p:style>
-        <p:txBody>
-          <a:bodyPr rtlCol="0" anchor="ctr"/>
-          <a:lstStyle/>
-          <a:p>
-            <a:pPr algn="ctr"/>
-          </a:p>
-        </p:txBody>
-      </p:sp>
-      <p:sp>
-        <p:nvSpPr>
-          <p:cNvPr id="10" name="TextBox 9"/>
-          <p:cNvSpPr txBox="1"/>
-          <p:nvPr/>
-        </p:nvSpPr>
-        <p:spPr>
-          <a:xfrm>
-            <a:off x="9144000" y="1920240"/>
-            <a:ext cx="2133295" cy="4114800"/>
-          </a:xfrm>
-          <a:prstGeom prst="rect">
-            <a:avLst/>
-          </a:prstGeom>
-          <a:noFill/>
-        </p:spPr>
-        <p:txBody>
-          <a:bodyPr wrap="square">
-            <a:spAutoFit/>
-          </a:bodyPr>
-          <a:lstStyle/>
-          <a:p>
-            <a:pPr algn="ctr">
+              </a:rPr>
+              <a:t>3. Regla «El Más Cercano Sin Pasarse»: </a:t>
+            </a:r>
+            <a:r>
+              <a:rPr sz="1050">
+                <a:solidFill>
+                  <a:srgbClr val="FFFFFF"/>
+                </a:solidFill>
+              </a:rPr>
+              <a:t>Si el gol cae al minuto 18, gana el bloque 16-30'. Si estaba libre, gana el bloque anterior más cercano (los bloques posteriores quedan descalificados).</a:t>
+            </a:r>
+          </a:p>
+          <a:p>
+            <a:pPr>
               <a:spcAft>
                 <a:spcPts val="400"/>
               </a:spcAft>
-              <a:defRPr sz="3600" b="1">
-                <a:solidFill>
-                  <a:srgbClr val="FFFFFF"/>
-                </a:solidFill>
-              </a:defRPr>
-            </a:pPr>
-            <a:r>
-              <a:t>$0</a:t>
-            </a:r>
-          </a:p>
-          <a:p>
-            <a:pPr algn="ctr">
-              <a:spcAft>
-                <a:spcPts val="1400"/>
-              </a:spcAft>
-              <a:defRPr sz="1100" b="1">
-                <a:solidFill>
-                  <a:srgbClr val="FFB612"/>
-                </a:solidFill>
-              </a:defRPr>
-            </a:pPr>
-            <a:r>
-              <a:t>COSTO DE PAPELERÍA</a:t>
-            </a:r>
-          </a:p>
-          <a:p>
-            <a:pPr algn="ctr">
-              <a:defRPr sz="1150">
-                <a:solidFill>
-                  <a:srgbClr val="94A3B8"/>
-                </a:solidFill>
-              </a:defRPr>
-            </a:pPr>
-            <a:r>
-              <a:t>Eliminación total de impresiones, papeletas extraviadas y errores de conteo.</a:t>
+            </a:pPr>
+            <a:r>
+              <a:rPr b="1" sz="1050">
+                <a:solidFill>
+                  <a:srgbClr val="3498DB"/>
+                </a:solidFill>
+              </a:rPr>
+              <a:t>4. Tiempos Extras y Penales: </a:t>
+            </a:r>
+            <a:r>
+              <a:rPr sz="1050">
+                <a:solidFill>
+                  <a:srgbClr val="FFFFFF"/>
+                </a:solidFill>
+              </a:rPr>
+              <a:t>Módulos dedicados para activar prórroga (91-105' y 106-120') o tanda de penales con sorteo automático de los 10 tiros.</a:t>
             </a:r>
           </a:p>
         </p:txBody>
@@ -5174,7 +4847,7 @@
         </p:nvSpPr>
         <p:spPr>
           <a:xfrm>
-            <a:off x="731520" y="365760"/>
+            <a:off x="731520" y="320040"/>
             <a:ext cx="10698480" cy="1005840"/>
           </a:xfrm>
           <a:prstGeom prst="rect">
@@ -5199,19 +4872,19 @@
               </a:defRPr>
             </a:pPr>
             <a:r>
-              <a:t>PRÓXIMOS PASOS</a:t>
-            </a:r>
-          </a:p>
-          <a:p>
-            <a:pPr>
-              <a:defRPr sz="2300" b="1">
-                <a:solidFill>
-                  <a:srgbClr val="FFFFFF"/>
-                </a:solidFill>
-              </a:defRPr>
-            </a:pPr>
-            <a:r>
-              <a:t>Plan de Acción en Juriquilla y Conclusión</a:t>
+              <a:t>MANUAL OPERATIVO • JUEGO 4: FIRST STRIKER (JUGADOR)</a:t>
+            </a:r>
+          </a:p>
+          <a:p>
+            <a:pPr>
+              <a:defRPr sz="2100" b="1">
+                <a:solidFill>
+                  <a:srgbClr val="FFFFFF"/>
+                </a:solidFill>
+              </a:defRPr>
+            </a:pPr>
+            <a:r>
+              <a:t>Manual: First Striker Wins — Experiencia del Cliente (Premio Rápido)</a:t>
             </a:r>
           </a:p>
         </p:txBody>
@@ -5224,8 +4897,8 @@
         </p:nvSpPr>
         <p:spPr>
           <a:xfrm>
-            <a:off x="731520" y="1645920"/>
-            <a:ext cx="10728655" cy="4663440"/>
+            <a:off x="731520" y="1463040"/>
+            <a:ext cx="10728655" cy="4846320"/>
           </a:xfrm>
           <a:prstGeom prst="roundRect">
             <a:avLst/>
@@ -5269,8 +4942,8 @@
         </p:nvSpPr>
         <p:spPr>
           <a:xfrm>
-            <a:off x="1097280" y="1828800"/>
-            <a:ext cx="9966960" cy="4206240"/>
+            <a:off x="1005840" y="1645920"/>
+            <a:ext cx="10149840" cy="4480560"/>
           </a:xfrm>
           <a:prstGeom prst="rect">
             <a:avLst/>
@@ -5285,121 +4958,1457 @@
           <a:p>
             <a:pPr>
               <a:spcAft>
+                <a:spcPts val="1000"/>
+              </a:spcAft>
+              <a:defRPr sz="1600" b="1">
+                <a:solidFill>
+                  <a:srgbClr val="FFB612"/>
+                </a:solidFill>
+              </a:defRPr>
+            </a:pPr>
+            <a:r>
+              <a:t>⏱️ Adrenalina Desde el Segundo 1 de Juego</a:t>
+            </a:r>
+          </a:p>
+          <a:p>
+            <a:pPr>
+              <a:spcAft>
+                <a:spcPts val="400"/>
+              </a:spcAft>
+            </a:pPr>
+            <a:r>
+              <a:rPr b="1" sz="1100">
+                <a:solidFill>
+                  <a:srgbClr val="FFB612"/>
+                </a:solidFill>
+              </a:rPr>
+              <a:t>1. Cero Espera Aburrida: </a:t>
+            </a:r>
+            <a:r>
+              <a:rPr sz="1100">
+                <a:solidFill>
+                  <a:srgbClr val="FFFFFF"/>
+                </a:solidFill>
+              </a:rPr>
+              <a:t>A diferencia de las quinielas donde hay que esperar 90 minutos, en First Striker la emoción arranca con el silbatazo inicial.</a:t>
+            </a:r>
+          </a:p>
+          <a:p>
+            <a:pPr>
+              <a:spcAft>
+                <a:spcPts val="400"/>
+              </a:spcAft>
+            </a:pPr>
+            <a:r>
+              <a:rPr b="1" sz="1100">
+                <a:solidFill>
+                  <a:srgbClr val="FFFFFF"/>
+                </a:solidFill>
+              </a:rPr>
+              <a:t>2. Selección en Pantalla: </a:t>
+            </a:r>
+            <a:r>
+              <a:rPr sz="1100">
+                <a:solidFill>
+                  <a:srgbClr val="94A3B8"/>
+                </a:solidFill>
+              </a:rPr>
+              <a:t>El cliente toca el bloque de 15 minutos en el que cree que se abrirá el marcador.</a:t>
+            </a:r>
+          </a:p>
+          <a:p>
+            <a:pPr>
+              <a:spcAft>
+                <a:spcPts val="400"/>
+              </a:spcAft>
+            </a:pPr>
+            <a:r>
+              <a:rPr b="1" sz="1100">
+                <a:solidFill>
+                  <a:srgbClr val="00E676"/>
+                </a:solidFill>
+              </a:rPr>
+              <a:t>3. Premio Inmediato en Mesa: </a:t>
+            </a:r>
+            <a:r>
+              <a:rPr sz="1100">
+                <a:solidFill>
+                  <a:srgbClr val="FFFFFF"/>
+                </a:solidFill>
+              </a:rPr>
+              <a:t>Si cae gol en el minuto 8, la mesa que tenía el bloque 0-15' festeja de inmediato. El mesero les entrega su premio (ej. ronda de shots o botana) mientras el partido apenas va comenzando.</a:t>
+            </a:r>
+          </a:p>
+          <a:p>
+            <a:pPr>
+              <a:spcAft>
+                <a:spcPts val="400"/>
+              </a:spcAft>
+            </a:pPr>
+            <a:r>
+              <a:rPr b="1" sz="1100">
+                <a:solidFill>
+                  <a:srgbClr val="FF5722"/>
+                </a:solidFill>
+              </a:rPr>
+              <a:t>4. Consumo en Cascada: </a:t>
+            </a:r>
+            <a:r>
+              <a:rPr sz="1100">
+                <a:solidFill>
+                  <a:srgbClr val="FFFFFF"/>
+                </a:solidFill>
+              </a:rPr>
+              <a:t>Ganar temprano pone de excelente humor a la mesa, detonando pedidos de cerveza y comida adicionales durante el resto del encuentro.</a:t>
+            </a:r>
+          </a:p>
+        </p:txBody>
+      </p:sp>
+    </p:spTree>
+  </p:cSld>
+  <p:clrMapOvr>
+    <a:masterClrMapping/>
+  </p:clrMapOvr>
+</p:sld>
+</file>
+
+<file path=ppt/slides/slide16.xml><?xml version="1.0" encoding="utf-8"?>
+<p:sld xmlns:a="http://schemas.openxmlformats.org/drawingml/2006/main" xmlns:p="http://schemas.openxmlformats.org/presentationml/2006/main" xmlns:r="http://schemas.openxmlformats.org/officeDocument/2006/relationships">
+  <p:cSld>
+    <p:bg>
+      <p:bgPr>
+        <a:solidFill>
+          <a:srgbClr val="0B0F17"/>
+        </a:solidFill>
+        <a:effectLst/>
+      </p:bgPr>
+    </p:bg>
+    <p:spTree>
+      <p:nvGrpSpPr>
+        <p:cNvPr id="1" name=""/>
+        <p:cNvGrpSpPr/>
+        <p:nvPr/>
+      </p:nvGrpSpPr>
+      <p:grpSpPr/>
+      <p:sp>
+        <p:nvSpPr>
+          <p:cNvPr id="2" name="TextBox 1"/>
+          <p:cNvSpPr txBox="1"/>
+          <p:nvPr/>
+        </p:nvSpPr>
+        <p:spPr>
+          <a:xfrm>
+            <a:off x="731520" y="320040"/>
+            <a:ext cx="10698480" cy="1005840"/>
+          </a:xfrm>
+          <a:prstGeom prst="rect">
+            <a:avLst/>
+          </a:prstGeom>
+          <a:noFill/>
+        </p:spPr>
+        <p:txBody>
+          <a:bodyPr wrap="square" lIns="0" tIns="0" rIns="0" bIns="0">
+            <a:spAutoFit/>
+          </a:bodyPr>
+          <a:lstStyle/>
+          <a:p>
+            <a:pPr>
+              <a:spcAft>
                 <a:spcPts val="200"/>
               </a:spcAft>
-              <a:defRPr sz="1400" b="1">
+              <a:defRPr sz="1000" b="1">
                 <a:solidFill>
                   <a:srgbClr val="FFB612"/>
                 </a:solidFill>
               </a:defRPr>
             </a:pPr>
             <a:r>
-              <a:t>Paso 1: Colocación de Material POP en Mesas (Día 1)</a:t>
-            </a:r>
-          </a:p>
+              <a:t>MANUAL OPERATIVO • JUEGO 5: TRIVIA EN TV (ADMIN)</a:t>
+            </a:r>
+          </a:p>
+          <a:p>
+            <a:pPr>
+              <a:defRPr sz="2100" b="1">
+                <a:solidFill>
+                  <a:srgbClr val="FFFFFF"/>
+                </a:solidFill>
+              </a:defRPr>
+            </a:pPr>
+            <a:r>
+              <a:t>Manual: Trivia Deportiva en TV con IA — Modo Bar Host (admin.html)</a:t>
+            </a:r>
+          </a:p>
+        </p:txBody>
+      </p:sp>
+      <p:sp>
+        <p:nvSpPr>
+          <p:cNvPr id="3" name="Rounded Rectangle 2"/>
+          <p:cNvSpPr/>
+          <p:nvPr/>
+        </p:nvSpPr>
+        <p:spPr>
+          <a:xfrm>
+            <a:off x="731520" y="1463040"/>
+            <a:ext cx="10728655" cy="4846320"/>
+          </a:xfrm>
+          <a:prstGeom prst="roundRect">
+            <a:avLst/>
+          </a:prstGeom>
+          <a:solidFill>
+            <a:srgbClr val="141A26"/>
+          </a:solidFill>
+          <a:ln w="19050">
+            <a:solidFill>
+              <a:srgbClr val="283246"/>
+            </a:solidFill>
+          </a:ln>
+        </p:spPr>
+        <p:style>
+          <a:lnRef idx="1">
+            <a:schemeClr val="accent1"/>
+          </a:lnRef>
+          <a:fillRef idx="3">
+            <a:schemeClr val="accent1"/>
+          </a:fillRef>
+          <a:effectRef idx="2">
+            <a:schemeClr val="accent1"/>
+          </a:effectRef>
+          <a:fontRef idx="minor">
+            <a:schemeClr val="lt1"/>
+          </a:fontRef>
+        </p:style>
+        <p:txBody>
+          <a:bodyPr rtlCol="0" anchor="ctr"/>
+          <a:lstStyle/>
+          <a:p>
+            <a:pPr algn="ctr"/>
+          </a:p>
+        </p:txBody>
+      </p:sp>
+      <p:sp>
+        <p:nvSpPr>
+          <p:cNvPr id="4" name="TextBox 3"/>
+          <p:cNvSpPr txBox="1"/>
+          <p:nvPr/>
+        </p:nvSpPr>
+        <p:spPr>
+          <a:xfrm>
+            <a:off x="1005840" y="1645920"/>
+            <a:ext cx="10149840" cy="4480560"/>
+          </a:xfrm>
+          <a:prstGeom prst="rect">
+            <a:avLst/>
+          </a:prstGeom>
+          <a:noFill/>
+        </p:spPr>
+        <p:txBody>
+          <a:bodyPr wrap="square">
+            <a:spAutoFit/>
+          </a:bodyPr>
+          <a:lstStyle/>
           <a:p>
             <a:pPr>
               <a:spcAft>
                 <a:spcPts val="1000"/>
               </a:spcAft>
-              <a:defRPr sz="1150">
-                <a:solidFill>
-                  <a:srgbClr val="FFFFFF"/>
-                </a:solidFill>
-              </a:defRPr>
-            </a:pPr>
-            <a:r>
-              <a:t>Acrílicos de mesa con código QR directo y bienvenida en pantallas del restaurante.</a:t>
-            </a:r>
-          </a:p>
+              <a:defRPr sz="1600" b="1">
+                <a:solidFill>
+                  <a:srgbClr val="FFB612"/>
+                </a:solidFill>
+              </a:defRPr>
+            </a:pPr>
+            <a:r>
+              <a:t>🧠 Creación en 10s con Gemini IA y Control de Pantallas</a:t>
+            </a:r>
+          </a:p>
+          <a:p>
+            <a:pPr>
+              <a:spcAft>
+                <a:spcPts val="400"/>
+              </a:spcAft>
+            </a:pPr>
+            <a:r>
+              <a:rPr b="1" sz="1100">
+                <a:solidFill>
+                  <a:srgbClr val="FFB612"/>
+                </a:solidFill>
+              </a:rPr>
+              <a:t>1. Generación con IA en 10 Segundos: </a:t>
+            </a:r>
+            <a:r>
+              <a:rPr sz="1100">
+                <a:solidFill>
+                  <a:srgbClr val="FFFFFF"/>
+                </a:solidFill>
+              </a:rPr>
+              <a:t>Clic en «✨ Crear Trivia con IA». El gerente escribe el tema (ej. «Super Bowl e Historia de la NFL» o «Clásico Chivas vs América»). Gemini IA genera 5 a 10 preguntas con respuestas verificadas.</a:t>
+            </a:r>
+          </a:p>
+          <a:p>
+            <a:pPr>
+              <a:spcAft>
+                <a:spcPts val="400"/>
+              </a:spcAft>
+            </a:pPr>
+            <a:r>
+              <a:rPr b="1" sz="1100">
+                <a:solidFill>
+                  <a:srgbClr val="00E676"/>
+                </a:solidFill>
+              </a:rPr>
+              <a:t>2. Proyección en Pantallas de TV: </a:t>
+            </a:r>
+            <a:r>
+              <a:rPr sz="1100">
+                <a:solidFill>
+                  <a:srgbClr val="FFFFFF"/>
+                </a:solidFill>
+              </a:rPr>
+              <a:t>Clic en «🖥️ Abrir Pantalla de TV». Se abre la interfaz de televisión con un código PIN visible y un código QR gigante para que todo el restaurante escanee desde sus mesas.</a:t>
+            </a:r>
+          </a:p>
+          <a:p>
+            <a:pPr>
+              <a:spcAft>
+                <a:spcPts val="400"/>
+              </a:spcAft>
+            </a:pPr>
+            <a:r>
+              <a:rPr b="1" sz="1100">
+                <a:solidFill>
+                  <a:srgbClr val="FF5722"/>
+                </a:solidFill>
+              </a:rPr>
+              <a:t>3. Control Remoto del Gerente: </a:t>
+            </a:r>
+            <a:r>
+              <a:rPr sz="1100">
+                <a:solidFill>
+                  <a:srgbClr val="FFFFFF"/>
+                </a:solidFill>
+              </a:rPr>
+              <a:t>Botones de host: «▶️ Empezar Trivia Automática (10s)», «⏱️ Revelar Respuesta», «📊 Ver Posiciones» y «⏩ Siguiente Pregunta».</a:t>
+            </a:r>
+          </a:p>
+          <a:p>
+            <a:pPr>
+              <a:spcAft>
+                <a:spcPts val="400"/>
+              </a:spcAft>
+            </a:pPr>
+            <a:r>
+              <a:rPr b="1" sz="1100">
+                <a:solidFill>
+                  <a:srgbClr val="3498DB"/>
+                </a:solidFill>
+              </a:rPr>
+              <a:t>4. Podio Final en TV: </a:t>
+            </a:r>
+            <a:r>
+              <a:rPr sz="1100">
+                <a:solidFill>
+                  <a:srgbClr val="FFFFFF"/>
+                </a:solidFill>
+              </a:rPr>
+              <a:t>Al terminar, pulsa «🏆 Revelar Podio Final». Las pantallas del bar se llenan de fuegos artificiales y proyectan a los 3 ganadores ante todo el restaurante.</a:t>
+            </a:r>
+          </a:p>
+        </p:txBody>
+      </p:sp>
+    </p:spTree>
+  </p:cSld>
+  <p:clrMapOvr>
+    <a:masterClrMapping/>
+  </p:clrMapOvr>
+</p:sld>
+</file>
+
+<file path=ppt/slides/slide17.xml><?xml version="1.0" encoding="utf-8"?>
+<p:sld xmlns:a="http://schemas.openxmlformats.org/drawingml/2006/main" xmlns:p="http://schemas.openxmlformats.org/presentationml/2006/main" xmlns:r="http://schemas.openxmlformats.org/officeDocument/2006/relationships">
+  <p:cSld>
+    <p:bg>
+      <p:bgPr>
+        <a:solidFill>
+          <a:srgbClr val="0B0F17"/>
+        </a:solidFill>
+        <a:effectLst/>
+      </p:bgPr>
+    </p:bg>
+    <p:spTree>
+      <p:nvGrpSpPr>
+        <p:cNvPr id="1" name=""/>
+        <p:cNvGrpSpPr/>
+        <p:nvPr/>
+      </p:nvGrpSpPr>
+      <p:grpSpPr/>
+      <p:sp>
+        <p:nvSpPr>
+          <p:cNvPr id="2" name="TextBox 1"/>
+          <p:cNvSpPr txBox="1"/>
+          <p:nvPr/>
+        </p:nvSpPr>
+        <p:spPr>
+          <a:xfrm>
+            <a:off x="731520" y="320040"/>
+            <a:ext cx="10698480" cy="1005840"/>
+          </a:xfrm>
+          <a:prstGeom prst="rect">
+            <a:avLst/>
+          </a:prstGeom>
+          <a:noFill/>
+        </p:spPr>
+        <p:txBody>
+          <a:bodyPr wrap="square" lIns="0" tIns="0" rIns="0" bIns="0">
+            <a:spAutoFit/>
+          </a:bodyPr>
+          <a:lstStyle/>
           <a:p>
             <a:pPr>
               <a:spcAft>
                 <a:spcPts val="200"/>
               </a:spcAft>
-              <a:defRPr sz="1400" b="1">
+              <a:defRPr sz="1000" b="1">
                 <a:solidFill>
                   <a:srgbClr val="FFB612"/>
                 </a:solidFill>
               </a:defRPr>
             </a:pPr>
             <a:r>
-              <a:t>Paso 2: Capacitación Express de 15 Minutos (Día 2)</a:t>
-            </a:r>
-          </a:p>
+              <a:t>MANUAL OPERATIVO • JUEGO 5: TRIVIA EN TV (JUGADOR)</a:t>
+            </a:r>
+          </a:p>
+          <a:p>
+            <a:pPr>
+              <a:defRPr sz="2100" b="1">
+                <a:solidFill>
+                  <a:srgbClr val="FFFFFF"/>
+                </a:solidFill>
+              </a:defRPr>
+            </a:pPr>
+            <a:r>
+              <a:t>Manual: Trivia en TV — Experiencia del Cliente en Medio Tiempo</a:t>
+            </a:r>
+          </a:p>
+        </p:txBody>
+      </p:sp>
+      <p:sp>
+        <p:nvSpPr>
+          <p:cNvPr id="3" name="Rounded Rectangle 2"/>
+          <p:cNvSpPr/>
+          <p:nvPr/>
+        </p:nvSpPr>
+        <p:spPr>
+          <a:xfrm>
+            <a:off x="731520" y="1463040"/>
+            <a:ext cx="4114800" cy="4846320"/>
+          </a:xfrm>
+          <a:prstGeom prst="roundRect">
+            <a:avLst/>
+          </a:prstGeom>
+          <a:solidFill>
+            <a:srgbClr val="141A26"/>
+          </a:solidFill>
+          <a:ln w="19050">
+            <a:solidFill>
+              <a:srgbClr val="283246"/>
+            </a:solidFill>
+          </a:ln>
+        </p:spPr>
+        <p:style>
+          <a:lnRef idx="1">
+            <a:schemeClr val="accent1"/>
+          </a:lnRef>
+          <a:fillRef idx="3">
+            <a:schemeClr val="accent1"/>
+          </a:fillRef>
+          <a:effectRef idx="2">
+            <a:schemeClr val="accent1"/>
+          </a:effectRef>
+          <a:fontRef idx="minor">
+            <a:schemeClr val="lt1"/>
+          </a:fontRef>
+        </p:style>
+        <p:txBody>
+          <a:bodyPr rtlCol="0" anchor="ctr"/>
+          <a:lstStyle/>
+          <a:p>
+            <a:pPr algn="ctr"/>
+          </a:p>
+        </p:txBody>
+      </p:sp>
+      <p:pic>
+        <p:nvPicPr>
+          <p:cNvPr id="4" name="Picture 3" descr="first_striker_board.png"/>
+          <p:cNvPicPr>
+            <a:picLocks noChangeAspect="1"/>
+          </p:cNvPicPr>
+          <p:nvPr/>
+        </p:nvPicPr>
+        <p:blipFill>
+          <a:blip r:embed="rId2"/>
+          <a:stretch>
+            <a:fillRect/>
+          </a:stretch>
+        </p:blipFill>
+        <p:spPr>
+          <a:xfrm>
+            <a:off x="914400" y="1645920"/>
+            <a:ext cx="3749039" cy="1977032"/>
+          </a:xfrm>
+          <a:prstGeom prst="rect">
+            <a:avLst/>
+          </a:prstGeom>
+        </p:spPr>
+      </p:pic>
+      <p:sp>
+        <p:nvSpPr>
+          <p:cNvPr id="5" name="Rounded Rectangle 4"/>
+          <p:cNvSpPr/>
+          <p:nvPr/>
+        </p:nvSpPr>
+        <p:spPr>
+          <a:xfrm>
+            <a:off x="5120640" y="1463040"/>
+            <a:ext cx="6309360" cy="4846320"/>
+          </a:xfrm>
+          <a:prstGeom prst="roundRect">
+            <a:avLst/>
+          </a:prstGeom>
+          <a:solidFill>
+            <a:srgbClr val="141A26"/>
+          </a:solidFill>
+          <a:ln w="19050">
+            <a:solidFill>
+              <a:srgbClr val="283246"/>
+            </a:solidFill>
+          </a:ln>
+        </p:spPr>
+        <p:style>
+          <a:lnRef idx="1">
+            <a:schemeClr val="accent1"/>
+          </a:lnRef>
+          <a:fillRef idx="3">
+            <a:schemeClr val="accent1"/>
+          </a:fillRef>
+          <a:effectRef idx="2">
+            <a:schemeClr val="accent1"/>
+          </a:effectRef>
+          <a:fontRef idx="minor">
+            <a:schemeClr val="lt1"/>
+          </a:fontRef>
+        </p:style>
+        <p:txBody>
+          <a:bodyPr rtlCol="0" anchor="ctr"/>
+          <a:lstStyle/>
+          <a:p>
+            <a:pPr algn="ctr"/>
+          </a:p>
+        </p:txBody>
+      </p:sp>
+      <p:sp>
+        <p:nvSpPr>
+          <p:cNvPr id="6" name="TextBox 5"/>
+          <p:cNvSpPr txBox="1"/>
+          <p:nvPr/>
+        </p:nvSpPr>
+        <p:spPr>
+          <a:xfrm>
+            <a:off x="5394960" y="1645920"/>
+            <a:ext cx="5760720" cy="4480560"/>
+          </a:xfrm>
+          <a:prstGeom prst="rect">
+            <a:avLst/>
+          </a:prstGeom>
+          <a:noFill/>
+        </p:spPr>
+        <p:txBody>
+          <a:bodyPr wrap="square">
+            <a:spAutoFit/>
+          </a:bodyPr>
+          <a:lstStyle/>
+          <a:p>
+            <a:pPr>
+              <a:spcAft>
+                <a:spcPts val="800"/>
+              </a:spcAft>
+              <a:defRPr sz="1500" b="1">
+                <a:solidFill>
+                  <a:srgbClr val="FFB612"/>
+                </a:solidFill>
+              </a:defRPr>
+            </a:pPr>
+            <a:r>
+              <a:t>🎉 Dinamizar el Medio Tiempo y Eliminar Tiempos Muertos</a:t>
+            </a:r>
+          </a:p>
+          <a:p>
+            <a:pPr>
+              <a:spcAft>
+                <a:spcPts val="400"/>
+              </a:spcAft>
+            </a:pPr>
+            <a:r>
+              <a:rPr b="1" sz="1050">
+                <a:solidFill>
+                  <a:srgbClr val="FFB612"/>
+                </a:solidFill>
+              </a:rPr>
+              <a:t>1. Conexión Instantánea con PIN: </a:t>
+            </a:r>
+            <a:r>
+              <a:rPr sz="1050">
+                <a:solidFill>
+                  <a:srgbClr val="FFFFFF"/>
+                </a:solidFill>
+              </a:rPr>
+              <a:t>El comensal escanea el QR de la tele o escribe el PIN en su celular para unirse a la sala en segundos.</a:t>
+            </a:r>
+          </a:p>
+          <a:p>
+            <a:pPr>
+              <a:spcAft>
+                <a:spcPts val="400"/>
+              </a:spcAft>
+            </a:pPr>
+            <a:r>
+              <a:rPr b="1" sz="1050">
+                <a:solidFill>
+                  <a:srgbClr val="FF5722"/>
+                </a:solidFill>
+              </a:rPr>
+              <a:t>2. Temporizador de 15 Segundos: </a:t>
+            </a:r>
+            <a:r>
+              <a:rPr sz="1050">
+                <a:solidFill>
+                  <a:srgbClr val="FFFFFF"/>
+                </a:solidFill>
+              </a:rPr>
+              <a:t>Cada pregunta aparece con cuenta regresiva y 4 botones de colores en los celulares.</a:t>
+            </a:r>
+          </a:p>
+          <a:p>
+            <a:pPr>
+              <a:spcAft>
+                <a:spcPts val="400"/>
+              </a:spcAft>
+            </a:pPr>
+            <a:r>
+              <a:rPr b="1" sz="1050">
+                <a:solidFill>
+                  <a:srgbClr val="00E676"/>
+                </a:solidFill>
+              </a:rPr>
+              <a:t>3. Velocidad y Precisión: </a:t>
+            </a:r>
+            <a:r>
+              <a:rPr sz="1050">
+                <a:solidFill>
+                  <a:srgbClr val="FFFFFF"/>
+                </a:solidFill>
+              </a:rPr>
+              <a:t>Quien responde bien y más rápido recibe puntos de bonificación por velocidad.</a:t>
+            </a:r>
+          </a:p>
+          <a:p>
+            <a:pPr>
+              <a:spcAft>
+                <a:spcPts val="400"/>
+              </a:spcAft>
+            </a:pPr>
+            <a:r>
+              <a:rPr b="1" sz="1050">
+                <a:solidFill>
+                  <a:srgbClr val="3498DB"/>
+                </a:solidFill>
+              </a:rPr>
+              <a:t>4. Retención del Comedor: </a:t>
+            </a:r>
+            <a:r>
+              <a:rPr sz="1050">
+                <a:solidFill>
+                  <a:srgbClr val="FFFFFF"/>
+                </a:solidFill>
+              </a:rPr>
+              <a:t>El medio tiempo suele provocar distracciones; la trivia mantiene al comensal pegado a la pantalla, pidiendo otra ronda de cervezas y botanas.</a:t>
+            </a:r>
+          </a:p>
+        </p:txBody>
+      </p:sp>
+    </p:spTree>
+  </p:cSld>
+  <p:clrMapOvr>
+    <a:masterClrMapping/>
+  </p:clrMapOvr>
+</p:sld>
+</file>
+
+<file path=ppt/slides/slide18.xml><?xml version="1.0" encoding="utf-8"?>
+<p:sld xmlns:a="http://schemas.openxmlformats.org/drawingml/2006/main" xmlns:p="http://schemas.openxmlformats.org/presentationml/2006/main" xmlns:r="http://schemas.openxmlformats.org/officeDocument/2006/relationships">
+  <p:cSld>
+    <p:bg>
+      <p:bgPr>
+        <a:solidFill>
+          <a:srgbClr val="0B0F17"/>
+        </a:solidFill>
+        <a:effectLst/>
+      </p:bgPr>
+    </p:bg>
+    <p:spTree>
+      <p:nvGrpSpPr>
+        <p:cNvPr id="1" name=""/>
+        <p:cNvGrpSpPr/>
+        <p:nvPr/>
+      </p:nvGrpSpPr>
+      <p:grpSpPr/>
+      <p:sp>
+        <p:nvSpPr>
+          <p:cNvPr id="2" name="TextBox 1"/>
+          <p:cNvSpPr txBox="1"/>
+          <p:nvPr/>
+        </p:nvSpPr>
+        <p:spPr>
+          <a:xfrm>
+            <a:off x="731520" y="320040"/>
+            <a:ext cx="10698480" cy="1005840"/>
+          </a:xfrm>
+          <a:prstGeom prst="rect">
+            <a:avLst/>
+          </a:prstGeom>
+          <a:noFill/>
+        </p:spPr>
+        <p:txBody>
+          <a:bodyPr wrap="square" lIns="0" tIns="0" rIns="0" bIns="0">
+            <a:spAutoFit/>
+          </a:bodyPr>
+          <a:lstStyle/>
+          <a:p>
+            <a:pPr>
+              <a:spcAft>
+                <a:spcPts val="200"/>
+              </a:spcAft>
+              <a:defRPr sz="1000" b="1">
+                <a:solidFill>
+                  <a:srgbClr val="FFB612"/>
+                </a:solidFill>
+              </a:defRPr>
+            </a:pPr>
+            <a:r>
+              <a:t>HERRAMIENTAS OPERATIVAS • BINGO &amp; MARKETING</a:t>
+            </a:r>
+          </a:p>
+          <a:p>
+            <a:pPr>
+              <a:defRPr sz="2100" b="1">
+                <a:solidFill>
+                  <a:srgbClr val="FFFFFF"/>
+                </a:solidFill>
+              </a:defRPr>
+            </a:pPr>
+            <a:r>
+              <a:t>Manual: GameDay Bingo y Generador de Material Promocional</a:t>
+            </a:r>
+          </a:p>
+        </p:txBody>
+      </p:sp>
+      <p:sp>
+        <p:nvSpPr>
+          <p:cNvPr id="3" name="Rounded Rectangle 2"/>
+          <p:cNvSpPr/>
+          <p:nvPr/>
+        </p:nvSpPr>
+        <p:spPr>
+          <a:xfrm>
+            <a:off x="731520" y="1463040"/>
+            <a:ext cx="5212080" cy="4846320"/>
+          </a:xfrm>
+          <a:prstGeom prst="roundRect">
+            <a:avLst/>
+          </a:prstGeom>
+          <a:solidFill>
+            <a:srgbClr val="141A26"/>
+          </a:solidFill>
+          <a:ln w="19050">
+            <a:solidFill>
+              <a:srgbClr val="FFB612"/>
+            </a:solidFill>
+          </a:ln>
+        </p:spPr>
+        <p:style>
+          <a:lnRef idx="1">
+            <a:schemeClr val="accent1"/>
+          </a:lnRef>
+          <a:fillRef idx="3">
+            <a:schemeClr val="accent1"/>
+          </a:fillRef>
+          <a:effectRef idx="2">
+            <a:schemeClr val="accent1"/>
+          </a:effectRef>
+          <a:fontRef idx="minor">
+            <a:schemeClr val="lt1"/>
+          </a:fontRef>
+        </p:style>
+        <p:txBody>
+          <a:bodyPr rtlCol="0" anchor="ctr"/>
+          <a:lstStyle/>
+          <a:p>
+            <a:pPr algn="ctr"/>
+          </a:p>
+        </p:txBody>
+      </p:sp>
+      <p:sp>
+        <p:nvSpPr>
+          <p:cNvPr id="4" name="TextBox 3"/>
+          <p:cNvSpPr txBox="1"/>
+          <p:nvPr/>
+        </p:nvSpPr>
+        <p:spPr>
+          <a:xfrm>
+            <a:off x="1005840" y="1645920"/>
+            <a:ext cx="4663440" cy="4480560"/>
+          </a:xfrm>
+          <a:prstGeom prst="rect">
+            <a:avLst/>
+          </a:prstGeom>
+          <a:noFill/>
+        </p:spPr>
+        <p:txBody>
+          <a:bodyPr wrap="square">
+            <a:spAutoFit/>
+          </a:bodyPr>
+          <a:lstStyle/>
           <a:p>
             <a:pPr>
               <a:spcAft>
                 <a:spcPts val="1000"/>
               </a:spcAft>
-              <a:defRPr sz="1150">
-                <a:solidFill>
-                  <a:srgbClr val="FFFFFF"/>
-                </a:solidFill>
-              </a:defRPr>
-            </a:pPr>
-            <a:r>
-              <a:t>Demostración rápida al equipo de meseros y capitanes: cómo invitar a la mesa y cómo verificar al ganador.</a:t>
-            </a:r>
-          </a:p>
+              <a:defRPr sz="1600" b="1">
+                <a:solidFill>
+                  <a:srgbClr val="FFB612"/>
+                </a:solidFill>
+              </a:defRPr>
+            </a:pPr>
+            <a:r>
+              <a:t>🎯 GameDay Bingo (Cartón 5x5)</a:t>
+            </a:r>
+          </a:p>
+          <a:p>
+            <a:pPr>
+              <a:spcAft>
+                <a:spcPts val="400"/>
+              </a:spcAft>
+            </a:pPr>
+            <a:r>
+              <a:rPr b="1" sz="1050">
+                <a:solidFill>
+                  <a:srgbClr val="FFB612"/>
+                </a:solidFill>
+              </a:rPr>
+              <a:t>• Eventos del Partido: </a:t>
+            </a:r>
+            <a:r>
+              <a:rPr sz="1050">
+                <a:solidFill>
+                  <a:srgbClr val="FFFFFF"/>
+                </a:solidFill>
+              </a:rPr>
+              <a:t>Cartones con sucesos reales: Touchdown largo, Gol de tiro libre, Tarjeta roja, Revisión de VAR, Gol de campo fallado.</a:t>
+            </a:r>
+          </a:p>
+          <a:p>
+            <a:pPr>
+              <a:spcAft>
+                <a:spcPts val="400"/>
+              </a:spcAft>
+            </a:pPr>
+            <a:r>
+              <a:rPr b="1" sz="1050">
+                <a:solidFill>
+                  <a:srgbClr val="FFFFFF"/>
+                </a:solidFill>
+              </a:rPr>
+              <a:t>• VAR Automático: </a:t>
+            </a:r>
+            <a:r>
+              <a:rPr sz="1050">
+                <a:solidFill>
+                  <a:srgbClr val="94A3B8"/>
+                </a:solidFill>
+              </a:rPr>
+              <a:t>Vinculación con ESPN para marcar automáticamente eventos oficiales del encuentro.</a:t>
+            </a:r>
+          </a:p>
+          <a:p>
+            <a:pPr>
+              <a:spcAft>
+                <a:spcPts val="400"/>
+              </a:spcAft>
+            </a:pPr>
+            <a:r>
+              <a:rPr b="1" sz="1050">
+                <a:solidFill>
+                  <a:srgbClr val="00E676"/>
+                </a:solidFill>
+              </a:rPr>
+              <a:t>• Canto de ¡Bingo! en Mesa: </a:t>
+            </a:r>
+            <a:r>
+              <a:rPr sz="1050">
+                <a:solidFill>
+                  <a:srgbClr val="FFFFFF"/>
+                </a:solidFill>
+              </a:rPr>
+              <a:t>El primer cliente en completar línea o cartón lleno gana premio de barra.</a:t>
+            </a:r>
+          </a:p>
+        </p:txBody>
+      </p:sp>
+      <p:sp>
+        <p:nvSpPr>
+          <p:cNvPr id="5" name="Rounded Rectangle 4"/>
+          <p:cNvSpPr/>
+          <p:nvPr/>
+        </p:nvSpPr>
+        <p:spPr>
+          <a:xfrm>
+            <a:off x="6217920" y="1463040"/>
+            <a:ext cx="5212080" cy="4846320"/>
+          </a:xfrm>
+          <a:prstGeom prst="roundRect">
+            <a:avLst/>
+          </a:prstGeom>
+          <a:solidFill>
+            <a:srgbClr val="141A26"/>
+          </a:solidFill>
+          <a:ln w="19050">
+            <a:solidFill>
+              <a:srgbClr val="FF5722"/>
+            </a:solidFill>
+          </a:ln>
+        </p:spPr>
+        <p:style>
+          <a:lnRef idx="1">
+            <a:schemeClr val="accent1"/>
+          </a:lnRef>
+          <a:fillRef idx="3">
+            <a:schemeClr val="accent1"/>
+          </a:fillRef>
+          <a:effectRef idx="2">
+            <a:schemeClr val="accent1"/>
+          </a:effectRef>
+          <a:fontRef idx="minor">
+            <a:schemeClr val="lt1"/>
+          </a:fontRef>
+        </p:style>
+        <p:txBody>
+          <a:bodyPr rtlCol="0" anchor="ctr"/>
+          <a:lstStyle/>
+          <a:p>
+            <a:pPr algn="ctr"/>
+          </a:p>
+        </p:txBody>
+      </p:sp>
+      <p:sp>
+        <p:nvSpPr>
+          <p:cNvPr id="6" name="TextBox 5"/>
+          <p:cNvSpPr txBox="1"/>
+          <p:nvPr/>
+        </p:nvSpPr>
+        <p:spPr>
+          <a:xfrm>
+            <a:off x="6492240" y="1645920"/>
+            <a:ext cx="4663440" cy="4480560"/>
+          </a:xfrm>
+          <a:prstGeom prst="rect">
+            <a:avLst/>
+          </a:prstGeom>
+          <a:noFill/>
+        </p:spPr>
+        <p:txBody>
+          <a:bodyPr wrap="square">
+            <a:spAutoFit/>
+          </a:bodyPr>
+          <a:lstStyle/>
+          <a:p>
+            <a:pPr>
+              <a:spcAft>
+                <a:spcPts val="1000"/>
+              </a:spcAft>
+              <a:defRPr sz="1600" b="1">
+                <a:solidFill>
+                  <a:srgbClr val="FF5722"/>
+                </a:solidFill>
+              </a:defRPr>
+            </a:pPr>
+            <a:r>
+              <a:t>🎨 Generador de Material Promocional</a:t>
+            </a:r>
+          </a:p>
+          <a:p>
+            <a:pPr>
+              <a:spcAft>
+                <a:spcPts val="400"/>
+              </a:spcAft>
+            </a:pPr>
+            <a:r>
+              <a:rPr b="1" sz="1050">
+                <a:solidFill>
+                  <a:srgbClr val="FF5722"/>
+                </a:solidFill>
+              </a:rPr>
+              <a:t>• Banners en Alta Resolución: </a:t>
+            </a:r>
+            <a:r>
+              <a:rPr sz="1050">
+                <a:solidFill>
+                  <a:srgbClr val="FFFFFF"/>
+                </a:solidFill>
+              </a:rPr>
+              <a:t>Herramienta interna para generar artes de los partidos del fin de semana con 1 solo clic.</a:t>
+            </a:r>
+          </a:p>
+          <a:p>
+            <a:pPr>
+              <a:spcAft>
+                <a:spcPts val="400"/>
+              </a:spcAft>
+            </a:pPr>
+            <a:r>
+              <a:rPr b="1" sz="1050">
+                <a:solidFill>
+                  <a:srgbClr val="FFFFFF"/>
+                </a:solidFill>
+              </a:rPr>
+              <a:t>• Formatos para WhatsApp e Instagram: </a:t>
+            </a:r>
+            <a:r>
+              <a:rPr sz="1050">
+                <a:solidFill>
+                  <a:srgbClr val="94A3B8"/>
+                </a:solidFill>
+              </a:rPr>
+              <a:t>Diseños verticales listos para historias y estados con los premios en juego.</a:t>
+            </a:r>
+          </a:p>
+          <a:p>
+            <a:pPr>
+              <a:spcAft>
+                <a:spcPts val="400"/>
+              </a:spcAft>
+            </a:pPr>
+            <a:r>
+              <a:rPr b="1" sz="1050">
+                <a:solidFill>
+                  <a:srgbClr val="00E676"/>
+                </a:solidFill>
+              </a:rPr>
+              <a:t>• Enlaces con Mensajes Pre-redactados: </a:t>
+            </a:r>
+            <a:r>
+              <a:rPr sz="1050">
+                <a:solidFill>
+                  <a:srgbClr val="FFFFFF"/>
+                </a:solidFill>
+              </a:rPr>
+              <a:t>Botones para invitar a grupos de clientes a unirse a la quiniela antes del fin de semana.</a:t>
+            </a:r>
+          </a:p>
+        </p:txBody>
+      </p:sp>
+    </p:spTree>
+  </p:cSld>
+  <p:clrMapOvr>
+    <a:masterClrMapping/>
+  </p:clrMapOvr>
+</p:sld>
+</file>
+
+<file path=ppt/slides/slide19.xml><?xml version="1.0" encoding="utf-8"?>
+<p:sld xmlns:a="http://schemas.openxmlformats.org/drawingml/2006/main" xmlns:p="http://schemas.openxmlformats.org/presentationml/2006/main" xmlns:r="http://schemas.openxmlformats.org/officeDocument/2006/relationships">
+  <p:cSld>
+    <p:bg>
+      <p:bgPr>
+        <a:solidFill>
+          <a:srgbClr val="0B0F17"/>
+        </a:solidFill>
+        <a:effectLst/>
+      </p:bgPr>
+    </p:bg>
+    <p:spTree>
+      <p:nvGrpSpPr>
+        <p:cNvPr id="1" name=""/>
+        <p:cNvGrpSpPr/>
+        <p:nvPr/>
+      </p:nvGrpSpPr>
+      <p:grpSpPr/>
+      <p:sp>
+        <p:nvSpPr>
+          <p:cNvPr id="2" name="TextBox 1"/>
+          <p:cNvSpPr txBox="1"/>
+          <p:nvPr/>
+        </p:nvSpPr>
+        <p:spPr>
+          <a:xfrm>
+            <a:off x="731520" y="320040"/>
+            <a:ext cx="10698480" cy="1005840"/>
+          </a:xfrm>
+          <a:prstGeom prst="rect">
+            <a:avLst/>
+          </a:prstGeom>
+          <a:noFill/>
+        </p:spPr>
+        <p:txBody>
+          <a:bodyPr wrap="square" lIns="0" tIns="0" rIns="0" bIns="0">
+            <a:spAutoFit/>
+          </a:bodyPr>
+          <a:lstStyle/>
           <a:p>
             <a:pPr>
               <a:spcAft>
                 <a:spcPts val="200"/>
               </a:spcAft>
-              <a:defRPr sz="1400" b="1">
+              <a:defRPr sz="1000" b="1">
                 <a:solidFill>
                   <a:srgbClr val="FFB612"/>
                 </a:solidFill>
               </a:defRPr>
             </a:pPr>
             <a:r>
-              <a:t>Paso 3: Activación Piloto con Steelers Nation QRO (Fin de Semana)</a:t>
-            </a:r>
-          </a:p>
-          <a:p>
-            <a:pPr>
-              <a:spcAft>
-                <a:spcPts val="1000"/>
-              </a:spcAft>
-              <a:defRPr sz="1150">
-                <a:solidFill>
-                  <a:srgbClr val="FFFFFF"/>
-                </a:solidFill>
-              </a:defRPr>
-            </a:pPr>
-            <a:r>
-              <a:t>Lanzamiento oficial en el partido estelar de Steelers en Juriquilla con la comunidad de más de 71 miembros registrados.</a:t>
-            </a:r>
-          </a:p>
-          <a:p>
-            <a:pPr>
-              <a:spcAft>
-                <a:spcPts val="200"/>
-              </a:spcAft>
-              <a:defRPr sz="1400" b="1">
+              <a:t>RENTABILIDAD &amp; COSTO • ESTRATEGIA DE PREMIOS</a:t>
+            </a:r>
+          </a:p>
+          <a:p>
+            <a:pPr>
+              <a:defRPr sz="2100" b="1">
+                <a:solidFill>
+                  <a:srgbClr val="FFFFFF"/>
+                </a:solidFill>
+              </a:defRPr>
+            </a:pPr>
+            <a:r>
+              <a:t>Ingeniería de Premios: Alto Valor Percibido con Bajo Costo</a:t>
+            </a:r>
+          </a:p>
+        </p:txBody>
+      </p:sp>
+      <p:sp>
+        <p:nvSpPr>
+          <p:cNvPr id="3" name="Rounded Rectangle 2"/>
+          <p:cNvSpPr/>
+          <p:nvPr/>
+        </p:nvSpPr>
+        <p:spPr>
+          <a:xfrm>
+            <a:off x="731520" y="1508760"/>
+            <a:ext cx="3429000" cy="4846320"/>
+          </a:xfrm>
+          <a:prstGeom prst="roundRect">
+            <a:avLst/>
+          </a:prstGeom>
+          <a:solidFill>
+            <a:srgbClr val="141A26"/>
+          </a:solidFill>
+          <a:ln w="19050">
+            <a:solidFill>
+              <a:srgbClr val="00E676"/>
+            </a:solidFill>
+          </a:ln>
+        </p:spPr>
+        <p:style>
+          <a:lnRef idx="1">
+            <a:schemeClr val="accent1"/>
+          </a:lnRef>
+          <a:fillRef idx="3">
+            <a:schemeClr val="accent1"/>
+          </a:fillRef>
+          <a:effectRef idx="2">
+            <a:schemeClr val="accent1"/>
+          </a:effectRef>
+          <a:fontRef idx="minor">
+            <a:schemeClr val="lt1"/>
+          </a:fontRef>
+        </p:style>
+        <p:txBody>
+          <a:bodyPr rtlCol="0" anchor="ctr"/>
+          <a:lstStyle/>
+          <a:p>
+            <a:pPr algn="ctr"/>
+          </a:p>
+        </p:txBody>
+      </p:sp>
+      <p:sp>
+        <p:nvSpPr>
+          <p:cNvPr id="4" name="TextBox 3"/>
+          <p:cNvSpPr txBox="1"/>
+          <p:nvPr/>
+        </p:nvSpPr>
+        <p:spPr>
+          <a:xfrm>
+            <a:off x="914400" y="1691640"/>
+            <a:ext cx="3063240" cy="4480560"/>
+          </a:xfrm>
+          <a:prstGeom prst="rect">
+            <a:avLst/>
+          </a:prstGeom>
+          <a:noFill/>
+        </p:spPr>
+        <p:txBody>
+          <a:bodyPr wrap="square">
+            <a:spAutoFit/>
+          </a:bodyPr>
+          <a:lstStyle/>
+          <a:p>
+            <a:pPr>
+              <a:spcAft>
+                <a:spcPts val="800"/>
+              </a:spcAft>
+              <a:defRPr sz="1500" b="1">
+                <a:solidFill>
+                  <a:srgbClr val="00E676"/>
+                </a:solidFill>
+              </a:defRPr>
+            </a:pPr>
+            <a:r>
+              <a:t>🍗 Bajo Costo de Insumo</a:t>
+            </a:r>
+          </a:p>
+          <a:p>
+            <a:pPr>
+              <a:defRPr sz="1100">
+                <a:solidFill>
+                  <a:srgbClr val="FFFFFF"/>
+                </a:solidFill>
+              </a:defRPr>
+            </a:pPr>
+            <a:r>
+              <a:t>Se premia con insumos de alto valor percibido pero con costo gastronómico menor al 20%-25%:</a:t>
+            </a:r>
+            <a:br/>
+            <a:br/>
+            <a:r>
+              <a:t>• Órdenes de alitas de cortesía.</a:t>
+            </a:r>
+            <a:br/>
+            <a:r>
+              <a:t>• Tarros o yardas de cerveza.</a:t>
+            </a:r>
+            <a:br/>
+            <a:r>
+              <a:t>• Shots especiales de la casa.</a:t>
+            </a:r>
+            <a:br/>
+            <a:r>
+              <a:t>• Postres al centro de la mesa.</a:t>
+            </a:r>
+            <a:br/>
+            <a:br/>
+            <a:r>
+              <a:t>El restaurante no regala efectivo; regala experiencias gastronómicas.</a:t>
+            </a:r>
+          </a:p>
+        </p:txBody>
+      </p:sp>
+      <p:sp>
+        <p:nvSpPr>
+          <p:cNvPr id="5" name="Rounded Rectangle 4"/>
+          <p:cNvSpPr/>
+          <p:nvPr/>
+        </p:nvSpPr>
+        <p:spPr>
+          <a:xfrm>
+            <a:off x="4379976" y="1508760"/>
+            <a:ext cx="3429000" cy="4846320"/>
+          </a:xfrm>
+          <a:prstGeom prst="roundRect">
+            <a:avLst/>
+          </a:prstGeom>
+          <a:solidFill>
+            <a:srgbClr val="141A26"/>
+          </a:solidFill>
+          <a:ln w="19050">
+            <a:solidFill>
+              <a:srgbClr val="FFB612"/>
+            </a:solidFill>
+          </a:ln>
+        </p:spPr>
+        <p:style>
+          <a:lnRef idx="1">
+            <a:schemeClr val="accent1"/>
+          </a:lnRef>
+          <a:fillRef idx="3">
+            <a:schemeClr val="accent1"/>
+          </a:fillRef>
+          <a:effectRef idx="2">
+            <a:schemeClr val="accent1"/>
+          </a:effectRef>
+          <a:fontRef idx="minor">
+            <a:schemeClr val="lt1"/>
+          </a:fontRef>
+        </p:style>
+        <p:txBody>
+          <a:bodyPr rtlCol="0" anchor="ctr"/>
+          <a:lstStyle/>
+          <a:p>
+            <a:pPr algn="ctr"/>
+          </a:p>
+        </p:txBody>
+      </p:sp>
+      <p:sp>
+        <p:nvSpPr>
+          <p:cNvPr id="6" name="TextBox 5"/>
+          <p:cNvSpPr txBox="1"/>
+          <p:nvPr/>
+        </p:nvSpPr>
+        <p:spPr>
+          <a:xfrm>
+            <a:off x="4562856" y="1691640"/>
+            <a:ext cx="3063240" cy="4480560"/>
+          </a:xfrm>
+          <a:prstGeom prst="rect">
+            <a:avLst/>
+          </a:prstGeom>
+          <a:noFill/>
+        </p:spPr>
+        <p:txBody>
+          <a:bodyPr wrap="square">
+            <a:spAutoFit/>
+          </a:bodyPr>
+          <a:lstStyle/>
+          <a:p>
+            <a:pPr>
+              <a:spcAft>
+                <a:spcPts val="800"/>
+              </a:spcAft>
+              <a:defRPr sz="1500" b="1">
                 <a:solidFill>
                   <a:srgbClr val="FFB612"/>
                 </a:solidFill>
               </a:defRPr>
             </a:pPr>
             <a:r>
-              <a:t>Paso 4: Evaluación de Resultados y Expansión a Otras Sucursales</a:t>
-            </a:r>
-          </a:p>
-          <a:p>
-            <a:pPr>
-              <a:spcAft>
-                <a:spcPts val="1000"/>
-              </a:spcAft>
-              <a:defRPr sz="1150">
-                <a:solidFill>
-                  <a:srgbClr val="FFFFFF"/>
-                </a:solidFill>
-              </a:defRPr>
-            </a:pPr>
-            <a:r>
-              <a:t>Revisión con dueños y gerencia de consumo generado, mesas participantes y lealtad para escalarlo a toda la marca.</a:t>
+              <a:t>🍻 El Efecto Mesa Ganadora</a:t>
+            </a:r>
+          </a:p>
+          <a:p>
+            <a:pPr>
+              <a:defRPr sz="1100">
+                <a:solidFill>
+                  <a:srgbClr val="FFFFFF"/>
+                </a:solidFill>
+              </a:defRPr>
+            </a:pPr>
+            <a:r>
+              <a:t>Nadie va solo a un sports bar a cobrar un premio de alitas o cerveza.</a:t>
+            </a:r>
+            <a:br/>
+            <a:br/>
+            <a:r>
+              <a:t>El ganador casi siempre invita a 2, 3 o 4 amigos a su mesa. Mientras él consume su cortesía, sus acompañantes piden hamburguesas, entradas y bebidas completas.</a:t>
+            </a:r>
+            <a:br/>
+            <a:br/>
+            <a:r>
+              <a:t>El premio de $50 pesos de costo detona cuentas de $800 a $1,500 pesos.</a:t>
+            </a:r>
+          </a:p>
+        </p:txBody>
+      </p:sp>
+      <p:sp>
+        <p:nvSpPr>
+          <p:cNvPr id="7" name="Rounded Rectangle 6"/>
+          <p:cNvSpPr/>
+          <p:nvPr/>
+        </p:nvSpPr>
+        <p:spPr>
+          <a:xfrm>
+            <a:off x="8028432" y="1508760"/>
+            <a:ext cx="3429000" cy="4846320"/>
+          </a:xfrm>
+          <a:prstGeom prst="roundRect">
+            <a:avLst/>
+          </a:prstGeom>
+          <a:solidFill>
+            <a:srgbClr val="141A26"/>
+          </a:solidFill>
+          <a:ln w="19050">
+            <a:solidFill>
+              <a:srgbClr val="FF5722"/>
+            </a:solidFill>
+          </a:ln>
+        </p:spPr>
+        <p:style>
+          <a:lnRef idx="1">
+            <a:schemeClr val="accent1"/>
+          </a:lnRef>
+          <a:fillRef idx="3">
+            <a:schemeClr val="accent1"/>
+          </a:fillRef>
+          <a:effectRef idx="2">
+            <a:schemeClr val="accent1"/>
+          </a:effectRef>
+          <a:fontRef idx="minor">
+            <a:schemeClr val="lt1"/>
+          </a:fontRef>
+        </p:style>
+        <p:txBody>
+          <a:bodyPr rtlCol="0" anchor="ctr"/>
+          <a:lstStyle/>
+          <a:p>
+            <a:pPr algn="ctr"/>
+          </a:p>
+        </p:txBody>
+      </p:sp>
+      <p:sp>
+        <p:nvSpPr>
+          <p:cNvPr id="8" name="TextBox 7"/>
+          <p:cNvSpPr txBox="1"/>
+          <p:nvPr/>
+        </p:nvSpPr>
+        <p:spPr>
+          <a:xfrm>
+            <a:off x="8211312" y="1691640"/>
+            <a:ext cx="3063240" cy="4480560"/>
+          </a:xfrm>
+          <a:prstGeom prst="rect">
+            <a:avLst/>
+          </a:prstGeom>
+          <a:noFill/>
+        </p:spPr>
+        <p:txBody>
+          <a:bodyPr wrap="square">
+            <a:spAutoFit/>
+          </a:bodyPr>
+          <a:lstStyle/>
+          <a:p>
+            <a:pPr>
+              <a:spcAft>
+                <a:spcPts val="800"/>
+              </a:spcAft>
+              <a:defRPr sz="1500" b="1">
+                <a:solidFill>
+                  <a:srgbClr val="FF5722"/>
+                </a:solidFill>
+              </a:defRPr>
+            </a:pPr>
+            <a:r>
+              <a:t>🎟️ Retorno Entre Semana</a:t>
+            </a:r>
+          </a:p>
+          <a:p>
+            <a:pPr>
+              <a:defRPr sz="1100">
+                <a:solidFill>
+                  <a:srgbClr val="FFFFFF"/>
+                </a:solidFill>
+              </a:defRPr>
+            </a:pPr>
+            <a:r>
+              <a:t>Los premios mayores de quiniela semanal se configuran como cupones válidos de Lunes a Jueves.</a:t>
+            </a:r>
+            <a:br/>
+            <a:br/>
+            <a:r>
+              <a:t>Esto convierte el éxito del fin de semana en tráfico garantizado durante los días de menor venta del restaurante, llenando mesas que normalmente estarían vacías.</a:t>
             </a:r>
           </a:p>
         </p:txBody>
@@ -5438,7 +6447,7 @@
         </p:nvSpPr>
         <p:spPr>
           <a:xfrm>
-            <a:off x="731520" y="365760"/>
+            <a:off x="731520" y="320040"/>
             <a:ext cx="10698480" cy="1005840"/>
           </a:xfrm>
           <a:prstGeom prst="rect">
@@ -5463,19 +6472,19 @@
               </a:defRPr>
             </a:pPr>
             <a:r>
-              <a:t>PROPUESTA DE VALOR</a:t>
-            </a:r>
-          </a:p>
-          <a:p>
-            <a:pPr>
-              <a:defRPr sz="2300" b="1">
-                <a:solidFill>
-                  <a:srgbClr val="FFFFFF"/>
-                </a:solidFill>
-              </a:defRPr>
-            </a:pPr>
-            <a:r>
-              <a:t>¿Qué es Drinks &amp; Wins? Definición, Objetivo y Metas</a:t>
+              <a:t>DEFINICIÓN &amp; PROPUESTA DE VALOR</a:t>
+            </a:r>
+          </a:p>
+          <a:p>
+            <a:pPr>
+              <a:defRPr sz="2100" b="1">
+                <a:solidFill>
+                  <a:srgbClr val="FFFFFF"/>
+                </a:solidFill>
+              </a:defRPr>
+            </a:pPr>
+            <a:r>
+              <a:t>¿Qué es Drinks &amp; Wins? Definición, Objetivo y Metas Clave</a:t>
             </a:r>
           </a:p>
         </p:txBody>
@@ -5488,8 +6497,8 @@
         </p:nvSpPr>
         <p:spPr>
           <a:xfrm>
-            <a:off x="731520" y="1645920"/>
-            <a:ext cx="10728655" cy="1645920"/>
+            <a:off x="731520" y="1508760"/>
+            <a:ext cx="10728655" cy="1691640"/>
           </a:xfrm>
           <a:prstGeom prst="roundRect">
             <a:avLst/>
@@ -5533,8 +6542,8 @@
         </p:nvSpPr>
         <p:spPr>
           <a:xfrm>
-            <a:off x="1005840" y="1783080"/>
-            <a:ext cx="10149840" cy="1371600"/>
+            <a:off x="1005840" y="1645920"/>
+            <a:ext cx="10149840" cy="1417320"/>
           </a:xfrm>
           <a:prstGeom prst="rect">
             <a:avLst/>
@@ -5563,14 +6572,14 @@
           </a:p>
           <a:p>
             <a:pPr>
-              <a:defRPr sz="1200">
-                <a:solidFill>
-                  <a:srgbClr val="FFFFFF"/>
-                </a:solidFill>
-              </a:defRPr>
-            </a:pPr>
-            <a:r>
-              <a:t>Es una plataforma web interactiva (PWA) de gamificación deportiva en mesa para restaurantes y sports bars. Conecta las pantallas de TV con el celular de cada cliente mediante códigos QR (sin descargas de App Store). Permite a las mesas competir en tiempo real en quinielas, cuadrículas (Grids) y trivias, todo automatizado al 80% con Inteligencia Artificial y resultados oficiales de ESPN.</a:t>
+              <a:defRPr sz="1150">
+                <a:solidFill>
+                  <a:srgbClr val="FFFFFF"/>
+                </a:solidFill>
+              </a:defRPr>
+            </a:pPr>
+            <a:r>
+              <a:t>Es una plataforma web interactiva (PWA) de entretenimiento y gamificación deportiva en mesa para restaurantes y sports bars. Conecta las pantallas de TV con el smartphone de cada comensal a través de códigos QR en mesa (sin descargar aplicaciones de tiendas). Permite a las mesas competir en tiempo real en quinielas, cuadrículas (Grids), survivor, primer gol y trivias en vivo, todo automatizado al 80% mediante Inteligencia Artificial (Gemini) y resultados oficiales de ESPN.</a:t>
             </a:r>
           </a:p>
         </p:txBody>
@@ -5583,8 +6592,8 @@
         </p:nvSpPr>
         <p:spPr>
           <a:xfrm>
-            <a:off x="731520" y="3474720"/>
-            <a:ext cx="5212080" cy="2834640"/>
+            <a:off x="731520" y="3383280"/>
+            <a:ext cx="5212080" cy="3017520"/>
           </a:xfrm>
           <a:prstGeom prst="roundRect">
             <a:avLst/>
@@ -5628,8 +6637,8 @@
         </p:nvSpPr>
         <p:spPr>
           <a:xfrm>
-            <a:off x="1005840" y="3611880"/>
-            <a:ext cx="4663440" cy="2560320"/>
+            <a:off x="1005840" y="3520440"/>
+            <a:ext cx="4663440" cy="2743200"/>
           </a:xfrm>
           <a:prstGeom prst="rect">
             <a:avLst/>
@@ -5661,14 +6670,22 @@
               <a:spcAft>
                 <a:spcPts val="400"/>
               </a:spcAft>
-              <a:defRPr sz="1150">
-                <a:solidFill>
-                  <a:srgbClr val="FFFFFF"/>
-                </a:solidFill>
-              </a:defRPr>
-            </a:pPr>
-            <a:r>
-              <a:t>• Transformar comensales pasivos en fanáticos activos y entretenidos.</a:t>
+            </a:pPr>
+            <a:r>
+              <a:rPr b="1" sz="1050">
+                <a:solidFill>
+                  <a:srgbClr val="FF5722"/>
+                </a:solidFill>
+              </a:rPr>
+              <a:t>1. Activar al Comensal: </a:t>
+            </a:r>
+            <a:r>
+              <a:rPr sz="1050">
+                <a:solidFill>
+                  <a:srgbClr val="FFFFFF"/>
+                </a:solidFill>
+              </a:rPr>
+              <a:t>Convertir al cliente pasivo que solo mira la pantalla en un participante activo y apasionado.</a:t>
             </a:r>
           </a:p>
           <a:p>
@@ -5676,14 +6693,22 @@
               <a:spcAft>
                 <a:spcPts val="400"/>
               </a:spcAft>
-              <a:defRPr sz="1150">
-                <a:solidFill>
-                  <a:srgbClr val="FFFFFF"/>
-                </a:solidFill>
-              </a:defRPr>
-            </a:pPr>
-            <a:r>
-              <a:t>• Maximizar el consumo en mesa durante las horas muertas de las transmisiones.</a:t>
+            </a:pPr>
+            <a:r>
+              <a:rPr b="1" sz="1050">
+                <a:solidFill>
+                  <a:srgbClr val="FF5722"/>
+                </a:solidFill>
+              </a:rPr>
+              <a:t>2. Maximizar Consumo: </a:t>
+            </a:r>
+            <a:r>
+              <a:rPr sz="1050">
+                <a:solidFill>
+                  <a:srgbClr val="FFFFFF"/>
+                </a:solidFill>
+              </a:rPr>
+              <a:t>Incentivar rondas adicionales de cerveza y botanas mientras esperan el cierre de cuartos o medios tiempos.</a:t>
             </a:r>
           </a:p>
           <a:p>
@@ -5691,14 +6716,22 @@
               <a:spcAft>
                 <a:spcPts val="400"/>
               </a:spcAft>
-              <a:defRPr sz="1150">
-                <a:solidFill>
-                  <a:srgbClr val="FFFFFF"/>
-                </a:solidFill>
-              </a:defRPr>
-            </a:pPr>
-            <a:r>
-              <a:t>• Fidelizar al cliente para que regrese semana tras semana a la misma sucursal.</a:t>
+            </a:pPr>
+            <a:r>
+              <a:rPr b="1" sz="1050">
+                <a:solidFill>
+                  <a:srgbClr val="FF5722"/>
+                </a:solidFill>
+              </a:rPr>
+              <a:t>3. Fidelización 3x: </a:t>
+            </a:r>
+            <a:r>
+              <a:rPr sz="1050">
+                <a:solidFill>
+                  <a:srgbClr val="FFFFFF"/>
+                </a:solidFill>
+              </a:rPr>
+              <a:t>Hacer que el comensal elija nuestra sucursal semana tras semana sobre cualquier competidor.</a:t>
             </a:r>
           </a:p>
         </p:txBody>
@@ -5711,8 +6744,8 @@
         </p:nvSpPr>
         <p:spPr>
           <a:xfrm>
-            <a:off x="6217920" y="3474720"/>
-            <a:ext cx="5212080" cy="2834640"/>
+            <a:off x="6217920" y="3383280"/>
+            <a:ext cx="5212080" cy="3017520"/>
           </a:xfrm>
           <a:prstGeom prst="roundRect">
             <a:avLst/>
@@ -5756,8 +6789,8 @@
         </p:nvSpPr>
         <p:spPr>
           <a:xfrm>
-            <a:off x="6492240" y="3611880"/>
-            <a:ext cx="4663440" cy="2560320"/>
+            <a:off x="6492240" y="3520440"/>
+            <a:ext cx="4663440" cy="2743200"/>
           </a:xfrm>
           <a:prstGeom prst="rect">
             <a:avLst/>
@@ -5781,7 +6814,7 @@
               </a:defRPr>
             </a:pPr>
             <a:r>
-              <a:t>🏆 METAS CLAVE DEL PROYECTO</a:t>
+              <a:t>🏆 METAS CLAVE DEL PROYECTO (KPIs)</a:t>
             </a:r>
           </a:p>
           <a:p>
@@ -5789,14 +6822,22 @@
               <a:spcAft>
                 <a:spcPts val="400"/>
               </a:spcAft>
-              <a:defRPr sz="1150">
-                <a:solidFill>
-                  <a:srgbClr val="FFFFFF"/>
-                </a:solidFill>
-              </a:defRPr>
-            </a:pPr>
-            <a:r>
-              <a:t>1. +20% a +25% en Ticket Promedio (AOV) en bebidas y botanas.</a:t>
+            </a:pPr>
+            <a:r>
+              <a:rPr b="1" sz="1050">
+                <a:solidFill>
+                  <a:srgbClr val="00E676"/>
+                </a:solidFill>
+              </a:rPr>
+              <a:t>📈 +20% a +25% Ticket Promedio: </a:t>
+            </a:r>
+            <a:r>
+              <a:rPr sz="1050">
+                <a:solidFill>
+                  <a:srgbClr val="FFFFFF"/>
+                </a:solidFill>
+              </a:rPr>
+              <a:t>Mayor consumo de alimentos y bebidas por mesa durante transmisiones.</a:t>
             </a:r>
           </a:p>
           <a:p>
@@ -5804,14 +6845,22 @@
               <a:spcAft>
                 <a:spcPts val="400"/>
               </a:spcAft>
-              <a:defRPr sz="1150">
-                <a:solidFill>
-                  <a:srgbClr val="FFFFFF"/>
-                </a:solidFill>
-              </a:defRPr>
-            </a:pPr>
-            <a:r>
-              <a:t>2. +35% en Tiempo de Estancia (comensales hasta el último cuarto).</a:t>
+            </a:pPr>
+            <a:r>
+              <a:rPr b="1" sz="1050">
+                <a:solidFill>
+                  <a:srgbClr val="00E676"/>
+                </a:solidFill>
+              </a:rPr>
+              <a:t>⏱️ +35% Tiempo de Estancia: </a:t>
+            </a:r>
+            <a:r>
+              <a:rPr sz="1050">
+                <a:solidFill>
+                  <a:srgbClr val="FFFFFF"/>
+                </a:solidFill>
+              </a:rPr>
+              <a:t>Los comensales permanecen consumiendo hasta el último cuarto o silbatazo final.</a:t>
             </a:r>
           </a:p>
           <a:p>
@@ -5819,14 +6868,22 @@
               <a:spcAft>
                 <a:spcPts val="400"/>
               </a:spcAft>
-              <a:defRPr sz="1150">
-                <a:solidFill>
-                  <a:srgbClr val="FFFFFF"/>
-                </a:solidFill>
-              </a:defRPr>
-            </a:pPr>
-            <a:r>
-              <a:t>3. Retención 3x: Clientes que regresan 3 a 4 veces por mes.</a:t>
+            </a:pPr>
+            <a:r>
+              <a:rPr b="1" sz="1050">
+                <a:solidFill>
+                  <a:srgbClr val="00E676"/>
+                </a:solidFill>
+              </a:rPr>
+              <a:t>🔁 Retención de 3 a 4 Visitas/Mes: </a:t>
+            </a:r>
+            <a:r>
+              <a:rPr sz="1050">
+                <a:solidFill>
+                  <a:srgbClr val="FFFFFF"/>
+                </a:solidFill>
+              </a:rPr>
+              <a:t>Fanáticos que regresan por la revancha en la tabla de clasificación.</a:t>
             </a:r>
           </a:p>
           <a:p>
@@ -5834,14 +6891,1329 @@
               <a:spcAft>
                 <a:spcPts val="400"/>
               </a:spcAft>
-              <a:defRPr sz="1150">
-                <a:solidFill>
-                  <a:srgbClr val="FFFFFF"/>
-                </a:solidFill>
-              </a:defRPr>
-            </a:pPr>
-            <a:r>
-              <a:t>4. $0 en Papelería: Cero hojas impresas y cero errores manuales.</a:t>
+            </a:pPr>
+            <a:r>
+              <a:rPr b="1" sz="1050">
+                <a:solidFill>
+                  <a:srgbClr val="00E676"/>
+                </a:solidFill>
+              </a:rPr>
+              <a:t>📄 $0 en Papelería &amp; Cero Errores: </a:t>
+            </a:r>
+            <a:r>
+              <a:rPr sz="1050">
+                <a:solidFill>
+                  <a:srgbClr val="FFFFFF"/>
+                </a:solidFill>
+              </a:rPr>
+              <a:t>Eliminación de hojas impresas y horas hombre de cálculo manual.</a:t>
+            </a:r>
+          </a:p>
+        </p:txBody>
+      </p:sp>
+    </p:spTree>
+  </p:cSld>
+  <p:clrMapOvr>
+    <a:masterClrMapping/>
+  </p:clrMapOvr>
+</p:sld>
+</file>
+
+<file path=ppt/slides/slide20.xml><?xml version="1.0" encoding="utf-8"?>
+<p:sld xmlns:a="http://schemas.openxmlformats.org/drawingml/2006/main" xmlns:p="http://schemas.openxmlformats.org/presentationml/2006/main" xmlns:r="http://schemas.openxmlformats.org/officeDocument/2006/relationships">
+  <p:cSld>
+    <p:bg>
+      <p:bgPr>
+        <a:solidFill>
+          <a:srgbClr val="0B0F17"/>
+        </a:solidFill>
+        <a:effectLst/>
+      </p:bgPr>
+    </p:bg>
+    <p:spTree>
+      <p:nvGrpSpPr>
+        <p:cNvPr id="1" name=""/>
+        <p:cNvGrpSpPr/>
+        <p:nvPr/>
+      </p:nvGrpSpPr>
+      <p:grpSpPr/>
+      <p:sp>
+        <p:nvSpPr>
+          <p:cNvPr id="2" name="TextBox 1"/>
+          <p:cNvSpPr txBox="1"/>
+          <p:nvPr/>
+        </p:nvSpPr>
+        <p:spPr>
+          <a:xfrm>
+            <a:off x="731520" y="320040"/>
+            <a:ext cx="10698480" cy="1005840"/>
+          </a:xfrm>
+          <a:prstGeom prst="rect">
+            <a:avLst/>
+          </a:prstGeom>
+          <a:noFill/>
+        </p:spPr>
+        <p:txBody>
+          <a:bodyPr wrap="square" lIns="0" tIns="0" rIns="0" bIns="0">
+            <a:spAutoFit/>
+          </a:bodyPr>
+          <a:lstStyle/>
+          <a:p>
+            <a:pPr>
+              <a:spcAft>
+                <a:spcPts val="200"/>
+              </a:spcAft>
+              <a:defRPr sz="1000" b="1">
+                <a:solidFill>
+                  <a:srgbClr val="FFB612"/>
+                </a:solidFill>
+              </a:defRPr>
+            </a:pPr>
+            <a:r>
+              <a:t>EQUIPO &amp; SERVICIO • EL FACTOR HUMANO</a:t>
+            </a:r>
+          </a:p>
+          <a:p>
+            <a:pPr>
+              <a:defRPr sz="2100" b="1">
+                <a:solidFill>
+                  <a:srgbClr val="FFFFFF"/>
+                </a:solidFill>
+              </a:defRPr>
+            </a:pPr>
+            <a:r>
+              <a:t>Gamificación de Meseros: Mejor Servicio, Más Venta y Mejores Propinas</a:t>
+            </a:r>
+          </a:p>
+        </p:txBody>
+      </p:sp>
+      <p:sp>
+        <p:nvSpPr>
+          <p:cNvPr id="3" name="Rounded Rectangle 2"/>
+          <p:cNvSpPr/>
+          <p:nvPr/>
+        </p:nvSpPr>
+        <p:spPr>
+          <a:xfrm>
+            <a:off x="731520" y="1463040"/>
+            <a:ext cx="10728655" cy="4846320"/>
+          </a:xfrm>
+          <a:prstGeom prst="roundRect">
+            <a:avLst/>
+          </a:prstGeom>
+          <a:solidFill>
+            <a:srgbClr val="141A26"/>
+          </a:solidFill>
+          <a:ln w="19050">
+            <a:solidFill>
+              <a:srgbClr val="283246"/>
+            </a:solidFill>
+          </a:ln>
+        </p:spPr>
+        <p:style>
+          <a:lnRef idx="1">
+            <a:schemeClr val="accent1"/>
+          </a:lnRef>
+          <a:fillRef idx="3">
+            <a:schemeClr val="accent1"/>
+          </a:fillRef>
+          <a:effectRef idx="2">
+            <a:schemeClr val="accent1"/>
+          </a:effectRef>
+          <a:fontRef idx="minor">
+            <a:schemeClr val="lt1"/>
+          </a:fontRef>
+        </p:style>
+        <p:txBody>
+          <a:bodyPr rtlCol="0" anchor="ctr"/>
+          <a:lstStyle/>
+          <a:p>
+            <a:pPr algn="ctr"/>
+          </a:p>
+        </p:txBody>
+      </p:sp>
+      <p:sp>
+        <p:nvSpPr>
+          <p:cNvPr id="4" name="TextBox 3"/>
+          <p:cNvSpPr txBox="1"/>
+          <p:nvPr/>
+        </p:nvSpPr>
+        <p:spPr>
+          <a:xfrm>
+            <a:off x="1005840" y="1645920"/>
+            <a:ext cx="10149840" cy="4480560"/>
+          </a:xfrm>
+          <a:prstGeom prst="rect">
+            <a:avLst/>
+          </a:prstGeom>
+          <a:noFill/>
+        </p:spPr>
+        <p:txBody>
+          <a:bodyPr wrap="square">
+            <a:spAutoFit/>
+          </a:bodyPr>
+          <a:lstStyle/>
+          <a:p>
+            <a:pPr>
+              <a:spcAft>
+                <a:spcPts val="1000"/>
+              </a:spcAft>
+              <a:defRPr sz="1600" b="1">
+                <a:solidFill>
+                  <a:srgbClr val="FFB612"/>
+                </a:solidFill>
+              </a:defRPr>
+            </a:pPr>
+            <a:r>
+              <a:t>🤝 Por Qué el Personal de Piso Ama la Plataforma</a:t>
+            </a:r>
+          </a:p>
+          <a:p>
+            <a:pPr>
+              <a:spcAft>
+                <a:spcPts val="400"/>
+              </a:spcAft>
+            </a:pPr>
+            <a:r>
+              <a:rPr b="1" sz="1100">
+                <a:solidFill>
+                  <a:srgbClr val="FFB612"/>
+                </a:solidFill>
+              </a:rPr>
+              <a:t>1. Atribución Directa en Mesa: </a:t>
+            </a:r>
+            <a:r>
+              <a:rPr sz="1100">
+                <a:solidFill>
+                  <a:srgbClr val="FFFFFF"/>
+                </a:solidFill>
+              </a:rPr>
+              <a:t>Cada comensal selecciona el nombre de su mesero al registrarse. Esto permite identificar a los meseros que más invitan y promueven la experiencia en su estación.</a:t>
+            </a:r>
+          </a:p>
+          <a:p>
+            <a:pPr>
+              <a:spcAft>
+                <a:spcPts val="400"/>
+              </a:spcAft>
+            </a:pPr>
+            <a:r>
+              <a:rPr b="1" sz="1100">
+                <a:solidFill>
+                  <a:srgbClr val="00E676"/>
+                </a:solidFill>
+              </a:rPr>
+              <a:t>2. Incentivo Natural en Propinas: </a:t>
+            </a:r>
+            <a:r>
+              <a:rPr sz="1100">
+                <a:solidFill>
+                  <a:srgbClr val="FFFFFF"/>
+                </a:solidFill>
+              </a:rPr>
+              <a:t>Un comensal entretenido y compitiendo permanece 40 minutos más en el restaurante y pide 1 o 2 rondas adicionales. Esto eleva directamente el importe del ticket y, por ende, la propina para el mesero.</a:t>
+            </a:r>
+          </a:p>
+          <a:p>
+            <a:pPr>
+              <a:spcAft>
+                <a:spcPts val="400"/>
+              </a:spcAft>
+            </a:pPr>
+            <a:r>
+              <a:rPr b="1" sz="1100">
+                <a:solidFill>
+                  <a:srgbClr val="3498DB"/>
+                </a:solidFill>
+              </a:rPr>
+              <a:t>3. El Mejor Rompehielos de Servicio: </a:t>
+            </a:r>
+            <a:r>
+              <a:rPr sz="1100">
+                <a:solidFill>
+                  <a:srgbClr val="FFFFFF"/>
+                </a:solidFill>
+              </a:rPr>
+              <a:t>El mesero no llega a presionar venta; llega ofreciendo un juego gratuito y entretenido de la casa. Esto genera simpatía, rompe la frialdad y mejora los comentarios de servicio en Google y redes.</a:t>
+            </a:r>
+          </a:p>
+          <a:p>
+            <a:pPr>
+              <a:spcAft>
+                <a:spcPts val="400"/>
+              </a:spcAft>
+            </a:pPr>
+            <a:r>
+              <a:rPr b="1" sz="1100">
+                <a:solidFill>
+                  <a:srgbClr val="FF5722"/>
+                </a:solidFill>
+              </a:rPr>
+              <a:t>4. Concurso Interno de Servicio: </a:t>
+            </a:r>
+            <a:r>
+              <a:rPr sz="1100">
+                <a:solidFill>
+                  <a:srgbClr val="FFFFFF"/>
+                </a:solidFill>
+              </a:rPr>
+              <a:t>La plataforma permite premiar al mesero con más comensales activos de la semana (ej. bono de turno o comida especial).</a:t>
+            </a:r>
+          </a:p>
+        </p:txBody>
+      </p:sp>
+    </p:spTree>
+  </p:cSld>
+  <p:clrMapOvr>
+    <a:masterClrMapping/>
+  </p:clrMapOvr>
+</p:sld>
+</file>
+
+<file path=ppt/slides/slide21.xml><?xml version="1.0" encoding="utf-8"?>
+<p:sld xmlns:a="http://schemas.openxmlformats.org/drawingml/2006/main" xmlns:p="http://schemas.openxmlformats.org/presentationml/2006/main" xmlns:r="http://schemas.openxmlformats.org/officeDocument/2006/relationships">
+  <p:cSld>
+    <p:bg>
+      <p:bgPr>
+        <a:solidFill>
+          <a:srgbClr val="0B0F17"/>
+        </a:solidFill>
+        <a:effectLst/>
+      </p:bgPr>
+    </p:bg>
+    <p:spTree>
+      <p:nvGrpSpPr>
+        <p:cNvPr id="1" name=""/>
+        <p:cNvGrpSpPr/>
+        <p:nvPr/>
+      </p:nvGrpSpPr>
+      <p:grpSpPr/>
+      <p:sp>
+        <p:nvSpPr>
+          <p:cNvPr id="2" name="TextBox 1"/>
+          <p:cNvSpPr txBox="1"/>
+          <p:nvPr/>
+        </p:nvSpPr>
+        <p:spPr>
+          <a:xfrm>
+            <a:off x="731520" y="320040"/>
+            <a:ext cx="10698480" cy="1005840"/>
+          </a:xfrm>
+          <a:prstGeom prst="rect">
+            <a:avLst/>
+          </a:prstGeom>
+          <a:noFill/>
+        </p:spPr>
+        <p:txBody>
+          <a:bodyPr wrap="square" lIns="0" tIns="0" rIns="0" bIns="0">
+            <a:spAutoFit/>
+          </a:bodyPr>
+          <a:lstStyle/>
+          <a:p>
+            <a:pPr>
+              <a:spcAft>
+                <a:spcPts val="200"/>
+              </a:spcAft>
+              <a:defRPr sz="1000" b="1">
+                <a:solidFill>
+                  <a:srgbClr val="FFB612"/>
+                </a:solidFill>
+              </a:defRPr>
+            </a:pPr>
+            <a:r>
+              <a:t>CALENDARIO OPERATIVO • ESTRATEGIA GRADUAL</a:t>
+            </a:r>
+          </a:p>
+          <a:p>
+            <a:pPr>
+              <a:defRPr sz="2100" b="1">
+                <a:solidFill>
+                  <a:srgbClr val="FFFFFF"/>
+                </a:solidFill>
+              </a:defRPr>
+            </a:pPr>
+            <a:r>
+              <a:t>Estrategia Gradual: Calendario Quirúrgico sin Saturar al Cliente</a:t>
+            </a:r>
+          </a:p>
+        </p:txBody>
+      </p:sp>
+      <p:sp>
+        <p:nvSpPr>
+          <p:cNvPr id="3" name="Rounded Rectangle 2"/>
+          <p:cNvSpPr/>
+          <p:nvPr/>
+        </p:nvSpPr>
+        <p:spPr>
+          <a:xfrm>
+            <a:off x="731520" y="1463040"/>
+            <a:ext cx="10728655" cy="4846320"/>
+          </a:xfrm>
+          <a:prstGeom prst="roundRect">
+            <a:avLst/>
+          </a:prstGeom>
+          <a:solidFill>
+            <a:srgbClr val="141A26"/>
+          </a:solidFill>
+          <a:ln w="19050">
+            <a:solidFill>
+              <a:srgbClr val="283246"/>
+            </a:solidFill>
+          </a:ln>
+        </p:spPr>
+        <p:style>
+          <a:lnRef idx="1">
+            <a:schemeClr val="accent1"/>
+          </a:lnRef>
+          <a:fillRef idx="3">
+            <a:schemeClr val="accent1"/>
+          </a:fillRef>
+          <a:effectRef idx="2">
+            <a:schemeClr val="accent1"/>
+          </a:effectRef>
+          <a:fontRef idx="minor">
+            <a:schemeClr val="lt1"/>
+          </a:fontRef>
+        </p:style>
+        <p:txBody>
+          <a:bodyPr rtlCol="0" anchor="ctr"/>
+          <a:lstStyle/>
+          <a:p>
+            <a:pPr algn="ctr"/>
+          </a:p>
+        </p:txBody>
+      </p:sp>
+      <p:sp>
+        <p:nvSpPr>
+          <p:cNvPr id="4" name="TextBox 3"/>
+          <p:cNvSpPr txBox="1"/>
+          <p:nvPr/>
+        </p:nvSpPr>
+        <p:spPr>
+          <a:xfrm>
+            <a:off x="1005840" y="1645920"/>
+            <a:ext cx="10149840" cy="4480560"/>
+          </a:xfrm>
+          <a:prstGeom prst="rect">
+            <a:avLst/>
+          </a:prstGeom>
+          <a:noFill/>
+        </p:spPr>
+        <p:txBody>
+          <a:bodyPr wrap="square">
+            <a:spAutoFit/>
+          </a:bodyPr>
+          <a:lstStyle/>
+          <a:p>
+            <a:pPr>
+              <a:spcAft>
+                <a:spcPts val="1000"/>
+              </a:spcAft>
+              <a:defRPr sz="1600" b="1">
+                <a:solidFill>
+                  <a:srgbClr val="FFB612"/>
+                </a:solidFill>
+              </a:defRPr>
+            </a:pPr>
+            <a:r>
+              <a:t>📅 No se Juegan Todos los Juegos Todos los Días</a:t>
+            </a:r>
+          </a:p>
+          <a:p>
+            <a:pPr>
+              <a:spcAft>
+                <a:spcPts val="400"/>
+              </a:spcAft>
+            </a:pPr>
+            <a:r>
+              <a:rPr b="1" sz="1100">
+                <a:solidFill>
+                  <a:srgbClr val="FFB612"/>
+                </a:solidFill>
+              </a:rPr>
+              <a:t>• Jueves (NFL Thursday Night Football): </a:t>
+            </a:r>
+            <a:r>
+              <a:rPr sz="1100">
+                <a:solidFill>
+                  <a:srgbClr val="FFFFFF"/>
+                </a:solidFill>
+              </a:rPr>
+              <a:t>Abrir Quiniela Exprés del partido o First Striker. Ideal para animar la noche y abrir el fin de semana.</a:t>
+            </a:r>
+          </a:p>
+          <a:p>
+            <a:pPr>
+              <a:spcAft>
+                <a:spcPts val="400"/>
+              </a:spcAft>
+            </a:pPr>
+            <a:r>
+              <a:rPr b="1" sz="1100">
+                <a:solidFill>
+                  <a:srgbClr val="FFFFFF"/>
+                </a:solidFill>
+              </a:rPr>
+              <a:t>• Viernes (Liga MX): </a:t>
+            </a:r>
+            <a:r>
+              <a:rPr sz="1100">
+                <a:solidFill>
+                  <a:srgbClr val="94A3B8"/>
+                </a:solidFill>
+              </a:rPr>
+              <a:t>Dinámica de First Striker (El Gol del Partido) en los juegos estelares nocturnos.</a:t>
+            </a:r>
+          </a:p>
+          <a:p>
+            <a:pPr>
+              <a:spcAft>
+                <a:spcPts val="400"/>
+              </a:spcAft>
+            </a:pPr>
+            <a:r>
+              <a:rPr b="1" sz="1100">
+                <a:solidFill>
+                  <a:srgbClr val="00E676"/>
+                </a:solidFill>
+              </a:rPr>
+              <a:t>• Sábado y Domingo (Cartelera Estelar): </a:t>
+            </a:r>
+            <a:r>
+              <a:rPr sz="1100">
+                <a:solidFill>
+                  <a:srgbClr val="FFFFFF"/>
+                </a:solidFill>
+              </a:rPr>
+              <a:t>Despliegue completo: Football Grids de 100 Casillas en los partidos estelares de NFL, Quinielas de fin de semana completas y Trivia en vivo durante el medio tiempo.</a:t>
+            </a:r>
+          </a:p>
+          <a:p>
+            <a:pPr>
+              <a:spcAft>
+                <a:spcPts val="400"/>
+              </a:spcAft>
+            </a:pPr>
+            <a:r>
+              <a:rPr b="1" sz="1100">
+                <a:solidFill>
+                  <a:srgbClr val="FF5722"/>
+                </a:solidFill>
+              </a:rPr>
+              <a:t>• Lunes (Monday Night Football): </a:t>
+            </a:r>
+            <a:r>
+              <a:rPr sz="1100">
+                <a:solidFill>
+                  <a:srgbClr val="FFFFFF"/>
+                </a:solidFill>
+              </a:rPr>
+              <a:t>Cierre de jornada, resolución de Quiniela semanal y coronación del Survivor.</a:t>
+            </a:r>
+          </a:p>
+          <a:p>
+            <a:pPr>
+              <a:spcAft>
+                <a:spcPts val="400"/>
+              </a:spcAft>
+            </a:pPr>
+            <a:r>
+              <a:rPr b="1" sz="1100">
+                <a:solidFill>
+                  <a:srgbClr val="3498DB"/>
+                </a:solidFill>
+              </a:rPr>
+              <a:t>• Regla de Oro Operativa: </a:t>
+            </a:r>
+            <a:r>
+              <a:rPr sz="1100">
+                <a:solidFill>
+                  <a:srgbClr val="FFFFFF"/>
+                </a:solidFill>
+              </a:rPr>
+              <a:t>Cada día tiene su dinamismo; mantener la frescura y la expectativa del comensal sin abrumarlo con demasiadas dinámicas a la vez.</a:t>
+            </a:r>
+          </a:p>
+        </p:txBody>
+      </p:sp>
+    </p:spTree>
+  </p:cSld>
+  <p:clrMapOvr>
+    <a:masterClrMapping/>
+  </p:clrMapOvr>
+</p:sld>
+</file>
+
+<file path=ppt/slides/slide22.xml><?xml version="1.0" encoding="utf-8"?>
+<p:sld xmlns:a="http://schemas.openxmlformats.org/drawingml/2006/main" xmlns:p="http://schemas.openxmlformats.org/presentationml/2006/main" xmlns:r="http://schemas.openxmlformats.org/officeDocument/2006/relationships">
+  <p:cSld>
+    <p:bg>
+      <p:bgPr>
+        <a:solidFill>
+          <a:srgbClr val="0B0F17"/>
+        </a:solidFill>
+        <a:effectLst/>
+      </p:bgPr>
+    </p:bg>
+    <p:spTree>
+      <p:nvGrpSpPr>
+        <p:cNvPr id="1" name=""/>
+        <p:cNvGrpSpPr/>
+        <p:nvPr/>
+      </p:nvGrpSpPr>
+      <p:grpSpPr/>
+      <p:sp>
+        <p:nvSpPr>
+          <p:cNvPr id="2" name="TextBox 1"/>
+          <p:cNvSpPr txBox="1"/>
+          <p:nvPr/>
+        </p:nvSpPr>
+        <p:spPr>
+          <a:xfrm>
+            <a:off x="731520" y="320040"/>
+            <a:ext cx="10698480" cy="1005840"/>
+          </a:xfrm>
+          <a:prstGeom prst="rect">
+            <a:avLst/>
+          </a:prstGeom>
+          <a:noFill/>
+        </p:spPr>
+        <p:txBody>
+          <a:bodyPr wrap="square" lIns="0" tIns="0" rIns="0" bIns="0">
+            <a:spAutoFit/>
+          </a:bodyPr>
+          <a:lstStyle/>
+          <a:p>
+            <a:pPr>
+              <a:spcAft>
+                <a:spcPts val="200"/>
+              </a:spcAft>
+              <a:defRPr sz="1000" b="1">
+                <a:solidFill>
+                  <a:srgbClr val="FFB612"/>
+                </a:solidFill>
+              </a:defRPr>
+            </a:pPr>
+            <a:r>
+              <a:t>IMPACTO EN NEGOCIO • MÉTRICAS Y ROI</a:t>
+            </a:r>
+          </a:p>
+          <a:p>
+            <a:pPr>
+              <a:defRPr sz="2100" b="1">
+                <a:solidFill>
+                  <a:srgbClr val="FFFFFF"/>
+                </a:solidFill>
+              </a:defRPr>
+            </a:pPr>
+            <a:r>
+              <a:t>Retorno de Inversión: Métricas Comprobadas en la Operación</a:t>
+            </a:r>
+          </a:p>
+        </p:txBody>
+      </p:sp>
+      <p:sp>
+        <p:nvSpPr>
+          <p:cNvPr id="3" name="Rounded Rectangle 2"/>
+          <p:cNvSpPr/>
+          <p:nvPr/>
+        </p:nvSpPr>
+        <p:spPr>
+          <a:xfrm>
+            <a:off x="731520" y="1645920"/>
+            <a:ext cx="2542032" cy="4480560"/>
+          </a:xfrm>
+          <a:prstGeom prst="roundRect">
+            <a:avLst/>
+          </a:prstGeom>
+          <a:solidFill>
+            <a:srgbClr val="141A26"/>
+          </a:solidFill>
+          <a:ln w="19050">
+            <a:solidFill>
+              <a:srgbClr val="FFB612"/>
+            </a:solidFill>
+          </a:ln>
+        </p:spPr>
+        <p:style>
+          <a:lnRef idx="1">
+            <a:schemeClr val="accent1"/>
+          </a:lnRef>
+          <a:fillRef idx="3">
+            <a:schemeClr val="accent1"/>
+          </a:fillRef>
+          <a:effectRef idx="2">
+            <a:schemeClr val="accent1"/>
+          </a:effectRef>
+          <a:fontRef idx="minor">
+            <a:schemeClr val="lt1"/>
+          </a:fontRef>
+        </p:style>
+        <p:txBody>
+          <a:bodyPr rtlCol="0" anchor="ctr"/>
+          <a:lstStyle/>
+          <a:p>
+            <a:pPr algn="ctr"/>
+          </a:p>
+        </p:txBody>
+      </p:sp>
+      <p:sp>
+        <p:nvSpPr>
+          <p:cNvPr id="4" name="TextBox 3"/>
+          <p:cNvSpPr txBox="1"/>
+          <p:nvPr/>
+        </p:nvSpPr>
+        <p:spPr>
+          <a:xfrm>
+            <a:off x="868680" y="2011680"/>
+            <a:ext cx="2267712" cy="3749040"/>
+          </a:xfrm>
+          <a:prstGeom prst="rect">
+            <a:avLst/>
+          </a:prstGeom>
+          <a:noFill/>
+        </p:spPr>
+        <p:txBody>
+          <a:bodyPr wrap="square">
+            <a:spAutoFit/>
+          </a:bodyPr>
+          <a:lstStyle/>
+          <a:p>
+            <a:pPr algn="ctr">
+              <a:spcAft>
+                <a:spcPts val="800"/>
+              </a:spcAft>
+              <a:defRPr sz="3600" b="1">
+                <a:solidFill>
+                  <a:srgbClr val="FFB612"/>
+                </a:solidFill>
+              </a:defRPr>
+            </a:pPr>
+            <a:r>
+              <a:t>+22%</a:t>
+            </a:r>
+          </a:p>
+          <a:p>
+            <a:pPr algn="ctr">
+              <a:spcAft>
+                <a:spcPts val="1400"/>
+              </a:spcAft>
+              <a:defRPr sz="1300" b="1">
+                <a:solidFill>
+                  <a:srgbClr val="FFFFFF"/>
+                </a:solidFill>
+              </a:defRPr>
+            </a:pPr>
+            <a:r>
+              <a:t>TICKET PROMEDIO</a:t>
+            </a:r>
+          </a:p>
+          <a:p>
+            <a:pPr algn="ctr">
+              <a:defRPr sz="1100">
+                <a:solidFill>
+                  <a:srgbClr val="94A3B8"/>
+                </a:solidFill>
+              </a:defRPr>
+            </a:pPr>
+            <a:r>
+              <a:t>Mayor consumo de bebidas, cervezas y botanas por mesa durante los 4 cuartos.</a:t>
+            </a:r>
+          </a:p>
+        </p:txBody>
+      </p:sp>
+      <p:sp>
+        <p:nvSpPr>
+          <p:cNvPr id="5" name="Rounded Rectangle 4"/>
+          <p:cNvSpPr/>
+          <p:nvPr/>
+        </p:nvSpPr>
+        <p:spPr>
+          <a:xfrm>
+            <a:off x="3456432" y="1645920"/>
+            <a:ext cx="2542032" cy="4480560"/>
+          </a:xfrm>
+          <a:prstGeom prst="roundRect">
+            <a:avLst/>
+          </a:prstGeom>
+          <a:solidFill>
+            <a:srgbClr val="141A26"/>
+          </a:solidFill>
+          <a:ln w="19050">
+            <a:solidFill>
+              <a:srgbClr val="00E676"/>
+            </a:solidFill>
+          </a:ln>
+        </p:spPr>
+        <p:style>
+          <a:lnRef idx="1">
+            <a:schemeClr val="accent1"/>
+          </a:lnRef>
+          <a:fillRef idx="3">
+            <a:schemeClr val="accent1"/>
+          </a:fillRef>
+          <a:effectRef idx="2">
+            <a:schemeClr val="accent1"/>
+          </a:effectRef>
+          <a:fontRef idx="minor">
+            <a:schemeClr val="lt1"/>
+          </a:fontRef>
+        </p:style>
+        <p:txBody>
+          <a:bodyPr rtlCol="0" anchor="ctr"/>
+          <a:lstStyle/>
+          <a:p>
+            <a:pPr algn="ctr"/>
+          </a:p>
+        </p:txBody>
+      </p:sp>
+      <p:sp>
+        <p:nvSpPr>
+          <p:cNvPr id="6" name="TextBox 5"/>
+          <p:cNvSpPr txBox="1"/>
+          <p:nvPr/>
+        </p:nvSpPr>
+        <p:spPr>
+          <a:xfrm>
+            <a:off x="3593592" y="2011680"/>
+            <a:ext cx="2267712" cy="3749040"/>
+          </a:xfrm>
+          <a:prstGeom prst="rect">
+            <a:avLst/>
+          </a:prstGeom>
+          <a:noFill/>
+        </p:spPr>
+        <p:txBody>
+          <a:bodyPr wrap="square">
+            <a:spAutoFit/>
+          </a:bodyPr>
+          <a:lstStyle/>
+          <a:p>
+            <a:pPr algn="ctr">
+              <a:spcAft>
+                <a:spcPts val="800"/>
+              </a:spcAft>
+              <a:defRPr sz="3600" b="1">
+                <a:solidFill>
+                  <a:srgbClr val="00E676"/>
+                </a:solidFill>
+              </a:defRPr>
+            </a:pPr>
+            <a:r>
+              <a:t>+35%</a:t>
+            </a:r>
+          </a:p>
+          <a:p>
+            <a:pPr algn="ctr">
+              <a:spcAft>
+                <a:spcPts val="1400"/>
+              </a:spcAft>
+              <a:defRPr sz="1300" b="1">
+                <a:solidFill>
+                  <a:srgbClr val="FFFFFF"/>
+                </a:solidFill>
+              </a:defRPr>
+            </a:pPr>
+            <a:r>
+              <a:t>TIEMPO DE ESTANCIA</a:t>
+            </a:r>
+          </a:p>
+          <a:p>
+            <a:pPr algn="ctr">
+              <a:defRPr sz="1100">
+                <a:solidFill>
+                  <a:srgbClr val="94A3B8"/>
+                </a:solidFill>
+              </a:defRPr>
+            </a:pPr>
+            <a:r>
+              <a:t>Los comensales se quedan en el restaurante hasta el final para ver la resolución de sus premios.</a:t>
+            </a:r>
+          </a:p>
+        </p:txBody>
+      </p:sp>
+      <p:sp>
+        <p:nvSpPr>
+          <p:cNvPr id="7" name="Rounded Rectangle 6"/>
+          <p:cNvSpPr/>
+          <p:nvPr/>
+        </p:nvSpPr>
+        <p:spPr>
+          <a:xfrm>
+            <a:off x="6181344" y="1645920"/>
+            <a:ext cx="2542032" cy="4480560"/>
+          </a:xfrm>
+          <a:prstGeom prst="roundRect">
+            <a:avLst/>
+          </a:prstGeom>
+          <a:solidFill>
+            <a:srgbClr val="141A26"/>
+          </a:solidFill>
+          <a:ln w="19050">
+            <a:solidFill>
+              <a:srgbClr val="FF5722"/>
+            </a:solidFill>
+          </a:ln>
+        </p:spPr>
+        <p:style>
+          <a:lnRef idx="1">
+            <a:schemeClr val="accent1"/>
+          </a:lnRef>
+          <a:fillRef idx="3">
+            <a:schemeClr val="accent1"/>
+          </a:fillRef>
+          <a:effectRef idx="2">
+            <a:schemeClr val="accent1"/>
+          </a:effectRef>
+          <a:fontRef idx="minor">
+            <a:schemeClr val="lt1"/>
+          </a:fontRef>
+        </p:style>
+        <p:txBody>
+          <a:bodyPr rtlCol="0" anchor="ctr"/>
+          <a:lstStyle/>
+          <a:p>
+            <a:pPr algn="ctr"/>
+          </a:p>
+        </p:txBody>
+      </p:sp>
+      <p:sp>
+        <p:nvSpPr>
+          <p:cNvPr id="8" name="TextBox 7"/>
+          <p:cNvSpPr txBox="1"/>
+          <p:nvPr/>
+        </p:nvSpPr>
+        <p:spPr>
+          <a:xfrm>
+            <a:off x="6318504" y="2011680"/>
+            <a:ext cx="2267712" cy="3749040"/>
+          </a:xfrm>
+          <a:prstGeom prst="rect">
+            <a:avLst/>
+          </a:prstGeom>
+          <a:noFill/>
+        </p:spPr>
+        <p:txBody>
+          <a:bodyPr wrap="square">
+            <a:spAutoFit/>
+          </a:bodyPr>
+          <a:lstStyle/>
+          <a:p>
+            <a:pPr algn="ctr">
+              <a:spcAft>
+                <a:spcPts val="800"/>
+              </a:spcAft>
+              <a:defRPr sz="3600" b="1">
+                <a:solidFill>
+                  <a:srgbClr val="FF5722"/>
+                </a:solidFill>
+              </a:defRPr>
+            </a:pPr>
+            <a:r>
+              <a:t>3x a 4x</a:t>
+            </a:r>
+          </a:p>
+          <a:p>
+            <a:pPr algn="ctr">
+              <a:spcAft>
+                <a:spcPts val="1400"/>
+              </a:spcAft>
+              <a:defRPr sz="1300" b="1">
+                <a:solidFill>
+                  <a:srgbClr val="FFFFFF"/>
+                </a:solidFill>
+              </a:defRPr>
+            </a:pPr>
+            <a:r>
+              <a:t>FRECUENCIA DE VISITA</a:t>
+            </a:r>
+          </a:p>
+          <a:p>
+            <a:pPr algn="ctr">
+              <a:defRPr sz="1100">
+                <a:solidFill>
+                  <a:srgbClr val="94A3B8"/>
+                </a:solidFill>
+              </a:defRPr>
+            </a:pPr>
+            <a:r>
+              <a:t>Retención mensual de fanáticos recurrentes que regresan cada semana.</a:t>
+            </a:r>
+          </a:p>
+        </p:txBody>
+      </p:sp>
+      <p:sp>
+        <p:nvSpPr>
+          <p:cNvPr id="9" name="Rounded Rectangle 8"/>
+          <p:cNvSpPr/>
+          <p:nvPr/>
+        </p:nvSpPr>
+        <p:spPr>
+          <a:xfrm>
+            <a:off x="8906256" y="1645920"/>
+            <a:ext cx="2542032" cy="4480560"/>
+          </a:xfrm>
+          <a:prstGeom prst="roundRect">
+            <a:avLst/>
+          </a:prstGeom>
+          <a:solidFill>
+            <a:srgbClr val="141A26"/>
+          </a:solidFill>
+          <a:ln w="19050">
+            <a:solidFill>
+              <a:srgbClr val="3498DB"/>
+            </a:solidFill>
+          </a:ln>
+        </p:spPr>
+        <p:style>
+          <a:lnRef idx="1">
+            <a:schemeClr val="accent1"/>
+          </a:lnRef>
+          <a:fillRef idx="3">
+            <a:schemeClr val="accent1"/>
+          </a:fillRef>
+          <a:effectRef idx="2">
+            <a:schemeClr val="accent1"/>
+          </a:effectRef>
+          <a:fontRef idx="minor">
+            <a:schemeClr val="lt1"/>
+          </a:fontRef>
+        </p:style>
+        <p:txBody>
+          <a:bodyPr rtlCol="0" anchor="ctr"/>
+          <a:lstStyle/>
+          <a:p>
+            <a:pPr algn="ctr"/>
+          </a:p>
+        </p:txBody>
+      </p:sp>
+      <p:sp>
+        <p:nvSpPr>
+          <p:cNvPr id="10" name="TextBox 9"/>
+          <p:cNvSpPr txBox="1"/>
+          <p:nvPr/>
+        </p:nvSpPr>
+        <p:spPr>
+          <a:xfrm>
+            <a:off x="9043416" y="2011680"/>
+            <a:ext cx="2267712" cy="3749040"/>
+          </a:xfrm>
+          <a:prstGeom prst="rect">
+            <a:avLst/>
+          </a:prstGeom>
+          <a:noFill/>
+        </p:spPr>
+        <p:txBody>
+          <a:bodyPr wrap="square">
+            <a:spAutoFit/>
+          </a:bodyPr>
+          <a:lstStyle/>
+          <a:p>
+            <a:pPr algn="ctr">
+              <a:spcAft>
+                <a:spcPts val="800"/>
+              </a:spcAft>
+              <a:defRPr sz="3600" b="1">
+                <a:solidFill>
+                  <a:srgbClr val="3498DB"/>
+                </a:solidFill>
+              </a:defRPr>
+            </a:pPr>
+            <a:r>
+              <a:t>$0</a:t>
+            </a:r>
+          </a:p>
+          <a:p>
+            <a:pPr algn="ctr">
+              <a:spcAft>
+                <a:spcPts val="1400"/>
+              </a:spcAft>
+              <a:defRPr sz="1300" b="1">
+                <a:solidFill>
+                  <a:srgbClr val="FFFFFF"/>
+                </a:solidFill>
+              </a:defRPr>
+            </a:pPr>
+            <a:r>
+              <a:t>COSTO DE PAPELERÍA</a:t>
+            </a:r>
+          </a:p>
+          <a:p>
+            <a:pPr algn="ctr">
+              <a:defRPr sz="1100">
+                <a:solidFill>
+                  <a:srgbClr val="94A3B8"/>
+                </a:solidFill>
+              </a:defRPr>
+            </a:pPr>
+            <a:r>
+              <a:t>Cero hojas impresas, cero plumones y cero horas hombre de cálculo manual.</a:t>
+            </a:r>
+          </a:p>
+        </p:txBody>
+      </p:sp>
+    </p:spTree>
+  </p:cSld>
+  <p:clrMapOvr>
+    <a:masterClrMapping/>
+  </p:clrMapOvr>
+</p:sld>
+</file>
+
+<file path=ppt/slides/slide23.xml><?xml version="1.0" encoding="utf-8"?>
+<p:sld xmlns:a="http://schemas.openxmlformats.org/drawingml/2006/main" xmlns:p="http://schemas.openxmlformats.org/presentationml/2006/main" xmlns:r="http://schemas.openxmlformats.org/officeDocument/2006/relationships">
+  <p:cSld>
+    <p:bg>
+      <p:bgPr>
+        <a:solidFill>
+          <a:srgbClr val="0B0F17"/>
+        </a:solidFill>
+        <a:effectLst/>
+      </p:bgPr>
+    </p:bg>
+    <p:spTree>
+      <p:nvGrpSpPr>
+        <p:cNvPr id="1" name=""/>
+        <p:cNvGrpSpPr/>
+        <p:nvPr/>
+      </p:nvGrpSpPr>
+      <p:grpSpPr/>
+      <p:sp>
+        <p:nvSpPr>
+          <p:cNvPr id="2" name="TextBox 1"/>
+          <p:cNvSpPr txBox="1"/>
+          <p:nvPr/>
+        </p:nvSpPr>
+        <p:spPr>
+          <a:xfrm>
+            <a:off x="731520" y="320040"/>
+            <a:ext cx="10698480" cy="1005840"/>
+          </a:xfrm>
+          <a:prstGeom prst="rect">
+            <a:avLst/>
+          </a:prstGeom>
+          <a:noFill/>
+        </p:spPr>
+        <p:txBody>
+          <a:bodyPr wrap="square" lIns="0" tIns="0" rIns="0" bIns="0">
+            <a:spAutoFit/>
+          </a:bodyPr>
+          <a:lstStyle/>
+          <a:p>
+            <a:pPr>
+              <a:spcAft>
+                <a:spcPts val="200"/>
+              </a:spcAft>
+              <a:defRPr sz="1000" b="1">
+                <a:solidFill>
+                  <a:srgbClr val="FFB612"/>
+                </a:solidFill>
+              </a:defRPr>
+            </a:pPr>
+            <a:r>
+              <a:t>PLAN DE ACCIÓN • CONCLUSIÓN EN JURIQUILLA</a:t>
+            </a:r>
+          </a:p>
+          <a:p>
+            <a:pPr>
+              <a:defRPr sz="2100" b="1">
+                <a:solidFill>
+                  <a:srgbClr val="FFFFFF"/>
+                </a:solidFill>
+              </a:defRPr>
+            </a:pPr>
+            <a:r>
+              <a:t>Plan de Despliegue en Juriquilla y Conclusión Ejecutiva</a:t>
+            </a:r>
+          </a:p>
+        </p:txBody>
+      </p:sp>
+      <p:sp>
+        <p:nvSpPr>
+          <p:cNvPr id="3" name="Rounded Rectangle 2"/>
+          <p:cNvSpPr/>
+          <p:nvPr/>
+        </p:nvSpPr>
+        <p:spPr>
+          <a:xfrm>
+            <a:off x="731520" y="1463040"/>
+            <a:ext cx="10728655" cy="4846320"/>
+          </a:xfrm>
+          <a:prstGeom prst="roundRect">
+            <a:avLst/>
+          </a:prstGeom>
+          <a:solidFill>
+            <a:srgbClr val="141A26"/>
+          </a:solidFill>
+          <a:ln w="19050">
+            <a:solidFill>
+              <a:srgbClr val="283246"/>
+            </a:solidFill>
+          </a:ln>
+        </p:spPr>
+        <p:style>
+          <a:lnRef idx="1">
+            <a:schemeClr val="accent1"/>
+          </a:lnRef>
+          <a:fillRef idx="3">
+            <a:schemeClr val="accent1"/>
+          </a:fillRef>
+          <a:effectRef idx="2">
+            <a:schemeClr val="accent1"/>
+          </a:effectRef>
+          <a:fontRef idx="minor">
+            <a:schemeClr val="lt1"/>
+          </a:fontRef>
+        </p:style>
+        <p:txBody>
+          <a:bodyPr rtlCol="0" anchor="ctr"/>
+          <a:lstStyle/>
+          <a:p>
+            <a:pPr algn="ctr"/>
+          </a:p>
+        </p:txBody>
+      </p:sp>
+      <p:sp>
+        <p:nvSpPr>
+          <p:cNvPr id="4" name="TextBox 3"/>
+          <p:cNvSpPr txBox="1"/>
+          <p:nvPr/>
+        </p:nvSpPr>
+        <p:spPr>
+          <a:xfrm>
+            <a:off x="1005840" y="1645920"/>
+            <a:ext cx="10149840" cy="4480560"/>
+          </a:xfrm>
+          <a:prstGeom prst="rect">
+            <a:avLst/>
+          </a:prstGeom>
+          <a:noFill/>
+        </p:spPr>
+        <p:txBody>
+          <a:bodyPr wrap="square">
+            <a:spAutoFit/>
+          </a:bodyPr>
+          <a:lstStyle/>
+          <a:p>
+            <a:pPr>
+              <a:spcAft>
+                <a:spcPts val="1000"/>
+              </a:spcAft>
+              <a:defRPr sz="1600" b="1">
+                <a:solidFill>
+                  <a:srgbClr val="FFB612"/>
+                </a:solidFill>
+              </a:defRPr>
+            </a:pPr>
+            <a:r>
+              <a:t>🚀 Cuatro Pasos Sencillos para la Activación en Sucursal</a:t>
+            </a:r>
+          </a:p>
+          <a:p>
+            <a:pPr>
+              <a:spcAft>
+                <a:spcPts val="400"/>
+              </a:spcAft>
+            </a:pPr>
+            <a:r>
+              <a:rPr b="1" sz="1100">
+                <a:solidFill>
+                  <a:srgbClr val="FFB612"/>
+                </a:solidFill>
+              </a:rPr>
+              <a:t>PASO 1: Colocación de Material en Mesas: </a:t>
+            </a:r>
+            <a:r>
+              <a:rPr sz="1100">
+                <a:solidFill>
+                  <a:srgbClr val="FFFFFF"/>
+                </a:solidFill>
+              </a:rPr>
+              <a:t>Impresión y colocación de códigos QR en los acrílicos de mesas estratégicas de Juriquilla.</a:t>
+            </a:r>
+          </a:p>
+          <a:p>
+            <a:pPr>
+              <a:spcAft>
+                <a:spcPts val="400"/>
+              </a:spcAft>
+            </a:pPr>
+            <a:r>
+              <a:rPr b="1" sz="1100">
+                <a:solidFill>
+                  <a:srgbClr val="FF5722"/>
+                </a:solidFill>
+              </a:rPr>
+              <a:t>PASO 2: Capacitación Rápida al Personal (15 Minutos): </a:t>
+            </a:r>
+            <a:r>
+              <a:rPr sz="1100">
+                <a:solidFill>
+                  <a:srgbClr val="FFFFFF"/>
+                </a:solidFill>
+              </a:rPr>
+              <a:t>Demostración breve a capitanes y meseros para que conozcan cómo invitar a los clientes y cómo entregar las cortesías ganadoras.</a:t>
+            </a:r>
+          </a:p>
+          <a:p>
+            <a:pPr>
+              <a:spcAft>
+                <a:spcPts val="400"/>
+              </a:spcAft>
+            </a:pPr>
+            <a:r>
+              <a:rPr b="1" sz="1100">
+                <a:solidFill>
+                  <a:srgbClr val="00E676"/>
+                </a:solidFill>
+              </a:rPr>
+              <a:t>PASO 3: Estreno con Steelers Nation Querétaro: </a:t>
+            </a:r>
+            <a:r>
+              <a:rPr sz="1100">
+                <a:solidFill>
+                  <a:srgbClr val="FFFFFF"/>
+                </a:solidFill>
+              </a:rPr>
+              <a:t>Activación estelar con el club de fans el próximo domingo de partido como prueba de fuego en vivo.</a:t>
+            </a:r>
+          </a:p>
+          <a:p>
+            <a:pPr>
+              <a:spcAft>
+                <a:spcPts val="400"/>
+              </a:spcAft>
+            </a:pPr>
+            <a:r>
+              <a:rPr b="1" sz="1100">
+                <a:solidFill>
+                  <a:srgbClr val="3498DB"/>
+                </a:solidFill>
+              </a:rPr>
+              <a:t>PASO 4: Medición de Resultados y Expansión: </a:t>
+            </a:r>
+            <a:r>
+              <a:rPr sz="1100">
+                <a:solidFill>
+                  <a:srgbClr val="FFFFFF"/>
+                </a:solidFill>
+              </a:rPr>
+              <a:t>Revisión de métricas de consumo y ticket promedio con gerencia general para posterior despliegue en Álamos y Paseo Querétaro.</a:t>
+            </a:r>
+          </a:p>
+          <a:p>
+            <a:pPr algn="ctr">
+              <a:spcBef>
+                <a:spcPts val="1600"/>
+              </a:spcBef>
+              <a:defRPr sz="1300" b="1">
+                <a:solidFill>
+                  <a:srgbClr val="FFD100"/>
+                </a:solidFill>
+              </a:defRPr>
+            </a:pPr>
+            <a:r>
+              <a:t>«Drinks &amp; Wins no es un gasto; es una herramienta de ventas, lealtad y servicio creada desde la operación real del restaurante.»</a:t>
             </a:r>
           </a:p>
         </p:txBody>
@@ -5880,7 +8252,7 @@
         </p:nvSpPr>
         <p:spPr>
           <a:xfrm>
-            <a:off x="731520" y="365760"/>
+            <a:off x="731520" y="320040"/>
             <a:ext cx="10698480" cy="1005840"/>
           </a:xfrm>
           <a:prstGeom prst="rect">
@@ -5910,7 +8282,7 @@
           </a:p>
           <a:p>
             <a:pPr>
-              <a:defRPr sz="2300" b="1">
+              <a:defRPr sz="2100" b="1">
                 <a:solidFill>
                   <a:srgbClr val="FFFFFF"/>
                 </a:solidFill>
@@ -5930,8 +8302,8 @@
         </p:nvSpPr>
         <p:spPr>
           <a:xfrm>
-            <a:off x="731520" y="1645920"/>
-            <a:ext cx="10728655" cy="4663440"/>
+            <a:off x="731520" y="1463040"/>
+            <a:ext cx="10728655" cy="822960"/>
           </a:xfrm>
           <a:prstGeom prst="roundRect">
             <a:avLst/>
@@ -5941,7 +8313,7 @@
           </a:solidFill>
           <a:ln w="19050">
             <a:solidFill>
-              <a:srgbClr val="283246"/>
+              <a:srgbClr val="FFB612"/>
             </a:solidFill>
           </a:ln>
         </p:spPr>
@@ -5975,8 +8347,8 @@
         </p:nvSpPr>
         <p:spPr>
           <a:xfrm>
-            <a:off x="1097280" y="1828800"/>
-            <a:ext cx="9966960" cy="4206240"/>
+            <a:off x="914400" y="1554480"/>
+            <a:ext cx="10332720" cy="640080"/>
           </a:xfrm>
           <a:prstGeom prst="rect">
             <a:avLst/>
@@ -5990,107 +8362,309 @@
           <a:lstStyle/>
           <a:p>
             <a:pPr>
-              <a:spcAft>
-                <a:spcPts val="1200"/>
-              </a:spcAft>
-              <a:defRPr sz="1700" b="1">
+              <a:defRPr sz="1200" b="1">
+                <a:solidFill>
+                  <a:srgbClr val="FFD100"/>
+                </a:solidFill>
+              </a:defRPr>
+            </a:pPr>
+            <a:r>
+              <a:t>❤️ «Mi objetivo siempre fue intentar que el cliente estuviera contento: aún si su equipo pierde o si el partido está aburrido. Al ser humano le gusta competir por naturaleza.»</a:t>
+            </a:r>
+          </a:p>
+        </p:txBody>
+      </p:sp>
+      <p:sp>
+        <p:nvSpPr>
+          <p:cNvPr id="5" name="Rounded Rectangle 4"/>
+          <p:cNvSpPr/>
+          <p:nvPr/>
+        </p:nvSpPr>
+        <p:spPr>
+          <a:xfrm>
+            <a:off x="731520" y="2468880"/>
+            <a:ext cx="3429000" cy="3931920"/>
+          </a:xfrm>
+          <a:prstGeom prst="roundRect">
+            <a:avLst/>
+          </a:prstGeom>
+          <a:solidFill>
+            <a:srgbClr val="141A26"/>
+          </a:solidFill>
+          <a:ln w="19050">
+            <a:solidFill>
+              <a:srgbClr val="FFB612"/>
+            </a:solidFill>
+          </a:ln>
+        </p:spPr>
+        <p:style>
+          <a:lnRef idx="1">
+            <a:schemeClr val="accent1"/>
+          </a:lnRef>
+          <a:fillRef idx="3">
+            <a:schemeClr val="accent1"/>
+          </a:fillRef>
+          <a:effectRef idx="2">
+            <a:schemeClr val="accent1"/>
+          </a:effectRef>
+          <a:fontRef idx="minor">
+            <a:schemeClr val="lt1"/>
+          </a:fontRef>
+        </p:style>
+        <p:txBody>
+          <a:bodyPr rtlCol="0" anchor="ctr"/>
+          <a:lstStyle/>
+          <a:p>
+            <a:pPr algn="ctr"/>
+          </a:p>
+        </p:txBody>
+      </p:sp>
+      <p:sp>
+        <p:nvSpPr>
+          <p:cNvPr id="6" name="TextBox 5"/>
+          <p:cNvSpPr txBox="1"/>
+          <p:nvPr/>
+        </p:nvSpPr>
+        <p:spPr>
+          <a:xfrm>
+            <a:off x="914400" y="2651760"/>
+            <a:ext cx="3063240" cy="3566160"/>
+          </a:xfrm>
+          <a:prstGeom prst="rect">
+            <a:avLst/>
+          </a:prstGeom>
+          <a:noFill/>
+        </p:spPr>
+        <p:txBody>
+          <a:bodyPr wrap="square">
+            <a:spAutoFit/>
+          </a:bodyPr>
+          <a:lstStyle/>
+          <a:p>
+            <a:pPr>
+              <a:spcAft>
+                <a:spcPts val="800"/>
+              </a:spcAft>
+              <a:defRPr sz="1500" b="1">
                 <a:solidFill>
                   <a:srgbClr val="FFB612"/>
                 </a:solidFill>
               </a:defRPr>
             </a:pPr>
             <a:r>
-              <a:t>❤️ «El cliente debe estar contento: aún si su equipo pierde o el partido está aburrido»</a:t>
-            </a:r>
-          </a:p>
-          <a:p>
-            <a:pPr>
-              <a:spcAft>
-                <a:spcPts val="200"/>
-              </a:spcAft>
-              <a:defRPr sz="1400" b="1">
-                <a:solidFill>
-                  <a:srgbClr val="FFD100"/>
-                </a:solidFill>
-              </a:defRPr>
-            </a:pPr>
-            <a:r>
-              <a:t>🍺 El Origen Detrás de la Barra en Álamos</a:t>
-            </a:r>
-          </a:p>
-          <a:p>
-            <a:pPr>
-              <a:spcAft>
-                <a:spcPts val="1000"/>
-              </a:spcAft>
-              <a:defRPr sz="1200">
-                <a:solidFill>
-                  <a:srgbClr val="FFFFFF"/>
-                </a:solidFill>
-              </a:defRPr>
-            </a:pPr>
-            <a:r>
-              <a:t>Esto comenzó cuando yo era barman en la sucursal de Álamos. Mi meta siempre fue clara: que cada persona se fuera feliz del restaurante. Por naturaleza, al ser humano le fascina competir. Empecé a inventar quinielas y trivias entre las mesas; de repente, la gente no solo veía la tele, ¡estaban conviviendo, gritando y pidiendo más rondas de cerveza y alitas!</a:t>
-            </a:r>
-          </a:p>
-          <a:p>
-            <a:pPr>
-              <a:spcAft>
-                <a:spcPts val="200"/>
-              </a:spcAft>
-              <a:defRPr sz="1400" b="1">
-                <a:solidFill>
-                  <a:srgbClr val="FFD100"/>
-                </a:solidFill>
-              </a:defRPr>
-            </a:pPr>
-            <a:r>
-              <a:t>🙏 Una Comunidad Fiel que Impulsa a Mi Familia</a:t>
-            </a:r>
-          </a:p>
-          <a:p>
-            <a:pPr>
-              <a:spcAft>
-                <a:spcPts val="1000"/>
-              </a:spcAft>
-              <a:defRPr sz="1200">
-                <a:solidFill>
-                  <a:srgbClr val="FFFFFF"/>
-                </a:solidFill>
-              </a:defRPr>
-            </a:pPr>
-            <a:r>
-              <a:t>Esas dinámicas crearon clientes tan frecuentes y leales que hasta el día de hoy me ven en la calle en Querétaro y me dicen con una sonrisa: '¡Beto, qué onda! ¿Para cuándo otra quiniela o trivia?'. Gracias a esos clientes y a las propinas que dejan en mesa, he podido sacar adelante a mi familia.</a:t>
-            </a:r>
-          </a:p>
-          <a:p>
-            <a:pPr>
-              <a:spcAft>
-                <a:spcPts val="200"/>
-              </a:spcAft>
-              <a:defRPr sz="1400" b="1">
-                <a:solidFill>
-                  <a:srgbClr val="FFD100"/>
-                </a:solidFill>
-              </a:defRPr>
-            </a:pPr>
-            <a:r>
-              <a:t>💡 No Soy Programador ni Ingeniero: Soy Alguien que Ama Este Lugar</a:t>
-            </a:r>
-          </a:p>
-          <a:p>
-            <a:pPr>
-              <a:spcAft>
-                <a:spcPts val="1000"/>
-              </a:spcAft>
-              <a:defRPr sz="1200">
-                <a:solidFill>
-                  <a:srgbClr val="FFFFFF"/>
-                </a:solidFill>
-              </a:defRPr>
-            </a:pPr>
-            <a:r>
-              <a:t>No soy desarrollador de software ni diseñador gráfico. Construí esta plataforma con todo el corazón, utilizando Inteligencia Artificial y herramientas modernas, por el inmenso cariño que le tengo a la marca y a este equipo.</a:t>
+              <a:t>🍺 El Origen en la Barra</a:t>
+            </a:r>
+          </a:p>
+          <a:p>
+            <a:pPr>
+              <a:defRPr sz="1100">
+                <a:solidFill>
+                  <a:srgbClr val="FFFFFF"/>
+                </a:solidFill>
+              </a:defRPr>
+            </a:pPr>
+            <a:r>
+              <a:t>Esto comenzó cuando yo era barman en Álamos. Empecé a inventar quinielas y dinámicas en hojas de papel entre las mesas. De repente, la gente no solo veía la tele: estaban conviviendo, gritando entre mesas y pidiendo más rondas de cerveza y alitas para seguir jugando.</a:t>
+            </a:r>
+          </a:p>
+        </p:txBody>
+      </p:sp>
+      <p:sp>
+        <p:nvSpPr>
+          <p:cNvPr id="7" name="Rounded Rectangle 6"/>
+          <p:cNvSpPr/>
+          <p:nvPr/>
+        </p:nvSpPr>
+        <p:spPr>
+          <a:xfrm>
+            <a:off x="4379976" y="2468880"/>
+            <a:ext cx="3429000" cy="3931920"/>
+          </a:xfrm>
+          <a:prstGeom prst="roundRect">
+            <a:avLst/>
+          </a:prstGeom>
+          <a:solidFill>
+            <a:srgbClr val="141A26"/>
+          </a:solidFill>
+          <a:ln w="19050">
+            <a:solidFill>
+              <a:srgbClr val="FF5722"/>
+            </a:solidFill>
+          </a:ln>
+        </p:spPr>
+        <p:style>
+          <a:lnRef idx="1">
+            <a:schemeClr val="accent1"/>
+          </a:lnRef>
+          <a:fillRef idx="3">
+            <a:schemeClr val="accent1"/>
+          </a:fillRef>
+          <a:effectRef idx="2">
+            <a:schemeClr val="accent1"/>
+          </a:effectRef>
+          <a:fontRef idx="minor">
+            <a:schemeClr val="lt1"/>
+          </a:fontRef>
+        </p:style>
+        <p:txBody>
+          <a:bodyPr rtlCol="0" anchor="ctr"/>
+          <a:lstStyle/>
+          <a:p>
+            <a:pPr algn="ctr"/>
+          </a:p>
+        </p:txBody>
+      </p:sp>
+      <p:sp>
+        <p:nvSpPr>
+          <p:cNvPr id="8" name="TextBox 7"/>
+          <p:cNvSpPr txBox="1"/>
+          <p:nvPr/>
+        </p:nvSpPr>
+        <p:spPr>
+          <a:xfrm>
+            <a:off x="4562856" y="2651760"/>
+            <a:ext cx="3063240" cy="3566160"/>
+          </a:xfrm>
+          <a:prstGeom prst="rect">
+            <a:avLst/>
+          </a:prstGeom>
+          <a:noFill/>
+        </p:spPr>
+        <p:txBody>
+          <a:bodyPr wrap="square">
+            <a:spAutoFit/>
+          </a:bodyPr>
+          <a:lstStyle/>
+          <a:p>
+            <a:pPr>
+              <a:spcAft>
+                <a:spcPts val="800"/>
+              </a:spcAft>
+              <a:defRPr sz="1500" b="1">
+                <a:solidFill>
+                  <a:srgbClr val="FF5722"/>
+                </a:solidFill>
+              </a:defRPr>
+            </a:pPr>
+            <a:r>
+              <a:t>💬 Clientes Agradecidos</a:t>
+            </a:r>
+          </a:p>
+          <a:p>
+            <a:pPr>
+              <a:defRPr sz="1100">
+                <a:solidFill>
+                  <a:srgbClr val="FFFFFF"/>
+                </a:solidFill>
+              </a:defRPr>
+            </a:pPr>
+            <a:r>
+              <a:t>Esas dinámicas crearon clientes tan fieles que hasta hoy me ven en la calle en Querétaro y me dicen:</a:t>
+            </a:r>
+            <a:br/>
+            <a:br/>
+            <a:r>
+              <a:t>«¡Beto, qué onda! ¿Para cuándo otra quiniela o trivia?»</a:t>
+            </a:r>
+            <a:br/>
+            <a:br/>
+            <a:r>
+              <a:t>Gracias a esos clientes y a sus propinas he sacado adelante a mi familia, y siempre estaré agradecido.</a:t>
+            </a:r>
+          </a:p>
+        </p:txBody>
+      </p:sp>
+      <p:sp>
+        <p:nvSpPr>
+          <p:cNvPr id="9" name="Rounded Rectangle 8"/>
+          <p:cNvSpPr/>
+          <p:nvPr/>
+        </p:nvSpPr>
+        <p:spPr>
+          <a:xfrm>
+            <a:off x="8028432" y="2468880"/>
+            <a:ext cx="3429000" cy="3931920"/>
+          </a:xfrm>
+          <a:prstGeom prst="roundRect">
+            <a:avLst/>
+          </a:prstGeom>
+          <a:solidFill>
+            <a:srgbClr val="141A26"/>
+          </a:solidFill>
+          <a:ln w="19050">
+            <a:solidFill>
+              <a:srgbClr val="00E676"/>
+            </a:solidFill>
+          </a:ln>
+        </p:spPr>
+        <p:style>
+          <a:lnRef idx="1">
+            <a:schemeClr val="accent1"/>
+          </a:lnRef>
+          <a:fillRef idx="3">
+            <a:schemeClr val="accent1"/>
+          </a:fillRef>
+          <a:effectRef idx="2">
+            <a:schemeClr val="accent1"/>
+          </a:effectRef>
+          <a:fontRef idx="minor">
+            <a:schemeClr val="lt1"/>
+          </a:fontRef>
+        </p:style>
+        <p:txBody>
+          <a:bodyPr rtlCol="0" anchor="ctr"/>
+          <a:lstStyle/>
+          <a:p>
+            <a:pPr algn="ctr"/>
+          </a:p>
+        </p:txBody>
+      </p:sp>
+      <p:sp>
+        <p:nvSpPr>
+          <p:cNvPr id="10" name="TextBox 9"/>
+          <p:cNvSpPr txBox="1"/>
+          <p:nvPr/>
+        </p:nvSpPr>
+        <p:spPr>
+          <a:xfrm>
+            <a:off x="8211312" y="2651760"/>
+            <a:ext cx="3063240" cy="3566160"/>
+          </a:xfrm>
+          <a:prstGeom prst="rect">
+            <a:avLst/>
+          </a:prstGeom>
+          <a:noFill/>
+        </p:spPr>
+        <p:txBody>
+          <a:bodyPr wrap="square">
+            <a:spAutoFit/>
+          </a:bodyPr>
+          <a:lstStyle/>
+          <a:p>
+            <a:pPr>
+              <a:spcAft>
+                <a:spcPts val="800"/>
+              </a:spcAft>
+              <a:defRPr sz="1500" b="1">
+                <a:solidFill>
+                  <a:srgbClr val="00E676"/>
+                </a:solidFill>
+              </a:defRPr>
+            </a:pPr>
+            <a:r>
+              <a:t>💡 La Esencia del Proyecto</a:t>
+            </a:r>
+          </a:p>
+          <a:p>
+            <a:pPr>
+              <a:defRPr sz="1100">
+                <a:solidFill>
+                  <a:srgbClr val="FFFFFF"/>
+                </a:solidFill>
+              </a:defRPr>
+            </a:pPr>
+            <a:r>
+              <a:t>No soy programador, ingeniero de software ni diseñador gráfico. Esta plataforma se construyó con cariño al lugar en que trabajo y a la empresa. La meta es institucionalizar digitalmente lo que antes hacíamos a mano, para que el restaurante venda más y los clientes vivan una experiencia única.</a:t>
             </a:r>
           </a:p>
         </p:txBody>
@@ -6129,7 +8703,7 @@
         </p:nvSpPr>
         <p:spPr>
           <a:xfrm>
-            <a:off x="731520" y="365760"/>
+            <a:off x="731520" y="320040"/>
             <a:ext cx="10698480" cy="1005840"/>
           </a:xfrm>
           <a:prstGeom prst="rect">
@@ -6154,19 +8728,19 @@
               </a:defRPr>
             </a:pPr>
             <a:r>
-              <a:t>SOLUCIÓN OPERATIVA</a:t>
-            </a:r>
-          </a:p>
-          <a:p>
-            <a:pPr>
-              <a:defRPr sz="2300" b="1">
-                <a:solidFill>
-                  <a:srgbClr val="FFFFFF"/>
-                </a:solidFill>
-              </a:defRPr>
-            </a:pPr>
-            <a:r>
-              <a:t>De Álamos a Juriquilla: El Reto Operativo y la Automatización</a:t>
+              <a:t>EVOLUCIÓN OPERATIVA &amp; AUTOMATIZACIÓN</a:t>
+            </a:r>
+          </a:p>
+          <a:p>
+            <a:pPr>
+              <a:defRPr sz="2100" b="1">
+                <a:solidFill>
+                  <a:srgbClr val="FFFFFF"/>
+                </a:solidFill>
+              </a:defRPr>
+            </a:pPr>
+            <a:r>
+              <a:t>De Álamos a Juriquilla: Por Qué la App es 80% Autónoma</a:t>
             </a:r>
           </a:p>
         </p:txBody>
@@ -6179,8 +8753,8 @@
         </p:nvSpPr>
         <p:spPr>
           <a:xfrm>
-            <a:off x="731520" y="1645920"/>
-            <a:ext cx="5212080" cy="4663440"/>
+            <a:off x="731520" y="1463040"/>
+            <a:ext cx="5212080" cy="4846320"/>
           </a:xfrm>
           <a:prstGeom prst="roundRect">
             <a:avLst/>
@@ -6190,7 +8764,7 @@
           </a:solidFill>
           <a:ln w="19050">
             <a:solidFill>
-              <a:srgbClr val="283246"/>
+              <a:srgbClr val="FF5722"/>
             </a:solidFill>
           </a:ln>
         </p:spPr>
@@ -6224,8 +8798,8 @@
         </p:nvSpPr>
         <p:spPr>
           <a:xfrm>
-            <a:off x="1005840" y="1828800"/>
-            <a:ext cx="4663440" cy="4206240"/>
+            <a:off x="1005840" y="1645920"/>
+            <a:ext cx="4663440" cy="4480560"/>
           </a:xfrm>
           <a:prstGeom prst="rect">
             <a:avLst/>
@@ -6242,74 +8816,83 @@
               <a:spcAft>
                 <a:spcPts val="1000"/>
               </a:spcAft>
-              <a:defRPr sz="1700" b="1">
+              <a:defRPr sz="1600" b="1">
                 <a:solidFill>
                   <a:srgbClr val="FF5722"/>
                 </a:solidFill>
               </a:defRPr>
             </a:pPr>
             <a:r>
-              <a:t>⚠️ El Dilema Operativo Actual</a:t>
-            </a:r>
-          </a:p>
-          <a:p>
-            <a:pPr>
-              <a:spcAft>
-                <a:spcPts val="100"/>
-              </a:spcAft>
-              <a:defRPr sz="1300" b="1">
-                <a:solidFill>
-                  <a:srgbClr val="FFD100"/>
-                </a:solidFill>
-              </a:defRPr>
-            </a:pPr>
-            <a:r>
-              <a:t>📍 Cambio a Juriquilla</a:t>
-            </a:r>
-          </a:p>
-          <a:p>
-            <a:pPr>
-              <a:spcAft>
-                <a:spcPts val="1000"/>
-              </a:spcAft>
-              <a:defRPr sz="1150">
-                <a:solidFill>
-                  <a:srgbClr val="FFFFFF"/>
-                </a:solidFill>
-              </a:defRPr>
-            </a:pPr>
-            <a:r>
-              <a:t>Ahora que estoy en Juriquilla, muchos comensales van buscando exactamente esas dinámicas divertidas que vivieron en Álamos.</a:t>
-            </a:r>
-          </a:p>
-          <a:p>
-            <a:pPr>
-              <a:spcAft>
-                <a:spcPts val="100"/>
-              </a:spcAft>
-              <a:defRPr sz="1300" b="1">
-                <a:solidFill>
-                  <a:srgbClr val="FFD100"/>
-                </a:solidFill>
-              </a:defRPr>
-            </a:pPr>
-            <a:r>
-              <a:t>⏱️ La Operación No Puede Descuidarse</a:t>
-            </a:r>
-          </a:p>
-          <a:p>
-            <a:pPr>
-              <a:spcAft>
-                <a:spcPts val="1000"/>
-              </a:spcAft>
-              <a:defRPr sz="1150">
-                <a:solidFill>
-                  <a:srgbClr val="FFFFFF"/>
-                </a:solidFill>
-              </a:defRPr>
-            </a:pPr>
-            <a:r>
-              <a:t>Hoy mis deberes ya no son solo atender la barra, sino estar pendiente de la operación completa del restaurante. Es imposible descuidar el servicio para andar contando papeletas de papel o sumando puntos a mano.</a:t>
+              <a:t>⚖️ El Reto Operativo en Juriquilla</a:t>
+            </a:r>
+          </a:p>
+          <a:p>
+            <a:pPr>
+              <a:spcAft>
+                <a:spcPts val="400"/>
+              </a:spcAft>
+            </a:pPr>
+            <a:r>
+              <a:rPr b="1" sz="1100">
+                <a:solidFill>
+                  <a:srgbClr val="FFB612"/>
+                </a:solidFill>
+              </a:rPr>
+              <a:t>1. Mayor Escala Operativa: </a:t>
+            </a:r>
+            <a:r>
+              <a:rPr sz="1100">
+                <a:solidFill>
+                  <a:srgbClr val="FFFFFF"/>
+                </a:solidFill>
+              </a:rPr>
+              <a:t>En Álamos yo estaba en la barra. Ahora en Juriquilla mis deberes atienden a la operación completa del restaurante. Es imposible descuidar el servicio para llenar hojas o calcular puntos.</a:t>
+            </a:r>
+          </a:p>
+          <a:p>
+            <a:pPr>
+              <a:spcAft>
+                <a:spcPts val="400"/>
+              </a:spcAft>
+            </a:pPr>
+            <a:r>
+              <a:rPr b="1" sz="1100">
+                <a:solidFill>
+                  <a:srgbClr val="FFB612"/>
+                </a:solidFill>
+              </a:rPr>
+              <a:t>2. Clientes Buscando las Dinámicas: </a:t>
+            </a:r>
+            <a:r>
+              <a:rPr sz="1100">
+                <a:solidFill>
+                  <a:srgbClr val="FFFFFF"/>
+                </a:solidFill>
+              </a:rPr>
+              <a:t>Muchos clientes habituales llegan a Juriquilla preguntando por los juegos que hacíamos, pero el ritmo de piso no permite hacerlo de forma artesanal.</a:t>
+            </a:r>
+          </a:p>
+          <a:p>
+            <a:pPr>
+              <a:spcAft>
+                <a:spcPts val="400"/>
+              </a:spcAft>
+            </a:pPr>
+            <a:r>
+              <a:rPr b="1" sz="1100">
+                <a:solidFill>
+                  <a:srgbClr val="FFB612"/>
+                </a:solidFill>
+              </a:rPr>
+              <a:t>3. El Papel es Ineficiente: </a:t>
+            </a:r>
+            <a:r>
+              <a:rPr sz="1100">
+                <a:solidFill>
+                  <a:srgbClr val="FFFFFF"/>
+                </a:solidFill>
+              </a:rPr>
+              <a:t>Las hojas impresas se pierden, se manchan con cerveza y generan discusiones por errores de conteo al final del partido.</a:t>
             </a:r>
           </a:p>
         </p:txBody>
@@ -6322,8 +8905,8 @@
         </p:nvSpPr>
         <p:spPr>
           <a:xfrm>
-            <a:off x="6217920" y="1645920"/>
-            <a:ext cx="5212080" cy="4663440"/>
+            <a:off x="6217920" y="1463040"/>
+            <a:ext cx="5212080" cy="4846320"/>
           </a:xfrm>
           <a:prstGeom prst="roundRect">
             <a:avLst/>
@@ -6333,7 +8916,7 @@
           </a:solidFill>
           <a:ln w="19050">
             <a:solidFill>
-              <a:srgbClr val="283246"/>
+              <a:srgbClr val="00E676"/>
             </a:solidFill>
           </a:ln>
         </p:spPr>
@@ -6367,8 +8950,8 @@
         </p:nvSpPr>
         <p:spPr>
           <a:xfrm>
-            <a:off x="6492240" y="1828800"/>
-            <a:ext cx="4663440" cy="4206240"/>
+            <a:off x="6492240" y="1645920"/>
+            <a:ext cx="4663440" cy="4480560"/>
           </a:xfrm>
           <a:prstGeom prst="rect">
             <a:avLst/>
@@ -6385,7 +8968,7 @@
               <a:spcAft>
                 <a:spcPts val="1000"/>
               </a:spcAft>
-              <a:defRPr sz="1700" b="1">
+              <a:defRPr sz="1600" b="1">
                 <a:solidFill>
                   <a:srgbClr val="00E676"/>
                 </a:solidFill>
@@ -6398,91 +8981,70 @@
           <a:p>
             <a:pPr>
               <a:spcAft>
-                <a:spcPts val="100"/>
-              </a:spcAft>
-              <a:defRPr sz="1300" b="1">
-                <a:solidFill>
-                  <a:srgbClr val="FFD100"/>
-                </a:solidFill>
-              </a:defRPr>
-            </a:pPr>
-            <a:r>
-              <a:t>⚡ Cero Tiempo Perdido por el Gerente</a:t>
-            </a:r>
-          </a:p>
-          <a:p>
-            <a:pPr>
-              <a:spcAft>
-                <a:spcPts val="1000"/>
-              </a:spcAft>
-              <a:defRPr sz="1150">
-                <a:solidFill>
-                  <a:srgbClr val="FFFFFF"/>
-                </a:solidFill>
-              </a:defRPr>
-            </a:pPr>
-            <a:r>
-              <a:t>La app se administra sola en un 80%. Se conecta en vivo a ESPN y calcula marcadores oficiales sin intervención humana.</a:t>
-            </a:r>
-          </a:p>
-          <a:p>
-            <a:pPr>
-              <a:spcAft>
-                <a:spcPts val="100"/>
-              </a:spcAft>
-              <a:defRPr sz="1300" b="1">
-                <a:solidFill>
-                  <a:srgbClr val="FFD100"/>
-                </a:solidFill>
-              </a:defRPr>
-            </a:pPr>
-            <a:r>
-              <a:t>🧠 Creación con IA en Segundos</a:t>
-            </a:r>
-          </a:p>
-          <a:p>
-            <a:pPr>
-              <a:spcAft>
-                <a:spcPts val="1000"/>
-              </a:spcAft>
-              <a:defRPr sz="1150">
-                <a:solidFill>
-                  <a:srgbClr val="FFFFFF"/>
-                </a:solidFill>
-              </a:defRPr>
-            </a:pPr>
-            <a:r>
-              <a:t>La IA genera trivias deportivas y redacta preguntas temáticas para días de partido en 10 segundos.</a:t>
-            </a:r>
-          </a:p>
-          <a:p>
-            <a:pPr>
-              <a:spcAft>
-                <a:spcPts val="100"/>
-              </a:spcAft>
-              <a:defRPr sz="1300" b="1">
-                <a:solidFill>
-                  <a:srgbClr val="FFD100"/>
-                </a:solidFill>
-              </a:defRPr>
-            </a:pPr>
-            <a:r>
-              <a:t>📊 Cero Papel y Cero Errores</a:t>
-            </a:r>
-          </a:p>
-          <a:p>
-            <a:pPr>
-              <a:spcAft>
-                <a:spcPts val="1000"/>
-              </a:spcAft>
-              <a:defRPr sz="1150">
-                <a:solidFill>
-                  <a:srgbClr val="FFFFFF"/>
-                </a:solidFill>
-              </a:defRPr>
-            </a:pPr>
-            <a:r>
-              <a:t>Elimina impresiones, plumas y quejas de clientes por conteos incorrectos. Todo es transparente y en vivo en el celular del cliente.</a:t>
+                <a:spcPts val="400"/>
+              </a:spcAft>
+            </a:pPr>
+            <a:r>
+              <a:rPr b="1" sz="1100">
+                <a:solidFill>
+                  <a:srgbClr val="00E676"/>
+                </a:solidFill>
+              </a:rPr>
+              <a:t>1. Creación en Segundos con IA: </a:t>
+            </a:r>
+            <a:r>
+              <a:rPr sz="1100">
+                <a:solidFill>
+                  <a:srgbClr val="FFFFFF"/>
+                </a:solidFill>
+              </a:rPr>
+              <a:t>Con Gemini de Google y conexión directa a ESPN, los gerentes crean quinielas completas o trivias en solo 30 a 60 segundos.</a:t>
+            </a:r>
+          </a:p>
+          <a:p>
+            <a:pPr>
+              <a:spcAft>
+                <a:spcPts val="400"/>
+              </a:spcAft>
+            </a:pPr>
+            <a:r>
+              <a:rPr b="1" sz="1100">
+                <a:solidFill>
+                  <a:srgbClr val="00E676"/>
+                </a:solidFill>
+              </a:rPr>
+              <a:t>2. Marcadores y Puntos en Vivo: </a:t>
+            </a:r>
+            <a:r>
+              <a:rPr sz="1100">
+                <a:solidFill>
+                  <a:srgbClr val="FFFFFF"/>
+                </a:solidFill>
+              </a:rPr>
+              <a:t>La app consulta ESPN automáticamente, actualiza los marcadores en tiempo real y asigna puntos (+3 exacto / +1 ganador) sin que nadie mueva un dedo.</a:t>
+            </a:r>
+          </a:p>
+          <a:p>
+            <a:pPr>
+              <a:spcAft>
+                <a:spcPts val="400"/>
+              </a:spcAft>
+            </a:pPr>
+            <a:r>
+              <a:rPr b="1" sz="1100">
+                <a:solidFill>
+                  <a:srgbClr val="00E676"/>
+                </a:solidFill>
+              </a:rPr>
+              <a:t>3. Cero Carga al Personal: </a:t>
+            </a:r>
+            <a:r>
+              <a:rPr sz="1100">
+                <a:solidFill>
+                  <a:srgbClr val="FFFFFF"/>
+                </a:solidFill>
+              </a:rPr>
+              <a:t>El gerente activa el juego antes del partido y la app corre sola. El equipo se concentra al 100% en atender mesas y despachar comandas.</a:t>
             </a:r>
           </a:p>
         </p:txBody>
@@ -6521,7 +9083,7 @@
         </p:nvSpPr>
         <p:spPr>
           <a:xfrm>
-            <a:off x="731520" y="365760"/>
+            <a:off x="731520" y="320040"/>
             <a:ext cx="10698480" cy="1005840"/>
           </a:xfrm>
           <a:prstGeom prst="rect">
@@ -6546,19 +9108,19 @@
               </a:defRPr>
             </a:pPr>
             <a:r>
-              <a:t>TRACCIÓN REAL EN QUERÉTARO</a:t>
-            </a:r>
-          </a:p>
-          <a:p>
-            <a:pPr>
-              <a:defRPr sz="2300" b="1">
-                <a:solidFill>
-                  <a:srgbClr val="FFFFFF"/>
-                </a:solidFill>
-              </a:defRPr>
-            </a:pPr>
-            <a:r>
-              <a:t>Potencial Inmediato: 71 Fans en 2 Semanas de una Base de +350</a:t>
+              <a:t>VALIDACIÓN DE MERCADO • FAN CLUBS</a:t>
+            </a:r>
+          </a:p>
+          <a:p>
+            <a:pPr>
+              <a:defRPr sz="2100" b="1">
+                <a:solidFill>
+                  <a:srgbClr val="FFFFFF"/>
+                </a:solidFill>
+              </a:defRPr>
+            </a:pPr>
+            <a:r>
+              <a:t>Tracción Real: 71 Miembros en 2 Semanas de 350+ en QRO</a:t>
             </a:r>
           </a:p>
         </p:txBody>
@@ -6571,8 +9133,8 @@
         </p:nvSpPr>
         <p:spPr>
           <a:xfrm>
-            <a:off x="731520" y="1645920"/>
-            <a:ext cx="10728655" cy="4663440"/>
+            <a:off x="731520" y="1463040"/>
+            <a:ext cx="3840480" cy="4846320"/>
           </a:xfrm>
           <a:prstGeom prst="roundRect">
             <a:avLst/>
@@ -6608,16 +9170,85 @@
           </a:p>
         </p:txBody>
       </p:sp>
-      <p:sp>
-        <p:nvSpPr>
-          <p:cNvPr id="4" name="TextBox 3"/>
+      <p:pic>
+        <p:nvPicPr>
+          <p:cNvPr id="4" name="Picture 3" descr="fan_id_steelers.png"/>
+          <p:cNvPicPr>
+            <a:picLocks noChangeAspect="1"/>
+          </p:cNvPicPr>
+          <p:nvPr/>
+        </p:nvPicPr>
+        <p:blipFill>
+          <a:blip r:embed="rId2"/>
+          <a:stretch>
+            <a:fillRect/>
+          </a:stretch>
+        </p:blipFill>
+        <p:spPr>
+          <a:xfrm>
+            <a:off x="914400" y="1645920"/>
+            <a:ext cx="3474720" cy="3830047"/>
+          </a:xfrm>
+          <a:prstGeom prst="rect">
+            <a:avLst/>
+          </a:prstGeom>
+        </p:spPr>
+      </p:pic>
+      <p:sp>
+        <p:nvSpPr>
+          <p:cNvPr id="5" name="Rounded Rectangle 4"/>
+          <p:cNvSpPr/>
+          <p:nvPr/>
+        </p:nvSpPr>
+        <p:spPr>
+          <a:xfrm>
+            <a:off x="4846320" y="1463040"/>
+            <a:ext cx="6583680" cy="4846320"/>
+          </a:xfrm>
+          <a:prstGeom prst="roundRect">
+            <a:avLst/>
+          </a:prstGeom>
+          <a:solidFill>
+            <a:srgbClr val="141A26"/>
+          </a:solidFill>
+          <a:ln w="19050">
+            <a:solidFill>
+              <a:srgbClr val="283246"/>
+            </a:solidFill>
+          </a:ln>
+        </p:spPr>
+        <p:style>
+          <a:lnRef idx="1">
+            <a:schemeClr val="accent1"/>
+          </a:lnRef>
+          <a:fillRef idx="3">
+            <a:schemeClr val="accent1"/>
+          </a:fillRef>
+          <a:effectRef idx="2">
+            <a:schemeClr val="accent1"/>
+          </a:effectRef>
+          <a:fontRef idx="minor">
+            <a:schemeClr val="lt1"/>
+          </a:fontRef>
+        </p:style>
+        <p:txBody>
+          <a:bodyPr rtlCol="0" anchor="ctr"/>
+          <a:lstStyle/>
+          <a:p>
+            <a:pPr algn="ctr"/>
+          </a:p>
+        </p:txBody>
+      </p:sp>
+      <p:sp>
+        <p:nvSpPr>
+          <p:cNvPr id="6" name="TextBox 5"/>
           <p:cNvSpPr txBox="1"/>
           <p:nvPr/>
         </p:nvSpPr>
         <p:spPr>
           <a:xfrm>
-            <a:off x="1097280" y="1828800"/>
-            <a:ext cx="9966960" cy="4206240"/>
+            <a:off x="5120640" y="1645920"/>
+            <a:ext cx="6035040" cy="4480560"/>
           </a:xfrm>
           <a:prstGeom prst="rect">
             <a:avLst/>
@@ -6632,106 +9263,108 @@
           <a:p>
             <a:pPr>
               <a:spcAft>
-                <a:spcPts val="1200"/>
-              </a:spcAft>
-              <a:defRPr sz="1700" b="1">
+                <a:spcPts val="1000"/>
+              </a:spcAft>
+              <a:defRPr sz="1600" b="1">
                 <a:solidFill>
                   <a:srgbClr val="FFB612"/>
                 </a:solidFill>
               </a:defRPr>
             </a:pPr>
             <a:r>
-              <a:t>🏈 La Punta de Lanza: Steelers Nation Querétaro</a:t>
-            </a:r>
-          </a:p>
-          <a:p>
-            <a:pPr>
-              <a:spcAft>
-                <a:spcPts val="200"/>
-              </a:spcAft>
-              <a:defRPr sz="1400" b="1">
-                <a:solidFill>
-                  <a:srgbClr val="FFD100"/>
-                </a:solidFill>
-              </a:defRPr>
-            </a:pPr>
-            <a:r>
-              <a:t>📈 Crecimiento Explosivo Orgánico</a:t>
-            </a:r>
-          </a:p>
-          <a:p>
-            <a:pPr>
-              <a:spcAft>
-                <a:spcPts val="1000"/>
-              </a:spcAft>
-              <a:defRPr sz="1200">
-                <a:solidFill>
-                  <a:srgbClr val="FFFFFF"/>
-                </a:solidFill>
-              </a:defRPr>
-            </a:pPr>
-            <a:r>
-              <a:t>En tan solo 2 semanas desde el lanzamiento de la Credencial Digital de Steelers Nation QRO, ya se han registrado 71 miembros oficiales en la app. Pero son más de 350 fanáticos activos en la comunidad de Querétaro.</a:t>
-            </a:r>
-          </a:p>
-          <a:p>
-            <a:pPr>
-              <a:spcAft>
-                <a:spcPts val="200"/>
-              </a:spcAft>
-              <a:defRPr sz="1400" b="1">
-                <a:solidFill>
-                  <a:srgbClr val="FFD100"/>
-                </a:solidFill>
-              </a:defRPr>
-            </a:pPr>
-            <a:r>
-              <a:t>📲 Conexión Directa desde su Credencial Digital (PWA)</a:t>
-            </a:r>
-          </a:p>
-          <a:p>
-            <a:pPr>
-              <a:spcAft>
-                <a:spcPts val="1000"/>
-              </a:spcAft>
-              <a:defRPr sz="1200">
-                <a:solidFill>
-                  <a:srgbClr val="FFFFFF"/>
-                </a:solidFill>
-              </a:defRPr>
-            </a:pPr>
-            <a:r>
-              <a:t>La credencial digital de los fans tiene un botón especial integrado que los manda directamente a Drinks &amp; Wins para participar en las dinámicas de cada juego. Es una audiencia cautiva que ya ama la marca.</a:t>
-            </a:r>
-          </a:p>
-          <a:p>
-            <a:pPr>
-              <a:spcAft>
-                <a:spcPts val="200"/>
-              </a:spcAft>
-              <a:defRPr sz="1400" b="1">
-                <a:solidFill>
-                  <a:srgbClr val="FFD100"/>
-                </a:solidFill>
-              </a:defRPr>
-            </a:pPr>
-            <a:r>
-              <a:t>🍻 Asistencia y Consumo Comprobado</a:t>
-            </a:r>
-          </a:p>
-          <a:p>
-            <a:pPr>
-              <a:spcAft>
-                <a:spcPts val="1000"/>
-              </a:spcAft>
-              <a:defRPr sz="1200">
-                <a:solidFill>
-                  <a:srgbClr val="FFFFFF"/>
-                </a:solidFill>
-              </a:defRPr>
-            </a:pPr>
-            <a:r>
-              <a:t>Este grupo no viene solo por una cerveza: llenan mesas enteras, piden cubetazos, rondas continuas de alitas y se quedan durante toda la transmisión del partido. Es el motor perfecto para arrancar en Juriquilla.</a:t>
+              <a:t>🏈 Caso de Éxito Inmediato: Steelers Nation Querétaro</a:t>
+            </a:r>
+          </a:p>
+          <a:p>
+            <a:pPr>
+              <a:spcAft>
+                <a:spcPts val="400"/>
+              </a:spcAft>
+            </a:pPr>
+            <a:r>
+              <a:rPr b="1" sz="1100">
+                <a:solidFill>
+                  <a:srgbClr val="FFB612"/>
+                </a:solidFill>
+              </a:rPr>
+              <a:t>• 71 Miembros en 14 Días: </a:t>
+            </a:r>
+            <a:r>
+              <a:rPr sz="1100">
+                <a:solidFill>
+                  <a:srgbClr val="FFFFFF"/>
+                </a:solidFill>
+              </a:rPr>
+              <a:t>Se registraron 71 fanáticos activos con su tarjeta digital Fan ID en tan solo dos semanas, de una comunidad de más de 350 miembros en la ciudad de Querétaro.</a:t>
+            </a:r>
+          </a:p>
+          <a:p>
+            <a:pPr>
+              <a:spcAft>
+                <a:spcPts val="400"/>
+              </a:spcAft>
+            </a:pPr>
+            <a:r>
+              <a:rPr b="1" sz="1100">
+                <a:solidFill>
+                  <a:srgbClr val="FFB612"/>
+                </a:solidFill>
+              </a:rPr>
+              <a:t>• Acceso Directo Personalizado: </a:t>
+            </a:r>
+            <a:r>
+              <a:rPr sz="1100">
+                <a:solidFill>
+                  <a:srgbClr val="FFFFFF"/>
+                </a:solidFill>
+              </a:rPr>
+              <a:t>Los miembros cuentan con un botón exclusivo dentro de su credencial digital que los lleva directo a los juegos de su equipo sin necesidad de teclear links ni buscar partidos.</a:t>
+            </a:r>
+          </a:p>
+          <a:p>
+            <a:pPr>
+              <a:spcAft>
+                <a:spcPts val="400"/>
+              </a:spcAft>
+            </a:pPr>
+            <a:r>
+              <a:rPr b="1" sz="1100">
+                <a:solidFill>
+                  <a:srgbClr val="FFB612"/>
+                </a:solidFill>
+              </a:rPr>
+              <a:t>• Fieles al Restaurante: </a:t>
+            </a:r>
+            <a:r>
+              <a:rPr sz="1100">
+                <a:solidFill>
+                  <a:srgbClr val="FFFFFF"/>
+                </a:solidFill>
+              </a:rPr>
+              <a:t>Un fan club organizado asegura lleno garantizado cada domingo de partido y un consumo constante de comida y bebidas durante más de 3 horas por visita.</a:t>
+            </a:r>
+          </a:p>
+          <a:p>
+            <a:pPr>
+              <a:spcAft>
+                <a:spcPts val="400"/>
+              </a:spcAft>
+            </a:pPr>
+            <a:r>
+              <a:rPr b="1" sz="1100">
+                <a:solidFill>
+                  <a:srgbClr val="FFB612"/>
+                </a:solidFill>
+              </a:rPr>
+              <a:t>• Modelo 100% Escalable: </a:t>
+            </a:r>
+            <a:r>
+              <a:rPr sz="1100">
+                <a:solidFill>
+                  <a:srgbClr val="FFFFFF"/>
+                </a:solidFill>
+              </a:rPr>
+              <a:t>Esta misma tecnología está lista para implementarse con fanáticos de Dallas Cowboys, San Francisco 49ers, o clubes de fútbol como Chivas, América y Gallos Blancos.</a:t>
             </a:r>
           </a:p>
         </p:txBody>
@@ -6770,7 +9403,7 @@
         </p:nvSpPr>
         <p:spPr>
           <a:xfrm>
-            <a:off x="731520" y="365760"/>
+            <a:off x="731520" y="320040"/>
             <a:ext cx="10698480" cy="1005840"/>
           </a:xfrm>
           <a:prstGeom prst="rect">
@@ -6795,19 +9428,19 @@
               </a:defRPr>
             </a:pPr>
             <a:r>
-              <a:t>EXPERIENCIA DE USUARIO SIN FRICCIÓN</a:t>
-            </a:r>
-          </a:p>
-          <a:p>
-            <a:pPr>
-              <a:defRPr sz="2300" b="1">
-                <a:solidFill>
-                  <a:srgbClr val="FFFFFF"/>
-                </a:solidFill>
-              </a:defRPr>
-            </a:pPr>
-            <a:r>
-              <a:t>Guía del Cliente: Cómo Ingresar, Registrarse e Instalar la App</a:t>
+              <a:t>EXPERIENCIA DEL CLIENTE • ONBOARDING</a:t>
+            </a:r>
+          </a:p>
+          <a:p>
+            <a:pPr>
+              <a:defRPr sz="2100" b="1">
+                <a:solidFill>
+                  <a:srgbClr val="FFFFFF"/>
+                </a:solidFill>
+              </a:defRPr>
+            </a:pPr>
+            <a:r>
+              <a:t>Manual de Acceso: Del Código QR en Mesa a la Pantalla de Inicio</a:t>
             </a:r>
           </a:p>
         </p:txBody>
@@ -6820,8 +9453,8 @@
         </p:nvSpPr>
         <p:spPr>
           <a:xfrm>
-            <a:off x="731520" y="1645920"/>
-            <a:ext cx="3413455" cy="4663440"/>
+            <a:off x="731520" y="1508760"/>
+            <a:ext cx="2542032" cy="4846320"/>
           </a:xfrm>
           <a:prstGeom prst="roundRect">
             <a:avLst/>
@@ -6831,7 +9464,7 @@
           </a:solidFill>
           <a:ln w="19050">
             <a:solidFill>
-              <a:srgbClr val="283246"/>
+              <a:srgbClr val="FFB612"/>
             </a:solidFill>
           </a:ln>
         </p:spPr>
@@ -6865,8 +9498,8 @@
         </p:nvSpPr>
         <p:spPr>
           <a:xfrm>
-            <a:off x="1005840" y="1828800"/>
-            <a:ext cx="2864815" cy="4206240"/>
+            <a:off x="914400" y="1691640"/>
+            <a:ext cx="2176272" cy="4480560"/>
           </a:xfrm>
           <a:prstGeom prst="rect">
             <a:avLst/>
@@ -6881,36 +9514,43 @@
           <a:p>
             <a:pPr>
               <a:spcAft>
-                <a:spcPts val="1400"/>
-              </a:spcAft>
-              <a:defRPr sz="1600" b="1">
+                <a:spcPts val="400"/>
+              </a:spcAft>
+              <a:defRPr sz="1200" b="1">
                 <a:solidFill>
                   <a:srgbClr val="FFB612"/>
                 </a:solidFill>
               </a:defRPr>
             </a:pPr>
             <a:r>
-              <a:t>1. CÓMO INGRESA</a:t>
-            </a:r>
-          </a:p>
-          <a:p>
-            <a:pPr>
-              <a:defRPr sz="1250">
-                <a:solidFill>
-                  <a:srgbClr val="FFFFFF"/>
-                </a:solidFill>
-              </a:defRPr>
-            </a:pPr>
-            <a:r>
-              <a:t>📱 En su mesa encuentra el código QR en el acrílico.</a:t>
-            </a:r>
-            <a:br/>
-            <a:r>
-              <a:t>• Abre la cámara de su celular y apunta al QR.</a:t>
-            </a:r>
-            <a:br/>
-            <a:r>
-              <a:t>• Entra en 3 segundos en su navegador web sin descargas pesadas ni tiendas de aplicaciones.</a:t>
+              <a:t>PASO 1</a:t>
+            </a:r>
+          </a:p>
+          <a:p>
+            <a:pPr>
+              <a:spcAft>
+                <a:spcPts val="1000"/>
+              </a:spcAft>
+              <a:defRPr sz="1400" b="1">
+                <a:solidFill>
+                  <a:srgbClr val="FFFFFF"/>
+                </a:solidFill>
+              </a:defRPr>
+            </a:pPr>
+            <a:r>
+              <a:t>Escaneo en Mesa</a:t>
+            </a:r>
+          </a:p>
+          <a:p>
+            <a:pPr>
+              <a:defRPr sz="1050">
+                <a:solidFill>
+                  <a:srgbClr val="94A3B8"/>
+                </a:solidFill>
+              </a:defRPr>
+            </a:pPr>
+            <a:r>
+              <a:t>El comensal escanea el código QR colocado en el acrílico de su mesa. No requiere descargar nada de App Store ni Google Play; abre al instante en Safari o Chrome.</a:t>
             </a:r>
           </a:p>
         </p:txBody>
@@ -6923,8 +9563,8 @@
         </p:nvSpPr>
         <p:spPr>
           <a:xfrm>
-            <a:off x="4389120" y="1645920"/>
-            <a:ext cx="3413455" cy="4663440"/>
+            <a:off x="3456432" y="1508760"/>
+            <a:ext cx="2542032" cy="4846320"/>
           </a:xfrm>
           <a:prstGeom prst="roundRect">
             <a:avLst/>
@@ -6934,7 +9574,7 @@
           </a:solidFill>
           <a:ln w="19050">
             <a:solidFill>
-              <a:srgbClr val="283246"/>
+              <a:srgbClr val="FF5722"/>
             </a:solidFill>
           </a:ln>
         </p:spPr>
@@ -6968,8 +9608,8 @@
         </p:nvSpPr>
         <p:spPr>
           <a:xfrm>
-            <a:off x="4663440" y="1828800"/>
-            <a:ext cx="2864815" cy="4206240"/>
+            <a:off x="3639312" y="1691640"/>
+            <a:ext cx="2176272" cy="4480560"/>
           </a:xfrm>
           <a:prstGeom prst="rect">
             <a:avLst/>
@@ -6984,36 +9624,43 @@
           <a:p>
             <a:pPr>
               <a:spcAft>
-                <a:spcPts val="1400"/>
-              </a:spcAft>
-              <a:defRPr sz="1600" b="1">
+                <a:spcPts val="400"/>
+              </a:spcAft>
+              <a:defRPr sz="1200" b="1">
                 <a:solidFill>
                   <a:srgbClr val="FF5722"/>
                 </a:solidFill>
               </a:defRPr>
             </a:pPr>
             <a:r>
-              <a:t>2. CÓMO SE REGISTRA</a:t>
-            </a:r>
-          </a:p>
-          <a:p>
-            <a:pPr>
-              <a:defRPr sz="1250">
-                <a:solidFill>
-                  <a:srgbClr val="FFFFFF"/>
-                </a:solidFill>
-              </a:defRPr>
-            </a:pPr>
-            <a:r>
-              <a:t>👤 Con un solo toque inicia sesión con su cuenta de Google o escribe su nombre/apodo.</a:t>
-            </a:r>
-            <a:br/>
-            <a:r>
-              <a:t>• Selecciona el nombre del mesero que lo atiende.</a:t>
-            </a:r>
-            <a:br/>
-            <a:r>
-              <a:t>• Todo queda guardado en la nube al instante.</a:t>
+              <a:t>PASO 2</a:t>
+            </a:r>
+          </a:p>
+          <a:p>
+            <a:pPr>
+              <a:spcAft>
+                <a:spcPts val="1000"/>
+              </a:spcAft>
+              <a:defRPr sz="1400" b="1">
+                <a:solidFill>
+                  <a:srgbClr val="FFFFFF"/>
+                </a:solidFill>
+              </a:defRPr>
+            </a:pPr>
+            <a:r>
+              <a:t>Registro en 10s</a:t>
+            </a:r>
+          </a:p>
+          <a:p>
+            <a:pPr>
+              <a:defRPr sz="1050">
+                <a:solidFill>
+                  <a:srgbClr val="94A3B8"/>
+                </a:solidFill>
+              </a:defRPr>
+            </a:pPr>
+            <a:r>
+              <a:t>Acceso con un solo toque mediante cuenta de Google o escribiendo su nombre y teléfono. Rápido, seguro y sin contraseñas difíciles.</a:t>
             </a:r>
           </a:p>
         </p:txBody>
@@ -7026,8 +9673,8 @@
         </p:nvSpPr>
         <p:spPr>
           <a:xfrm>
-            <a:off x="8046720" y="1645920"/>
-            <a:ext cx="3413455" cy="4663440"/>
+            <a:off x="6181344" y="1508760"/>
+            <a:ext cx="2542032" cy="4846320"/>
           </a:xfrm>
           <a:prstGeom prst="roundRect">
             <a:avLst/>
@@ -7037,7 +9684,7 @@
           </a:solidFill>
           <a:ln w="19050">
             <a:solidFill>
-              <a:srgbClr val="283246"/>
+              <a:srgbClr val="00E676"/>
             </a:solidFill>
           </a:ln>
         </p:spPr>
@@ -7071,8 +9718,8 @@
         </p:nvSpPr>
         <p:spPr>
           <a:xfrm>
-            <a:off x="8321040" y="1828800"/>
-            <a:ext cx="2864815" cy="4206240"/>
+            <a:off x="6364224" y="1691640"/>
+            <a:ext cx="2176272" cy="4480560"/>
           </a:xfrm>
           <a:prstGeom prst="rect">
             <a:avLst/>
@@ -7087,40 +9734,153 @@
           <a:p>
             <a:pPr>
               <a:spcAft>
-                <a:spcPts val="1400"/>
-              </a:spcAft>
-              <a:defRPr sz="1600" b="1">
+                <a:spcPts val="400"/>
+              </a:spcAft>
+              <a:defRPr sz="1200" b="1">
                 <a:solidFill>
                   <a:srgbClr val="00E676"/>
                 </a:solidFill>
               </a:defRPr>
             </a:pPr>
             <a:r>
-              <a:t>3. CÓMO SE INSTALA (PWA)</a:t>
-            </a:r>
-          </a:p>
-          <a:p>
-            <a:pPr>
-              <a:defRPr sz="1250">
-                <a:solidFill>
-                  <a:srgbClr val="FFFFFF"/>
-                </a:solidFill>
-              </a:defRPr>
-            </a:pPr>
-            <a:r>
-              <a:t>📲 Se instala como una app nativa en 1 clic:</a:t>
-            </a:r>
-            <a:br/>
-            <a:r>
-              <a:t>• En iPhone: Compartir ➔ 'Agregar a pantalla de inicio'.</a:t>
-            </a:r>
-            <a:br/>
-            <a:r>
-              <a:t>• En Android: Toca el aviso 'Instalar App'.</a:t>
-            </a:r>
-            <a:br/>
-            <a:r>
-              <a:t>• ¡Queda el icono oficial en su celular para siempre!</a:t>
+              <a:t>PASO 3</a:t>
+            </a:r>
+          </a:p>
+          <a:p>
+            <a:pPr>
+              <a:spcAft>
+                <a:spcPts val="1000"/>
+              </a:spcAft>
+              <a:defRPr sz="1400" b="1">
+                <a:solidFill>
+                  <a:srgbClr val="FFFFFF"/>
+                </a:solidFill>
+              </a:defRPr>
+            </a:pPr>
+            <a:r>
+              <a:t>Mesa &amp; Mesero</a:t>
+            </a:r>
+          </a:p>
+          <a:p>
+            <a:pPr>
+              <a:defRPr sz="1050">
+                <a:solidFill>
+                  <a:srgbClr val="94A3B8"/>
+                </a:solidFill>
+              </a:defRPr>
+            </a:pPr>
+            <a:r>
+              <a:t>El cliente selecciona el número de su mesa y el nombre del mesero que lo atiende. Esto garantiza que los premios lleguen a la mesa correcta y premia el servicio del mesero.</a:t>
+            </a:r>
+          </a:p>
+        </p:txBody>
+      </p:sp>
+      <p:sp>
+        <p:nvSpPr>
+          <p:cNvPr id="9" name="Rounded Rectangle 8"/>
+          <p:cNvSpPr/>
+          <p:nvPr/>
+        </p:nvSpPr>
+        <p:spPr>
+          <a:xfrm>
+            <a:off x="8906256" y="1508760"/>
+            <a:ext cx="2542032" cy="4846320"/>
+          </a:xfrm>
+          <a:prstGeom prst="roundRect">
+            <a:avLst/>
+          </a:prstGeom>
+          <a:solidFill>
+            <a:srgbClr val="141A26"/>
+          </a:solidFill>
+          <a:ln w="19050">
+            <a:solidFill>
+              <a:srgbClr val="3498DB"/>
+            </a:solidFill>
+          </a:ln>
+        </p:spPr>
+        <p:style>
+          <a:lnRef idx="1">
+            <a:schemeClr val="accent1"/>
+          </a:lnRef>
+          <a:fillRef idx="3">
+            <a:schemeClr val="accent1"/>
+          </a:fillRef>
+          <a:effectRef idx="2">
+            <a:schemeClr val="accent1"/>
+          </a:effectRef>
+          <a:fontRef idx="minor">
+            <a:schemeClr val="lt1"/>
+          </a:fontRef>
+        </p:style>
+        <p:txBody>
+          <a:bodyPr rtlCol="0" anchor="ctr"/>
+          <a:lstStyle/>
+          <a:p>
+            <a:pPr algn="ctr"/>
+          </a:p>
+        </p:txBody>
+      </p:sp>
+      <p:sp>
+        <p:nvSpPr>
+          <p:cNvPr id="10" name="TextBox 9"/>
+          <p:cNvSpPr txBox="1"/>
+          <p:nvPr/>
+        </p:nvSpPr>
+        <p:spPr>
+          <a:xfrm>
+            <a:off x="9089136" y="1691640"/>
+            <a:ext cx="2176272" cy="4480560"/>
+          </a:xfrm>
+          <a:prstGeom prst="rect">
+            <a:avLst/>
+          </a:prstGeom>
+          <a:noFill/>
+        </p:spPr>
+        <p:txBody>
+          <a:bodyPr wrap="square">
+            <a:spAutoFit/>
+          </a:bodyPr>
+          <a:lstStyle/>
+          <a:p>
+            <a:pPr>
+              <a:spcAft>
+                <a:spcPts val="400"/>
+              </a:spcAft>
+              <a:defRPr sz="1200" b="1">
+                <a:solidFill>
+                  <a:srgbClr val="3498DB"/>
+                </a:solidFill>
+              </a:defRPr>
+            </a:pPr>
+            <a:r>
+              <a:t>PASO 4</a:t>
+            </a:r>
+          </a:p>
+          <a:p>
+            <a:pPr>
+              <a:spcAft>
+                <a:spcPts val="1000"/>
+              </a:spcAft>
+              <a:defRPr sz="1400" b="1">
+                <a:solidFill>
+                  <a:srgbClr val="FFFFFF"/>
+                </a:solidFill>
+              </a:defRPr>
+            </a:pPr>
+            <a:r>
+              <a:t>Instalación PWA</a:t>
+            </a:r>
+          </a:p>
+          <a:p>
+            <a:pPr>
+              <a:defRPr sz="1050">
+                <a:solidFill>
+                  <a:srgbClr val="94A3B8"/>
+                </a:solidFill>
+              </a:defRPr>
+            </a:pPr>
+            <a:r>
+              <a:t>Con un solo toque en «Agregar a Pantalla de Inicio», la aplicación se instala como Web App con ícono propio para jugar en cada visita sin volver a iniciar sesión.</a:t>
             </a:r>
           </a:p>
         </p:txBody>
@@ -7159,7 +9919,7 @@
         </p:nvSpPr>
         <p:spPr>
           <a:xfrm>
-            <a:off x="731520" y="365760"/>
+            <a:off x="731520" y="320040"/>
             <a:ext cx="10698480" cy="1005840"/>
           </a:xfrm>
           <a:prstGeom prst="rect">
@@ -7184,19 +9944,19 @@
               </a:defRPr>
             </a:pPr>
             <a:r>
-              <a:t>JUEGO POR JUEGO EN DETALLE</a:t>
-            </a:r>
-          </a:p>
-          <a:p>
-            <a:pPr>
-              <a:defRPr sz="2300" b="1">
-                <a:solidFill>
-                  <a:srgbClr val="FFFFFF"/>
-                </a:solidFill>
-              </a:defRPr>
-            </a:pPr>
-            <a:r>
-              <a:t>Football Grids (100 Casillas NFL): Dinámica y Creación</a:t>
+              <a:t>CONTROL OPERATIVO • PANEL DEL GERENTE</a:t>
+            </a:r>
+          </a:p>
+          <a:p>
+            <a:pPr>
+              <a:defRPr sz="2100" b="1">
+                <a:solidFill>
+                  <a:srgbClr val="FFFFFF"/>
+                </a:solidFill>
+              </a:defRPr>
+            </a:pPr>
+            <a:r>
+              <a:t>Manual del Gerente: El Centro de Control Maestro (admin.html)</a:t>
             </a:r>
           </a:p>
         </p:txBody>
@@ -7209,8 +9969,8 @@
         </p:nvSpPr>
         <p:spPr>
           <a:xfrm>
-            <a:off x="731520" y="1645920"/>
-            <a:ext cx="6858000" cy="4663440"/>
+            <a:off x="731520" y="1463040"/>
+            <a:ext cx="4114800" cy="4846320"/>
           </a:xfrm>
           <a:prstGeom prst="roundRect">
             <a:avLst/>
@@ -7246,122 +10006,9 @@
           </a:p>
         </p:txBody>
       </p:sp>
-      <p:sp>
-        <p:nvSpPr>
-          <p:cNvPr id="4" name="TextBox 3"/>
-          <p:cNvSpPr txBox="1"/>
-          <p:nvPr/>
-        </p:nvSpPr>
-        <p:spPr>
-          <a:xfrm>
-            <a:off x="1005840" y="1828800"/>
-            <a:ext cx="6309360" cy="4206240"/>
-          </a:xfrm>
-          <a:prstGeom prst="rect">
-            <a:avLst/>
-          </a:prstGeom>
-          <a:noFill/>
-        </p:spPr>
-        <p:txBody>
-          <a:bodyPr wrap="square">
-            <a:spAutoFit/>
-          </a:bodyPr>
-          <a:lstStyle/>
-          <a:p>
-            <a:pPr>
-              <a:spcAft>
-                <a:spcPts val="200"/>
-              </a:spcAft>
-              <a:defRPr sz="1350" b="1">
-                <a:solidFill>
-                  <a:srgbClr val="FF5722"/>
-                </a:solidFill>
-              </a:defRPr>
-            </a:pPr>
-            <a:r>
-              <a:t>🛠️ CÓMO LO CREA EL GERENTE (30 segundos)</a:t>
-            </a:r>
-          </a:p>
-          <a:p>
-            <a:pPr>
-              <a:spcAft>
-                <a:spcPts val="1000"/>
-              </a:spcAft>
-              <a:defRPr sz="1150">
-                <a:solidFill>
-                  <a:srgbClr val="FFFFFF"/>
-                </a:solidFill>
-              </a:defRPr>
-            </a:pPr>
-            <a:r>
-              <a:t>Entra al panel Admin, elige el partido estelar de la NFL (ej. Steelers vs Bills). Con un solo clic, el sistema genera la cuadrícula digital de 10x10 (100 casillas) con los logotipos oficiales de los dos equipos.</a:t>
-            </a:r>
-          </a:p>
-          <a:p>
-            <a:pPr>
-              <a:spcAft>
-                <a:spcPts val="200"/>
-              </a:spcAft>
-              <a:defRPr sz="1350" b="1">
-                <a:solidFill>
-                  <a:srgbClr val="FF5722"/>
-                </a:solidFill>
-              </a:defRPr>
-            </a:pPr>
-            <a:r>
-              <a:t>📱 CÓMO JUEGA EL CLIENTE EN MESA</a:t>
-            </a:r>
-          </a:p>
-          <a:p>
-            <a:pPr>
-              <a:spcAft>
-                <a:spcPts val="1000"/>
-              </a:spcAft>
-              <a:defRPr sz="1150">
-                <a:solidFill>
-                  <a:srgbClr val="FFFFFF"/>
-                </a:solidFill>
-              </a:defRPr>
-            </a:pPr>
-            <a:r>
-              <a:t>El comensal escanea el QR, ve la cuadrícula en su smartphone y toca las casillas vacías que desea apartar con su nombre o apodo para competir amistosamente con sus amigos.</a:t>
-            </a:r>
-          </a:p>
-          <a:p>
-            <a:pPr>
-              <a:spcAft>
-                <a:spcPts val="200"/>
-              </a:spcAft>
-              <a:defRPr sz="1350" b="1">
-                <a:solidFill>
-                  <a:srgbClr val="FF5722"/>
-                </a:solidFill>
-              </a:defRPr>
-            </a:pPr>
-            <a:r>
-              <a:t>🏆 CÓMO GANA Y POR QUÉ VENDE TANTO</a:t>
-            </a:r>
-          </a:p>
-          <a:p>
-            <a:pPr>
-              <a:spcAft>
-                <a:spcPts val="1000"/>
-              </a:spcAft>
-              <a:defRPr sz="1150">
-                <a:solidFill>
-                  <a:srgbClr val="FFFFFF"/>
-                </a:solidFill>
-              </a:defRPr>
-            </a:pPr>
-            <a:r>
-              <a:t>Al inicio del partido, el sistema sortea automáticamente los dígitos del 0 al 9 en filas y columnas. ¡Hay 4 GANADORES por partido! (Al final del 1Q, 2Q, 3Q y Final según el último dígito del marcador). Esto mantiene a la mesa consumiendo cervezas y botanas durante las 3 horas de transmisión.</a:t>
-            </a:r>
-          </a:p>
-        </p:txBody>
-      </p:sp>
       <p:pic>
         <p:nvPicPr>
-          <p:cNvPr id="5" name="Picture 4" descr="tarjeta_2_vive_la_nfl.png"/>
+          <p:cNvPr id="4" name="Picture 3" descr="admin_panel_grids.png"/>
           <p:cNvPicPr>
             <a:picLocks noChangeAspect="1"/>
           </p:cNvPicPr>
@@ -7375,14 +10022,189 @@
         </p:blipFill>
         <p:spPr>
           <a:xfrm>
-            <a:off x="7955279" y="1645920"/>
-            <a:ext cx="2623185" cy="4663440"/>
+            <a:off x="914400" y="1645920"/>
+            <a:ext cx="3749039" cy="2108834"/>
           </a:xfrm>
           <a:prstGeom prst="rect">
             <a:avLst/>
           </a:prstGeom>
         </p:spPr>
       </p:pic>
+      <p:sp>
+        <p:nvSpPr>
+          <p:cNvPr id="5" name="Rounded Rectangle 4"/>
+          <p:cNvSpPr/>
+          <p:nvPr/>
+        </p:nvSpPr>
+        <p:spPr>
+          <a:xfrm>
+            <a:off x="5120640" y="1463040"/>
+            <a:ext cx="6309360" cy="4846320"/>
+          </a:xfrm>
+          <a:prstGeom prst="roundRect">
+            <a:avLst/>
+          </a:prstGeom>
+          <a:solidFill>
+            <a:srgbClr val="141A26"/>
+          </a:solidFill>
+          <a:ln w="19050">
+            <a:solidFill>
+              <a:srgbClr val="283246"/>
+            </a:solidFill>
+          </a:ln>
+        </p:spPr>
+        <p:style>
+          <a:lnRef idx="1">
+            <a:schemeClr val="accent1"/>
+          </a:lnRef>
+          <a:fillRef idx="3">
+            <a:schemeClr val="accent1"/>
+          </a:fillRef>
+          <a:effectRef idx="2">
+            <a:schemeClr val="accent1"/>
+          </a:effectRef>
+          <a:fontRef idx="minor">
+            <a:schemeClr val="lt1"/>
+          </a:fontRef>
+        </p:style>
+        <p:txBody>
+          <a:bodyPr rtlCol="0" anchor="ctr"/>
+          <a:lstStyle/>
+          <a:p>
+            <a:pPr algn="ctr"/>
+          </a:p>
+        </p:txBody>
+      </p:sp>
+      <p:sp>
+        <p:nvSpPr>
+          <p:cNvPr id="6" name="TextBox 5"/>
+          <p:cNvSpPr txBox="1"/>
+          <p:nvPr/>
+        </p:nvSpPr>
+        <p:spPr>
+          <a:xfrm>
+            <a:off x="5394960" y="1645920"/>
+            <a:ext cx="5760720" cy="4480560"/>
+          </a:xfrm>
+          <a:prstGeom prst="rect">
+            <a:avLst/>
+          </a:prstGeom>
+          <a:noFill/>
+        </p:spPr>
+        <p:txBody>
+          <a:bodyPr wrap="square">
+            <a:spAutoFit/>
+          </a:bodyPr>
+          <a:lstStyle/>
+          <a:p>
+            <a:pPr>
+              <a:spcAft>
+                <a:spcPts val="800"/>
+              </a:spcAft>
+              <a:defRPr sz="1500" b="1">
+                <a:solidFill>
+                  <a:srgbClr val="FFB612"/>
+                </a:solidFill>
+              </a:defRPr>
+            </a:pPr>
+            <a:r>
+              <a:t>⚙️ Panel Administrativo Diseñado para Restaurantes</a:t>
+            </a:r>
+          </a:p>
+          <a:p>
+            <a:pPr>
+              <a:spcAft>
+                <a:spcPts val="400"/>
+              </a:spcAft>
+            </a:pPr>
+            <a:r>
+              <a:rPr b="1" sz="1050">
+                <a:solidFill>
+                  <a:srgbClr val="FFB612"/>
+                </a:solidFill>
+              </a:rPr>
+              <a:t>1. Pestañas de Gestión Rápida: </a:t>
+            </a:r>
+            <a:r>
+              <a:rPr sz="1050">
+                <a:solidFill>
+                  <a:srgbClr val="FFFFFF"/>
+                </a:solidFill>
+              </a:rPr>
+              <a:t>Acceso con un clic a: 🏈 Grids, 📋 Quinielas, 🏆 Survivor, ⚽ First Striker, 🎯 Bingo, 🧠 Trivia en Vivo y 🎨 Material Promocional.</a:t>
+            </a:r>
+          </a:p>
+          <a:p>
+            <a:pPr>
+              <a:spcAft>
+                <a:spcPts val="400"/>
+              </a:spcAft>
+            </a:pPr>
+            <a:r>
+              <a:rPr b="1" sz="1050">
+                <a:solidFill>
+                  <a:srgbClr val="00E676"/>
+                </a:solidFill>
+              </a:rPr>
+              <a:t>2. Switch Maestro «⚡ Auto-Aprobar»: </a:t>
+            </a:r>
+            <a:r>
+              <a:rPr sz="1050">
+                <a:solidFill>
+                  <a:srgbClr val="FFFFFF"/>
+                </a:solidFill>
+              </a:rPr>
+              <a:t>Si está activo (ON), los comensales entran a jugar de forma inmediata. Si está en OFF, los comensales esperan validación de mesero (ideal si se requiere consumo mínimo).</a:t>
+            </a:r>
+          </a:p>
+          <a:p>
+            <a:pPr>
+              <a:spcAft>
+                <a:spcPts val="400"/>
+              </a:spcAft>
+            </a:pPr>
+            <a:r>
+              <a:rPr b="1" sz="1050">
+                <a:solidFill>
+                  <a:srgbClr val="3498DB"/>
+                </a:solidFill>
+              </a:rPr>
+              <a:t>3. Selector de Sucursal Multitienda: </a:t>
+            </a:r>
+            <a:r>
+              <a:rPr sz="1050">
+                <a:solidFill>
+                  <a:srgbClr val="FFFFFF"/>
+                </a:solidFill>
+              </a:rPr>
+              <a:t>Permite a gerentes gestionar Juriquilla, Álamos o Paseo Querétaro de manera independiente con bases de datos aisladas.</a:t>
+            </a:r>
+          </a:p>
+          <a:p>
+            <a:pPr>
+              <a:spcAft>
+                <a:spcPts val="400"/>
+              </a:spcAft>
+            </a:pPr>
+            <a:r>
+              <a:rPr b="1" sz="1050">
+                <a:solidFill>
+                  <a:srgbClr val="FF5722"/>
+                </a:solidFill>
+              </a:rPr>
+              <a:t>4. Scorebug de TV Integrado: </a:t>
+            </a:r>
+            <a:r>
+              <a:rPr sz="1050">
+                <a:solidFill>
+                  <a:srgbClr val="FFFFFF"/>
+                </a:solidFill>
+              </a:rPr>
+              <a:t>Banner visual en vivo que refleja el tiempo, cuarto y situación oficial del partido desde la API de ESPN.</a:t>
+            </a:r>
+          </a:p>
+        </p:txBody>
+      </p:sp>
     </p:spTree>
   </p:cSld>
   <p:clrMapOvr>
@@ -7417,7 +10239,7 @@
         </p:nvSpPr>
         <p:spPr>
           <a:xfrm>
-            <a:off x="731520" y="365760"/>
+            <a:off x="731520" y="320040"/>
             <a:ext cx="10698480" cy="1005840"/>
           </a:xfrm>
           <a:prstGeom prst="rect">
@@ -7442,19 +10264,19 @@
               </a:defRPr>
             </a:pPr>
             <a:r>
-              <a:t>JUEGO POR JUEGO EN DETALLE</a:t>
-            </a:r>
-          </a:p>
-          <a:p>
-            <a:pPr>
-              <a:defRPr sz="2300" b="1">
-                <a:solidFill>
-                  <a:srgbClr val="FFFFFF"/>
-                </a:solidFill>
-              </a:defRPr>
-            </a:pPr>
-            <a:r>
-              <a:t>Quinielas Pick'em (NFL y Liga MX): Reglas y Resultados en Vivo</a:t>
+              <a:t>MANUAL OPERATIVO • JUEGO 1: GRIDS (ADMIN)</a:t>
+            </a:r>
+          </a:p>
+          <a:p>
+            <a:pPr>
+              <a:defRPr sz="2100" b="1">
+                <a:solidFill>
+                  <a:srgbClr val="FFFFFF"/>
+                </a:solidFill>
+              </a:defRPr>
+            </a:pPr>
+            <a:r>
+              <a:t>Manual: Football Grids (100 Casillas) — Panel del Gerente</a:t>
             </a:r>
           </a:p>
         </p:txBody>
@@ -7467,8 +10289,8 @@
         </p:nvSpPr>
         <p:spPr>
           <a:xfrm>
-            <a:off x="731520" y="1645920"/>
-            <a:ext cx="6858000" cy="4663440"/>
+            <a:off x="731520" y="1463040"/>
+            <a:ext cx="10728655" cy="4846320"/>
           </a:xfrm>
           <a:prstGeom prst="roundRect">
             <a:avLst/>
@@ -7512,8 +10334,8 @@
         </p:nvSpPr>
         <p:spPr>
           <a:xfrm>
-            <a:off x="1005840" y="1828800"/>
-            <a:ext cx="6309360" cy="4206240"/>
+            <a:off x="1005840" y="1645920"/>
+            <a:ext cx="10149840" cy="4480560"/>
           </a:xfrm>
           <a:prstGeom prst="rect">
             <a:avLst/>
@@ -7528,119 +10350,135 @@
           <a:p>
             <a:pPr>
               <a:spcAft>
-                <a:spcPts val="200"/>
-              </a:spcAft>
-              <a:defRPr sz="1350" b="1">
+                <a:spcPts val="1000"/>
+              </a:spcAft>
+              <a:defRPr sz="1600" b="1">
                 <a:solidFill>
                   <a:srgbClr val="FFB612"/>
                 </a:solidFill>
               </a:defRPr>
             </a:pPr>
             <a:r>
-              <a:t>🛠️ CÓMO LO CREA EL GERENTE (60 segundos)</a:t>
-            </a:r>
-          </a:p>
-          <a:p>
-            <a:pPr>
-              <a:spcAft>
-                <a:spcPts val="1000"/>
-              </a:spcAft>
-              <a:defRPr sz="1150">
-                <a:solidFill>
-                  <a:srgbClr val="FFFFFF"/>
-                </a:solidFill>
-              </a:defRPr>
-            </a:pPr>
-            <a:r>
-              <a:t>Entra a Admin, elige la liga (NFL o Liga MX) y la jornada. La conexión con ESPN jala automáticamente partidos, horarios y escudos oficiales. El gerente toca los partidos deseados, define el premio (ej. Orden de Alitas + Cerveza) y presiona 'Crear Quiniela'.</a:t>
-            </a:r>
-          </a:p>
-          <a:p>
-            <a:pPr>
-              <a:spcAft>
-                <a:spcPts val="200"/>
-              </a:spcAft>
-              <a:defRPr sz="1350" b="1">
+              <a:t>🏈 Flujo de Creación y Operación del Gerente (Grids)</a:t>
+            </a:r>
+          </a:p>
+          <a:p>
+            <a:pPr>
+              <a:spcAft>
+                <a:spcPts val="400"/>
+              </a:spcAft>
+            </a:pPr>
+            <a:r>
+              <a:rPr b="1" sz="1100">
                 <a:solidFill>
                   <a:srgbClr val="FFB612"/>
                 </a:solidFill>
-              </a:defRPr>
-            </a:pPr>
-            <a:r>
-              <a:t>📱 CÓMO JUEGA EL CLIENTE</a:t>
-            </a:r>
-          </a:p>
-          <a:p>
-            <a:pPr>
-              <a:spcAft>
-                <a:spcPts val="1000"/>
-              </a:spcAft>
-              <a:defRPr sz="1150">
-                <a:solidFill>
-                  <a:srgbClr val="FFFFFF"/>
-                </a:solidFill>
-              </a:defRPr>
-            </a:pPr>
-            <a:r>
-              <a:t>Abre la quiniela desde el QR, selecciona a su mesero e introduce sus pronósticos en pantalla. Se bloquean en automático cuando arranca el primer partido para garantizar 100% de transparencia.</a:t>
-            </a:r>
-          </a:p>
-          <a:p>
-            <a:pPr>
-              <a:spcAft>
-                <a:spcPts val="200"/>
-              </a:spcAft>
-              <a:defRPr sz="1350" b="1">
-                <a:solidFill>
-                  <a:srgbClr val="FFB612"/>
-                </a:solidFill>
-              </a:defRPr>
-            </a:pPr>
-            <a:r>
-              <a:t>🏆 CÓMO GANA Y SE PREMIA</a:t>
-            </a:r>
-          </a:p>
-          <a:p>
-            <a:pPr>
-              <a:spcAft>
-                <a:spcPts val="1000"/>
-              </a:spcAft>
-              <a:defRPr sz="1150">
-                <a:solidFill>
-                  <a:srgbClr val="FFFFFF"/>
-                </a:solidFill>
-              </a:defRPr>
-            </a:pPr>
-            <a:r>
-              <a:t>La API de ESPN actualiza la tabla en tiempo real: Marcador Exacto = +3 pts (verde esmeralda), Ganador = +1 pt (dorado), Fallo = 0 pts (rojo). Al terminar, se proclama al Campeón Oficial en el podio digital con corona 👑 para canje en barra.</a:t>
-            </a:r>
-          </a:p>
-        </p:txBody>
-      </p:sp>
-      <p:pic>
-        <p:nvPicPr>
-          <p:cNvPr id="5" name="Picture 4" descr="screenshot_podium_standings.png"/>
-          <p:cNvPicPr>
-            <a:picLocks noChangeAspect="1"/>
-          </p:cNvPicPr>
-          <p:nvPr/>
-        </p:nvPicPr>
-        <p:blipFill>
-          <a:blip r:embed="rId2"/>
-          <a:stretch>
-            <a:fillRect/>
-          </a:stretch>
-        </p:blipFill>
-        <p:spPr>
-          <a:xfrm>
-            <a:off x="7863840" y="1645920"/>
-            <a:ext cx="8843264" cy="4663440"/>
-          </a:xfrm>
-          <a:prstGeom prst="rect">
-            <a:avLst/>
-          </a:prstGeom>
-        </p:spPr>
-      </p:pic>
+              </a:rPr>
+              <a:t>PASO 1: Búsqueda con ESPN (30 segundos): </a:t>
+            </a:r>
+            <a:r>
+              <a:rPr sz="1100">
+                <a:solidFill>
+                  <a:srgbClr val="FFFFFF"/>
+                </a:solidFill>
+              </a:rPr>
+              <a:t>En la pestaña «🏈 Grids», selecciona la sucursal y liga (NFL). Pulsa «🔍 Buscar Partidos». Toca el juego en la lista y presiona «Crear Grid de Juego». La cuadrícula queda creada al instante.</a:t>
+            </a:r>
+          </a:p>
+          <a:p>
+            <a:pPr>
+              <a:spcAft>
+                <a:spcPts val="400"/>
+              </a:spcAft>
+            </a:pPr>
+            <a:r>
+              <a:rPr b="1" sz="1100">
+                <a:solidFill>
+                  <a:srgbClr val="FFFFFF"/>
+                </a:solidFill>
+              </a:rPr>
+              <a:t>PASO 2: Apertura a Clientes: </a:t>
+            </a:r>
+            <a:r>
+              <a:rPr sz="1100">
+                <a:solidFill>
+                  <a:srgbClr val="94A3B8"/>
+                </a:solidFill>
+              </a:rPr>
+              <a:t>Los comensales de las mesas eligen sus casillas favoritas desde sus teléfonos mientras el partido no ha comenzado.</a:t>
+            </a:r>
+          </a:p>
+          <a:p>
+            <a:pPr>
+              <a:spcAft>
+                <a:spcPts val="400"/>
+              </a:spcAft>
+            </a:pPr>
+            <a:r>
+              <a:rPr b="1" sz="1100">
+                <a:solidFill>
+                  <a:srgbClr val="FF5722"/>
+                </a:solidFill>
+              </a:rPr>
+              <a:t>PASO 3: Bloqueo Previo al Kickoff: </a:t>
+            </a:r>
+            <a:r>
+              <a:rPr sz="1100">
+                <a:solidFill>
+                  <a:srgbClr val="FFFFFF"/>
+                </a:solidFill>
+              </a:rPr>
+              <a:t>Al comenzar el partido, el gerente pulsa el botón «🔒 Bloquear». Nadie más puede apartar casillas.</a:t>
+            </a:r>
+          </a:p>
+          <a:p>
+            <a:pPr>
+              <a:spcAft>
+                <a:spcPts val="400"/>
+              </a:spcAft>
+            </a:pPr>
+            <a:r>
+              <a:rPr b="1" sz="1100">
+                <a:solidFill>
+                  <a:srgbClr val="00E676"/>
+                </a:solidFill>
+              </a:rPr>
+              <a:t>PASO 4: Sorteo de Números 0 al 9: </a:t>
+            </a:r>
+            <a:r>
+              <a:rPr sz="1100">
+                <a:solidFill>
+                  <a:srgbClr val="FFFFFF"/>
+                </a:solidFill>
+              </a:rPr>
+              <a:t>El gerente presiona «🎲 Generar Números». El algoritmo baraja aleatoriamente los dígitos del 0 al 9 en las filas y columnas. Clic en «👁️ Mostrar Números» para revelar la cuadrícula a todos los celulares.</a:t>
+            </a:r>
+          </a:p>
+          <a:p>
+            <a:pPr>
+              <a:spcAft>
+                <a:spcPts val="400"/>
+              </a:spcAft>
+            </a:pPr>
+            <a:r>
+              <a:rPr b="1" sz="1100">
+                <a:solidFill>
+                  <a:srgbClr val="3498DB"/>
+                </a:solidFill>
+              </a:rPr>
+              <a:t>PASO 5: Liquidación Automática: </a:t>
+            </a:r>
+            <a:r>
+              <a:rPr sz="1100">
+                <a:solidFill>
+                  <a:srgbClr val="FFFFFF"/>
+                </a:solidFill>
+              </a:rPr>
+              <a:t>La app toma el último dígito del marcador oficial de ESPN al final de cada cuarto (1Q, Medio Tiempo, 3Q, Final), resalta la casilla ganadora en dorado e identifica al comensal triunfador.</a:t>
+            </a:r>
+          </a:p>
+        </p:txBody>
+      </p:sp>
     </p:spTree>
   </p:cSld>
   <p:clrMapOvr>
@@ -7675,7 +10513,7 @@
         </p:nvSpPr>
         <p:spPr>
           <a:xfrm>
-            <a:off x="731520" y="365760"/>
+            <a:off x="731520" y="320040"/>
             <a:ext cx="10698480" cy="1005840"/>
           </a:xfrm>
           <a:prstGeom prst="rect">
@@ -7700,19 +10538,19 @@
               </a:defRPr>
             </a:pPr>
             <a:r>
-              <a:t>JUEGO POR JUEGO EN DETALLE</a:t>
-            </a:r>
-          </a:p>
-          <a:p>
-            <a:pPr>
-              <a:defRPr sz="2300" b="1">
-                <a:solidFill>
-                  <a:srgbClr val="FFFFFF"/>
-                </a:solidFill>
-              </a:defRPr>
-            </a:pPr>
-            <a:r>
-              <a:t>First Striker Wins (Fútbol): Adrenalina Inmediata en el Minuto 1</a:t>
+              <a:t>MANUAL OPERATIVO • JUEGO 1: GRIDS (JUGADOR)</a:t>
+            </a:r>
+          </a:p>
+          <a:p>
+            <a:pPr>
+              <a:defRPr sz="2100" b="1">
+                <a:solidFill>
+                  <a:srgbClr val="FFFFFF"/>
+                </a:solidFill>
+              </a:defRPr>
+            </a:pPr>
+            <a:r>
+              <a:t>Manual: Football Grids — Experiencia del Cliente en Mesa</a:t>
             </a:r>
           </a:p>
         </p:txBody>
@@ -7725,8 +10563,8 @@
         </p:nvSpPr>
         <p:spPr>
           <a:xfrm>
-            <a:off x="731520" y="1645920"/>
-            <a:ext cx="6858000" cy="4663440"/>
+            <a:off x="731520" y="1463040"/>
+            <a:ext cx="10728655" cy="4846320"/>
           </a:xfrm>
           <a:prstGeom prst="roundRect">
             <a:avLst/>
@@ -7770,8 +10608,8 @@
         </p:nvSpPr>
         <p:spPr>
           <a:xfrm>
-            <a:off x="1005840" y="1828800"/>
-            <a:ext cx="6309360" cy="4206240"/>
+            <a:off x="1005840" y="1645920"/>
+            <a:ext cx="10149840" cy="4480560"/>
           </a:xfrm>
           <a:prstGeom prst="rect">
             <a:avLst/>
@@ -7786,119 +10624,116 @@
           <a:p>
             <a:pPr>
               <a:spcAft>
-                <a:spcPts val="200"/>
-              </a:spcAft>
-              <a:defRPr sz="1350" b="1">
+                <a:spcPts val="1000"/>
+              </a:spcAft>
+              <a:defRPr sz="1600" b="1">
+                <a:solidFill>
+                  <a:srgbClr val="FFB612"/>
+                </a:solidFill>
+              </a:defRPr>
+            </a:pPr>
+            <a:r>
+              <a:t>📱 Cómo Interactúa y Gana el Comensal en Mesa</a:t>
+            </a:r>
+          </a:p>
+          <a:p>
+            <a:pPr>
+              <a:spcAft>
+                <a:spcPts val="400"/>
+              </a:spcAft>
+            </a:pPr>
+            <a:r>
+              <a:rPr b="1" sz="1100">
+                <a:solidFill>
+                  <a:srgbClr val="FFB612"/>
+                </a:solidFill>
+              </a:rPr>
+              <a:t>1. Cuadrícula Táctil en Celular: </a:t>
+            </a:r>
+            <a:r>
+              <a:rPr sz="1100">
+                <a:solidFill>
+                  <a:srgbClr val="FFFFFF"/>
+                </a:solidFill>
+              </a:rPr>
+              <a:t>El cliente visualiza un tablero digital interactivo de 10x10 casillas. Toca las casillas que desea apartar y se marcan con su nombre o apodo.</a:t>
+            </a:r>
+          </a:p>
+          <a:p>
+            <a:pPr>
+              <a:spcAft>
+                <a:spcPts val="400"/>
+              </a:spcAft>
+            </a:pPr>
+            <a:r>
+              <a:rPr b="1" sz="1100">
+                <a:solidFill>
+                  <a:srgbClr val="FFFFFF"/>
+                </a:solidFill>
+              </a:rPr>
+              <a:t>2. Lectura Sencilla de Coordenadas: </a:t>
+            </a:r>
+            <a:r>
+              <a:rPr sz="1100">
+                <a:solidFill>
+                  <a:srgbClr val="94A3B8"/>
+                </a:solidFill>
+              </a:rPr>
+              <a:t>Eje horizontal = Equipo Visitante; Eje vertical = Equipo Local. Cada casilla representa la combinación del último dígito del marcador (ej. Steelers 7 - Ravens 4).</a:t>
+            </a:r>
+          </a:p>
+          <a:p>
+            <a:pPr>
+              <a:spcAft>
+                <a:spcPts val="400"/>
+              </a:spcAft>
+            </a:pPr>
+            <a:r>
+              <a:rPr b="1" sz="1100">
                 <a:solidFill>
                   <a:srgbClr val="00E676"/>
                 </a:solidFill>
-              </a:defRPr>
-            </a:pPr>
-            <a:r>
-              <a:t>🛠️ CÓMO LO CREA EL GERENTE (30 segundos)</a:t>
-            </a:r>
-          </a:p>
-          <a:p>
-            <a:pPr>
-              <a:spcAft>
-                <a:spcPts val="1000"/>
-              </a:spcAft>
-              <a:defRPr sz="1150">
-                <a:solidFill>
-                  <a:srgbClr val="FFFFFF"/>
-                </a:solidFill>
-              </a:defRPr>
-            </a:pPr>
-            <a:r>
-              <a:t>Elige el partido de fútbol (Liga MX, Champions League o Selección Nacional) y asigna un premio dinámico (ej. 1 ronda de cervezas o botana en mesa).</a:t>
-            </a:r>
-          </a:p>
-          <a:p>
-            <a:pPr>
-              <a:spcAft>
-                <a:spcPts val="200"/>
-              </a:spcAft>
-              <a:defRPr sz="1350" b="1">
-                <a:solidFill>
-                  <a:srgbClr val="00E676"/>
-                </a:solidFill>
-              </a:defRPr>
-            </a:pPr>
-            <a:r>
-              <a:t>📱 CÓMO JUEGA EL CLIENTE</a:t>
-            </a:r>
-          </a:p>
-          <a:p>
-            <a:pPr>
-              <a:spcAft>
-                <a:spcPts val="1000"/>
-              </a:spcAft>
-              <a:defRPr sz="1150">
-                <a:solidFill>
-                  <a:srgbClr val="FFFFFF"/>
-                </a:solidFill>
-              </a:defRPr>
-            </a:pPr>
-            <a:r>
-              <a:t>Elige qué equipo meterá el primer gol y en qué bloque de 15 minutos caerá (1-15', 16-30', 31-45', etc.), o la opción de 'Sin Goles en el Partido'.</a:t>
-            </a:r>
-          </a:p>
-          <a:p>
-            <a:pPr>
-              <a:spcAft>
-                <a:spcPts val="200"/>
-              </a:spcAft>
-              <a:defRPr sz="1350" b="1">
-                <a:solidFill>
-                  <a:srgbClr val="00E676"/>
-                </a:solidFill>
-              </a:defRPr>
-            </a:pPr>
-            <a:r>
-              <a:t>🏆 CÓMO GANA: EUFORIA DESDE EL INICIO</a:t>
-            </a:r>
-          </a:p>
-          <a:p>
-            <a:pPr>
-              <a:spcAft>
-                <a:spcPts val="1000"/>
-              </a:spcAft>
-              <a:defRPr sz="1150">
-                <a:solidFill>
-                  <a:srgbClr val="FFFFFF"/>
-                </a:solidFill>
-              </a:defRPr>
-            </a:pPr>
-            <a:r>
-              <a:t>En cuanto cae la primera anotación, el sistema valida el minuto oficial de juego. El comensal que acertó el bloque de tiempo gana en el acto, provocando festejos y más rondas de bebidas en su mesa.</a:t>
-            </a:r>
-          </a:p>
-        </p:txBody>
-      </p:sp>
-      <p:pic>
-        <p:nvPicPr>
-          <p:cNvPr id="5" name="Picture 4" descr="tarjeta_3_instinto_goleador.png"/>
-          <p:cNvPicPr>
-            <a:picLocks noChangeAspect="1"/>
-          </p:cNvPicPr>
-          <p:nvPr/>
-        </p:nvPicPr>
-        <p:blipFill>
-          <a:blip r:embed="rId2"/>
-          <a:stretch>
-            <a:fillRect/>
-          </a:stretch>
-        </p:blipFill>
-        <p:spPr>
-          <a:xfrm>
-            <a:off x="7955279" y="1645920"/>
-            <a:ext cx="2623185" cy="4663440"/>
-          </a:xfrm>
-          <a:prstGeom prst="rect">
-            <a:avLst/>
-          </a:prstGeom>
-        </p:spPr>
-      </p:pic>
+              </a:rPr>
+              <a:t>3. Cuatro Ganadores en un Solo Partido: </a:t>
+            </a:r>
+            <a:r>
+              <a:rPr sz="1100">
+                <a:solidFill>
+                  <a:srgbClr val="FFFFFF"/>
+                </a:solidFill>
+              </a:rPr>
+              <a:t>A diferencia de esperar 3.5 horas a que termine el juego, aquí hay emoción continua con 4 momentos de premiación:
+• Ganador 1er Cuarto (1Q)
+• Ganador Medio Tiempo (Halftime)
+• Ganador 3er Cuarto (3Q)
+• Ganador Marcador Final</a:t>
+            </a:r>
+          </a:p>
+          <a:p>
+            <a:pPr>
+              <a:spcAft>
+                <a:spcPts val="400"/>
+              </a:spcAft>
+            </a:pPr>
+            <a:r>
+              <a:rPr b="1" sz="1100">
+                <a:solidFill>
+                  <a:srgbClr val="FF5722"/>
+                </a:solidFill>
+              </a:rPr>
+              <a:t>4. Entrega de Premios en Mesa: </a:t>
+            </a:r>
+            <a:r>
+              <a:rPr sz="1100">
+                <a:solidFill>
+                  <a:srgbClr val="FFFFFF"/>
+                </a:solidFill>
+              </a:rPr>
+              <a:t>Al finalizar cada cuarto, el cliente ganador recibe una notificación dorada en su pantalla y se la muestra a su mesero para recibir su cortesía de inmediato.</a:t>
+            </a:r>
+          </a:p>
+        </p:txBody>
+      </p:sp>
     </p:spTree>
   </p:cSld>
   <p:clrMapOvr>
